--- a/V2授课PPT/W12-第24次课-正式答辩专场.pptx
+++ b/V2授课PPT/W12-第24次课-正式答辩专场.pptx
@@ -6,12 +6,15 @@
   </p:sldMasterIdLst>
   <p:sldIdLst>
     <p:sldId id="256" r:id="rId7"/>
+    <p:sldId id="367" r:id="rId15"/>
     <p:sldId id="280" r:id="rId32"/>
     <p:sldId id="311" r:id="rId63"/>
     <p:sldId id="318" r:id="rId70"/>
     <p:sldId id="320" r:id="rId72"/>
     <p:sldId id="339" r:id="rId91"/>
     <p:sldId id="366" r:id="rId118"/>
+    <p:sldId id="368" r:id="rId16"/>
+    <p:sldId id="369" r:id="rId17"/>
   </p:sldIdLst>
   <p:sldSz cx="12192000" cy="6858000" type="screen4x3"/>
   <p:notesSz cx="6858000" cy="9144000"/>
@@ -4309,6 +4312,120 @@
 </p:sld>
 </file>
 
+<file path=ppt/slides/slide10.xml><?xml version="1.0" encoding="utf-8"?>
+<p:sld xmlns:a="http://schemas.openxmlformats.org/drawingml/2006/main" xmlns:p="http://schemas.openxmlformats.org/presentationml/2006/main" xmlns:r="http://schemas.openxmlformats.org/officeDocument/2006/relationships">
+  <p:cSld>
+    <p:spTree>
+      <p:nvGrpSpPr>
+        <p:cNvPr id="1" name=""/>
+        <p:cNvGrpSpPr/>
+        <p:nvPr/>
+      </p:nvGrpSpPr>
+      <p:grpSpPr/>
+      <p:sp>
+        <p:nvSpPr>
+          <p:cNvPr id="2" name="TextBox 1"/>
+          <p:cNvSpPr txBox="1"/>
+          <p:nvPr/>
+        </p:nvSpPr>
+        <p:spPr>
+          <a:xfrm>
+            <a:off x="548640" y="320040"/>
+            <a:ext cx="11094720" cy="914400"/>
+          </a:xfrm>
+          <a:prstGeom prst="rect">
+            <a:avLst/>
+          </a:prstGeom>
+          <a:noFill/>
+        </p:spPr>
+        <p:txBody>
+          <a:bodyPr wrap="none">
+            <a:spAutoFit/>
+          </a:bodyPr>
+          <a:lstStyle/>
+          <a:p>
+            <a:r>
+              <a:rPr sz="3000" b="1"/>
+              <a:t>本讲与岗位任务单的衔接</a:t>
+            </a:r>
+          </a:p>
+        </p:txBody>
+      </p:sp>
+      <p:sp>
+        <p:nvSpPr>
+          <p:cNvPr id="3" name="TextBox 2"/>
+          <p:cNvSpPr txBox="1"/>
+          <p:nvPr/>
+        </p:nvSpPr>
+        <p:spPr>
+          <a:xfrm>
+            <a:off x="731520" y="1371600"/>
+            <a:ext cx="10728960" cy="4663440"/>
+          </a:xfrm>
+          <a:prstGeom prst="rect">
+            <a:avLst/>
+          </a:prstGeom>
+          <a:noFill/>
+        </p:spPr>
+        <p:txBody>
+          <a:bodyPr wrap="square">
+            <a:spAutoFit/>
+          </a:bodyPr>
+          <a:lstStyle/>
+          <a:p>
+            <a:pPr>
+              <a:spcAft>
+                <a:spcPts val="1000"/>
+              </a:spcAft>
+            </a:pPr>
+            <a:r>
+              <a:rPr sz="1800"/>
+              <a:t>本讲在工作过程系统化课程中承担的任务环节：任务实施</a:t>
+            </a:r>
+          </a:p>
+          <a:p>
+            <a:pPr>
+              <a:spcAft>
+                <a:spcPts val="1000"/>
+              </a:spcAft>
+            </a:pPr>
+            <a:r>
+              <a:rPr sz="1800"/>
+              <a:t>考核对齐：过程性成绩取自本讲工单第六节各模块得分合计（满分 100）。</a:t>
+            </a:r>
+          </a:p>
+          <a:p>
+            <a:pPr>
+              <a:spcAft>
+                <a:spcPts val="1000"/>
+              </a:spcAft>
+            </a:pPr>
+            <a:r>
+              <a:rPr sz="1800"/>
+              <a:t>达标线：综合成绩≥60 分，且无安全红线一票否决记录</a:t>
+            </a:r>
+          </a:p>
+          <a:p>
+            <a:pPr>
+              <a:spcAft>
+                <a:spcPts val="1000"/>
+              </a:spcAft>
+            </a:pPr>
+            <a:r>
+              <a:rPr sz="1800"/>
+              <a:t>无效工单判定：未打安全勾、无本人签字、无三方联签。</a:t>
+            </a:r>
+          </a:p>
+        </p:txBody>
+      </p:sp>
+    </p:spTree>
+  </p:cSld>
+  <p:clrMapOvr>
+    <a:masterClrMapping/>
+  </p:clrMapOvr>
+</p:sld>
+</file>
+
 <file path=ppt/slides/slide2.xml><?xml version="1.0" encoding="utf-8"?>
 <p:sld xmlns:a="http://schemas.openxmlformats.org/drawingml/2006/main" xmlns:p="http://schemas.openxmlformats.org/presentationml/2006/main" xmlns:r="http://schemas.openxmlformats.org/officeDocument/2006/relationships">
   <p:cSld>
@@ -8117,6 +8234,251 @@
                 <a:latin typeface="微软雅黑"/>
               </a:rPr>
               <a:t>以生为本   |   做中学 · 学中做</a:t>
+            </a:r>
+          </a:p>
+        </p:txBody>
+      </p:sp>
+    </p:spTree>
+  </p:cSld>
+  <p:clrMapOvr>
+    <a:masterClrMapping/>
+  </p:clrMapOvr>
+</p:sld>
+</file>
+
+<file path=ppt/slides/slide8.xml><?xml version="1.0" encoding="utf-8"?>
+<p:sld xmlns:a="http://schemas.openxmlformats.org/drawingml/2006/main" xmlns:p="http://schemas.openxmlformats.org/presentationml/2006/main" xmlns:r="http://schemas.openxmlformats.org/officeDocument/2006/relationships">
+  <p:cSld>
+    <p:spTree>
+      <p:nvGrpSpPr>
+        <p:cNvPr id="1" name=""/>
+        <p:cNvGrpSpPr/>
+        <p:nvPr/>
+      </p:nvGrpSpPr>
+      <p:grpSpPr/>
+      <p:sp>
+        <p:nvSpPr>
+          <p:cNvPr id="2" name="TextBox 1"/>
+          <p:cNvSpPr txBox="1"/>
+          <p:nvPr/>
+        </p:nvSpPr>
+        <p:spPr>
+          <a:xfrm>
+            <a:off x="548640" y="320040"/>
+            <a:ext cx="11094720" cy="914400"/>
+          </a:xfrm>
+          <a:prstGeom prst="rect">
+            <a:avLst/>
+          </a:prstGeom>
+          <a:noFill/>
+        </p:spPr>
+        <p:txBody>
+          <a:bodyPr wrap="none">
+            <a:spAutoFit/>
+          </a:bodyPr>
+          <a:lstStyle/>
+          <a:p>
+            <a:r>
+              <a:rPr sz="3000" b="1"/>
+              <a:t>安全与合规警示（操作前必读）</a:t>
+            </a:r>
+          </a:p>
+        </p:txBody>
+      </p:sp>
+      <p:sp>
+        <p:nvSpPr>
+          <p:cNvPr id="3" name="TextBox 2"/>
+          <p:cNvSpPr txBox="1"/>
+          <p:nvPr/>
+        </p:nvSpPr>
+        <p:spPr>
+          <a:xfrm>
+            <a:off x="731520" y="1371600"/>
+            <a:ext cx="10728960" cy="4663440"/>
+          </a:xfrm>
+          <a:prstGeom prst="rect">
+            <a:avLst/>
+          </a:prstGeom>
+          <a:noFill/>
+        </p:spPr>
+        <p:txBody>
+          <a:bodyPr wrap="square">
+            <a:spAutoFit/>
+          </a:bodyPr>
+          <a:lstStyle/>
+          <a:p>
+            <a:pPr>
+              <a:spcAft>
+                <a:spcPts val="1000"/>
+              </a:spcAft>
+            </a:pPr>
+            <a:r>
+              <a:rPr sz="1800"/>
+              <a:t>1. 上机前确认本工位电源开关与急停位置，确认设备处于安全状态。</a:t>
+            </a:r>
+          </a:p>
+          <a:p>
+            <a:pPr>
+              <a:spcAft>
+                <a:spcPts val="1000"/>
+              </a:spcAft>
+            </a:pPr>
+            <a:r>
+              <a:rPr sz="1800"/>
+              <a:t>2. 涉及接线的操作一律先断电、后验电、再作业，禁止带电插拔。</a:t>
+            </a:r>
+          </a:p>
+          <a:p>
+            <a:pPr>
+              <a:spcAft>
+                <a:spcPts val="1000"/>
+              </a:spcAft>
+            </a:pPr>
+            <a:r>
+              <a:rPr sz="1800"/>
+              <a:t>3. 身体任何部位不进入设备运动/散热区域，长发束起，不佩戴悬垂饰物。</a:t>
+            </a:r>
+          </a:p>
+          <a:p>
+            <a:pPr>
+              <a:spcAft>
+                <a:spcPts val="1000"/>
+              </a:spcAft>
+            </a:pPr>
+            <a:r>
+              <a:rPr sz="1800"/>
+              <a:t>4. 调试程序前先静态检查、再低速小样本试运行，确认无异常后放大规模。</a:t>
+            </a:r>
+          </a:p>
+          <a:p>
+            <a:pPr>
+              <a:spcAft>
+                <a:spcPts val="1000"/>
+              </a:spcAft>
+            </a:pPr>
+            <a:r>
+              <a:rPr sz="1800"/>
+              <a:t>5. 任何不确定或异常情况，立即停止操作并报告指导教师，不擅自处置。</a:t>
+            </a:r>
+          </a:p>
+          <a:p>
+            <a:r>
+              <a:rPr sz="1400" b="1"/>
+              <a:t>以上任一条违反，本次任务按课程标准「安全规范一票否决」条款记 0 分并中止实训。</a:t>
+            </a:r>
+          </a:p>
+        </p:txBody>
+      </p:sp>
+    </p:spTree>
+  </p:cSld>
+  <p:clrMapOvr>
+    <a:masterClrMapping/>
+  </p:clrMapOvr>
+</p:sld>
+</file>
+
+<file path=ppt/slides/slide9.xml><?xml version="1.0" encoding="utf-8"?>
+<p:sld xmlns:a="http://schemas.openxmlformats.org/drawingml/2006/main" xmlns:p="http://schemas.openxmlformats.org/presentationml/2006/main" xmlns:r="http://schemas.openxmlformats.org/officeDocument/2006/relationships">
+  <p:cSld>
+    <p:spTree>
+      <p:nvGrpSpPr>
+        <p:cNvPr id="1" name=""/>
+        <p:cNvGrpSpPr/>
+        <p:nvPr/>
+      </p:nvGrpSpPr>
+      <p:grpSpPr/>
+      <p:sp>
+        <p:nvSpPr>
+          <p:cNvPr id="2" name="TextBox 1"/>
+          <p:cNvSpPr txBox="1"/>
+          <p:nvPr/>
+        </p:nvSpPr>
+        <p:spPr>
+          <a:xfrm>
+            <a:off x="548640" y="320040"/>
+            <a:ext cx="11094720" cy="914400"/>
+          </a:xfrm>
+          <a:prstGeom prst="rect">
+            <a:avLst/>
+          </a:prstGeom>
+          <a:noFill/>
+        </p:spPr>
+        <p:txBody>
+          <a:bodyPr wrap="none">
+            <a:spAutoFit/>
+          </a:bodyPr>
+          <a:lstStyle/>
+          <a:p>
+            <a:r>
+              <a:rPr sz="3000" b="1"/>
+              <a:t>本任务六步法导航</a:t>
+            </a:r>
+          </a:p>
+        </p:txBody>
+      </p:sp>
+      <p:sp>
+        <p:nvSpPr>
+          <p:cNvPr id="3" name="TextBox 2"/>
+          <p:cNvSpPr txBox="1"/>
+          <p:nvPr/>
+        </p:nvSpPr>
+        <p:spPr>
+          <a:xfrm>
+            <a:off x="731520" y="1371600"/>
+            <a:ext cx="10728960" cy="4663440"/>
+          </a:xfrm>
+          <a:prstGeom prst="rect">
+            <a:avLst/>
+          </a:prstGeom>
+          <a:noFill/>
+        </p:spPr>
+        <p:txBody>
+          <a:bodyPr wrap="square">
+            <a:spAutoFit/>
+          </a:bodyPr>
+          <a:lstStyle/>
+          <a:p>
+            <a:pPr>
+              <a:spcAft>
+                <a:spcPts val="1000"/>
+              </a:spcAft>
+            </a:pPr>
+            <a:r>
+              <a:rPr sz="1800"/>
+              <a:t>六步法：资讯 → 计划 → 决策 → 实施 → 检查 → 评估</a:t>
+            </a:r>
+          </a:p>
+          <a:p>
+            <a:pPr>
+              <a:spcAft>
+                <a:spcPts val="1000"/>
+              </a:spcAft>
+            </a:pPr>
+            <a:r>
+              <a:rPr sz="1800"/>
+              <a:t>本讲对应工单：《程序设计基础》分层任务工单</a:t>
+            </a:r>
+          </a:p>
+          <a:p>
+            <a:pPr>
+              <a:spcAft>
+                <a:spcPts val="1000"/>
+              </a:spcAft>
+            </a:pPr>
+            <a:r>
+              <a:rPr sz="1800"/>
+              <a:t>课堂产出：工单第六节实施记录须当堂填写，含操作前安全打勾与学生本人签字。</a:t>
+            </a:r>
+          </a:p>
+          <a:p>
+            <a:pPr>
+              <a:spcAft>
+                <a:spcPts val="1000"/>
+              </a:spcAft>
+            </a:pPr>
+            <a:r>
+              <a:rPr sz="1800"/>
+              <a:t>课后交付：班组长／操作员／教师三方联签后交回，缺签视为未交付。</a:t>
             </a:r>
           </a:p>
         </p:txBody>

--- a/V2授课PPT/W12-第24次课-正式答辩专场.pptx
+++ b/V2授课PPT/W12-第24次课-正式答辩专场.pptx
@@ -10,6 +10,9 @@
     <p:sldId id="280" r:id="rId32"/>
     <p:sldId id="311" r:id="rId63"/>
     <p:sldId id="318" r:id="rId70"/>
+    <p:sldId id="370" r:id="rId18"/>
+    <p:sldId id="371" r:id="rId19"/>
+    <p:sldId id="372" r:id="rId20"/>
     <p:sldId id="320" r:id="rId72"/>
     <p:sldId id="339" r:id="rId91"/>
     <p:sldId id="366" r:id="rId118"/>
@@ -4426,6 +4429,3259 @@
 </p:sld>
 </file>
 
+<file path=ppt/slides/slide11.xml><?xml version="1.0" encoding="utf-8"?>
+<p:sld xmlns:a="http://schemas.openxmlformats.org/drawingml/2006/main" xmlns:p="http://schemas.openxmlformats.org/presentationml/2006/main" xmlns:r="http://schemas.openxmlformats.org/officeDocument/2006/relationships">
+  <p:cSld>
+    <p:spTree>
+      <p:nvGrpSpPr>
+        <p:cNvPr id="1" name=""/>
+        <p:cNvGrpSpPr/>
+        <p:nvPr/>
+      </p:nvGrpSpPr>
+      <p:grpSpPr/>
+      <p:sp>
+        <p:nvSpPr>
+          <p:cNvPr id="2" name="Rectangle 1"/>
+          <p:cNvSpPr/>
+          <p:nvPr/>
+        </p:nvSpPr>
+        <p:spPr>
+          <a:xfrm>
+            <a:off x="0" y="0"/>
+            <a:ext cx="12192000" cy="1150000"/>
+          </a:xfrm>
+          <a:prstGeom prst="rect">
+            <a:avLst/>
+          </a:prstGeom>
+          <a:solidFill>
+            <a:srgbClr val="010328"/>
+          </a:solidFill>
+          <a:ln>
+            <a:noFill/>
+          </a:ln>
+          <a:effectLst/>
+        </p:spPr>
+        <p:style>
+          <a:lnRef idx="1">
+            <a:schemeClr val="accent1"/>
+          </a:lnRef>
+          <a:fillRef idx="3">
+            <a:schemeClr val="accent1"/>
+          </a:fillRef>
+          <a:effectRef idx="2">
+            <a:schemeClr val="accent1"/>
+          </a:effectRef>
+          <a:fontRef idx="minor">
+            <a:schemeClr val="lt1"/>
+          </a:fontRef>
+        </p:style>
+        <p:txBody>
+          <a:bodyPr rtlCol="0" anchor="ctr"/>
+          <a:lstStyle/>
+          <a:p>
+            <a:pPr algn="ctr"/>
+          </a:p>
+        </p:txBody>
+      </p:sp>
+      <p:sp>
+        <p:nvSpPr>
+          <p:cNvPr id="3" name="Rectangle 2"/>
+          <p:cNvSpPr/>
+          <p:nvPr/>
+        </p:nvSpPr>
+        <p:spPr>
+          <a:xfrm>
+            <a:off x="0" y="1150000"/>
+            <a:ext cx="2600000" cy="70000"/>
+          </a:xfrm>
+          <a:prstGeom prst="rect">
+            <a:avLst/>
+          </a:prstGeom>
+          <a:solidFill>
+            <a:srgbClr val="F5670F"/>
+          </a:solidFill>
+          <a:ln>
+            <a:noFill/>
+          </a:ln>
+          <a:effectLst/>
+        </p:spPr>
+        <p:style>
+          <a:lnRef idx="1">
+            <a:schemeClr val="accent1"/>
+          </a:lnRef>
+          <a:fillRef idx="3">
+            <a:schemeClr val="accent1"/>
+          </a:fillRef>
+          <a:effectRef idx="2">
+            <a:schemeClr val="accent1"/>
+          </a:effectRef>
+          <a:fontRef idx="minor">
+            <a:schemeClr val="lt1"/>
+          </a:fontRef>
+        </p:style>
+        <p:txBody>
+          <a:bodyPr rtlCol="0" anchor="ctr"/>
+          <a:lstStyle/>
+          <a:p>
+            <a:pPr algn="ctr"/>
+          </a:p>
+        </p:txBody>
+      </p:sp>
+      <p:sp>
+        <p:nvSpPr>
+          <p:cNvPr id="4" name="TextBox 3"/>
+          <p:cNvSpPr txBox="1"/>
+          <p:nvPr/>
+        </p:nvSpPr>
+        <p:spPr>
+          <a:xfrm>
+            <a:off x="700000" y="300000"/>
+            <a:ext cx="10792000" cy="700000"/>
+          </a:xfrm>
+          <a:prstGeom prst="rect">
+            <a:avLst/>
+          </a:prstGeom>
+          <a:noFill/>
+        </p:spPr>
+        <p:txBody>
+          <a:bodyPr wrap="square" anchor="ctr">
+            <a:spAutoFit/>
+          </a:bodyPr>
+          <a:lstStyle/>
+          <a:p>
+            <a:pPr algn="l">
+              <a:lnSpc>
+                <a:spcPct val="110000"/>
+              </a:lnSpc>
+              <a:spcAft>
+                <a:spcPts val="600"/>
+              </a:spcAft>
+            </a:pPr>
+            <a:r>
+              <a:rPr sz="2400" b="1">
+                <a:solidFill>
+                  <a:srgbClr val="FFFFFF"/>
+                </a:solidFill>
+                <a:latin typeface="微软雅黑"/>
+              </a:rPr>
+              <a:t>本课重难点地图 · 老师划重点（动手前必看）</a:t>
+            </a:r>
+          </a:p>
+        </p:txBody>
+      </p:sp>
+      <p:sp>
+        <p:nvSpPr>
+          <p:cNvPr id="24" name="Rectangle 23"/>
+          <p:cNvSpPr/>
+          <p:nvPr/>
+        </p:nvSpPr>
+        <p:spPr>
+          <a:xfrm>
+            <a:off x="500000" y="6500000"/>
+            <a:ext cx="11100000" cy="20000"/>
+          </a:xfrm>
+          <a:prstGeom prst="rect">
+            <a:avLst/>
+          </a:prstGeom>
+          <a:solidFill>
+            <a:srgbClr val="C9D4EE"/>
+          </a:solidFill>
+          <a:ln>
+            <a:noFill/>
+          </a:ln>
+          <a:effectLst/>
+        </p:spPr>
+        <p:style>
+          <a:lnRef idx="1">
+            <a:schemeClr val="accent1"/>
+          </a:lnRef>
+          <a:fillRef idx="3">
+            <a:schemeClr val="accent1"/>
+          </a:fillRef>
+          <a:effectRef idx="2">
+            <a:schemeClr val="accent1"/>
+          </a:effectRef>
+          <a:fontRef idx="minor">
+            <a:schemeClr val="lt1"/>
+          </a:fontRef>
+        </p:style>
+        <p:txBody>
+          <a:bodyPr rtlCol="0" anchor="ctr"/>
+          <a:lstStyle/>
+          <a:p>
+            <a:pPr algn="ctr"/>
+          </a:p>
+        </p:txBody>
+      </p:sp>
+      <p:sp>
+        <p:nvSpPr>
+          <p:cNvPr id="25" name="TextBox 24"/>
+          <p:cNvSpPr txBox="1"/>
+          <p:nvPr/>
+        </p:nvSpPr>
+        <p:spPr>
+          <a:xfrm>
+            <a:off x="500000" y="6540000"/>
+            <a:ext cx="7000000" cy="300000"/>
+          </a:xfrm>
+          <a:prstGeom prst="rect">
+            <a:avLst/>
+          </a:prstGeom>
+          <a:noFill/>
+        </p:spPr>
+        <p:txBody>
+          <a:bodyPr wrap="square" anchor="t">
+            <a:spAutoFit/>
+          </a:bodyPr>
+          <a:lstStyle/>
+          <a:p>
+            <a:pPr algn="l">
+              <a:lnSpc>
+                <a:spcPct val="110000"/>
+              </a:lnSpc>
+              <a:spcAft>
+                <a:spcPts val="600"/>
+              </a:spcAft>
+            </a:pPr>
+            <a:r>
+              <a:rPr sz="1000" b="0">
+                <a:solidFill>
+                  <a:srgbClr val="8A97B5"/>
+                </a:solidFill>
+                <a:latin typeface="微软雅黑"/>
+              </a:rPr>
+              <a:t>两江智造集团 · Python编程基础</a:t>
+            </a:r>
+          </a:p>
+        </p:txBody>
+      </p:sp>
+      <p:sp>
+        <p:nvSpPr>
+          <p:cNvPr id="26" name="TextBox 25"/>
+          <p:cNvSpPr txBox="1"/>
+          <p:nvPr/>
+        </p:nvSpPr>
+        <p:spPr>
+          <a:xfrm>
+            <a:off x="10600000" y="6540000"/>
+            <a:ext cx="1000000" cy="300000"/>
+          </a:xfrm>
+          <a:prstGeom prst="rect">
+            <a:avLst/>
+          </a:prstGeom>
+          <a:noFill/>
+        </p:spPr>
+        <p:txBody>
+          <a:bodyPr wrap="square" anchor="t">
+            <a:spAutoFit/>
+          </a:bodyPr>
+          <a:lstStyle/>
+          <a:p>
+            <a:pPr algn="r">
+              <a:lnSpc>
+                <a:spcPct val="110000"/>
+              </a:lnSpc>
+              <a:spcAft>
+                <a:spcPts val="600"/>
+              </a:spcAft>
+            </a:pPr>
+            <a:r>
+              <a:rPr sz="1000" b="0">
+                <a:solidFill>
+                  <a:srgbClr val="8A97B5"/>
+                </a:solidFill>
+                <a:latin typeface="微软雅黑"/>
+              </a:rPr>
+              <a:t>6 / 13</a:t>
+            </a:r>
+          </a:p>
+        </p:txBody>
+      </p:sp>
+      <p:sp>
+        <p:nvSpPr>
+          <p:cNvPr id="27" name="TextBox 26"/>
+          <p:cNvSpPr txBox="1"/>
+          <p:nvPr/>
+        </p:nvSpPr>
+        <p:spPr>
+          <a:xfrm>
+            <a:off x="457200" y="1389888"/>
+            <a:ext cx="11274552" cy="274320"/>
+          </a:xfrm>
+          <a:prstGeom prst="rect">
+            <a:avLst/>
+          </a:prstGeom>
+          <a:noFill/>
+        </p:spPr>
+        <p:txBody>
+          <a:bodyPr wrap="square">
+            <a:spAutoFit/>
+          </a:bodyPr>
+          <a:lstStyle/>
+          <a:p>
+            <a:r>
+              <a:rPr sz="1050" b="0">
+                <a:solidFill>
+                  <a:srgbClr val="6B7280"/>
+                </a:solidFill>
+                <a:latin typeface="微软雅黑"/>
+              </a:rPr>
+              <a:t>动手前先看这页：重点要会什么、难点会卡在哪、哪里最容易错、学没学会怎么自测。</a:t>
+            </a:r>
+          </a:p>
+        </p:txBody>
+      </p:sp>
+      <p:sp>
+        <p:nvSpPr>
+          <p:cNvPr id="28" name="Rectangle 27"/>
+          <p:cNvSpPr/>
+          <p:nvPr/>
+        </p:nvSpPr>
+        <p:spPr>
+          <a:xfrm>
+            <a:off x="457200" y="1783080"/>
+            <a:ext cx="5532120" cy="3127248"/>
+          </a:xfrm>
+          <a:prstGeom prst="rect">
+            <a:avLst/>
+          </a:prstGeom>
+          <a:solidFill>
+            <a:srgbClr val="FFFFFF"/>
+          </a:solidFill>
+          <a:ln>
+            <a:solidFill>
+              <a:srgbClr val="D6DCE4"/>
+            </a:solidFill>
+          </a:ln>
+          <a:effectLst/>
+        </p:spPr>
+        <p:style>
+          <a:lnRef idx="1">
+            <a:schemeClr val="accent1"/>
+          </a:lnRef>
+          <a:fillRef idx="3">
+            <a:schemeClr val="accent1"/>
+          </a:fillRef>
+          <a:effectRef idx="2">
+            <a:schemeClr val="accent1"/>
+          </a:effectRef>
+          <a:fontRef idx="minor">
+            <a:schemeClr val="lt1"/>
+          </a:fontRef>
+        </p:style>
+        <p:txBody>
+          <a:bodyPr rtlCol="0" anchor="ctr" wrap="square"/>
+          <a:lstStyle/>
+          <a:p>
+            <a:pPr algn="ctr"/>
+          </a:p>
+        </p:txBody>
+      </p:sp>
+      <p:sp>
+        <p:nvSpPr>
+          <p:cNvPr id="29" name="Rectangle 28"/>
+          <p:cNvSpPr/>
+          <p:nvPr/>
+        </p:nvSpPr>
+        <p:spPr>
+          <a:xfrm>
+            <a:off x="457200" y="1783080"/>
+            <a:ext cx="5532120" cy="365760"/>
+          </a:xfrm>
+          <a:prstGeom prst="rect">
+            <a:avLst/>
+          </a:prstGeom>
+          <a:solidFill>
+            <a:srgbClr val="2F5D8C"/>
+          </a:solidFill>
+          <a:ln>
+            <a:noFill/>
+          </a:ln>
+          <a:effectLst/>
+        </p:spPr>
+        <p:style>
+          <a:lnRef idx="1">
+            <a:schemeClr val="accent1"/>
+          </a:lnRef>
+          <a:fillRef idx="3">
+            <a:schemeClr val="accent1"/>
+          </a:fillRef>
+          <a:effectRef idx="2">
+            <a:schemeClr val="accent1"/>
+          </a:effectRef>
+          <a:fontRef idx="minor">
+            <a:schemeClr val="lt1"/>
+          </a:fontRef>
+        </p:style>
+        <p:txBody>
+          <a:bodyPr rtlCol="0" anchor="ctr" wrap="square"/>
+          <a:lstStyle/>
+          <a:p>
+            <a:pPr algn="ctr"/>
+          </a:p>
+        </p:txBody>
+      </p:sp>
+      <p:sp>
+        <p:nvSpPr>
+          <p:cNvPr id="30" name="TextBox 29"/>
+          <p:cNvSpPr txBox="1"/>
+          <p:nvPr/>
+        </p:nvSpPr>
+        <p:spPr>
+          <a:xfrm>
+            <a:off x="566928" y="1819656"/>
+            <a:ext cx="5312664" cy="292608"/>
+          </a:xfrm>
+          <a:prstGeom prst="rect">
+            <a:avLst/>
+          </a:prstGeom>
+          <a:noFill/>
+        </p:spPr>
+        <p:txBody>
+          <a:bodyPr wrap="square">
+            <a:spAutoFit/>
+          </a:bodyPr>
+          <a:lstStyle/>
+          <a:p>
+            <a:r>
+              <a:rPr sz="1150" b="1">
+                <a:solidFill>
+                  <a:srgbClr val="FFFFFF"/>
+                </a:solidFill>
+                <a:latin typeface="微软雅黑"/>
+              </a:rPr>
+              <a:t>重点 · 必会必考（本课知识点全景）</a:t>
+            </a:r>
+          </a:p>
+        </p:txBody>
+      </p:sp>
+      <p:sp>
+        <p:nvSpPr>
+          <p:cNvPr id="31" name="TextBox 30"/>
+          <p:cNvSpPr txBox="1"/>
+          <p:nvPr/>
+        </p:nvSpPr>
+        <p:spPr>
+          <a:xfrm>
+            <a:off x="621792" y="2267712"/>
+            <a:ext cx="5257800" cy="2560320"/>
+          </a:xfrm>
+          <a:prstGeom prst="rect">
+            <a:avLst/>
+          </a:prstGeom>
+          <a:noFill/>
+        </p:spPr>
+        <p:txBody>
+          <a:bodyPr wrap="square">
+            <a:spAutoFit/>
+          </a:bodyPr>
+          <a:lstStyle/>
+          <a:p>
+            <a:r>
+              <a:rPr sz="950" b="0">
+                <a:solidFill>
+                  <a:srgbClr val="2B2F36"/>
+                </a:solidFill>
+                <a:latin typeface="微软雅黑"/>
+              </a:rPr>
+              <a:t>◆ B01 checklist三清单｜checklist=飞行前检查单：功能/规范/演示逐项打勾</a:t>
+            </a:r>
+          </a:p>
+          <a:p>
+            <a:r>
+              <a:rPr sz="950" b="0">
+                <a:solidFill>
+                  <a:srgbClr val="2B2F36"/>
+                </a:solidFill>
+                <a:latin typeface="微软雅黑"/>
+              </a:rPr>
+              <a:t>◆ B02 答辩四段结构｜四段=时间盒：1分钟分工+5分钟演示+2分钟总结+提问</a:t>
+            </a:r>
+          </a:p>
+          <a:p>
+            <a:r>
+              <a:rPr sz="950" b="0">
+                <a:solidFill>
+                  <a:srgbClr val="2B2F36"/>
+                </a:solidFill>
+                <a:latin typeface="微软雅黑"/>
+              </a:rPr>
+              <a:t>◆ B03 bad-case预案｜bad-case预案=答辩灭火器：评委必点脏数据，提前备好</a:t>
+            </a:r>
+          </a:p>
+          <a:p>
+            <a:r>
+              <a:rPr sz="950" b="0">
+                <a:solidFill>
+                  <a:srgbClr val="2B2F36"/>
+                </a:solidFill>
+                <a:latin typeface="微软雅黑"/>
+              </a:rPr>
+              <a:t>◆ B04 贡献表与Git核对｜贡献表对Git=口头对台账——谁写的代码提交记录说了算</a:t>
+            </a:r>
+          </a:p>
+          <a:p>
+            <a:r>
+              <a:rPr sz="950" b="0">
+                <a:solidFill>
+                  <a:srgbClr val="2B2F36"/>
+                </a:solidFill>
+                <a:latin typeface="微软雅黑"/>
+              </a:rPr>
+              <a:t>◆ B05 个人问责制｜个人问责=随机点名必答题——组分与个人分分开</a:t>
+            </a:r>
+          </a:p>
+          <a:p>
+            <a:r>
+              <a:rPr sz="950" b="0">
+                <a:solidFill>
+                  <a:srgbClr val="2B2F36"/>
+                </a:solidFill>
+                <a:latin typeface="微软雅黑"/>
+              </a:rPr>
+              <a:t>◆ B06 时间盒弹性｜时间盒弹性=人多就切5+3分钟——超时打断不解释</a:t>
+            </a:r>
+          </a:p>
+        </p:txBody>
+      </p:sp>
+      <p:sp>
+        <p:nvSpPr>
+          <p:cNvPr id="32" name="Rectangle 31"/>
+          <p:cNvSpPr/>
+          <p:nvPr/>
+        </p:nvSpPr>
+        <p:spPr>
+          <a:xfrm>
+            <a:off x="6144768" y="1783080"/>
+            <a:ext cx="5586984" cy="1481328"/>
+          </a:xfrm>
+          <a:prstGeom prst="rect">
+            <a:avLst/>
+          </a:prstGeom>
+          <a:solidFill>
+            <a:srgbClr val="FFFFFF"/>
+          </a:solidFill>
+          <a:ln>
+            <a:solidFill>
+              <a:srgbClr val="D6DCE4"/>
+            </a:solidFill>
+          </a:ln>
+          <a:effectLst/>
+        </p:spPr>
+        <p:style>
+          <a:lnRef idx="1">
+            <a:schemeClr val="accent1"/>
+          </a:lnRef>
+          <a:fillRef idx="3">
+            <a:schemeClr val="accent1"/>
+          </a:fillRef>
+          <a:effectRef idx="2">
+            <a:schemeClr val="accent1"/>
+          </a:effectRef>
+          <a:fontRef idx="minor">
+            <a:schemeClr val="lt1"/>
+          </a:fontRef>
+        </p:style>
+        <p:txBody>
+          <a:bodyPr rtlCol="0" anchor="ctr" wrap="square"/>
+          <a:lstStyle/>
+          <a:p>
+            <a:pPr algn="ctr"/>
+          </a:p>
+        </p:txBody>
+      </p:sp>
+      <p:sp>
+        <p:nvSpPr>
+          <p:cNvPr id="33" name="Rectangle 32"/>
+          <p:cNvSpPr/>
+          <p:nvPr/>
+        </p:nvSpPr>
+        <p:spPr>
+          <a:xfrm>
+            <a:off x="6144768" y="1783080"/>
+            <a:ext cx="5586984" cy="365760"/>
+          </a:xfrm>
+          <a:prstGeom prst="rect">
+            <a:avLst/>
+          </a:prstGeom>
+          <a:solidFill>
+            <a:srgbClr val="8A4B2D"/>
+          </a:solidFill>
+          <a:ln>
+            <a:noFill/>
+          </a:ln>
+          <a:effectLst/>
+        </p:spPr>
+        <p:style>
+          <a:lnRef idx="1">
+            <a:schemeClr val="accent1"/>
+          </a:lnRef>
+          <a:fillRef idx="3">
+            <a:schemeClr val="accent1"/>
+          </a:fillRef>
+          <a:effectRef idx="2">
+            <a:schemeClr val="accent1"/>
+          </a:effectRef>
+          <a:fontRef idx="minor">
+            <a:schemeClr val="lt1"/>
+          </a:fontRef>
+        </p:style>
+        <p:txBody>
+          <a:bodyPr rtlCol="0" anchor="ctr" wrap="square"/>
+          <a:lstStyle/>
+          <a:p>
+            <a:pPr algn="ctr"/>
+          </a:p>
+        </p:txBody>
+      </p:sp>
+      <p:sp>
+        <p:nvSpPr>
+          <p:cNvPr id="34" name="TextBox 33"/>
+          <p:cNvSpPr txBox="1"/>
+          <p:nvPr/>
+        </p:nvSpPr>
+        <p:spPr>
+          <a:xfrm>
+            <a:off x="6254496" y="1819656"/>
+            <a:ext cx="5367528" cy="292608"/>
+          </a:xfrm>
+          <a:prstGeom prst="rect">
+            <a:avLst/>
+          </a:prstGeom>
+          <a:noFill/>
+        </p:spPr>
+        <p:txBody>
+          <a:bodyPr wrap="square">
+            <a:spAutoFit/>
+          </a:bodyPr>
+          <a:lstStyle/>
+          <a:p>
+            <a:r>
+              <a:rPr sz="1150" b="1">
+                <a:solidFill>
+                  <a:srgbClr val="FFFFFF"/>
+                </a:solidFill>
+                <a:latin typeface="微软雅黑"/>
+              </a:rPr>
+              <a:t>难点 · 易卡壳（下一页逐个击破）</a:t>
+            </a:r>
+          </a:p>
+        </p:txBody>
+      </p:sp>
+      <p:sp>
+        <p:nvSpPr>
+          <p:cNvPr id="35" name="TextBox 34"/>
+          <p:cNvSpPr txBox="1"/>
+          <p:nvPr/>
+        </p:nvSpPr>
+        <p:spPr>
+          <a:xfrm>
+            <a:off x="6309360" y="2231136"/>
+            <a:ext cx="5303520" cy="960120"/>
+          </a:xfrm>
+          <a:prstGeom prst="rect">
+            <a:avLst/>
+          </a:prstGeom>
+          <a:noFill/>
+        </p:spPr>
+        <p:txBody>
+          <a:bodyPr wrap="square">
+            <a:spAutoFit/>
+          </a:bodyPr>
+          <a:lstStyle/>
+          <a:p>
+            <a:r>
+              <a:rPr sz="900" b="0">
+                <a:solidFill>
+                  <a:srgbClr val="2B2F36"/>
+                </a:solidFill>
+                <a:latin typeface="微软雅黑"/>
+              </a:rPr>
+              <a:t>▲ 误区：靠'我觉得都OK'——清单逐项过，漏一项扣一项</a:t>
+            </a:r>
+          </a:p>
+          <a:p>
+            <a:r>
+              <a:rPr sz="900" b="0">
+                <a:solidFill>
+                  <a:srgbClr val="2B2F36"/>
+                </a:solidFill>
+                <a:latin typeface="微软雅黑"/>
+              </a:rPr>
+              <a:t>▲ 误区：先讲代码再演示——先跑通给结果，评委要有耐心阈值</a:t>
+            </a:r>
+          </a:p>
+          <a:p>
+            <a:r>
+              <a:rPr sz="900" b="0">
+                <a:solidFill>
+                  <a:srgbClr val="2B2F36"/>
+                </a:solidFill>
+                <a:latin typeface="微软雅黑"/>
+              </a:rPr>
+              <a:t>▲ 误区：崩溃不扣死分，崩溃无预案才扣——兜底体现工程态度</a:t>
+            </a:r>
+          </a:p>
+        </p:txBody>
+      </p:sp>
+      <p:sp>
+        <p:nvSpPr>
+          <p:cNvPr id="36" name="Rectangle 35"/>
+          <p:cNvSpPr/>
+          <p:nvPr/>
+        </p:nvSpPr>
+        <p:spPr>
+          <a:xfrm>
+            <a:off x="6144768" y="3401568"/>
+            <a:ext cx="5586984" cy="1508760"/>
+          </a:xfrm>
+          <a:prstGeom prst="rect">
+            <a:avLst/>
+          </a:prstGeom>
+          <a:solidFill>
+            <a:srgbClr val="FFFFFF"/>
+          </a:solidFill>
+          <a:ln>
+            <a:solidFill>
+              <a:srgbClr val="D6DCE4"/>
+            </a:solidFill>
+          </a:ln>
+          <a:effectLst/>
+        </p:spPr>
+        <p:style>
+          <a:lnRef idx="1">
+            <a:schemeClr val="accent1"/>
+          </a:lnRef>
+          <a:fillRef idx="3">
+            <a:schemeClr val="accent1"/>
+          </a:fillRef>
+          <a:effectRef idx="2">
+            <a:schemeClr val="accent1"/>
+          </a:effectRef>
+          <a:fontRef idx="minor">
+            <a:schemeClr val="lt1"/>
+          </a:fontRef>
+        </p:style>
+        <p:txBody>
+          <a:bodyPr rtlCol="0" anchor="ctr" wrap="square"/>
+          <a:lstStyle/>
+          <a:p>
+            <a:pPr algn="ctr"/>
+          </a:p>
+        </p:txBody>
+      </p:sp>
+      <p:sp>
+        <p:nvSpPr>
+          <p:cNvPr id="37" name="Rectangle 36"/>
+          <p:cNvSpPr/>
+          <p:nvPr/>
+        </p:nvSpPr>
+        <p:spPr>
+          <a:xfrm>
+            <a:off x="6144768" y="3401568"/>
+            <a:ext cx="5586984" cy="365760"/>
+          </a:xfrm>
+          <a:prstGeom prst="rect">
+            <a:avLst/>
+          </a:prstGeom>
+          <a:solidFill>
+            <a:srgbClr val="9A3B3B"/>
+          </a:solidFill>
+          <a:ln>
+            <a:noFill/>
+          </a:ln>
+          <a:effectLst/>
+        </p:spPr>
+        <p:style>
+          <a:lnRef idx="1">
+            <a:schemeClr val="accent1"/>
+          </a:lnRef>
+          <a:fillRef idx="3">
+            <a:schemeClr val="accent1"/>
+          </a:fillRef>
+          <a:effectRef idx="2">
+            <a:schemeClr val="accent1"/>
+          </a:effectRef>
+          <a:fontRef idx="minor">
+            <a:schemeClr val="lt1"/>
+          </a:fontRef>
+        </p:style>
+        <p:txBody>
+          <a:bodyPr rtlCol="0" anchor="ctr" wrap="square"/>
+          <a:lstStyle/>
+          <a:p>
+            <a:pPr algn="ctr"/>
+          </a:p>
+        </p:txBody>
+      </p:sp>
+      <p:sp>
+        <p:nvSpPr>
+          <p:cNvPr id="38" name="TextBox 37"/>
+          <p:cNvSpPr txBox="1"/>
+          <p:nvPr/>
+        </p:nvSpPr>
+        <p:spPr>
+          <a:xfrm>
+            <a:off x="6254496" y="3438144"/>
+            <a:ext cx="5367528" cy="292608"/>
+          </a:xfrm>
+          <a:prstGeom prst="rect">
+            <a:avLst/>
+          </a:prstGeom>
+          <a:noFill/>
+        </p:spPr>
+        <p:txBody>
+          <a:bodyPr wrap="square">
+            <a:spAutoFit/>
+          </a:bodyPr>
+          <a:lstStyle/>
+          <a:p>
+            <a:r>
+              <a:rPr sz="1150" b="1">
+                <a:solidFill>
+                  <a:srgbClr val="FFFFFF"/>
+                </a:solidFill>
+                <a:latin typeface="微软雅黑"/>
+              </a:rPr>
+              <a:t>高频易错 · 动手前先记住</a:t>
+            </a:r>
+          </a:p>
+        </p:txBody>
+      </p:sp>
+      <p:sp>
+        <p:nvSpPr>
+          <p:cNvPr id="39" name="TextBox 38"/>
+          <p:cNvSpPr txBox="1"/>
+          <p:nvPr/>
+        </p:nvSpPr>
+        <p:spPr>
+          <a:xfrm>
+            <a:off x="6309360" y="3849624"/>
+            <a:ext cx="5303520" cy="960120"/>
+          </a:xfrm>
+          <a:prstGeom prst="rect">
+            <a:avLst/>
+          </a:prstGeom>
+          <a:noFill/>
+        </p:spPr>
+        <p:txBody>
+          <a:bodyPr wrap="square">
+            <a:spAutoFit/>
+          </a:bodyPr>
+          <a:lstStyle/>
+          <a:p>
+            <a:r>
+              <a:rPr sz="900" b="0">
+                <a:solidFill>
+                  <a:srgbClr val="2B2F36"/>
+                </a:solidFill>
+                <a:latin typeface="微软雅黑"/>
+              </a:rPr>
+              <a:t>✗ 现场装依赖 → 答辩机预演</a:t>
+            </a:r>
+          </a:p>
+          <a:p>
+            <a:r>
+              <a:rPr sz="900" b="0">
+                <a:solidFill>
+                  <a:srgbClr val="2B2F36"/>
+                </a:solidFill>
+                <a:latin typeface="微软雅黑"/>
+              </a:rPr>
+              <a:t>✗ 只讲不演示 → 必须现场运行</a:t>
+            </a:r>
+          </a:p>
+          <a:p>
+            <a:r>
+              <a:rPr sz="900" b="0">
+                <a:solidFill>
+                  <a:srgbClr val="2B2F36"/>
+                </a:solidFill>
+                <a:latin typeface="微软雅黑"/>
+              </a:rPr>
+              <a:t>✗ 超时 → 按5+3彩排两遍</a:t>
+            </a:r>
+          </a:p>
+        </p:txBody>
+      </p:sp>
+      <p:sp>
+        <p:nvSpPr>
+          <p:cNvPr id="40" name="Rectangle 39"/>
+          <p:cNvSpPr/>
+          <p:nvPr/>
+        </p:nvSpPr>
+        <p:spPr>
+          <a:xfrm>
+            <a:off x="457200" y="5047488"/>
+            <a:ext cx="11274552" cy="1207008"/>
+          </a:xfrm>
+          <a:prstGeom prst="rect">
+            <a:avLst/>
+          </a:prstGeom>
+          <a:solidFill>
+            <a:srgbClr val="FFFFFF"/>
+          </a:solidFill>
+          <a:ln>
+            <a:solidFill>
+              <a:srgbClr val="D6DCE4"/>
+            </a:solidFill>
+          </a:ln>
+          <a:effectLst/>
+        </p:spPr>
+        <p:style>
+          <a:lnRef idx="1">
+            <a:schemeClr val="accent1"/>
+          </a:lnRef>
+          <a:fillRef idx="3">
+            <a:schemeClr val="accent1"/>
+          </a:fillRef>
+          <a:effectRef idx="2">
+            <a:schemeClr val="accent1"/>
+          </a:effectRef>
+          <a:fontRef idx="minor">
+            <a:schemeClr val="lt1"/>
+          </a:fontRef>
+        </p:style>
+        <p:txBody>
+          <a:bodyPr rtlCol="0" anchor="ctr" wrap="square"/>
+          <a:lstStyle/>
+          <a:p>
+            <a:pPr algn="ctr"/>
+          </a:p>
+        </p:txBody>
+      </p:sp>
+      <p:sp>
+        <p:nvSpPr>
+          <p:cNvPr id="41" name="Rectangle 40"/>
+          <p:cNvSpPr/>
+          <p:nvPr/>
+        </p:nvSpPr>
+        <p:spPr>
+          <a:xfrm>
+            <a:off x="457200" y="5047488"/>
+            <a:ext cx="11274552" cy="365760"/>
+          </a:xfrm>
+          <a:prstGeom prst="rect">
+            <a:avLst/>
+          </a:prstGeom>
+          <a:solidFill>
+            <a:srgbClr val="2E7D46"/>
+          </a:solidFill>
+          <a:ln>
+            <a:noFill/>
+          </a:ln>
+          <a:effectLst/>
+        </p:spPr>
+        <p:style>
+          <a:lnRef idx="1">
+            <a:schemeClr val="accent1"/>
+          </a:lnRef>
+          <a:fillRef idx="3">
+            <a:schemeClr val="accent1"/>
+          </a:fillRef>
+          <a:effectRef idx="2">
+            <a:schemeClr val="accent1"/>
+          </a:effectRef>
+          <a:fontRef idx="minor">
+            <a:schemeClr val="lt1"/>
+          </a:fontRef>
+        </p:style>
+        <p:txBody>
+          <a:bodyPr rtlCol="0" anchor="ctr" wrap="square"/>
+          <a:lstStyle/>
+          <a:p>
+            <a:pPr algn="ctr"/>
+          </a:p>
+        </p:txBody>
+      </p:sp>
+      <p:sp>
+        <p:nvSpPr>
+          <p:cNvPr id="42" name="TextBox 41"/>
+          <p:cNvSpPr txBox="1"/>
+          <p:nvPr/>
+        </p:nvSpPr>
+        <p:spPr>
+          <a:xfrm>
+            <a:off x="566928" y="5084064"/>
+            <a:ext cx="11055096" cy="292608"/>
+          </a:xfrm>
+          <a:prstGeom prst="rect">
+            <a:avLst/>
+          </a:prstGeom>
+          <a:noFill/>
+        </p:spPr>
+        <p:txBody>
+          <a:bodyPr wrap="square">
+            <a:spAutoFit/>
+          </a:bodyPr>
+          <a:lstStyle/>
+          <a:p>
+            <a:r>
+              <a:rPr sz="1150" b="1">
+                <a:solidFill>
+                  <a:srgbClr val="FFFFFF"/>
+                </a:solidFill>
+                <a:latin typeface="微软雅黑"/>
+              </a:rPr>
+              <a:t>达标自问 · 学没学会，问自己这四句（当堂评分同口径）</a:t>
+            </a:r>
+          </a:p>
+        </p:txBody>
+      </p:sp>
+      <p:sp>
+        <p:nvSpPr>
+          <p:cNvPr id="43" name="TextBox 42"/>
+          <p:cNvSpPr txBox="1"/>
+          <p:nvPr/>
+        </p:nvSpPr>
+        <p:spPr>
+          <a:xfrm>
+            <a:off x="621792" y="5458968"/>
+            <a:ext cx="10972800" cy="768096"/>
+          </a:xfrm>
+          <a:prstGeom prst="rect">
+            <a:avLst/>
+          </a:prstGeom>
+          <a:noFill/>
+        </p:spPr>
+        <p:txBody>
+          <a:bodyPr wrap="square">
+            <a:spAutoFit/>
+          </a:bodyPr>
+          <a:lstStyle/>
+          <a:p>
+            <a:r>
+              <a:rPr sz="900" b="0">
+                <a:solidFill>
+                  <a:srgbClr val="2B2F36"/>
+                </a:solidFill>
+                <a:latin typeface="微软雅黑"/>
+              </a:rPr>
+              <a:t>① 及格线我能过吗——功能基本完整+能演示主流程</a:t>
+            </a:r>
+          </a:p>
+          <a:p>
+            <a:r>
+              <a:rPr sz="900" b="0">
+                <a:solidFill>
+                  <a:srgbClr val="2B2F36"/>
+                </a:solidFill>
+                <a:latin typeface="微软雅黑"/>
+              </a:rPr>
+              <a:t>② 优秀线我够吗——规范率≥95%+架构清晰+创新点</a:t>
+            </a:r>
+          </a:p>
+          <a:p>
+            <a:r>
+              <a:rPr sz="900" b="0">
+                <a:solidFill>
+                  <a:srgbClr val="2B2F36"/>
+                </a:solidFill>
+                <a:latin typeface="微软雅黑"/>
+              </a:rPr>
+              <a:t>③ 技能点我能独立做出来吗——对照技能点页 S1–S4 逐条自测</a:t>
+            </a:r>
+          </a:p>
+          <a:p>
+            <a:r>
+              <a:rPr sz="900" b="0">
+                <a:solidFill>
+                  <a:srgbClr val="2B2F36"/>
+                </a:solidFill>
+                <a:latin typeface="微软雅黑"/>
+              </a:rPr>
+              <a:t>④ 报错了先查「常见错误速查」页再举手——错误信息逐字读一遍，八成自己能修</a:t>
+            </a:r>
+          </a:p>
+        </p:txBody>
+      </p:sp>
+      <p:sp>
+        <p:nvSpPr>
+          <p:cNvPr id="44" name="TextBox 43"/>
+          <p:cNvSpPr txBox="1"/>
+          <p:nvPr/>
+        </p:nvSpPr>
+        <p:spPr>
+          <a:xfrm>
+            <a:off x="457200" y="6281928"/>
+            <a:ext cx="9601200" cy="182880"/>
+          </a:xfrm>
+          <a:prstGeom prst="rect">
+            <a:avLst/>
+          </a:prstGeom>
+          <a:noFill/>
+        </p:spPr>
+        <p:txBody>
+          <a:bodyPr wrap="square">
+            <a:spAutoFit/>
+          </a:bodyPr>
+          <a:lstStyle/>
+          <a:p>
+            <a:r>
+              <a:rPr sz="750" b="0">
+                <a:solidFill>
+                  <a:srgbClr val="6B7280"/>
+                </a:solidFill>
+                <a:latin typeface="微软雅黑"/>
+              </a:rPr>
+              <a:t>素材来源：同周《第23次课-项目终验联调与预答辩》知识卡与避坑清单（逐字摘录）</a:t>
+            </a:r>
+          </a:p>
+        </p:txBody>
+      </p:sp>
+    </p:spTree>
+  </p:cSld>
+  <p:clrMapOvr>
+    <a:masterClrMapping/>
+  </p:clrMapOvr>
+</p:sld>
+</file>
+
+<file path=ppt/slides/slide12.xml><?xml version="1.0" encoding="utf-8"?>
+<p:sld xmlns:a="http://schemas.openxmlformats.org/drawingml/2006/main" xmlns:p="http://schemas.openxmlformats.org/presentationml/2006/main" xmlns:r="http://schemas.openxmlformats.org/officeDocument/2006/relationships">
+  <p:cSld>
+    <p:spTree>
+      <p:nvGrpSpPr>
+        <p:cNvPr id="1" name=""/>
+        <p:cNvGrpSpPr/>
+        <p:nvPr/>
+      </p:nvGrpSpPr>
+      <p:grpSpPr/>
+      <p:sp>
+        <p:nvSpPr>
+          <p:cNvPr id="2" name="Rectangle 1"/>
+          <p:cNvSpPr/>
+          <p:nvPr/>
+        </p:nvSpPr>
+        <p:spPr>
+          <a:xfrm>
+            <a:off x="0" y="0"/>
+            <a:ext cx="12192000" cy="1150000"/>
+          </a:xfrm>
+          <a:prstGeom prst="rect">
+            <a:avLst/>
+          </a:prstGeom>
+          <a:solidFill>
+            <a:srgbClr val="010328"/>
+          </a:solidFill>
+          <a:ln>
+            <a:noFill/>
+          </a:ln>
+          <a:effectLst/>
+        </p:spPr>
+        <p:style>
+          <a:lnRef idx="1">
+            <a:schemeClr val="accent1"/>
+          </a:lnRef>
+          <a:fillRef idx="3">
+            <a:schemeClr val="accent1"/>
+          </a:fillRef>
+          <a:effectRef idx="2">
+            <a:schemeClr val="accent1"/>
+          </a:effectRef>
+          <a:fontRef idx="minor">
+            <a:schemeClr val="lt1"/>
+          </a:fontRef>
+        </p:style>
+        <p:txBody>
+          <a:bodyPr rtlCol="0" anchor="ctr"/>
+          <a:lstStyle/>
+          <a:p>
+            <a:pPr algn="ctr"/>
+          </a:p>
+        </p:txBody>
+      </p:sp>
+      <p:sp>
+        <p:nvSpPr>
+          <p:cNvPr id="3" name="Rectangle 2"/>
+          <p:cNvSpPr/>
+          <p:nvPr/>
+        </p:nvSpPr>
+        <p:spPr>
+          <a:xfrm>
+            <a:off x="0" y="1150000"/>
+            <a:ext cx="2600000" cy="70000"/>
+          </a:xfrm>
+          <a:prstGeom prst="rect">
+            <a:avLst/>
+          </a:prstGeom>
+          <a:solidFill>
+            <a:srgbClr val="F5670F"/>
+          </a:solidFill>
+          <a:ln>
+            <a:noFill/>
+          </a:ln>
+          <a:effectLst/>
+        </p:spPr>
+        <p:style>
+          <a:lnRef idx="1">
+            <a:schemeClr val="accent1"/>
+          </a:lnRef>
+          <a:fillRef idx="3">
+            <a:schemeClr val="accent1"/>
+          </a:fillRef>
+          <a:effectRef idx="2">
+            <a:schemeClr val="accent1"/>
+          </a:effectRef>
+          <a:fontRef idx="minor">
+            <a:schemeClr val="lt1"/>
+          </a:fontRef>
+        </p:style>
+        <p:txBody>
+          <a:bodyPr rtlCol="0" anchor="ctr"/>
+          <a:lstStyle/>
+          <a:p>
+            <a:pPr algn="ctr"/>
+          </a:p>
+        </p:txBody>
+      </p:sp>
+      <p:sp>
+        <p:nvSpPr>
+          <p:cNvPr id="4" name="TextBox 3"/>
+          <p:cNvSpPr txBox="1"/>
+          <p:nvPr/>
+        </p:nvSpPr>
+        <p:spPr>
+          <a:xfrm>
+            <a:off x="700000" y="300000"/>
+            <a:ext cx="10792000" cy="700000"/>
+          </a:xfrm>
+          <a:prstGeom prst="rect">
+            <a:avLst/>
+          </a:prstGeom>
+          <a:noFill/>
+        </p:spPr>
+        <p:txBody>
+          <a:bodyPr wrap="square" anchor="ctr">
+            <a:spAutoFit/>
+          </a:bodyPr>
+          <a:lstStyle/>
+          <a:p>
+            <a:pPr algn="l">
+              <a:lnSpc>
+                <a:spcPct val="110000"/>
+              </a:lnSpc>
+              <a:spcAft>
+                <a:spcPts val="600"/>
+              </a:spcAft>
+            </a:pPr>
+            <a:r>
+              <a:rPr sz="2400" b="1">
+                <a:solidFill>
+                  <a:srgbClr val="FFFFFF"/>
+                </a:solidFill>
+                <a:latin typeface="微软雅黑"/>
+              </a:rPr>
+              <a:t>难点逐个击破 · 零基础照做就能会</a:t>
+            </a:r>
+          </a:p>
+        </p:txBody>
+      </p:sp>
+      <p:sp>
+        <p:nvSpPr>
+          <p:cNvPr id="24" name="Rectangle 23"/>
+          <p:cNvSpPr/>
+          <p:nvPr/>
+        </p:nvSpPr>
+        <p:spPr>
+          <a:xfrm>
+            <a:off x="500000" y="6500000"/>
+            <a:ext cx="11100000" cy="20000"/>
+          </a:xfrm>
+          <a:prstGeom prst="rect">
+            <a:avLst/>
+          </a:prstGeom>
+          <a:solidFill>
+            <a:srgbClr val="C9D4EE"/>
+          </a:solidFill>
+          <a:ln>
+            <a:noFill/>
+          </a:ln>
+          <a:effectLst/>
+        </p:spPr>
+        <p:style>
+          <a:lnRef idx="1">
+            <a:schemeClr val="accent1"/>
+          </a:lnRef>
+          <a:fillRef idx="3">
+            <a:schemeClr val="accent1"/>
+          </a:fillRef>
+          <a:effectRef idx="2">
+            <a:schemeClr val="accent1"/>
+          </a:effectRef>
+          <a:fontRef idx="minor">
+            <a:schemeClr val="lt1"/>
+          </a:fontRef>
+        </p:style>
+        <p:txBody>
+          <a:bodyPr rtlCol="0" anchor="ctr"/>
+          <a:lstStyle/>
+          <a:p>
+            <a:pPr algn="ctr"/>
+          </a:p>
+        </p:txBody>
+      </p:sp>
+      <p:sp>
+        <p:nvSpPr>
+          <p:cNvPr id="25" name="TextBox 24"/>
+          <p:cNvSpPr txBox="1"/>
+          <p:nvPr/>
+        </p:nvSpPr>
+        <p:spPr>
+          <a:xfrm>
+            <a:off x="500000" y="6540000"/>
+            <a:ext cx="7000000" cy="300000"/>
+          </a:xfrm>
+          <a:prstGeom prst="rect">
+            <a:avLst/>
+          </a:prstGeom>
+          <a:noFill/>
+        </p:spPr>
+        <p:txBody>
+          <a:bodyPr wrap="square" anchor="t">
+            <a:spAutoFit/>
+          </a:bodyPr>
+          <a:lstStyle/>
+          <a:p>
+            <a:pPr algn="l">
+              <a:lnSpc>
+                <a:spcPct val="110000"/>
+              </a:lnSpc>
+              <a:spcAft>
+                <a:spcPts val="600"/>
+              </a:spcAft>
+            </a:pPr>
+            <a:r>
+              <a:rPr sz="1000" b="0">
+                <a:solidFill>
+                  <a:srgbClr val="8A97B5"/>
+                </a:solidFill>
+                <a:latin typeface="微软雅黑"/>
+              </a:rPr>
+              <a:t>两江智造集团 · Python编程基础</a:t>
+            </a:r>
+          </a:p>
+        </p:txBody>
+      </p:sp>
+      <p:sp>
+        <p:nvSpPr>
+          <p:cNvPr id="26" name="TextBox 25"/>
+          <p:cNvSpPr txBox="1"/>
+          <p:nvPr/>
+        </p:nvSpPr>
+        <p:spPr>
+          <a:xfrm>
+            <a:off x="10600000" y="6540000"/>
+            <a:ext cx="1000000" cy="300000"/>
+          </a:xfrm>
+          <a:prstGeom prst="rect">
+            <a:avLst/>
+          </a:prstGeom>
+          <a:noFill/>
+        </p:spPr>
+        <p:txBody>
+          <a:bodyPr wrap="square" anchor="t">
+            <a:spAutoFit/>
+          </a:bodyPr>
+          <a:lstStyle/>
+          <a:p>
+            <a:pPr algn="r">
+              <a:lnSpc>
+                <a:spcPct val="110000"/>
+              </a:lnSpc>
+              <a:spcAft>
+                <a:spcPts val="600"/>
+              </a:spcAft>
+            </a:pPr>
+            <a:r>
+              <a:rPr sz="1000" b="0">
+                <a:solidFill>
+                  <a:srgbClr val="8A97B5"/>
+                </a:solidFill>
+                <a:latin typeface="微软雅黑"/>
+              </a:rPr>
+              <a:t>7 / 13</a:t>
+            </a:r>
+          </a:p>
+        </p:txBody>
+      </p:sp>
+      <p:sp>
+        <p:nvSpPr>
+          <p:cNvPr id="27" name="TextBox 26"/>
+          <p:cNvSpPr txBox="1"/>
+          <p:nvPr/>
+        </p:nvSpPr>
+        <p:spPr>
+          <a:xfrm>
+            <a:off x="457200" y="1389888"/>
+            <a:ext cx="11274552" cy="274320"/>
+          </a:xfrm>
+          <a:prstGeom prst="rect">
+            <a:avLst/>
+          </a:prstGeom>
+          <a:noFill/>
+        </p:spPr>
+        <p:txBody>
+          <a:bodyPr wrap="square">
+            <a:spAutoFit/>
+          </a:bodyPr>
+          <a:lstStyle/>
+          <a:p>
+            <a:r>
+              <a:rPr sz="1050" b="0">
+                <a:solidFill>
+                  <a:srgbClr val="6B7280"/>
+                </a:solidFill>
+                <a:latin typeface="微软雅黑"/>
+              </a:rPr>
+              <a:t>每个难点四步走：先看「为什么容易栽」对号入座 → 记住「一招破解」→ 照「动手验证」做一遍 → 做不出回知识详解页。</a:t>
+            </a:r>
+          </a:p>
+        </p:txBody>
+      </p:sp>
+      <p:sp>
+        <p:nvSpPr>
+          <p:cNvPr id="28" name="Rectangle 27"/>
+          <p:cNvSpPr/>
+          <p:nvPr/>
+        </p:nvSpPr>
+        <p:spPr>
+          <a:xfrm>
+            <a:off x="457200" y="1783080"/>
+            <a:ext cx="11274552" cy="1481328"/>
+          </a:xfrm>
+          <a:prstGeom prst="rect">
+            <a:avLst/>
+          </a:prstGeom>
+          <a:solidFill>
+            <a:srgbClr val="F7F9FC"/>
+          </a:solidFill>
+          <a:ln>
+            <a:solidFill>
+              <a:srgbClr val="D6DCE4"/>
+            </a:solidFill>
+          </a:ln>
+          <a:effectLst/>
+        </p:spPr>
+        <p:style>
+          <a:lnRef idx="1">
+            <a:schemeClr val="accent1"/>
+          </a:lnRef>
+          <a:fillRef idx="3">
+            <a:schemeClr val="accent1"/>
+          </a:fillRef>
+          <a:effectRef idx="2">
+            <a:schemeClr val="accent1"/>
+          </a:effectRef>
+          <a:fontRef idx="minor">
+            <a:schemeClr val="lt1"/>
+          </a:fontRef>
+        </p:style>
+        <p:txBody>
+          <a:bodyPr rtlCol="0" anchor="ctr" wrap="square"/>
+          <a:lstStyle/>
+          <a:p>
+            <a:pPr algn="ctr"/>
+          </a:p>
+        </p:txBody>
+      </p:sp>
+      <p:sp>
+        <p:nvSpPr>
+          <p:cNvPr id="29" name="Rectangle 28"/>
+          <p:cNvSpPr/>
+          <p:nvPr/>
+        </p:nvSpPr>
+        <p:spPr>
+          <a:xfrm>
+            <a:off x="457200" y="1783080"/>
+            <a:ext cx="82296" cy="1481328"/>
+          </a:xfrm>
+          <a:prstGeom prst="rect">
+            <a:avLst/>
+          </a:prstGeom>
+          <a:solidFill>
+            <a:srgbClr val="8A4B2D"/>
+          </a:solidFill>
+          <a:ln>
+            <a:noFill/>
+          </a:ln>
+          <a:effectLst/>
+        </p:spPr>
+        <p:style>
+          <a:lnRef idx="1">
+            <a:schemeClr val="accent1"/>
+          </a:lnRef>
+          <a:fillRef idx="3">
+            <a:schemeClr val="accent1"/>
+          </a:fillRef>
+          <a:effectRef idx="2">
+            <a:schemeClr val="accent1"/>
+          </a:effectRef>
+          <a:fontRef idx="minor">
+            <a:schemeClr val="lt1"/>
+          </a:fontRef>
+        </p:style>
+        <p:txBody>
+          <a:bodyPr rtlCol="0" anchor="ctr" wrap="square"/>
+          <a:lstStyle/>
+          <a:p>
+            <a:pPr algn="ctr"/>
+          </a:p>
+        </p:txBody>
+      </p:sp>
+      <p:sp>
+        <p:nvSpPr>
+          <p:cNvPr id="30" name="TextBox 29"/>
+          <p:cNvSpPr txBox="1"/>
+          <p:nvPr/>
+        </p:nvSpPr>
+        <p:spPr>
+          <a:xfrm>
+            <a:off x="658368" y="1828800"/>
+            <a:ext cx="10972800" cy="274320"/>
+          </a:xfrm>
+          <a:prstGeom prst="rect">
+            <a:avLst/>
+          </a:prstGeom>
+          <a:noFill/>
+        </p:spPr>
+        <p:txBody>
+          <a:bodyPr wrap="square">
+            <a:spAutoFit/>
+          </a:bodyPr>
+          <a:lstStyle/>
+          <a:p>
+            <a:r>
+              <a:rPr sz="1100" b="1">
+                <a:solidFill>
+                  <a:srgbClr val="8A4B2D"/>
+                </a:solidFill>
+                <a:latin typeface="微软雅黑"/>
+              </a:rPr>
+              <a:t>难点1：B01 checklist三清单</a:t>
+            </a:r>
+          </a:p>
+        </p:txBody>
+      </p:sp>
+      <p:sp>
+        <p:nvSpPr>
+          <p:cNvPr id="31" name="TextBox 30"/>
+          <p:cNvSpPr txBox="1"/>
+          <p:nvPr/>
+        </p:nvSpPr>
+        <p:spPr>
+          <a:xfrm>
+            <a:off x="658368" y="2148840"/>
+            <a:ext cx="3566160" cy="219456"/>
+          </a:xfrm>
+          <a:prstGeom prst="rect">
+            <a:avLst/>
+          </a:prstGeom>
+          <a:noFill/>
+        </p:spPr>
+        <p:txBody>
+          <a:bodyPr wrap="square">
+            <a:spAutoFit/>
+          </a:bodyPr>
+          <a:lstStyle/>
+          <a:p>
+            <a:r>
+              <a:rPr sz="900" b="1">
+                <a:solidFill>
+                  <a:srgbClr val="B5533A"/>
+                </a:solidFill>
+                <a:latin typeface="微软雅黑"/>
+              </a:rPr>
+              <a:t>为什么容易栽</a:t>
+            </a:r>
+          </a:p>
+        </p:txBody>
+      </p:sp>
+      <p:sp>
+        <p:nvSpPr>
+          <p:cNvPr id="32" name="TextBox 31"/>
+          <p:cNvSpPr txBox="1"/>
+          <p:nvPr/>
+        </p:nvSpPr>
+        <p:spPr>
+          <a:xfrm>
+            <a:off x="658368" y="2386584"/>
+            <a:ext cx="3584448" cy="822960"/>
+          </a:xfrm>
+          <a:prstGeom prst="rect">
+            <a:avLst/>
+          </a:prstGeom>
+          <a:noFill/>
+        </p:spPr>
+        <p:txBody>
+          <a:bodyPr wrap="square">
+            <a:spAutoFit/>
+          </a:bodyPr>
+          <a:lstStyle/>
+          <a:p>
+            <a:r>
+              <a:rPr sz="850" b="0">
+                <a:solidFill>
+                  <a:srgbClr val="2B2F36"/>
+                </a:solidFill>
+                <a:latin typeface="微软雅黑"/>
+              </a:rPr>
+              <a:t>误区：靠'我觉得都OK'——清单逐项过，漏一项扣一项</a:t>
+            </a:r>
+          </a:p>
+        </p:txBody>
+      </p:sp>
+      <p:sp>
+        <p:nvSpPr>
+          <p:cNvPr id="33" name="TextBox 32"/>
+          <p:cNvSpPr txBox="1"/>
+          <p:nvPr/>
+        </p:nvSpPr>
+        <p:spPr>
+          <a:xfrm>
+            <a:off x="4334255" y="2148840"/>
+            <a:ext cx="3566160" cy="219456"/>
+          </a:xfrm>
+          <a:prstGeom prst="rect">
+            <a:avLst/>
+          </a:prstGeom>
+          <a:noFill/>
+        </p:spPr>
+        <p:txBody>
+          <a:bodyPr wrap="square">
+            <a:spAutoFit/>
+          </a:bodyPr>
+          <a:lstStyle/>
+          <a:p>
+            <a:r>
+              <a:rPr sz="900" b="1">
+                <a:solidFill>
+                  <a:srgbClr val="2E7D46"/>
+                </a:solidFill>
+                <a:latin typeface="微软雅黑"/>
+              </a:rPr>
+              <a:t>一招破解（记住这句）</a:t>
+            </a:r>
+          </a:p>
+        </p:txBody>
+      </p:sp>
+      <p:sp>
+        <p:nvSpPr>
+          <p:cNvPr id="34" name="TextBox 33"/>
+          <p:cNvSpPr txBox="1"/>
+          <p:nvPr/>
+        </p:nvSpPr>
+        <p:spPr>
+          <a:xfrm>
+            <a:off x="4334255" y="2386584"/>
+            <a:ext cx="3584448" cy="822960"/>
+          </a:xfrm>
+          <a:prstGeom prst="rect">
+            <a:avLst/>
+          </a:prstGeom>
+          <a:noFill/>
+        </p:spPr>
+        <p:txBody>
+          <a:bodyPr wrap="square">
+            <a:spAutoFit/>
+          </a:bodyPr>
+          <a:lstStyle/>
+          <a:p>
+            <a:r>
+              <a:rPr sz="850" b="0">
+                <a:solidFill>
+                  <a:srgbClr val="2B2F36"/>
+                </a:solidFill>
+                <a:latin typeface="微软雅黑"/>
+              </a:rPr>
+              <a:t>checklist=飞行前检查单：功能/规范/演示逐项打勾</a:t>
+            </a:r>
+          </a:p>
+        </p:txBody>
+      </p:sp>
+      <p:sp>
+        <p:nvSpPr>
+          <p:cNvPr id="35" name="TextBox 34"/>
+          <p:cNvSpPr txBox="1"/>
+          <p:nvPr/>
+        </p:nvSpPr>
+        <p:spPr>
+          <a:xfrm>
+            <a:off x="8010143" y="2148840"/>
+            <a:ext cx="3566160" cy="219456"/>
+          </a:xfrm>
+          <a:prstGeom prst="rect">
+            <a:avLst/>
+          </a:prstGeom>
+          <a:noFill/>
+        </p:spPr>
+        <p:txBody>
+          <a:bodyPr wrap="square">
+            <a:spAutoFit/>
+          </a:bodyPr>
+          <a:lstStyle/>
+          <a:p>
+            <a:r>
+              <a:rPr sz="900" b="1">
+                <a:solidFill>
+                  <a:srgbClr val="35506E"/>
+                </a:solidFill>
+                <a:latin typeface="微软雅黑"/>
+              </a:rPr>
+              <a:t>动手验证（照做一遍）</a:t>
+            </a:r>
+          </a:p>
+        </p:txBody>
+      </p:sp>
+      <p:sp>
+        <p:nvSpPr>
+          <p:cNvPr id="36" name="TextBox 35"/>
+          <p:cNvSpPr txBox="1"/>
+          <p:nvPr/>
+        </p:nvSpPr>
+        <p:spPr>
+          <a:xfrm>
+            <a:off x="8010143" y="2386584"/>
+            <a:ext cx="3584448" cy="822960"/>
+          </a:xfrm>
+          <a:prstGeom prst="rect">
+            <a:avLst/>
+          </a:prstGeom>
+          <a:noFill/>
+        </p:spPr>
+        <p:txBody>
+          <a:bodyPr wrap="square">
+            <a:spAutoFit/>
+          </a:bodyPr>
+          <a:lstStyle/>
+          <a:p>
+            <a:r>
+              <a:rPr sz="850" b="0">
+                <a:solidFill>
+                  <a:srgbClr val="2B2F36"/>
+                </a:solidFill>
+                <a:latin typeface="微软雅黑"/>
+              </a:rPr>
+              <a:t>终验不靠记忆靠清单——工程师与飞行员同一套方法 □全部功能可跑 □PEP8规范 □运行截图齐</a:t>
+            </a:r>
+          </a:p>
+        </p:txBody>
+      </p:sp>
+      <p:sp>
+        <p:nvSpPr>
+          <p:cNvPr id="37" name="Rectangle 36"/>
+          <p:cNvSpPr/>
+          <p:nvPr/>
+        </p:nvSpPr>
+        <p:spPr>
+          <a:xfrm>
+            <a:off x="457200" y="3383280"/>
+            <a:ext cx="11274552" cy="1481328"/>
+          </a:xfrm>
+          <a:prstGeom prst="rect">
+            <a:avLst/>
+          </a:prstGeom>
+          <a:solidFill>
+            <a:srgbClr val="F7F9FC"/>
+          </a:solidFill>
+          <a:ln>
+            <a:solidFill>
+              <a:srgbClr val="D6DCE4"/>
+            </a:solidFill>
+          </a:ln>
+          <a:effectLst/>
+        </p:spPr>
+        <p:style>
+          <a:lnRef idx="1">
+            <a:schemeClr val="accent1"/>
+          </a:lnRef>
+          <a:fillRef idx="3">
+            <a:schemeClr val="accent1"/>
+          </a:fillRef>
+          <a:effectRef idx="2">
+            <a:schemeClr val="accent1"/>
+          </a:effectRef>
+          <a:fontRef idx="minor">
+            <a:schemeClr val="lt1"/>
+          </a:fontRef>
+        </p:style>
+        <p:txBody>
+          <a:bodyPr rtlCol="0" anchor="ctr" wrap="square"/>
+          <a:lstStyle/>
+          <a:p>
+            <a:pPr algn="ctr"/>
+          </a:p>
+        </p:txBody>
+      </p:sp>
+      <p:sp>
+        <p:nvSpPr>
+          <p:cNvPr id="38" name="Rectangle 37"/>
+          <p:cNvSpPr/>
+          <p:nvPr/>
+        </p:nvSpPr>
+        <p:spPr>
+          <a:xfrm>
+            <a:off x="457200" y="3383280"/>
+            <a:ext cx="82296" cy="1481328"/>
+          </a:xfrm>
+          <a:prstGeom prst="rect">
+            <a:avLst/>
+          </a:prstGeom>
+          <a:solidFill>
+            <a:srgbClr val="8A4B2D"/>
+          </a:solidFill>
+          <a:ln>
+            <a:noFill/>
+          </a:ln>
+          <a:effectLst/>
+        </p:spPr>
+        <p:style>
+          <a:lnRef idx="1">
+            <a:schemeClr val="accent1"/>
+          </a:lnRef>
+          <a:fillRef idx="3">
+            <a:schemeClr val="accent1"/>
+          </a:fillRef>
+          <a:effectRef idx="2">
+            <a:schemeClr val="accent1"/>
+          </a:effectRef>
+          <a:fontRef idx="minor">
+            <a:schemeClr val="lt1"/>
+          </a:fontRef>
+        </p:style>
+        <p:txBody>
+          <a:bodyPr rtlCol="0" anchor="ctr" wrap="square"/>
+          <a:lstStyle/>
+          <a:p>
+            <a:pPr algn="ctr"/>
+          </a:p>
+        </p:txBody>
+      </p:sp>
+      <p:sp>
+        <p:nvSpPr>
+          <p:cNvPr id="39" name="TextBox 38"/>
+          <p:cNvSpPr txBox="1"/>
+          <p:nvPr/>
+        </p:nvSpPr>
+        <p:spPr>
+          <a:xfrm>
+            <a:off x="658368" y="3429000"/>
+            <a:ext cx="10972800" cy="274320"/>
+          </a:xfrm>
+          <a:prstGeom prst="rect">
+            <a:avLst/>
+          </a:prstGeom>
+          <a:noFill/>
+        </p:spPr>
+        <p:txBody>
+          <a:bodyPr wrap="square">
+            <a:spAutoFit/>
+          </a:bodyPr>
+          <a:lstStyle/>
+          <a:p>
+            <a:r>
+              <a:rPr sz="1100" b="1">
+                <a:solidFill>
+                  <a:srgbClr val="8A4B2D"/>
+                </a:solidFill>
+                <a:latin typeface="微软雅黑"/>
+              </a:rPr>
+              <a:t>难点2：B02 答辩四段结构</a:t>
+            </a:r>
+          </a:p>
+        </p:txBody>
+      </p:sp>
+      <p:sp>
+        <p:nvSpPr>
+          <p:cNvPr id="40" name="TextBox 39"/>
+          <p:cNvSpPr txBox="1"/>
+          <p:nvPr/>
+        </p:nvSpPr>
+        <p:spPr>
+          <a:xfrm>
+            <a:off x="658368" y="3749040"/>
+            <a:ext cx="3566160" cy="219456"/>
+          </a:xfrm>
+          <a:prstGeom prst="rect">
+            <a:avLst/>
+          </a:prstGeom>
+          <a:noFill/>
+        </p:spPr>
+        <p:txBody>
+          <a:bodyPr wrap="square">
+            <a:spAutoFit/>
+          </a:bodyPr>
+          <a:lstStyle/>
+          <a:p>
+            <a:r>
+              <a:rPr sz="900" b="1">
+                <a:solidFill>
+                  <a:srgbClr val="B5533A"/>
+                </a:solidFill>
+                <a:latin typeface="微软雅黑"/>
+              </a:rPr>
+              <a:t>为什么容易栽</a:t>
+            </a:r>
+          </a:p>
+        </p:txBody>
+      </p:sp>
+      <p:sp>
+        <p:nvSpPr>
+          <p:cNvPr id="41" name="TextBox 40"/>
+          <p:cNvSpPr txBox="1"/>
+          <p:nvPr/>
+        </p:nvSpPr>
+        <p:spPr>
+          <a:xfrm>
+            <a:off x="658368" y="3986784"/>
+            <a:ext cx="3584448" cy="822960"/>
+          </a:xfrm>
+          <a:prstGeom prst="rect">
+            <a:avLst/>
+          </a:prstGeom>
+          <a:noFill/>
+        </p:spPr>
+        <p:txBody>
+          <a:bodyPr wrap="square">
+            <a:spAutoFit/>
+          </a:bodyPr>
+          <a:lstStyle/>
+          <a:p>
+            <a:r>
+              <a:rPr sz="850" b="0">
+                <a:solidFill>
+                  <a:srgbClr val="2B2F36"/>
+                </a:solidFill>
+                <a:latin typeface="微软雅黑"/>
+              </a:rPr>
+              <a:t>误区：先讲代码再演示——先跑通给结果，评委要有耐心阈值</a:t>
+            </a:r>
+          </a:p>
+        </p:txBody>
+      </p:sp>
+      <p:sp>
+        <p:nvSpPr>
+          <p:cNvPr id="42" name="TextBox 41"/>
+          <p:cNvSpPr txBox="1"/>
+          <p:nvPr/>
+        </p:nvSpPr>
+        <p:spPr>
+          <a:xfrm>
+            <a:off x="4334255" y="3749040"/>
+            <a:ext cx="3566160" cy="219456"/>
+          </a:xfrm>
+          <a:prstGeom prst="rect">
+            <a:avLst/>
+          </a:prstGeom>
+          <a:noFill/>
+        </p:spPr>
+        <p:txBody>
+          <a:bodyPr wrap="square">
+            <a:spAutoFit/>
+          </a:bodyPr>
+          <a:lstStyle/>
+          <a:p>
+            <a:r>
+              <a:rPr sz="900" b="1">
+                <a:solidFill>
+                  <a:srgbClr val="2E7D46"/>
+                </a:solidFill>
+                <a:latin typeface="微软雅黑"/>
+              </a:rPr>
+              <a:t>一招破解（记住这句）</a:t>
+            </a:r>
+          </a:p>
+        </p:txBody>
+      </p:sp>
+      <p:sp>
+        <p:nvSpPr>
+          <p:cNvPr id="43" name="TextBox 42"/>
+          <p:cNvSpPr txBox="1"/>
+          <p:nvPr/>
+        </p:nvSpPr>
+        <p:spPr>
+          <a:xfrm>
+            <a:off x="4334255" y="3986784"/>
+            <a:ext cx="3584448" cy="822960"/>
+          </a:xfrm>
+          <a:prstGeom prst="rect">
+            <a:avLst/>
+          </a:prstGeom>
+          <a:noFill/>
+        </p:spPr>
+        <p:txBody>
+          <a:bodyPr wrap="square">
+            <a:spAutoFit/>
+          </a:bodyPr>
+          <a:lstStyle/>
+          <a:p>
+            <a:r>
+              <a:rPr sz="850" b="0">
+                <a:solidFill>
+                  <a:srgbClr val="2B2F36"/>
+                </a:solidFill>
+                <a:latin typeface="微软雅黑"/>
+              </a:rPr>
+              <a:t>四段=时间盒：1分钟分工+5分钟演示+2分钟总结+提问</a:t>
+            </a:r>
+          </a:p>
+        </p:txBody>
+      </p:sp>
+      <p:sp>
+        <p:nvSpPr>
+          <p:cNvPr id="44" name="TextBox 43"/>
+          <p:cNvSpPr txBox="1"/>
+          <p:nvPr/>
+        </p:nvSpPr>
+        <p:spPr>
+          <a:xfrm>
+            <a:off x="8010143" y="3749040"/>
+            <a:ext cx="3566160" cy="219456"/>
+          </a:xfrm>
+          <a:prstGeom prst="rect">
+            <a:avLst/>
+          </a:prstGeom>
+          <a:noFill/>
+        </p:spPr>
+        <p:txBody>
+          <a:bodyPr wrap="square">
+            <a:spAutoFit/>
+          </a:bodyPr>
+          <a:lstStyle/>
+          <a:p>
+            <a:r>
+              <a:rPr sz="900" b="1">
+                <a:solidFill>
+                  <a:srgbClr val="35506E"/>
+                </a:solidFill>
+                <a:latin typeface="微软雅黑"/>
+              </a:rPr>
+              <a:t>动手验证（照做一遍）</a:t>
+            </a:r>
+          </a:p>
+        </p:txBody>
+      </p:sp>
+      <p:sp>
+        <p:nvSpPr>
+          <p:cNvPr id="45" name="TextBox 44"/>
+          <p:cNvSpPr txBox="1"/>
+          <p:nvPr/>
+        </p:nvSpPr>
+        <p:spPr>
+          <a:xfrm>
+            <a:off x="8010143" y="3986784"/>
+            <a:ext cx="3584448" cy="822960"/>
+          </a:xfrm>
+          <a:prstGeom prst="rect">
+            <a:avLst/>
+          </a:prstGeom>
+          <a:noFill/>
+        </p:spPr>
+        <p:txBody>
+          <a:bodyPr wrap="square">
+            <a:spAutoFit/>
+          </a:bodyPr>
+          <a:lstStyle/>
+          <a:p>
+            <a:r>
+              <a:rPr sz="850" b="0">
+                <a:solidFill>
+                  <a:srgbClr val="2B2F36"/>
+                </a:solidFill>
+                <a:latin typeface="微软雅黑"/>
+              </a:rPr>
+              <a:t>小组答辩8分钟时间盒——超时直接打断 '我们4人分工…→现在演示…→收获是…'</a:t>
+            </a:r>
+          </a:p>
+        </p:txBody>
+      </p:sp>
+      <p:sp>
+        <p:nvSpPr>
+          <p:cNvPr id="46" name="Rectangle 45"/>
+          <p:cNvSpPr/>
+          <p:nvPr/>
+        </p:nvSpPr>
+        <p:spPr>
+          <a:xfrm>
+            <a:off x="457200" y="4983480"/>
+            <a:ext cx="11274552" cy="1481328"/>
+          </a:xfrm>
+          <a:prstGeom prst="rect">
+            <a:avLst/>
+          </a:prstGeom>
+          <a:solidFill>
+            <a:srgbClr val="F7F9FC"/>
+          </a:solidFill>
+          <a:ln>
+            <a:solidFill>
+              <a:srgbClr val="D6DCE4"/>
+            </a:solidFill>
+          </a:ln>
+          <a:effectLst/>
+        </p:spPr>
+        <p:style>
+          <a:lnRef idx="1">
+            <a:schemeClr val="accent1"/>
+          </a:lnRef>
+          <a:fillRef idx="3">
+            <a:schemeClr val="accent1"/>
+          </a:fillRef>
+          <a:effectRef idx="2">
+            <a:schemeClr val="accent1"/>
+          </a:effectRef>
+          <a:fontRef idx="minor">
+            <a:schemeClr val="lt1"/>
+          </a:fontRef>
+        </p:style>
+        <p:txBody>
+          <a:bodyPr rtlCol="0" anchor="ctr" wrap="square"/>
+          <a:lstStyle/>
+          <a:p>
+            <a:pPr algn="ctr"/>
+          </a:p>
+        </p:txBody>
+      </p:sp>
+      <p:sp>
+        <p:nvSpPr>
+          <p:cNvPr id="47" name="Rectangle 46"/>
+          <p:cNvSpPr/>
+          <p:nvPr/>
+        </p:nvSpPr>
+        <p:spPr>
+          <a:xfrm>
+            <a:off x="457200" y="4983480"/>
+            <a:ext cx="82296" cy="1481328"/>
+          </a:xfrm>
+          <a:prstGeom prst="rect">
+            <a:avLst/>
+          </a:prstGeom>
+          <a:solidFill>
+            <a:srgbClr val="8A4B2D"/>
+          </a:solidFill>
+          <a:ln>
+            <a:noFill/>
+          </a:ln>
+          <a:effectLst/>
+        </p:spPr>
+        <p:style>
+          <a:lnRef idx="1">
+            <a:schemeClr val="accent1"/>
+          </a:lnRef>
+          <a:fillRef idx="3">
+            <a:schemeClr val="accent1"/>
+          </a:fillRef>
+          <a:effectRef idx="2">
+            <a:schemeClr val="accent1"/>
+          </a:effectRef>
+          <a:fontRef idx="minor">
+            <a:schemeClr val="lt1"/>
+          </a:fontRef>
+        </p:style>
+        <p:txBody>
+          <a:bodyPr rtlCol="0" anchor="ctr" wrap="square"/>
+          <a:lstStyle/>
+          <a:p>
+            <a:pPr algn="ctr"/>
+          </a:p>
+        </p:txBody>
+      </p:sp>
+      <p:sp>
+        <p:nvSpPr>
+          <p:cNvPr id="48" name="TextBox 47"/>
+          <p:cNvSpPr txBox="1"/>
+          <p:nvPr/>
+        </p:nvSpPr>
+        <p:spPr>
+          <a:xfrm>
+            <a:off x="658368" y="5029200"/>
+            <a:ext cx="10972800" cy="274320"/>
+          </a:xfrm>
+          <a:prstGeom prst="rect">
+            <a:avLst/>
+          </a:prstGeom>
+          <a:noFill/>
+        </p:spPr>
+        <p:txBody>
+          <a:bodyPr wrap="square">
+            <a:spAutoFit/>
+          </a:bodyPr>
+          <a:lstStyle/>
+          <a:p>
+            <a:r>
+              <a:rPr sz="1100" b="1">
+                <a:solidFill>
+                  <a:srgbClr val="8A4B2D"/>
+                </a:solidFill>
+                <a:latin typeface="微软雅黑"/>
+              </a:rPr>
+              <a:t>难点3：B03 bad-case预案</a:t>
+            </a:r>
+          </a:p>
+        </p:txBody>
+      </p:sp>
+      <p:sp>
+        <p:nvSpPr>
+          <p:cNvPr id="49" name="TextBox 48"/>
+          <p:cNvSpPr txBox="1"/>
+          <p:nvPr/>
+        </p:nvSpPr>
+        <p:spPr>
+          <a:xfrm>
+            <a:off x="658368" y="5349240"/>
+            <a:ext cx="3566160" cy="219456"/>
+          </a:xfrm>
+          <a:prstGeom prst="rect">
+            <a:avLst/>
+          </a:prstGeom>
+          <a:noFill/>
+        </p:spPr>
+        <p:txBody>
+          <a:bodyPr wrap="square">
+            <a:spAutoFit/>
+          </a:bodyPr>
+          <a:lstStyle/>
+          <a:p>
+            <a:r>
+              <a:rPr sz="900" b="1">
+                <a:solidFill>
+                  <a:srgbClr val="B5533A"/>
+                </a:solidFill>
+                <a:latin typeface="微软雅黑"/>
+              </a:rPr>
+              <a:t>为什么容易栽</a:t>
+            </a:r>
+          </a:p>
+        </p:txBody>
+      </p:sp>
+      <p:sp>
+        <p:nvSpPr>
+          <p:cNvPr id="50" name="TextBox 49"/>
+          <p:cNvSpPr txBox="1"/>
+          <p:nvPr/>
+        </p:nvSpPr>
+        <p:spPr>
+          <a:xfrm>
+            <a:off x="658368" y="5586984"/>
+            <a:ext cx="3584448" cy="822960"/>
+          </a:xfrm>
+          <a:prstGeom prst="rect">
+            <a:avLst/>
+          </a:prstGeom>
+          <a:noFill/>
+        </p:spPr>
+        <p:txBody>
+          <a:bodyPr wrap="square">
+            <a:spAutoFit/>
+          </a:bodyPr>
+          <a:lstStyle/>
+          <a:p>
+            <a:r>
+              <a:rPr sz="850" b="0">
+                <a:solidFill>
+                  <a:srgbClr val="2B2F36"/>
+                </a:solidFill>
+                <a:latin typeface="微软雅黑"/>
+              </a:rPr>
+              <a:t>误区：崩溃不扣死分，崩溃无预案才扣——兜底体现工程态度</a:t>
+            </a:r>
+          </a:p>
+        </p:txBody>
+      </p:sp>
+      <p:sp>
+        <p:nvSpPr>
+          <p:cNvPr id="51" name="TextBox 50"/>
+          <p:cNvSpPr txBox="1"/>
+          <p:nvPr/>
+        </p:nvSpPr>
+        <p:spPr>
+          <a:xfrm>
+            <a:off x="4334255" y="5349240"/>
+            <a:ext cx="3566160" cy="219456"/>
+          </a:xfrm>
+          <a:prstGeom prst="rect">
+            <a:avLst/>
+          </a:prstGeom>
+          <a:noFill/>
+        </p:spPr>
+        <p:txBody>
+          <a:bodyPr wrap="square">
+            <a:spAutoFit/>
+          </a:bodyPr>
+          <a:lstStyle/>
+          <a:p>
+            <a:r>
+              <a:rPr sz="900" b="1">
+                <a:solidFill>
+                  <a:srgbClr val="2E7D46"/>
+                </a:solidFill>
+                <a:latin typeface="微软雅黑"/>
+              </a:rPr>
+              <a:t>一招破解（记住这句）</a:t>
+            </a:r>
+          </a:p>
+        </p:txBody>
+      </p:sp>
+      <p:sp>
+        <p:nvSpPr>
+          <p:cNvPr id="52" name="TextBox 51"/>
+          <p:cNvSpPr txBox="1"/>
+          <p:nvPr/>
+        </p:nvSpPr>
+        <p:spPr>
+          <a:xfrm>
+            <a:off x="4334255" y="5586984"/>
+            <a:ext cx="3584448" cy="822960"/>
+          </a:xfrm>
+          <a:prstGeom prst="rect">
+            <a:avLst/>
+          </a:prstGeom>
+          <a:noFill/>
+        </p:spPr>
+        <p:txBody>
+          <a:bodyPr wrap="square">
+            <a:spAutoFit/>
+          </a:bodyPr>
+          <a:lstStyle/>
+          <a:p>
+            <a:r>
+              <a:rPr sz="850" b="0">
+                <a:solidFill>
+                  <a:srgbClr val="2B2F36"/>
+                </a:solidFill>
+                <a:latin typeface="微软雅黑"/>
+              </a:rPr>
+              <a:t>bad-case预案=答辩灭火器：评委必点脏数据，提前备好</a:t>
+            </a:r>
+          </a:p>
+        </p:txBody>
+      </p:sp>
+      <p:sp>
+        <p:nvSpPr>
+          <p:cNvPr id="53" name="TextBox 52"/>
+          <p:cNvSpPr txBox="1"/>
+          <p:nvPr/>
+        </p:nvSpPr>
+        <p:spPr>
+          <a:xfrm>
+            <a:off x="8010143" y="5349240"/>
+            <a:ext cx="3566160" cy="219456"/>
+          </a:xfrm>
+          <a:prstGeom prst="rect">
+            <a:avLst/>
+          </a:prstGeom>
+          <a:noFill/>
+        </p:spPr>
+        <p:txBody>
+          <a:bodyPr wrap="square">
+            <a:spAutoFit/>
+          </a:bodyPr>
+          <a:lstStyle/>
+          <a:p>
+            <a:r>
+              <a:rPr sz="900" b="1">
+                <a:solidFill>
+                  <a:srgbClr val="35506E"/>
+                </a:solidFill>
+                <a:latin typeface="微软雅黑"/>
+              </a:rPr>
+              <a:t>动手验证（照做一遍）</a:t>
+            </a:r>
+          </a:p>
+        </p:txBody>
+      </p:sp>
+      <p:sp>
+        <p:nvSpPr>
+          <p:cNvPr id="54" name="TextBox 53"/>
+          <p:cNvSpPr txBox="1"/>
+          <p:nvPr/>
+        </p:nvSpPr>
+        <p:spPr>
+          <a:xfrm>
+            <a:off x="8010143" y="5586984"/>
+            <a:ext cx="3584448" cy="822960"/>
+          </a:xfrm>
+          <a:prstGeom prst="rect">
+            <a:avLst/>
+          </a:prstGeom>
+          <a:noFill/>
+        </p:spPr>
+        <p:txBody>
+          <a:bodyPr wrap="square">
+            <a:spAutoFit/>
+          </a:bodyPr>
+          <a:lstStyle/>
+          <a:p>
+            <a:r>
+              <a:rPr sz="850" b="0">
+                <a:solidFill>
+                  <a:srgbClr val="2B2F36"/>
+                </a:solidFill>
+                <a:latin typeface="微软雅黑"/>
+              </a:rPr>
+              <a:t>预演评委可能的刁钻输入——温度=abc不能崩 输入'温度=abc'→友好报错并提示重输</a:t>
+            </a:r>
+          </a:p>
+        </p:txBody>
+      </p:sp>
+    </p:spTree>
+  </p:cSld>
+  <p:clrMapOvr>
+    <a:masterClrMapping/>
+  </p:clrMapOvr>
+</p:sld>
+</file>
+
+<file path=ppt/slides/slide13.xml><?xml version="1.0" encoding="utf-8"?>
+<p:sld xmlns:a="http://schemas.openxmlformats.org/drawingml/2006/main" xmlns:p="http://schemas.openxmlformats.org/presentationml/2006/main" xmlns:r="http://schemas.openxmlformats.org/officeDocument/2006/relationships">
+  <p:cSld>
+    <p:spTree>
+      <p:nvGrpSpPr>
+        <p:cNvPr id="1" name=""/>
+        <p:cNvGrpSpPr/>
+        <p:nvPr/>
+      </p:nvGrpSpPr>
+      <p:grpSpPr/>
+      <p:sp>
+        <p:nvSpPr>
+          <p:cNvPr id="2" name="Rectangle 1"/>
+          <p:cNvSpPr/>
+          <p:nvPr/>
+        </p:nvSpPr>
+        <p:spPr>
+          <a:xfrm>
+            <a:off x="0" y="0"/>
+            <a:ext cx="12192000" cy="1150000"/>
+          </a:xfrm>
+          <a:prstGeom prst="rect">
+            <a:avLst/>
+          </a:prstGeom>
+          <a:solidFill>
+            <a:srgbClr val="010328"/>
+          </a:solidFill>
+          <a:ln>
+            <a:noFill/>
+          </a:ln>
+          <a:effectLst/>
+        </p:spPr>
+        <p:style>
+          <a:lnRef idx="1">
+            <a:schemeClr val="accent1"/>
+          </a:lnRef>
+          <a:fillRef idx="3">
+            <a:schemeClr val="accent1"/>
+          </a:fillRef>
+          <a:effectRef idx="2">
+            <a:schemeClr val="accent1"/>
+          </a:effectRef>
+          <a:fontRef idx="minor">
+            <a:schemeClr val="lt1"/>
+          </a:fontRef>
+        </p:style>
+        <p:txBody>
+          <a:bodyPr rtlCol="0" anchor="ctr"/>
+          <a:lstStyle/>
+          <a:p>
+            <a:pPr algn="ctr"/>
+          </a:p>
+        </p:txBody>
+      </p:sp>
+      <p:sp>
+        <p:nvSpPr>
+          <p:cNvPr id="3" name="Rectangle 2"/>
+          <p:cNvSpPr/>
+          <p:nvPr/>
+        </p:nvSpPr>
+        <p:spPr>
+          <a:xfrm>
+            <a:off x="0" y="1150000"/>
+            <a:ext cx="2600000" cy="70000"/>
+          </a:xfrm>
+          <a:prstGeom prst="rect">
+            <a:avLst/>
+          </a:prstGeom>
+          <a:solidFill>
+            <a:srgbClr val="F5670F"/>
+          </a:solidFill>
+          <a:ln>
+            <a:noFill/>
+          </a:ln>
+          <a:effectLst/>
+        </p:spPr>
+        <p:style>
+          <a:lnRef idx="1">
+            <a:schemeClr val="accent1"/>
+          </a:lnRef>
+          <a:fillRef idx="3">
+            <a:schemeClr val="accent1"/>
+          </a:fillRef>
+          <a:effectRef idx="2">
+            <a:schemeClr val="accent1"/>
+          </a:effectRef>
+          <a:fontRef idx="minor">
+            <a:schemeClr val="lt1"/>
+          </a:fontRef>
+        </p:style>
+        <p:txBody>
+          <a:bodyPr rtlCol="0" anchor="ctr"/>
+          <a:lstStyle/>
+          <a:p>
+            <a:pPr algn="ctr"/>
+          </a:p>
+        </p:txBody>
+      </p:sp>
+      <p:sp>
+        <p:nvSpPr>
+          <p:cNvPr id="4" name="TextBox 3"/>
+          <p:cNvSpPr txBox="1"/>
+          <p:nvPr/>
+        </p:nvSpPr>
+        <p:spPr>
+          <a:xfrm>
+            <a:off x="700000" y="300000"/>
+            <a:ext cx="10792000" cy="700000"/>
+          </a:xfrm>
+          <a:prstGeom prst="rect">
+            <a:avLst/>
+          </a:prstGeom>
+          <a:noFill/>
+        </p:spPr>
+        <p:txBody>
+          <a:bodyPr wrap="square" anchor="ctr">
+            <a:spAutoFit/>
+          </a:bodyPr>
+          <a:lstStyle/>
+          <a:p>
+            <a:pPr algn="l">
+              <a:lnSpc>
+                <a:spcPct val="110000"/>
+              </a:lnSpc>
+              <a:spcAft>
+                <a:spcPts val="600"/>
+              </a:spcAft>
+            </a:pPr>
+            <a:r>
+              <a:rPr sz="2400" b="1">
+                <a:solidFill>
+                  <a:srgbClr val="FFFFFF"/>
+                </a:solidFill>
+                <a:latin typeface="微软雅黑"/>
+              </a:rPr>
+              <a:t>承上启下 · 动手前避坑清单</a:t>
+            </a:r>
+          </a:p>
+        </p:txBody>
+      </p:sp>
+      <p:sp>
+        <p:nvSpPr>
+          <p:cNvPr id="24" name="Rectangle 23"/>
+          <p:cNvSpPr/>
+          <p:nvPr/>
+        </p:nvSpPr>
+        <p:spPr>
+          <a:xfrm>
+            <a:off x="500000" y="6500000"/>
+            <a:ext cx="11100000" cy="20000"/>
+          </a:xfrm>
+          <a:prstGeom prst="rect">
+            <a:avLst/>
+          </a:prstGeom>
+          <a:solidFill>
+            <a:srgbClr val="C9D4EE"/>
+          </a:solidFill>
+          <a:ln>
+            <a:noFill/>
+          </a:ln>
+          <a:effectLst/>
+        </p:spPr>
+        <p:style>
+          <a:lnRef idx="1">
+            <a:schemeClr val="accent1"/>
+          </a:lnRef>
+          <a:fillRef idx="3">
+            <a:schemeClr val="accent1"/>
+          </a:fillRef>
+          <a:effectRef idx="2">
+            <a:schemeClr val="accent1"/>
+          </a:effectRef>
+          <a:fontRef idx="minor">
+            <a:schemeClr val="lt1"/>
+          </a:fontRef>
+        </p:style>
+        <p:txBody>
+          <a:bodyPr rtlCol="0" anchor="ctr"/>
+          <a:lstStyle/>
+          <a:p>
+            <a:pPr algn="ctr"/>
+          </a:p>
+        </p:txBody>
+      </p:sp>
+      <p:sp>
+        <p:nvSpPr>
+          <p:cNvPr id="25" name="TextBox 24"/>
+          <p:cNvSpPr txBox="1"/>
+          <p:nvPr/>
+        </p:nvSpPr>
+        <p:spPr>
+          <a:xfrm>
+            <a:off x="500000" y="6540000"/>
+            <a:ext cx="7000000" cy="300000"/>
+          </a:xfrm>
+          <a:prstGeom prst="rect">
+            <a:avLst/>
+          </a:prstGeom>
+          <a:noFill/>
+        </p:spPr>
+        <p:txBody>
+          <a:bodyPr wrap="square" anchor="t">
+            <a:spAutoFit/>
+          </a:bodyPr>
+          <a:lstStyle/>
+          <a:p>
+            <a:pPr algn="l">
+              <a:lnSpc>
+                <a:spcPct val="110000"/>
+              </a:lnSpc>
+              <a:spcAft>
+                <a:spcPts val="600"/>
+              </a:spcAft>
+            </a:pPr>
+            <a:r>
+              <a:rPr sz="1000" b="0">
+                <a:solidFill>
+                  <a:srgbClr val="8A97B5"/>
+                </a:solidFill>
+                <a:latin typeface="微软雅黑"/>
+              </a:rPr>
+              <a:t>两江智造集团 · Python编程基础</a:t>
+            </a:r>
+          </a:p>
+        </p:txBody>
+      </p:sp>
+      <p:sp>
+        <p:nvSpPr>
+          <p:cNvPr id="26" name="TextBox 25"/>
+          <p:cNvSpPr txBox="1"/>
+          <p:nvPr/>
+        </p:nvSpPr>
+        <p:spPr>
+          <a:xfrm>
+            <a:off x="10600000" y="6540000"/>
+            <a:ext cx="1000000" cy="300000"/>
+          </a:xfrm>
+          <a:prstGeom prst="rect">
+            <a:avLst/>
+          </a:prstGeom>
+          <a:noFill/>
+        </p:spPr>
+        <p:txBody>
+          <a:bodyPr wrap="square" anchor="t">
+            <a:spAutoFit/>
+          </a:bodyPr>
+          <a:lstStyle/>
+          <a:p>
+            <a:pPr algn="r">
+              <a:lnSpc>
+                <a:spcPct val="110000"/>
+              </a:lnSpc>
+              <a:spcAft>
+                <a:spcPts val="600"/>
+              </a:spcAft>
+            </a:pPr>
+            <a:r>
+              <a:rPr sz="1000" b="0">
+                <a:solidFill>
+                  <a:srgbClr val="8A97B5"/>
+                </a:solidFill>
+                <a:latin typeface="微软雅黑"/>
+              </a:rPr>
+              <a:t>8 / 13</a:t>
+            </a:r>
+          </a:p>
+        </p:txBody>
+      </p:sp>
+      <p:sp>
+        <p:nvSpPr>
+          <p:cNvPr id="27" name="TextBox 26"/>
+          <p:cNvSpPr txBox="1"/>
+          <p:nvPr/>
+        </p:nvSpPr>
+        <p:spPr>
+          <a:xfrm>
+            <a:off x="457200" y="1389888"/>
+            <a:ext cx="11274552" cy="274320"/>
+          </a:xfrm>
+          <a:prstGeom prst="rect">
+            <a:avLst/>
+          </a:prstGeom>
+          <a:noFill/>
+        </p:spPr>
+        <p:txBody>
+          <a:bodyPr wrap="square">
+            <a:spAutoFit/>
+          </a:bodyPr>
+          <a:lstStyle/>
+          <a:p>
+            <a:r>
+              <a:rPr sz="1050" b="0">
+                <a:solidFill>
+                  <a:srgbClr val="6B7280"/>
+                </a:solidFill>
+                <a:latin typeface="微软雅黑"/>
+              </a:rPr>
+              <a:t>本讲是动手冲刺课：先把上周完整讲解里的高频翻车点过一遍，再开工——每条都是历届学生真实踩过的坑。</a:t>
+            </a:r>
+          </a:p>
+        </p:txBody>
+      </p:sp>
+      <p:sp>
+        <p:nvSpPr>
+          <p:cNvPr id="28" name="Rectangle 27"/>
+          <p:cNvSpPr/>
+          <p:nvPr/>
+        </p:nvSpPr>
+        <p:spPr>
+          <a:xfrm>
+            <a:off x="457200" y="1783080"/>
+            <a:ext cx="5532120" cy="2061972"/>
+          </a:xfrm>
+          <a:prstGeom prst="rect">
+            <a:avLst/>
+          </a:prstGeom>
+          <a:solidFill>
+            <a:srgbClr val="FFFFFF"/>
+          </a:solidFill>
+          <a:ln>
+            <a:solidFill>
+              <a:srgbClr val="D6DCE4"/>
+            </a:solidFill>
+          </a:ln>
+          <a:effectLst/>
+        </p:spPr>
+        <p:style>
+          <a:lnRef idx="1">
+            <a:schemeClr val="accent1"/>
+          </a:lnRef>
+          <a:fillRef idx="3">
+            <a:schemeClr val="accent1"/>
+          </a:fillRef>
+          <a:effectRef idx="2">
+            <a:schemeClr val="accent1"/>
+          </a:effectRef>
+          <a:fontRef idx="minor">
+            <a:schemeClr val="lt1"/>
+          </a:fontRef>
+        </p:style>
+        <p:txBody>
+          <a:bodyPr rtlCol="0" anchor="ctr" wrap="square"/>
+          <a:lstStyle/>
+          <a:p>
+            <a:pPr algn="ctr"/>
+          </a:p>
+        </p:txBody>
+      </p:sp>
+      <p:sp>
+        <p:nvSpPr>
+          <p:cNvPr id="29" name="Rectangle 28"/>
+          <p:cNvSpPr/>
+          <p:nvPr/>
+        </p:nvSpPr>
+        <p:spPr>
+          <a:xfrm>
+            <a:off x="457200" y="1783080"/>
+            <a:ext cx="82296" cy="2061972"/>
+          </a:xfrm>
+          <a:prstGeom prst="rect">
+            <a:avLst/>
+          </a:prstGeom>
+          <a:solidFill>
+            <a:srgbClr val="9A3B3B"/>
+          </a:solidFill>
+          <a:ln>
+            <a:noFill/>
+          </a:ln>
+          <a:effectLst/>
+        </p:spPr>
+        <p:style>
+          <a:lnRef idx="1">
+            <a:schemeClr val="accent1"/>
+          </a:lnRef>
+          <a:fillRef idx="3">
+            <a:schemeClr val="accent1"/>
+          </a:fillRef>
+          <a:effectRef idx="2">
+            <a:schemeClr val="accent1"/>
+          </a:effectRef>
+          <a:fontRef idx="minor">
+            <a:schemeClr val="lt1"/>
+          </a:fontRef>
+        </p:style>
+        <p:txBody>
+          <a:bodyPr rtlCol="0" anchor="ctr" wrap="square"/>
+          <a:lstStyle/>
+          <a:p>
+            <a:pPr algn="ctr"/>
+          </a:p>
+        </p:txBody>
+      </p:sp>
+      <p:sp>
+        <p:nvSpPr>
+          <p:cNvPr id="30" name="TextBox 29"/>
+          <p:cNvSpPr txBox="1"/>
+          <p:nvPr/>
+        </p:nvSpPr>
+        <p:spPr>
+          <a:xfrm>
+            <a:off x="658368" y="1847088"/>
+            <a:ext cx="5166359" cy="274320"/>
+          </a:xfrm>
+          <a:prstGeom prst="rect">
+            <a:avLst/>
+          </a:prstGeom>
+          <a:noFill/>
+        </p:spPr>
+        <p:txBody>
+          <a:bodyPr wrap="square">
+            <a:spAutoFit/>
+          </a:bodyPr>
+          <a:lstStyle/>
+          <a:p>
+            <a:r>
+              <a:rPr sz="1050" b="1">
+                <a:solidFill>
+                  <a:srgbClr val="B5533A"/>
+                </a:solidFill>
+                <a:latin typeface="微软雅黑"/>
+              </a:rPr>
+              <a:t>✗ 现场装依赖</a:t>
+            </a:r>
+          </a:p>
+        </p:txBody>
+      </p:sp>
+      <p:sp>
+        <p:nvSpPr>
+          <p:cNvPr id="31" name="TextBox 30"/>
+          <p:cNvSpPr txBox="1"/>
+          <p:nvPr/>
+        </p:nvSpPr>
+        <p:spPr>
+          <a:xfrm>
+            <a:off x="658368" y="2167128"/>
+            <a:ext cx="5166359" cy="868680"/>
+          </a:xfrm>
+          <a:prstGeom prst="rect">
+            <a:avLst/>
+          </a:prstGeom>
+          <a:noFill/>
+        </p:spPr>
+        <p:txBody>
+          <a:bodyPr wrap="square">
+            <a:spAutoFit/>
+          </a:bodyPr>
+          <a:lstStyle/>
+          <a:p>
+            <a:r>
+              <a:rPr sz="900" b="0">
+                <a:solidFill>
+                  <a:srgbClr val="2B2F36"/>
+                </a:solidFill>
+                <a:latin typeface="微软雅黑"/>
+              </a:rPr>
+              <a:t>原因：没提前试跑</a:t>
+            </a:r>
+          </a:p>
+          <a:p>
+            <a:r>
+              <a:rPr sz="900" b="0">
+                <a:solidFill>
+                  <a:srgbClr val="2B2F36"/>
+                </a:solidFill>
+                <a:latin typeface="微软雅黑"/>
+              </a:rPr>
+              <a:t>✔ 解决：答辩机预演</a:t>
+            </a:r>
+          </a:p>
+        </p:txBody>
+      </p:sp>
+      <p:sp>
+        <p:nvSpPr>
+          <p:cNvPr id="32" name="Rectangle 31"/>
+          <p:cNvSpPr/>
+          <p:nvPr/>
+        </p:nvSpPr>
+        <p:spPr>
+          <a:xfrm>
+            <a:off x="6199632" y="1783080"/>
+            <a:ext cx="5532120" cy="2061972"/>
+          </a:xfrm>
+          <a:prstGeom prst="rect">
+            <a:avLst/>
+          </a:prstGeom>
+          <a:solidFill>
+            <a:srgbClr val="FFFFFF"/>
+          </a:solidFill>
+          <a:ln>
+            <a:solidFill>
+              <a:srgbClr val="D6DCE4"/>
+            </a:solidFill>
+          </a:ln>
+          <a:effectLst/>
+        </p:spPr>
+        <p:style>
+          <a:lnRef idx="1">
+            <a:schemeClr val="accent1"/>
+          </a:lnRef>
+          <a:fillRef idx="3">
+            <a:schemeClr val="accent1"/>
+          </a:fillRef>
+          <a:effectRef idx="2">
+            <a:schemeClr val="accent1"/>
+          </a:effectRef>
+          <a:fontRef idx="minor">
+            <a:schemeClr val="lt1"/>
+          </a:fontRef>
+        </p:style>
+        <p:txBody>
+          <a:bodyPr rtlCol="0" anchor="ctr" wrap="square"/>
+          <a:lstStyle/>
+          <a:p>
+            <a:pPr algn="ctr"/>
+          </a:p>
+        </p:txBody>
+      </p:sp>
+      <p:sp>
+        <p:nvSpPr>
+          <p:cNvPr id="33" name="Rectangle 32"/>
+          <p:cNvSpPr/>
+          <p:nvPr/>
+        </p:nvSpPr>
+        <p:spPr>
+          <a:xfrm>
+            <a:off x="6199632" y="1783080"/>
+            <a:ext cx="82296" cy="2061972"/>
+          </a:xfrm>
+          <a:prstGeom prst="rect">
+            <a:avLst/>
+          </a:prstGeom>
+          <a:solidFill>
+            <a:srgbClr val="9A3B3B"/>
+          </a:solidFill>
+          <a:ln>
+            <a:noFill/>
+          </a:ln>
+          <a:effectLst/>
+        </p:spPr>
+        <p:style>
+          <a:lnRef idx="1">
+            <a:schemeClr val="accent1"/>
+          </a:lnRef>
+          <a:fillRef idx="3">
+            <a:schemeClr val="accent1"/>
+          </a:fillRef>
+          <a:effectRef idx="2">
+            <a:schemeClr val="accent1"/>
+          </a:effectRef>
+          <a:fontRef idx="minor">
+            <a:schemeClr val="lt1"/>
+          </a:fontRef>
+        </p:style>
+        <p:txBody>
+          <a:bodyPr rtlCol="0" anchor="ctr" wrap="square"/>
+          <a:lstStyle/>
+          <a:p>
+            <a:pPr algn="ctr"/>
+          </a:p>
+        </p:txBody>
+      </p:sp>
+      <p:sp>
+        <p:nvSpPr>
+          <p:cNvPr id="34" name="TextBox 33"/>
+          <p:cNvSpPr txBox="1"/>
+          <p:nvPr/>
+        </p:nvSpPr>
+        <p:spPr>
+          <a:xfrm>
+            <a:off x="6400800" y="1847088"/>
+            <a:ext cx="5166359" cy="274320"/>
+          </a:xfrm>
+          <a:prstGeom prst="rect">
+            <a:avLst/>
+          </a:prstGeom>
+          <a:noFill/>
+        </p:spPr>
+        <p:txBody>
+          <a:bodyPr wrap="square">
+            <a:spAutoFit/>
+          </a:bodyPr>
+          <a:lstStyle/>
+          <a:p>
+            <a:r>
+              <a:rPr sz="1050" b="1">
+                <a:solidFill>
+                  <a:srgbClr val="B5533A"/>
+                </a:solidFill>
+                <a:latin typeface="微软雅黑"/>
+              </a:rPr>
+              <a:t>✗ 只讲不演示</a:t>
+            </a:r>
+          </a:p>
+        </p:txBody>
+      </p:sp>
+      <p:sp>
+        <p:nvSpPr>
+          <p:cNvPr id="35" name="TextBox 34"/>
+          <p:cNvSpPr txBox="1"/>
+          <p:nvPr/>
+        </p:nvSpPr>
+        <p:spPr>
+          <a:xfrm>
+            <a:off x="6400800" y="2167128"/>
+            <a:ext cx="5166359" cy="868680"/>
+          </a:xfrm>
+          <a:prstGeom prst="rect">
+            <a:avLst/>
+          </a:prstGeom>
+          <a:noFill/>
+        </p:spPr>
+        <p:txBody>
+          <a:bodyPr wrap="square">
+            <a:spAutoFit/>
+          </a:bodyPr>
+          <a:lstStyle/>
+          <a:p>
+            <a:r>
+              <a:rPr sz="900" b="0">
+                <a:solidFill>
+                  <a:srgbClr val="2B2F36"/>
+                </a:solidFill>
+                <a:latin typeface="微软雅黑"/>
+              </a:rPr>
+              <a:t>原因：空谈</a:t>
+            </a:r>
+          </a:p>
+          <a:p>
+            <a:r>
+              <a:rPr sz="900" b="0">
+                <a:solidFill>
+                  <a:srgbClr val="2B2F36"/>
+                </a:solidFill>
+                <a:latin typeface="微软雅黑"/>
+              </a:rPr>
+              <a:t>✔ 解决：必须现场运行</a:t>
+            </a:r>
+          </a:p>
+        </p:txBody>
+      </p:sp>
+      <p:sp>
+        <p:nvSpPr>
+          <p:cNvPr id="36" name="Rectangle 35"/>
+          <p:cNvSpPr/>
+          <p:nvPr/>
+        </p:nvSpPr>
+        <p:spPr>
+          <a:xfrm>
+            <a:off x="457200" y="3973068"/>
+            <a:ext cx="5532120" cy="2061972"/>
+          </a:xfrm>
+          <a:prstGeom prst="rect">
+            <a:avLst/>
+          </a:prstGeom>
+          <a:solidFill>
+            <a:srgbClr val="FFFFFF"/>
+          </a:solidFill>
+          <a:ln>
+            <a:solidFill>
+              <a:srgbClr val="D6DCE4"/>
+            </a:solidFill>
+          </a:ln>
+          <a:effectLst/>
+        </p:spPr>
+        <p:style>
+          <a:lnRef idx="1">
+            <a:schemeClr val="accent1"/>
+          </a:lnRef>
+          <a:fillRef idx="3">
+            <a:schemeClr val="accent1"/>
+          </a:fillRef>
+          <a:effectRef idx="2">
+            <a:schemeClr val="accent1"/>
+          </a:effectRef>
+          <a:fontRef idx="minor">
+            <a:schemeClr val="lt1"/>
+          </a:fontRef>
+        </p:style>
+        <p:txBody>
+          <a:bodyPr rtlCol="0" anchor="ctr" wrap="square"/>
+          <a:lstStyle/>
+          <a:p>
+            <a:pPr algn="ctr"/>
+          </a:p>
+        </p:txBody>
+      </p:sp>
+      <p:sp>
+        <p:nvSpPr>
+          <p:cNvPr id="37" name="Rectangle 36"/>
+          <p:cNvSpPr/>
+          <p:nvPr/>
+        </p:nvSpPr>
+        <p:spPr>
+          <a:xfrm>
+            <a:off x="457200" y="3973068"/>
+            <a:ext cx="82296" cy="2061972"/>
+          </a:xfrm>
+          <a:prstGeom prst="rect">
+            <a:avLst/>
+          </a:prstGeom>
+          <a:solidFill>
+            <a:srgbClr val="9A3B3B"/>
+          </a:solidFill>
+          <a:ln>
+            <a:noFill/>
+          </a:ln>
+          <a:effectLst/>
+        </p:spPr>
+        <p:style>
+          <a:lnRef idx="1">
+            <a:schemeClr val="accent1"/>
+          </a:lnRef>
+          <a:fillRef idx="3">
+            <a:schemeClr val="accent1"/>
+          </a:fillRef>
+          <a:effectRef idx="2">
+            <a:schemeClr val="accent1"/>
+          </a:effectRef>
+          <a:fontRef idx="minor">
+            <a:schemeClr val="lt1"/>
+          </a:fontRef>
+        </p:style>
+        <p:txBody>
+          <a:bodyPr rtlCol="0" anchor="ctr" wrap="square"/>
+          <a:lstStyle/>
+          <a:p>
+            <a:pPr algn="ctr"/>
+          </a:p>
+        </p:txBody>
+      </p:sp>
+      <p:sp>
+        <p:nvSpPr>
+          <p:cNvPr id="38" name="TextBox 37"/>
+          <p:cNvSpPr txBox="1"/>
+          <p:nvPr/>
+        </p:nvSpPr>
+        <p:spPr>
+          <a:xfrm>
+            <a:off x="658368" y="4037076"/>
+            <a:ext cx="5166359" cy="274320"/>
+          </a:xfrm>
+          <a:prstGeom prst="rect">
+            <a:avLst/>
+          </a:prstGeom>
+          <a:noFill/>
+        </p:spPr>
+        <p:txBody>
+          <a:bodyPr wrap="square">
+            <a:spAutoFit/>
+          </a:bodyPr>
+          <a:lstStyle/>
+          <a:p>
+            <a:r>
+              <a:rPr sz="1050" b="1">
+                <a:solidFill>
+                  <a:srgbClr val="B5533A"/>
+                </a:solidFill>
+                <a:latin typeface="微软雅黑"/>
+              </a:rPr>
+              <a:t>✗ 超时</a:t>
+            </a:r>
+          </a:p>
+        </p:txBody>
+      </p:sp>
+      <p:sp>
+        <p:nvSpPr>
+          <p:cNvPr id="39" name="TextBox 38"/>
+          <p:cNvSpPr txBox="1"/>
+          <p:nvPr/>
+        </p:nvSpPr>
+        <p:spPr>
+          <a:xfrm>
+            <a:off x="658368" y="4357116"/>
+            <a:ext cx="5166359" cy="868680"/>
+          </a:xfrm>
+          <a:prstGeom prst="rect">
+            <a:avLst/>
+          </a:prstGeom>
+          <a:noFill/>
+        </p:spPr>
+        <p:txBody>
+          <a:bodyPr wrap="square">
+            <a:spAutoFit/>
+          </a:bodyPr>
+          <a:lstStyle/>
+          <a:p>
+            <a:r>
+              <a:rPr sz="900" b="0">
+                <a:solidFill>
+                  <a:srgbClr val="2B2F36"/>
+                </a:solidFill>
+                <a:latin typeface="微软雅黑"/>
+              </a:rPr>
+              <a:t>原因：没掐表</a:t>
+            </a:r>
+          </a:p>
+          <a:p>
+            <a:r>
+              <a:rPr sz="900" b="0">
+                <a:solidFill>
+                  <a:srgbClr val="2B2F36"/>
+                </a:solidFill>
+                <a:latin typeface="微软雅黑"/>
+              </a:rPr>
+              <a:t>✔ 解决：按5+3彩排两遍</a:t>
+            </a:r>
+          </a:p>
+        </p:txBody>
+      </p:sp>
+      <p:sp>
+        <p:nvSpPr>
+          <p:cNvPr id="40" name="TextBox 39"/>
+          <p:cNvSpPr txBox="1"/>
+          <p:nvPr/>
+        </p:nvSpPr>
+        <p:spPr>
+          <a:xfrm>
+            <a:off x="457200" y="6281928"/>
+            <a:ext cx="9601200" cy="182880"/>
+          </a:xfrm>
+          <a:prstGeom prst="rect">
+            <a:avLst/>
+          </a:prstGeom>
+          <a:noFill/>
+        </p:spPr>
+        <p:txBody>
+          <a:bodyPr wrap="square">
+            <a:spAutoFit/>
+          </a:bodyPr>
+          <a:lstStyle/>
+          <a:p>
+            <a:r>
+              <a:rPr sz="750" b="0">
+                <a:solidFill>
+                  <a:srgbClr val="6B7280"/>
+                </a:solidFill>
+                <a:latin typeface="微软雅黑"/>
+              </a:rPr>
+              <a:t>素材来源：同周《第23次课-项目终验联调与预答辩》知识卡与避坑清单（逐字摘录）</a:t>
+            </a:r>
+          </a:p>
+        </p:txBody>
+      </p:sp>
+    </p:spTree>
+  </p:cSld>
+  <p:clrMapOvr>
+    <a:masterClrMapping/>
+  </p:clrMapOvr>
+</p:sld>
+</file>
+
 <file path=ppt/slides/slide2.xml><?xml version="1.0" encoding="utf-8"?>
 <p:sld xmlns:a="http://schemas.openxmlformats.org/drawingml/2006/main" xmlns:p="http://schemas.openxmlformats.org/presentationml/2006/main" xmlns:r="http://schemas.openxmlformats.org/officeDocument/2006/relationships">
   <p:cSld>
@@ -4438,102 +7694,14 @@
       <p:grpSpPr/>
       <p:sp>
         <p:nvSpPr>
-          <p:cNvPr id="2" name="Rectangle 1"/>
-          <p:cNvSpPr/>
-          <p:nvPr/>
-        </p:nvSpPr>
-        <p:spPr>
-          <a:xfrm>
-            <a:off x="0" y="0"/>
-            <a:ext cx="12192000" cy="1150000"/>
-          </a:xfrm>
-          <a:prstGeom prst="rect">
-            <a:avLst/>
-          </a:prstGeom>
-          <a:solidFill>
-            <a:srgbClr val="010328"/>
-          </a:solidFill>
-          <a:ln>
-            <a:noFill/>
-          </a:ln>
-          <a:effectLst/>
-        </p:spPr>
-        <p:style>
-          <a:lnRef idx="1">
-            <a:schemeClr val="accent1"/>
-          </a:lnRef>
-          <a:fillRef idx="3">
-            <a:schemeClr val="accent1"/>
-          </a:fillRef>
-          <a:effectRef idx="2">
-            <a:schemeClr val="accent1"/>
-          </a:effectRef>
-          <a:fontRef idx="minor">
-            <a:schemeClr val="lt1"/>
-          </a:fontRef>
-        </p:style>
-        <p:txBody>
-          <a:bodyPr rtlCol="0" anchor="ctr"/>
-          <a:lstStyle/>
-          <a:p>
-            <a:pPr algn="ctr"/>
-          </a:p>
-        </p:txBody>
-      </p:sp>
-      <p:sp>
-        <p:nvSpPr>
-          <p:cNvPr id="3" name="Rectangle 2"/>
-          <p:cNvSpPr/>
-          <p:nvPr/>
-        </p:nvSpPr>
-        <p:spPr>
-          <a:xfrm>
-            <a:off x="0" y="1150000"/>
-            <a:ext cx="2600000" cy="70000"/>
-          </a:xfrm>
-          <a:prstGeom prst="rect">
-            <a:avLst/>
-          </a:prstGeom>
-          <a:solidFill>
-            <a:srgbClr val="F5670F"/>
-          </a:solidFill>
-          <a:ln>
-            <a:noFill/>
-          </a:ln>
-          <a:effectLst/>
-        </p:spPr>
-        <p:style>
-          <a:lnRef idx="1">
-            <a:schemeClr val="accent1"/>
-          </a:lnRef>
-          <a:fillRef idx="3">
-            <a:schemeClr val="accent1"/>
-          </a:fillRef>
-          <a:effectRef idx="2">
-            <a:schemeClr val="accent1"/>
-          </a:effectRef>
-          <a:fontRef idx="minor">
-            <a:schemeClr val="lt1"/>
-          </a:fontRef>
-        </p:style>
-        <p:txBody>
-          <a:bodyPr rtlCol="0" anchor="ctr"/>
-          <a:lstStyle/>
-          <a:p>
-            <a:pPr algn="ctr"/>
-          </a:p>
-        </p:txBody>
-      </p:sp>
-      <p:sp>
-        <p:nvSpPr>
-          <p:cNvPr id="4" name="TextBox 3"/>
+          <p:cNvPr id="2" name="TextBox 1"/>
           <p:cNvSpPr txBox="1"/>
           <p:nvPr/>
         </p:nvSpPr>
         <p:spPr>
           <a:xfrm>
-            <a:off x="700000" y="300000"/>
-            <a:ext cx="10792000" cy="700000"/>
+            <a:off x="548640" y="320040"/>
+            <a:ext cx="11094720" cy="914400"/>
           </a:xfrm>
           <a:prstGeom prst="rect">
             <a:avLst/>
@@ -4541,353 +7709,98 @@
           <a:noFill/>
         </p:spPr>
         <p:txBody>
-          <a:bodyPr wrap="square" anchor="t">
+          <a:bodyPr wrap="none">
             <a:spAutoFit/>
           </a:bodyPr>
           <a:lstStyle/>
           <a:p>
-            <a:pPr algn="l">
-              <a:lnSpc>
-                <a:spcPct val="110000"/>
-              </a:lnSpc>
+            <a:r>
+              <a:rPr sz="3000" b="1"/>
+              <a:t>安全与合规警示（操作前必读）</a:t>
+            </a:r>
+          </a:p>
+        </p:txBody>
+      </p:sp>
+      <p:sp>
+        <p:nvSpPr>
+          <p:cNvPr id="3" name="TextBox 2"/>
+          <p:cNvSpPr txBox="1"/>
+          <p:nvPr/>
+        </p:nvSpPr>
+        <p:spPr>
+          <a:xfrm>
+            <a:off x="731520" y="1371600"/>
+            <a:ext cx="10728960" cy="4663440"/>
+          </a:xfrm>
+          <a:prstGeom prst="rect">
+            <a:avLst/>
+          </a:prstGeom>
+          <a:noFill/>
+        </p:spPr>
+        <p:txBody>
+          <a:bodyPr wrap="square">
+            <a:spAutoFit/>
+          </a:bodyPr>
+          <a:lstStyle/>
+          <a:p>
+            <a:pPr>
               <a:spcAft>
-                <a:spcPts val="600"/>
+                <a:spcPts val="1000"/>
               </a:spcAft>
             </a:pPr>
             <a:r>
-              <a:rPr sz="2400" b="1">
-                <a:solidFill>
-                  <a:srgbClr val="FFFFFF"/>
-                </a:solidFill>
-                <a:latin typeface="微软雅黑"/>
-              </a:rPr>
-              <a:t>任务情境（集团项目案例）</a:t>
-            </a:r>
-          </a:p>
-        </p:txBody>
-      </p:sp>
-      <p:sp>
-        <p:nvSpPr>
-          <p:cNvPr id="5" name="Rectangle 4"/>
-          <p:cNvSpPr/>
-          <p:nvPr/>
-        </p:nvSpPr>
-        <p:spPr>
-          <a:xfrm>
-            <a:off x="800000" y="1780000"/>
-            <a:ext cx="10600000" cy="700000"/>
-          </a:xfrm>
-          <a:prstGeom prst="rect">
-            <a:avLst/>
-          </a:prstGeom>
-          <a:solidFill>
-            <a:srgbClr val="010328"/>
-          </a:solidFill>
-          <a:ln>
-            <a:noFill/>
-          </a:ln>
-          <a:effectLst/>
-        </p:spPr>
-        <p:style>
-          <a:lnRef idx="1">
-            <a:schemeClr val="accent1"/>
-          </a:lnRef>
-          <a:fillRef idx="3">
-            <a:schemeClr val="accent1"/>
-          </a:fillRef>
-          <a:effectRef idx="2">
-            <a:schemeClr val="accent1"/>
-          </a:effectRef>
-          <a:fontRef idx="minor">
-            <a:schemeClr val="lt1"/>
-          </a:fontRef>
-        </p:style>
-        <p:txBody>
-          <a:bodyPr rtlCol="0" anchor="ctr"/>
-          <a:lstStyle/>
-          <a:p>
-            <a:pPr algn="ctr"/>
-          </a:p>
-        </p:txBody>
-      </p:sp>
-      <p:sp>
-        <p:nvSpPr>
-          <p:cNvPr id="6" name="TextBox 5"/>
-          <p:cNvSpPr txBox="1"/>
-          <p:nvPr/>
-        </p:nvSpPr>
-        <p:spPr>
-          <a:xfrm>
-            <a:off x="1000000" y="1880000"/>
-            <a:ext cx="10200000" cy="520000"/>
-          </a:xfrm>
-          <a:prstGeom prst="rect">
-            <a:avLst/>
-          </a:prstGeom>
-          <a:noFill/>
-        </p:spPr>
-        <p:txBody>
-          <a:bodyPr wrap="square" anchor="t">
-            <a:spAutoFit/>
-          </a:bodyPr>
-          <a:lstStyle/>
-          <a:p>
-            <a:pPr algn="l">
-              <a:lnSpc>
-                <a:spcPct val="110000"/>
-              </a:lnSpc>
+              <a:rPr sz="1800"/>
+              <a:t>1. 上机前确认本工位电源开关与急停位置，确认设备处于安全状态。</a:t>
+            </a:r>
+          </a:p>
+          <a:p>
+            <a:pPr>
               <a:spcAft>
-                <a:spcPts val="600"/>
+                <a:spcPts val="1000"/>
               </a:spcAft>
             </a:pPr>
             <a:r>
-              <a:rPr sz="1400" b="1">
-                <a:solidFill>
-                  <a:srgbClr val="FFFFFF"/>
-                </a:solidFill>
-                <a:latin typeface="微软雅黑"/>
-              </a:rPr>
-              <a:t>◆ 重庆两江智造集团 · 精密制造事业部</a:t>
-            </a:r>
-          </a:p>
-        </p:txBody>
-      </p:sp>
-      <p:sp>
-        <p:nvSpPr>
-          <p:cNvPr id="7" name="Rectangle 6"/>
-          <p:cNvSpPr/>
-          <p:nvPr/>
-        </p:nvSpPr>
-        <p:spPr>
-          <a:xfrm>
-            <a:off x="800000" y="2580000"/>
-            <a:ext cx="6300000" cy="3600000"/>
-          </a:xfrm>
-          <a:prstGeom prst="rect">
-            <a:avLst/>
-          </a:prstGeom>
-          <a:solidFill>
-            <a:srgbClr val="F7F9FD"/>
-          </a:solidFill>
-          <a:ln>
-            <a:solidFill>
-              <a:srgbClr val="0545E8"/>
-            </a:solidFill>
-          </a:ln>
-          <a:effectLst/>
-        </p:spPr>
-        <p:style>
-          <a:lnRef idx="1">
-            <a:schemeClr val="accent1"/>
-          </a:lnRef>
-          <a:fillRef idx="3">
-            <a:schemeClr val="accent1"/>
-          </a:fillRef>
-          <a:effectRef idx="2">
-            <a:schemeClr val="accent1"/>
-          </a:effectRef>
-          <a:fontRef idx="minor">
-            <a:schemeClr val="lt1"/>
-          </a:fontRef>
-        </p:style>
-        <p:txBody>
-          <a:bodyPr rtlCol="0" anchor="ctr"/>
-          <a:lstStyle/>
-          <a:p>
-            <a:pPr algn="ctr"/>
-          </a:p>
-        </p:txBody>
-      </p:sp>
-      <p:sp>
-        <p:nvSpPr>
-          <p:cNvPr id="8" name="TextBox 7"/>
-          <p:cNvSpPr txBox="1"/>
-          <p:nvPr/>
-        </p:nvSpPr>
-        <p:spPr>
-          <a:xfrm>
-            <a:off x="1000000" y="2740000"/>
-            <a:ext cx="5900000" cy="3300000"/>
-          </a:xfrm>
-          <a:prstGeom prst="rect">
-            <a:avLst/>
-          </a:prstGeom>
-          <a:noFill/>
-        </p:spPr>
-        <p:txBody>
-          <a:bodyPr wrap="square" anchor="t">
-            <a:spAutoFit/>
-          </a:bodyPr>
-          <a:lstStyle/>
-          <a:p>
-            <a:pPr algn="l">
-              <a:lnSpc>
-                <a:spcPct val="130000"/>
-              </a:lnSpc>
+              <a:rPr sz="1800"/>
+              <a:t>2. 涉及接线的操作一律先断电、后验电、再作业，禁止带电插拔。</a:t>
+            </a:r>
+          </a:p>
+          <a:p>
+            <a:pPr>
               <a:spcAft>
-                <a:spcPts val="600"/>
+                <a:spcPts val="1000"/>
               </a:spcAft>
             </a:pPr>
             <a:r>
-              <a:rPr sz="1450" b="0">
-                <a:solidFill>
-                  <a:srgbClr val="010328"/>
-                </a:solidFill>
-                <a:latin typeface="微软雅黑"/>
-              </a:rPr>
-              <a:t>答辩日。王主任、方总监和平台吴工都坐在台下。你要交付的，是把12周所学装进一个完整的《工业互联网数据处理系统》——第23次课终验预答辩，第24次课正式答辩。</a:t>
-            </a:r>
-          </a:p>
-        </p:txBody>
-      </p:sp>
-      <p:pic>
-        <p:nvPicPr>
-          <p:cNvPr id="9" name="Picture 8" descr="W12_场景.png"/>
-          <p:cNvPicPr>
-            <a:picLocks noChangeAspect="1"/>
-          </p:cNvPicPr>
-          <p:nvPr/>
-        </p:nvPicPr>
-        <p:blipFill>
-          <a:blip r:embed="rId2"/>
-          <a:stretch>
-            <a:fillRect/>
-          </a:stretch>
-        </p:blipFill>
-        <p:spPr>
-          <a:xfrm>
-            <a:off x="7250000" y="2580000"/>
-            <a:ext cx="4150000" cy="3600000"/>
-          </a:xfrm>
-          <a:prstGeom prst="rect">
-            <a:avLst/>
-          </a:prstGeom>
-        </p:spPr>
-      </p:pic>
-      <p:sp>
-        <p:nvSpPr>
-          <p:cNvPr id="10" name="Rectangle 9"/>
-          <p:cNvSpPr/>
-          <p:nvPr/>
-        </p:nvSpPr>
-        <p:spPr>
-          <a:xfrm>
-            <a:off x="500000" y="6500000"/>
-            <a:ext cx="11100000" cy="20000"/>
-          </a:xfrm>
-          <a:prstGeom prst="rect">
-            <a:avLst/>
-          </a:prstGeom>
-          <a:solidFill>
-            <a:srgbClr val="C9D4EE"/>
-          </a:solidFill>
-          <a:ln>
-            <a:noFill/>
-          </a:ln>
-          <a:effectLst/>
-        </p:spPr>
-        <p:style>
-          <a:lnRef idx="1">
-            <a:schemeClr val="accent1"/>
-          </a:lnRef>
-          <a:fillRef idx="3">
-            <a:schemeClr val="accent1"/>
-          </a:fillRef>
-          <a:effectRef idx="2">
-            <a:schemeClr val="accent1"/>
-          </a:effectRef>
-          <a:fontRef idx="minor">
-            <a:schemeClr val="lt1"/>
-          </a:fontRef>
-        </p:style>
-        <p:txBody>
-          <a:bodyPr rtlCol="0" anchor="ctr"/>
-          <a:lstStyle/>
-          <a:p>
-            <a:pPr algn="ctr"/>
-          </a:p>
-        </p:txBody>
-      </p:sp>
-      <p:sp>
-        <p:nvSpPr>
-          <p:cNvPr id="11" name="TextBox 10"/>
-          <p:cNvSpPr txBox="1"/>
-          <p:nvPr/>
-        </p:nvSpPr>
-        <p:spPr>
-          <a:xfrm>
-            <a:off x="500000" y="6540000"/>
-            <a:ext cx="7000000" cy="300000"/>
-          </a:xfrm>
-          <a:prstGeom prst="rect">
-            <a:avLst/>
-          </a:prstGeom>
-          <a:noFill/>
-        </p:spPr>
-        <p:txBody>
-          <a:bodyPr wrap="square" anchor="t">
-            <a:spAutoFit/>
-          </a:bodyPr>
-          <a:lstStyle/>
-          <a:p>
-            <a:pPr algn="l">
-              <a:lnSpc>
-                <a:spcPct val="110000"/>
-              </a:lnSpc>
+              <a:rPr sz="1800"/>
+              <a:t>3. 身体任何部位不进入设备运动/散热区域，长发束起，不佩戴悬垂饰物。</a:t>
+            </a:r>
+          </a:p>
+          <a:p>
+            <a:pPr>
               <a:spcAft>
-                <a:spcPts val="600"/>
+                <a:spcPts val="1000"/>
               </a:spcAft>
             </a:pPr>
             <a:r>
-              <a:rPr sz="1000" b="0">
-                <a:solidFill>
-                  <a:srgbClr val="8A97B5"/>
-                </a:solidFill>
-                <a:latin typeface="微软雅黑"/>
-              </a:rPr>
-              <a:t>两江智造集团 · Python编程基础</a:t>
-            </a:r>
-          </a:p>
-        </p:txBody>
-      </p:sp>
-      <p:sp>
-        <p:nvSpPr>
-          <p:cNvPr id="12" name="TextBox 11"/>
-          <p:cNvSpPr txBox="1"/>
-          <p:nvPr/>
-        </p:nvSpPr>
-        <p:spPr>
-          <a:xfrm>
-            <a:off x="10600000" y="6540000"/>
-            <a:ext cx="1000000" cy="300000"/>
-          </a:xfrm>
-          <a:prstGeom prst="rect">
-            <a:avLst/>
-          </a:prstGeom>
-          <a:noFill/>
-        </p:spPr>
-        <p:txBody>
-          <a:bodyPr wrap="square" anchor="t">
-            <a:spAutoFit/>
-          </a:bodyPr>
-          <a:lstStyle/>
-          <a:p>
-            <a:pPr algn="r">
-              <a:lnSpc>
-                <a:spcPct val="110000"/>
-              </a:lnSpc>
+              <a:rPr sz="1800"/>
+              <a:t>4. 调试程序前先静态检查、再低速小样本试运行，确认无异常后放大规模。</a:t>
+            </a:r>
+          </a:p>
+          <a:p>
+            <a:pPr>
               <a:spcAft>
-                <a:spcPts val="600"/>
+                <a:spcPts val="1000"/>
               </a:spcAft>
             </a:pPr>
             <a:r>
-              <a:rPr sz="1000" b="0">
-                <a:solidFill>
-                  <a:srgbClr val="8A97B5"/>
-                </a:solidFill>
-                <a:latin typeface="微软雅黑"/>
-              </a:rPr>
-              <a:t>2 / 7</a:t>
+              <a:rPr sz="1800"/>
+              <a:t>5. 任何不确定或异常情况，立即停止操作并报告指导教师，不擅自处置。</a:t>
+            </a:r>
+          </a:p>
+          <a:p>
+            <a:r>
+              <a:rPr sz="1400" b="1"/>
+              <a:t>以上任一条违反，本次任务按课程标准「安全规范一票否决」条款记 0 分并中止实训。</a:t>
             </a:r>
           </a:p>
         </p:txBody>
@@ -5000,100 +7913,14 @@
       </p:sp>
       <p:sp>
         <p:nvSpPr>
-          <p:cNvPr id="4" name="Rectangle 3"/>
-          <p:cNvSpPr/>
-          <p:nvPr/>
-        </p:nvSpPr>
-        <p:spPr>
-          <a:xfrm>
-            <a:off x="600000" y="230000"/>
-            <a:ext cx="700000" cy="700000"/>
-          </a:xfrm>
-          <a:prstGeom prst="rect">
-            <a:avLst/>
-          </a:prstGeom>
-          <a:solidFill>
-            <a:srgbClr val="F5670F"/>
-          </a:solidFill>
-          <a:ln>
-            <a:noFill/>
-          </a:ln>
-          <a:effectLst/>
-        </p:spPr>
-        <p:style>
-          <a:lnRef idx="1">
-            <a:schemeClr val="accent1"/>
-          </a:lnRef>
-          <a:fillRef idx="3">
-            <a:schemeClr val="accent1"/>
-          </a:fillRef>
-          <a:effectRef idx="2">
-            <a:schemeClr val="accent1"/>
-          </a:effectRef>
-          <a:fontRef idx="minor">
-            <a:schemeClr val="lt1"/>
-          </a:fontRef>
-        </p:style>
-        <p:txBody>
-          <a:bodyPr rtlCol="0" anchor="ctr"/>
-          <a:lstStyle/>
-          <a:p>
-            <a:pPr algn="ctr"/>
-          </a:p>
-        </p:txBody>
-      </p:sp>
-      <p:sp>
-        <p:nvSpPr>
-          <p:cNvPr id="5" name="TextBox 4"/>
+          <p:cNvPr id="4" name="TextBox 3"/>
           <p:cNvSpPr txBox="1"/>
           <p:nvPr/>
         </p:nvSpPr>
         <p:spPr>
           <a:xfrm>
-            <a:off x="600000" y="255000"/>
-            <a:ext cx="700000" cy="660000"/>
-          </a:xfrm>
-          <a:prstGeom prst="rect">
-            <a:avLst/>
-          </a:prstGeom>
-          <a:noFill/>
-        </p:spPr>
-        <p:txBody>
-          <a:bodyPr wrap="square" anchor="t">
-            <a:spAutoFit/>
-          </a:bodyPr>
-          <a:lstStyle/>
-          <a:p>
-            <a:pPr algn="ctr">
-              <a:lnSpc>
-                <a:spcPct val="110000"/>
-              </a:lnSpc>
-              <a:spcAft>
-                <a:spcPts val="600"/>
-              </a:spcAft>
-            </a:pPr>
-            <a:r>
-              <a:rPr sz="2400" b="1">
-                <a:solidFill>
-                  <a:srgbClr val="FFFFFF"/>
-                </a:solidFill>
-                <a:latin typeface="微软雅黑"/>
-              </a:rPr>
-              <a:t>1</a:t>
-            </a:r>
-          </a:p>
-        </p:txBody>
-      </p:sp>
-      <p:sp>
-        <p:nvSpPr>
-          <p:cNvPr id="6" name="TextBox 5"/>
-          <p:cNvSpPr txBox="1"/>
-          <p:nvPr/>
-        </p:nvSpPr>
-        <p:spPr>
-          <a:xfrm>
-            <a:off x="1500000" y="300000"/>
-            <a:ext cx="9992000" cy="700000"/>
+            <a:off x="700000" y="300000"/>
+            <a:ext cx="10792000" cy="700000"/>
           </a:xfrm>
           <a:prstGeom prst="rect">
             <a:avLst/>
@@ -5121,27 +7948,27 @@
                 </a:solidFill>
                 <a:latin typeface="微软雅黑"/>
               </a:rPr>
-              <a:t>正式答辩专场（1）</a:t>
-            </a:r>
-          </a:p>
-        </p:txBody>
-      </p:sp>
-      <p:sp>
-        <p:nvSpPr>
-          <p:cNvPr id="7" name="Rectangle 6"/>
+              <a:t>任务情境（集团项目案例）</a:t>
+            </a:r>
+          </a:p>
+        </p:txBody>
+      </p:sp>
+      <p:sp>
+        <p:nvSpPr>
+          <p:cNvPr id="5" name="Rectangle 4"/>
           <p:cNvSpPr/>
           <p:nvPr/>
         </p:nvSpPr>
         <p:spPr>
           <a:xfrm>
-            <a:off x="820000" y="2160000"/>
-            <a:ext cx="120000" cy="120000"/>
+            <a:off x="800000" y="1780000"/>
+            <a:ext cx="10600000" cy="700000"/>
           </a:xfrm>
           <a:prstGeom prst="rect">
             <a:avLst/>
           </a:prstGeom>
           <a:solidFill>
-            <a:srgbClr val="F5670F"/>
+            <a:srgbClr val="010328"/>
           </a:solidFill>
           <a:ln>
             <a:noFill/>
@@ -5172,444 +7999,14 @@
       </p:sp>
       <p:sp>
         <p:nvSpPr>
-          <p:cNvPr id="8" name="TextBox 7"/>
+          <p:cNvPr id="6" name="TextBox 5"/>
           <p:cNvSpPr txBox="1"/>
           <p:nvPr/>
         </p:nvSpPr>
         <p:spPr>
           <a:xfrm>
-            <a:off x="1100000" y="2050000"/>
-            <a:ext cx="10200000" cy="680000"/>
-          </a:xfrm>
-          <a:prstGeom prst="rect">
-            <a:avLst/>
-          </a:prstGeom>
-          <a:noFill/>
-        </p:spPr>
-        <p:txBody>
-          <a:bodyPr wrap="square" anchor="t">
-            <a:spAutoFit/>
-          </a:bodyPr>
-          <a:lstStyle/>
-          <a:p>
-            <a:pPr algn="l">
-              <a:lnSpc>
-                <a:spcPct val="125000"/>
-              </a:lnSpc>
-              <a:spcAft>
-                <a:spcPts val="600"/>
-              </a:spcAft>
-            </a:pPr>
-            <a:r>
-              <a:rPr sz="1500" b="0">
-                <a:solidFill>
-                  <a:srgbClr val="010328"/>
-                </a:solidFill>
-                <a:latin typeface="微软雅黑"/>
-              </a:rPr>
-              <a:t>项目演示：现场运行系统、展示输出报告；</a:t>
-            </a:r>
-          </a:p>
-        </p:txBody>
-      </p:sp>
-      <p:sp>
-        <p:nvSpPr>
-          <p:cNvPr id="9" name="Rectangle 8"/>
-          <p:cNvSpPr/>
-          <p:nvPr/>
-        </p:nvSpPr>
-        <p:spPr>
-          <a:xfrm>
-            <a:off x="820000" y="2840000"/>
-            <a:ext cx="120000" cy="120000"/>
-          </a:xfrm>
-          <a:prstGeom prst="rect">
-            <a:avLst/>
-          </a:prstGeom>
-          <a:solidFill>
-            <a:srgbClr val="F5670F"/>
-          </a:solidFill>
-          <a:ln>
-            <a:noFill/>
-          </a:ln>
-          <a:effectLst/>
-        </p:spPr>
-        <p:style>
-          <a:lnRef idx="1">
-            <a:schemeClr val="accent1"/>
-          </a:lnRef>
-          <a:fillRef idx="3">
-            <a:schemeClr val="accent1"/>
-          </a:fillRef>
-          <a:effectRef idx="2">
-            <a:schemeClr val="accent1"/>
-          </a:effectRef>
-          <a:fontRef idx="minor">
-            <a:schemeClr val="lt1"/>
-          </a:fontRef>
-        </p:style>
-        <p:txBody>
-          <a:bodyPr rtlCol="0" anchor="ctr"/>
-          <a:lstStyle/>
-          <a:p>
-            <a:pPr algn="ctr"/>
-          </a:p>
-        </p:txBody>
-      </p:sp>
-      <p:sp>
-        <p:nvSpPr>
-          <p:cNvPr id="10" name="TextBox 9"/>
-          <p:cNvSpPr txBox="1"/>
-          <p:nvPr/>
-        </p:nvSpPr>
-        <p:spPr>
-          <a:xfrm>
-            <a:off x="1100000" y="2730000"/>
-            <a:ext cx="10200000" cy="680000"/>
-          </a:xfrm>
-          <a:prstGeom prst="rect">
-            <a:avLst/>
-          </a:prstGeom>
-          <a:noFill/>
-        </p:spPr>
-        <p:txBody>
-          <a:bodyPr wrap="square" anchor="t">
-            <a:spAutoFit/>
-          </a:bodyPr>
-          <a:lstStyle/>
-          <a:p>
-            <a:pPr algn="l">
-              <a:lnSpc>
-                <a:spcPct val="125000"/>
-              </a:lnSpc>
-              <a:spcAft>
-                <a:spcPts val="600"/>
-              </a:spcAft>
-            </a:pPr>
-            <a:r>
-              <a:rPr sz="1500" b="0">
-                <a:solidFill>
-                  <a:srgbClr val="010328"/>
-                </a:solidFill>
-                <a:latin typeface="微软雅黑"/>
-              </a:rPr>
-              <a:t>项目答辩：架构讲解、技术问答、创新点陈述；</a:t>
-            </a:r>
-          </a:p>
-        </p:txBody>
-      </p:sp>
-      <p:sp>
-        <p:nvSpPr>
-          <p:cNvPr id="11" name="Rectangle 10"/>
-          <p:cNvSpPr/>
-          <p:nvPr/>
-        </p:nvSpPr>
-        <p:spPr>
-          <a:xfrm>
-            <a:off x="820000" y="3520000"/>
-            <a:ext cx="120000" cy="120000"/>
-          </a:xfrm>
-          <a:prstGeom prst="rect">
-            <a:avLst/>
-          </a:prstGeom>
-          <a:solidFill>
-            <a:srgbClr val="F5670F"/>
-          </a:solidFill>
-          <a:ln>
-            <a:noFill/>
-          </a:ln>
-          <a:effectLst/>
-        </p:spPr>
-        <p:style>
-          <a:lnRef idx="1">
-            <a:schemeClr val="accent1"/>
-          </a:lnRef>
-          <a:fillRef idx="3">
-            <a:schemeClr val="accent1"/>
-          </a:fillRef>
-          <a:effectRef idx="2">
-            <a:schemeClr val="accent1"/>
-          </a:effectRef>
-          <a:fontRef idx="minor">
-            <a:schemeClr val="lt1"/>
-          </a:fontRef>
-        </p:style>
-        <p:txBody>
-          <a:bodyPr rtlCol="0" anchor="ctr"/>
-          <a:lstStyle/>
-          <a:p>
-            <a:pPr algn="ctr"/>
-          </a:p>
-        </p:txBody>
-      </p:sp>
-      <p:sp>
-        <p:nvSpPr>
-          <p:cNvPr id="12" name="TextBox 11"/>
-          <p:cNvSpPr txBox="1"/>
-          <p:nvPr/>
-        </p:nvSpPr>
-        <p:spPr>
-          <a:xfrm>
-            <a:off x="1100000" y="3410000"/>
-            <a:ext cx="10200000" cy="900000"/>
-          </a:xfrm>
-          <a:prstGeom prst="rect">
-            <a:avLst/>
-          </a:prstGeom>
-          <a:noFill/>
-        </p:spPr>
-        <p:txBody>
-          <a:bodyPr wrap="square" anchor="t">
-            <a:spAutoFit/>
-          </a:bodyPr>
-          <a:lstStyle/>
-          <a:p>
-            <a:pPr algn="l">
-              <a:lnSpc>
-                <a:spcPct val="125000"/>
-              </a:lnSpc>
-              <a:spcAft>
-                <a:spcPts val="600"/>
-              </a:spcAft>
-            </a:pPr>
-            <a:r>
-              <a:rPr sz="1500" b="0">
-                <a:solidFill>
-                  <a:srgbClr val="010328"/>
-                </a:solidFill>
-                <a:latin typeface="微软雅黑"/>
-              </a:rPr>
-              <a:t>答辩节奏：≤6组按“8分钟演示+5分钟问答”；♡6组切换“5分钟演示+3分钟问答”，且演示视频（≤3分钟）于课前1天预收、教师预看并带问题入场；</a:t>
-            </a:r>
-          </a:p>
-        </p:txBody>
-      </p:sp>
-      <p:sp>
-        <p:nvSpPr>
-          <p:cNvPr id="13" name="Rectangle 12"/>
-          <p:cNvSpPr/>
-          <p:nvPr/>
-        </p:nvSpPr>
-        <p:spPr>
-          <a:xfrm>
-            <a:off x="820000" y="4460000"/>
-            <a:ext cx="120000" cy="120000"/>
-          </a:xfrm>
-          <a:prstGeom prst="rect">
-            <a:avLst/>
-          </a:prstGeom>
-          <a:solidFill>
-            <a:srgbClr val="F5670F"/>
-          </a:solidFill>
-          <a:ln>
-            <a:noFill/>
-          </a:ln>
-          <a:effectLst/>
-        </p:spPr>
-        <p:style>
-          <a:lnRef idx="1">
-            <a:schemeClr val="accent1"/>
-          </a:lnRef>
-          <a:fillRef idx="3">
-            <a:schemeClr val="accent1"/>
-          </a:fillRef>
-          <a:effectRef idx="2">
-            <a:schemeClr val="accent1"/>
-          </a:effectRef>
-          <a:fontRef idx="minor">
-            <a:schemeClr val="lt1"/>
-          </a:fontRef>
-        </p:style>
-        <p:txBody>
-          <a:bodyPr rtlCol="0" anchor="ctr"/>
-          <a:lstStyle/>
-          <a:p>
-            <a:pPr algn="ctr"/>
-          </a:p>
-        </p:txBody>
-      </p:sp>
-      <p:sp>
-        <p:nvSpPr>
-          <p:cNvPr id="14" name="TextBox 13"/>
-          <p:cNvSpPr txBox="1"/>
-          <p:nvPr/>
-        </p:nvSpPr>
-        <p:spPr>
-          <a:xfrm>
-            <a:off x="1100000" y="4350000"/>
-            <a:ext cx="10200000" cy="680000"/>
-          </a:xfrm>
-          <a:prstGeom prst="rect">
-            <a:avLst/>
-          </a:prstGeom>
-          <a:noFill/>
-        </p:spPr>
-        <p:txBody>
-          <a:bodyPr wrap="square" anchor="t">
-            <a:spAutoFit/>
-          </a:bodyPr>
-          <a:lstStyle/>
-          <a:p>
-            <a:pPr algn="l">
-              <a:lnSpc>
-                <a:spcPct val="125000"/>
-              </a:lnSpc>
-              <a:spcAft>
-                <a:spcPts val="600"/>
-              </a:spcAft>
-            </a:pPr>
-            <a:r>
-              <a:rPr sz="1500" b="0">
-                <a:solidFill>
-                  <a:srgbClr val="010328"/>
-                </a:solidFill>
-                <a:latin typeface="微软雅黑"/>
-              </a:rPr>
-              <a:t>多元评价：教师评价+组间互评+企业导师点评；</a:t>
-            </a:r>
-          </a:p>
-        </p:txBody>
-      </p:sp>
-      <p:sp>
-        <p:nvSpPr>
-          <p:cNvPr id="15" name="Rectangle 14"/>
-          <p:cNvSpPr/>
-          <p:nvPr/>
-        </p:nvSpPr>
-        <p:spPr>
-          <a:xfrm>
-            <a:off x="820000" y="5140000"/>
-            <a:ext cx="120000" cy="120000"/>
-          </a:xfrm>
-          <a:prstGeom prst="rect">
-            <a:avLst/>
-          </a:prstGeom>
-          <a:solidFill>
-            <a:srgbClr val="F5670F"/>
-          </a:solidFill>
-          <a:ln>
-            <a:noFill/>
-          </a:ln>
-          <a:effectLst/>
-        </p:spPr>
-        <p:style>
-          <a:lnRef idx="1">
-            <a:schemeClr val="accent1"/>
-          </a:lnRef>
-          <a:fillRef idx="3">
-            <a:schemeClr val="accent1"/>
-          </a:fillRef>
-          <a:effectRef idx="2">
-            <a:schemeClr val="accent1"/>
-          </a:effectRef>
-          <a:fontRef idx="minor">
-            <a:schemeClr val="lt1"/>
-          </a:fontRef>
-        </p:style>
-        <p:txBody>
-          <a:bodyPr rtlCol="0" anchor="ctr"/>
-          <a:lstStyle/>
-          <a:p>
-            <a:pPr algn="ctr"/>
-          </a:p>
-        </p:txBody>
-      </p:sp>
-      <p:sp>
-        <p:nvSpPr>
-          <p:cNvPr id="16" name="TextBox 15"/>
-          <p:cNvSpPr txBox="1"/>
-          <p:nvPr/>
-        </p:nvSpPr>
-        <p:spPr>
-          <a:xfrm>
-            <a:off x="1100000" y="5030000"/>
-            <a:ext cx="10200000" cy="680000"/>
-          </a:xfrm>
-          <a:prstGeom prst="rect">
-            <a:avLst/>
-          </a:prstGeom>
-          <a:noFill/>
-        </p:spPr>
-        <p:txBody>
-          <a:bodyPr wrap="square" anchor="t">
-            <a:spAutoFit/>
-          </a:bodyPr>
-          <a:lstStyle/>
-          <a:p>
-            <a:pPr algn="l">
-              <a:lnSpc>
-                <a:spcPct val="125000"/>
-              </a:lnSpc>
-              <a:spcAft>
-                <a:spcPts val="600"/>
-              </a:spcAft>
-            </a:pPr>
-            <a:r>
-              <a:rPr sz="1500" b="0">
-                <a:solidFill>
-                  <a:srgbClr val="010328"/>
-                </a:solidFill>
-                <a:latin typeface="微软雅黑"/>
-              </a:rPr>
-              <a:t>课程总结与后续课程（《AI应用基础》进阶）衔接说明。</a:t>
-            </a:r>
-          </a:p>
-        </p:txBody>
-      </p:sp>
-      <p:sp>
-        <p:nvSpPr>
-          <p:cNvPr id="17" name="Rectangle 16"/>
-          <p:cNvSpPr/>
-          <p:nvPr/>
-        </p:nvSpPr>
-        <p:spPr>
-          <a:xfrm>
-            <a:off x="500000" y="6500000"/>
-            <a:ext cx="11100000" cy="20000"/>
-          </a:xfrm>
-          <a:prstGeom prst="rect">
-            <a:avLst/>
-          </a:prstGeom>
-          <a:solidFill>
-            <a:srgbClr val="C9D4EE"/>
-          </a:solidFill>
-          <a:ln>
-            <a:noFill/>
-          </a:ln>
-          <a:effectLst/>
-        </p:spPr>
-        <p:style>
-          <a:lnRef idx="1">
-            <a:schemeClr val="accent1"/>
-          </a:lnRef>
-          <a:fillRef idx="3">
-            <a:schemeClr val="accent1"/>
-          </a:fillRef>
-          <a:effectRef idx="2">
-            <a:schemeClr val="accent1"/>
-          </a:effectRef>
-          <a:fontRef idx="minor">
-            <a:schemeClr val="lt1"/>
-          </a:fontRef>
-        </p:style>
-        <p:txBody>
-          <a:bodyPr rtlCol="0" anchor="ctr"/>
-          <a:lstStyle/>
-          <a:p>
-            <a:pPr algn="ctr"/>
-          </a:p>
-        </p:txBody>
-      </p:sp>
-      <p:sp>
-        <p:nvSpPr>
-          <p:cNvPr id="18" name="TextBox 17"/>
-          <p:cNvSpPr txBox="1"/>
-          <p:nvPr/>
-        </p:nvSpPr>
-        <p:spPr>
-          <a:xfrm>
-            <a:off x="500000" y="6540000"/>
-            <a:ext cx="7000000" cy="300000"/>
+            <a:off x="1000000" y="1880000"/>
+            <a:ext cx="10200000" cy="520000"/>
           </a:xfrm>
           <a:prstGeom prst="rect">
             <a:avLst/>
@@ -5631,6 +8028,204 @@
               </a:spcAft>
             </a:pPr>
             <a:r>
+              <a:rPr sz="1400" b="1">
+                <a:solidFill>
+                  <a:srgbClr val="FFFFFF"/>
+                </a:solidFill>
+                <a:latin typeface="微软雅黑"/>
+              </a:rPr>
+              <a:t>◆ 重庆两江智造集团 · 精密制造事业部</a:t>
+            </a:r>
+          </a:p>
+        </p:txBody>
+      </p:sp>
+      <p:sp>
+        <p:nvSpPr>
+          <p:cNvPr id="7" name="Rectangle 6"/>
+          <p:cNvSpPr/>
+          <p:nvPr/>
+        </p:nvSpPr>
+        <p:spPr>
+          <a:xfrm>
+            <a:off x="800000" y="2580000"/>
+            <a:ext cx="6300000" cy="3600000"/>
+          </a:xfrm>
+          <a:prstGeom prst="rect">
+            <a:avLst/>
+          </a:prstGeom>
+          <a:solidFill>
+            <a:srgbClr val="F7F9FD"/>
+          </a:solidFill>
+          <a:ln>
+            <a:solidFill>
+              <a:srgbClr val="0545E8"/>
+            </a:solidFill>
+          </a:ln>
+          <a:effectLst/>
+        </p:spPr>
+        <p:style>
+          <a:lnRef idx="1">
+            <a:schemeClr val="accent1"/>
+          </a:lnRef>
+          <a:fillRef idx="3">
+            <a:schemeClr val="accent1"/>
+          </a:fillRef>
+          <a:effectRef idx="2">
+            <a:schemeClr val="accent1"/>
+          </a:effectRef>
+          <a:fontRef idx="minor">
+            <a:schemeClr val="lt1"/>
+          </a:fontRef>
+        </p:style>
+        <p:txBody>
+          <a:bodyPr rtlCol="0" anchor="ctr"/>
+          <a:lstStyle/>
+          <a:p>
+            <a:pPr algn="ctr"/>
+          </a:p>
+        </p:txBody>
+      </p:sp>
+      <p:sp>
+        <p:nvSpPr>
+          <p:cNvPr id="8" name="TextBox 7"/>
+          <p:cNvSpPr txBox="1"/>
+          <p:nvPr/>
+        </p:nvSpPr>
+        <p:spPr>
+          <a:xfrm>
+            <a:off x="1000000" y="2740000"/>
+            <a:ext cx="5900000" cy="3300000"/>
+          </a:xfrm>
+          <a:prstGeom prst="rect">
+            <a:avLst/>
+          </a:prstGeom>
+          <a:noFill/>
+        </p:spPr>
+        <p:txBody>
+          <a:bodyPr wrap="square" anchor="t">
+            <a:spAutoFit/>
+          </a:bodyPr>
+          <a:lstStyle/>
+          <a:p>
+            <a:pPr algn="l">
+              <a:lnSpc>
+                <a:spcPct val="130000"/>
+              </a:lnSpc>
+              <a:spcAft>
+                <a:spcPts val="600"/>
+              </a:spcAft>
+            </a:pPr>
+            <a:r>
+              <a:rPr sz="1450" b="0">
+                <a:solidFill>
+                  <a:srgbClr val="010328"/>
+                </a:solidFill>
+                <a:latin typeface="微软雅黑"/>
+              </a:rPr>
+              <a:t>答辩日。王主任、方总监和平台吴工都坐在台下。你要交付的，是把12周所学装进一个完整的《工业互联网数据处理系统》——第23次课终验预答辩，第24次课正式答辩。</a:t>
+            </a:r>
+          </a:p>
+        </p:txBody>
+      </p:sp>
+      <p:pic>
+        <p:nvPicPr>
+          <p:cNvPr id="9" name="Picture 8" descr="W12_场景.png"/>
+          <p:cNvPicPr>
+            <a:picLocks noChangeAspect="1"/>
+          </p:cNvPicPr>
+          <p:nvPr/>
+        </p:nvPicPr>
+        <p:blipFill>
+          <a:blip r:embed="rId2"/>
+          <a:stretch>
+            <a:fillRect/>
+          </a:stretch>
+        </p:blipFill>
+        <p:spPr>
+          <a:xfrm>
+            <a:off x="7250000" y="2580000"/>
+            <a:ext cx="4150000" cy="3600000"/>
+          </a:xfrm>
+          <a:prstGeom prst="rect">
+            <a:avLst/>
+          </a:prstGeom>
+        </p:spPr>
+      </p:pic>
+      <p:sp>
+        <p:nvSpPr>
+          <p:cNvPr id="10" name="Rectangle 9"/>
+          <p:cNvSpPr/>
+          <p:nvPr/>
+        </p:nvSpPr>
+        <p:spPr>
+          <a:xfrm>
+            <a:off x="500000" y="6500000"/>
+            <a:ext cx="11100000" cy="20000"/>
+          </a:xfrm>
+          <a:prstGeom prst="rect">
+            <a:avLst/>
+          </a:prstGeom>
+          <a:solidFill>
+            <a:srgbClr val="C9D4EE"/>
+          </a:solidFill>
+          <a:ln>
+            <a:noFill/>
+          </a:ln>
+          <a:effectLst/>
+        </p:spPr>
+        <p:style>
+          <a:lnRef idx="1">
+            <a:schemeClr val="accent1"/>
+          </a:lnRef>
+          <a:fillRef idx="3">
+            <a:schemeClr val="accent1"/>
+          </a:fillRef>
+          <a:effectRef idx="2">
+            <a:schemeClr val="accent1"/>
+          </a:effectRef>
+          <a:fontRef idx="minor">
+            <a:schemeClr val="lt1"/>
+          </a:fontRef>
+        </p:style>
+        <p:txBody>
+          <a:bodyPr rtlCol="0" anchor="ctr"/>
+          <a:lstStyle/>
+          <a:p>
+            <a:pPr algn="ctr"/>
+          </a:p>
+        </p:txBody>
+      </p:sp>
+      <p:sp>
+        <p:nvSpPr>
+          <p:cNvPr id="11" name="TextBox 10"/>
+          <p:cNvSpPr txBox="1"/>
+          <p:nvPr/>
+        </p:nvSpPr>
+        <p:spPr>
+          <a:xfrm>
+            <a:off x="500000" y="6540000"/>
+            <a:ext cx="7000000" cy="300000"/>
+          </a:xfrm>
+          <a:prstGeom prst="rect">
+            <a:avLst/>
+          </a:prstGeom>
+          <a:noFill/>
+        </p:spPr>
+        <p:txBody>
+          <a:bodyPr wrap="square" anchor="t">
+            <a:spAutoFit/>
+          </a:bodyPr>
+          <a:lstStyle/>
+          <a:p>
+            <a:pPr algn="l">
+              <a:lnSpc>
+                <a:spcPct val="110000"/>
+              </a:lnSpc>
+              <a:spcAft>
+                <a:spcPts val="600"/>
+              </a:spcAft>
+            </a:pPr>
+            <a:r>
               <a:rPr sz="1000" b="0">
                 <a:solidFill>
                   <a:srgbClr val="8A97B5"/>
@@ -5644,7 +8239,7 @@
       </p:sp>
       <p:sp>
         <p:nvSpPr>
-          <p:cNvPr id="19" name="TextBox 18"/>
+          <p:cNvPr id="12" name="TextBox 11"/>
           <p:cNvSpPr txBox="1"/>
           <p:nvPr/>
         </p:nvSpPr>
@@ -5679,7 +8274,7 @@
                 </a:solidFill>
                 <a:latin typeface="微软雅黑"/>
               </a:rPr>
-              <a:t>3 / 7</a:t>
+              <a:t>3 / 13</a:t>
             </a:r>
           </a:p>
         </p:txBody>
@@ -5792,14 +8387,58 @@
       </p:sp>
       <p:sp>
         <p:nvSpPr>
-          <p:cNvPr id="4" name="TextBox 3"/>
+          <p:cNvPr id="4" name="Rectangle 3"/>
+          <p:cNvSpPr/>
+          <p:nvPr/>
+        </p:nvSpPr>
+        <p:spPr>
+          <a:xfrm>
+            <a:off x="600000" y="230000"/>
+            <a:ext cx="700000" cy="700000"/>
+          </a:xfrm>
+          <a:prstGeom prst="rect">
+            <a:avLst/>
+          </a:prstGeom>
+          <a:solidFill>
+            <a:srgbClr val="F5670F"/>
+          </a:solidFill>
+          <a:ln>
+            <a:noFill/>
+          </a:ln>
+          <a:effectLst/>
+        </p:spPr>
+        <p:style>
+          <a:lnRef idx="1">
+            <a:schemeClr val="accent1"/>
+          </a:lnRef>
+          <a:fillRef idx="3">
+            <a:schemeClr val="accent1"/>
+          </a:fillRef>
+          <a:effectRef idx="2">
+            <a:schemeClr val="accent1"/>
+          </a:effectRef>
+          <a:fontRef idx="minor">
+            <a:schemeClr val="lt1"/>
+          </a:fontRef>
+        </p:style>
+        <p:txBody>
+          <a:bodyPr rtlCol="0" anchor="ctr"/>
+          <a:lstStyle/>
+          <a:p>
+            <a:pPr algn="ctr"/>
+          </a:p>
+        </p:txBody>
+      </p:sp>
+      <p:sp>
+        <p:nvSpPr>
+          <p:cNvPr id="5" name="TextBox 4"/>
           <p:cNvSpPr txBox="1"/>
           <p:nvPr/>
         </p:nvSpPr>
         <p:spPr>
           <a:xfrm>
-            <a:off x="700000" y="300000"/>
-            <a:ext cx="10792000" cy="700000"/>
+            <a:off x="600000" y="255000"/>
+            <a:ext cx="700000" cy="660000"/>
           </a:xfrm>
           <a:prstGeom prst="rect">
             <a:avLst/>
@@ -5807,7 +8446,49 @@
           <a:noFill/>
         </p:spPr>
         <p:txBody>
-          <a:bodyPr wrap="square" anchor="ctr">
+          <a:bodyPr wrap="square" anchor="t">
+            <a:spAutoFit/>
+          </a:bodyPr>
+          <a:lstStyle/>
+          <a:p>
+            <a:pPr algn="ctr">
+              <a:lnSpc>
+                <a:spcPct val="110000"/>
+              </a:lnSpc>
+              <a:spcAft>
+                <a:spcPts val="600"/>
+              </a:spcAft>
+            </a:pPr>
+            <a:r>
+              <a:rPr sz="2400" b="1">
+                <a:solidFill>
+                  <a:srgbClr val="FFFFFF"/>
+                </a:solidFill>
+                <a:latin typeface="微软雅黑"/>
+              </a:rPr>
+              <a:t>1</a:t>
+            </a:r>
+          </a:p>
+        </p:txBody>
+      </p:sp>
+      <p:sp>
+        <p:nvSpPr>
+          <p:cNvPr id="6" name="TextBox 5"/>
+          <p:cNvSpPr txBox="1"/>
+          <p:nvPr/>
+        </p:nvSpPr>
+        <p:spPr>
+          <a:xfrm>
+            <a:off x="1500000" y="300000"/>
+            <a:ext cx="9992000" cy="700000"/>
+          </a:xfrm>
+          <a:prstGeom prst="rect">
+            <a:avLst/>
+          </a:prstGeom>
+          <a:noFill/>
+        </p:spPr>
+        <p:txBody>
+          <a:bodyPr wrap="square" anchor="t">
             <a:spAutoFit/>
           </a:bodyPr>
           <a:lstStyle/>
@@ -5827,27 +8508,27 @@
                 </a:solidFill>
                 <a:latin typeface="微软雅黑"/>
               </a:rPr>
-              <a:t>正式答辩流程</a:t>
-            </a:r>
-          </a:p>
-        </p:txBody>
-      </p:sp>
-      <p:sp>
-        <p:nvSpPr>
-          <p:cNvPr id="5" name="Rectangle 4"/>
+              <a:t>正式答辩专场（1）</a:t>
+            </a:r>
+          </a:p>
+        </p:txBody>
+      </p:sp>
+      <p:sp>
+        <p:nvSpPr>
+          <p:cNvPr id="7" name="Rectangle 6"/>
           <p:cNvSpPr/>
           <p:nvPr/>
         </p:nvSpPr>
         <p:spPr>
           <a:xfrm>
-            <a:off x="800000" y="2000000"/>
-            <a:ext cx="3400000" cy="700000"/>
+            <a:off x="820000" y="2160000"/>
+            <a:ext cx="120000" cy="120000"/>
           </a:xfrm>
           <a:prstGeom prst="rect">
             <a:avLst/>
           </a:prstGeom>
           <a:solidFill>
-            <a:srgbClr val="010328"/>
+            <a:srgbClr val="F5670F"/>
           </a:solidFill>
           <a:ln>
             <a:noFill/>
@@ -5878,14 +8559,14 @@
       </p:sp>
       <p:sp>
         <p:nvSpPr>
-          <p:cNvPr id="6" name="TextBox 5"/>
+          <p:cNvPr id="8" name="TextBox 7"/>
           <p:cNvSpPr txBox="1"/>
           <p:nvPr/>
         </p:nvSpPr>
         <p:spPr>
           <a:xfrm>
-            <a:off x="800000" y="2120000"/>
-            <a:ext cx="3400000" cy="500000"/>
+            <a:off x="1100000" y="2050000"/>
+            <a:ext cx="10200000" cy="680000"/>
           </a:xfrm>
           <a:prstGeom prst="rect">
             <a:avLst/>
@@ -5898,42 +8579,42 @@
           </a:bodyPr>
           <a:lstStyle/>
           <a:p>
-            <a:pPr algn="ctr">
+            <a:pPr algn="l">
               <a:lnSpc>
-                <a:spcPct val="110000"/>
+                <a:spcPct val="125000"/>
               </a:lnSpc>
               <a:spcAft>
                 <a:spcPts val="600"/>
               </a:spcAft>
             </a:pPr>
             <a:r>
-              <a:rPr sz="1400" b="1">
-                <a:solidFill>
-                  <a:srgbClr val="FFFFFF"/>
+              <a:rPr sz="1500" b="0">
+                <a:solidFill>
+                  <a:srgbClr val="010328"/>
                 </a:solidFill>
                 <a:latin typeface="微软雅黑"/>
               </a:rPr>
-              <a:t>环节</a:t>
-            </a:r>
-          </a:p>
-        </p:txBody>
-      </p:sp>
-      <p:sp>
-        <p:nvSpPr>
-          <p:cNvPr id="7" name="Rectangle 6"/>
+              <a:t>项目演示：现场运行系统、展示输出报告；</a:t>
+            </a:r>
+          </a:p>
+        </p:txBody>
+      </p:sp>
+      <p:sp>
+        <p:nvSpPr>
+          <p:cNvPr id="9" name="Rectangle 8"/>
           <p:cNvSpPr/>
           <p:nvPr/>
         </p:nvSpPr>
         <p:spPr>
           <a:xfrm>
-            <a:off x="4200000" y="2000000"/>
-            <a:ext cx="2400000" cy="700000"/>
+            <a:off x="820000" y="2840000"/>
+            <a:ext cx="120000" cy="120000"/>
           </a:xfrm>
           <a:prstGeom prst="rect">
             <a:avLst/>
           </a:prstGeom>
           <a:solidFill>
-            <a:srgbClr val="010328"/>
+            <a:srgbClr val="F5670F"/>
           </a:solidFill>
           <a:ln>
             <a:noFill/>
@@ -5964,14 +8645,14 @@
       </p:sp>
       <p:sp>
         <p:nvSpPr>
-          <p:cNvPr id="8" name="TextBox 7"/>
+          <p:cNvPr id="10" name="TextBox 9"/>
           <p:cNvSpPr txBox="1"/>
           <p:nvPr/>
         </p:nvSpPr>
         <p:spPr>
           <a:xfrm>
-            <a:off x="4200000" y="2120000"/>
-            <a:ext cx="2400000" cy="500000"/>
+            <a:off x="1100000" y="2730000"/>
+            <a:ext cx="10200000" cy="680000"/>
           </a:xfrm>
           <a:prstGeom prst="rect">
             <a:avLst/>
@@ -5984,42 +8665,42 @@
           </a:bodyPr>
           <a:lstStyle/>
           <a:p>
-            <a:pPr algn="ctr">
+            <a:pPr algn="l">
               <a:lnSpc>
-                <a:spcPct val="110000"/>
+                <a:spcPct val="125000"/>
               </a:lnSpc>
               <a:spcAft>
                 <a:spcPts val="600"/>
               </a:spcAft>
             </a:pPr>
             <a:r>
-              <a:rPr sz="1400" b="1">
-                <a:solidFill>
-                  <a:srgbClr val="FFFFFF"/>
+              <a:rPr sz="1500" b="0">
+                <a:solidFill>
+                  <a:srgbClr val="010328"/>
                 </a:solidFill>
                 <a:latin typeface="微软雅黑"/>
               </a:rPr>
-              <a:t>时长</a:t>
-            </a:r>
-          </a:p>
-        </p:txBody>
-      </p:sp>
-      <p:sp>
-        <p:nvSpPr>
-          <p:cNvPr id="9" name="Rectangle 8"/>
+              <a:t>项目答辩：架构讲解、技术问答、创新点陈述；</a:t>
+            </a:r>
+          </a:p>
+        </p:txBody>
+      </p:sp>
+      <p:sp>
+        <p:nvSpPr>
+          <p:cNvPr id="11" name="Rectangle 10"/>
           <p:cNvSpPr/>
           <p:nvPr/>
         </p:nvSpPr>
         <p:spPr>
           <a:xfrm>
-            <a:off x="6600000" y="2000000"/>
-            <a:ext cx="2400000" cy="700000"/>
+            <a:off x="820000" y="3520000"/>
+            <a:ext cx="120000" cy="120000"/>
           </a:xfrm>
           <a:prstGeom prst="rect">
             <a:avLst/>
           </a:prstGeom>
           <a:solidFill>
-            <a:srgbClr val="010328"/>
+            <a:srgbClr val="F5670F"/>
           </a:solidFill>
           <a:ln>
             <a:noFill/>
@@ -6050,14 +8731,14 @@
       </p:sp>
       <p:sp>
         <p:nvSpPr>
-          <p:cNvPr id="10" name="TextBox 9"/>
+          <p:cNvPr id="12" name="TextBox 11"/>
           <p:cNvSpPr txBox="1"/>
           <p:nvPr/>
         </p:nvSpPr>
         <p:spPr>
           <a:xfrm>
-            <a:off x="6600000" y="2120000"/>
-            <a:ext cx="2400000" cy="500000"/>
+            <a:off x="1100000" y="3410000"/>
+            <a:ext cx="10200000" cy="900000"/>
           </a:xfrm>
           <a:prstGeom prst="rect">
             <a:avLst/>
@@ -6070,47 +8751,45 @@
           </a:bodyPr>
           <a:lstStyle/>
           <a:p>
-            <a:pPr algn="ctr">
+            <a:pPr algn="l">
               <a:lnSpc>
-                <a:spcPct val="110000"/>
+                <a:spcPct val="125000"/>
               </a:lnSpc>
               <a:spcAft>
                 <a:spcPts val="600"/>
               </a:spcAft>
             </a:pPr>
             <a:r>
-              <a:rPr sz="1400" b="1">
-                <a:solidFill>
-                  <a:srgbClr val="FFFFFF"/>
+              <a:rPr sz="1500" b="0">
+                <a:solidFill>
+                  <a:srgbClr val="010328"/>
                 </a:solidFill>
                 <a:latin typeface="微软雅黑"/>
               </a:rPr>
-              <a:t>要求</a:t>
-            </a:r>
-          </a:p>
-        </p:txBody>
-      </p:sp>
-      <p:sp>
-        <p:nvSpPr>
-          <p:cNvPr id="11" name="Rectangle 10"/>
+              <a:t>答辩节奏：≤6组按“8分钟演示+5分钟问答”；♡6组切换“5分钟演示+3分钟问答”，且演示视频（≤3分钟）于课前1天预收、教师预看并带问题入场；</a:t>
+            </a:r>
+          </a:p>
+        </p:txBody>
+      </p:sp>
+      <p:sp>
+        <p:nvSpPr>
+          <p:cNvPr id="13" name="Rectangle 12"/>
           <p:cNvSpPr/>
           <p:nvPr/>
         </p:nvSpPr>
         <p:spPr>
           <a:xfrm>
-            <a:off x="800000" y="2700000"/>
-            <a:ext cx="3400000" cy="620000"/>
+            <a:off x="820000" y="4460000"/>
+            <a:ext cx="120000" cy="120000"/>
           </a:xfrm>
           <a:prstGeom prst="rect">
             <a:avLst/>
           </a:prstGeom>
           <a:solidFill>
-            <a:srgbClr val="F3F6FD"/>
+            <a:srgbClr val="F5670F"/>
           </a:solidFill>
           <a:ln>
-            <a:solidFill>
-              <a:srgbClr val="C9D4EE"/>
-            </a:solidFill>
+            <a:noFill/>
           </a:ln>
           <a:effectLst/>
         </p:spPr>
@@ -6138,14 +8817,14 @@
       </p:sp>
       <p:sp>
         <p:nvSpPr>
-          <p:cNvPr id="12" name="TextBox 11"/>
+          <p:cNvPr id="14" name="TextBox 13"/>
           <p:cNvSpPr txBox="1"/>
           <p:nvPr/>
         </p:nvSpPr>
         <p:spPr>
           <a:xfrm>
-            <a:off x="800000" y="2800000"/>
-            <a:ext cx="3400000" cy="480000"/>
+            <a:off x="1100000" y="4350000"/>
+            <a:ext cx="10200000" cy="680000"/>
           </a:xfrm>
           <a:prstGeom prst="rect">
             <a:avLst/>
@@ -6158,47 +8837,45 @@
           </a:bodyPr>
           <a:lstStyle/>
           <a:p>
-            <a:pPr algn="ctr">
+            <a:pPr algn="l">
               <a:lnSpc>
-                <a:spcPct val="110000"/>
+                <a:spcPct val="125000"/>
               </a:lnSpc>
               <a:spcAft>
                 <a:spcPts val="600"/>
               </a:spcAft>
             </a:pPr>
             <a:r>
-              <a:rPr sz="1300" b="1">
+              <a:rPr sz="1500" b="0">
                 <a:solidFill>
                   <a:srgbClr val="010328"/>
                 </a:solidFill>
                 <a:latin typeface="微软雅黑"/>
               </a:rPr>
-              <a:t>演示</a:t>
-            </a:r>
-          </a:p>
-        </p:txBody>
-      </p:sp>
-      <p:sp>
-        <p:nvSpPr>
-          <p:cNvPr id="13" name="Rectangle 12"/>
+              <a:t>多元评价：教师评价+组间互评+企业导师点评；</a:t>
+            </a:r>
+          </a:p>
+        </p:txBody>
+      </p:sp>
+      <p:sp>
+        <p:nvSpPr>
+          <p:cNvPr id="15" name="Rectangle 14"/>
           <p:cNvSpPr/>
           <p:nvPr/>
         </p:nvSpPr>
         <p:spPr>
           <a:xfrm>
-            <a:off x="4200000" y="2700000"/>
-            <a:ext cx="2400000" cy="620000"/>
+            <a:off x="820000" y="5140000"/>
+            <a:ext cx="120000" cy="120000"/>
           </a:xfrm>
           <a:prstGeom prst="rect">
             <a:avLst/>
           </a:prstGeom>
           <a:solidFill>
-            <a:srgbClr val="F3F6FD"/>
+            <a:srgbClr val="F5670F"/>
           </a:solidFill>
           <a:ln>
-            <a:solidFill>
-              <a:srgbClr val="C9D4EE"/>
-            </a:solidFill>
+            <a:noFill/>
           </a:ln>
           <a:effectLst/>
         </p:spPr>
@@ -6226,14 +8903,14 @@
       </p:sp>
       <p:sp>
         <p:nvSpPr>
-          <p:cNvPr id="14" name="TextBox 13"/>
+          <p:cNvPr id="16" name="TextBox 15"/>
           <p:cNvSpPr txBox="1"/>
           <p:nvPr/>
         </p:nvSpPr>
         <p:spPr>
           <a:xfrm>
-            <a:off x="4200000" y="2800000"/>
-            <a:ext cx="2400000" cy="480000"/>
+            <a:off x="1100000" y="5030000"/>
+            <a:ext cx="10200000" cy="680000"/>
           </a:xfrm>
           <a:prstGeom prst="rect">
             <a:avLst/>
@@ -6246,47 +8923,45 @@
           </a:bodyPr>
           <a:lstStyle/>
           <a:p>
-            <a:pPr algn="ctr">
+            <a:pPr algn="l">
               <a:lnSpc>
-                <a:spcPct val="110000"/>
+                <a:spcPct val="125000"/>
               </a:lnSpc>
               <a:spcAft>
                 <a:spcPts val="600"/>
               </a:spcAft>
             </a:pPr>
             <a:r>
-              <a:rPr sz="1300" b="0">
+              <a:rPr sz="1500" b="0">
                 <a:solidFill>
                   <a:srgbClr val="010328"/>
                 </a:solidFill>
                 <a:latin typeface="微软雅黑"/>
               </a:rPr>
-              <a:t>8min</a:t>
-            </a:r>
-          </a:p>
-        </p:txBody>
-      </p:sp>
-      <p:sp>
-        <p:nvSpPr>
-          <p:cNvPr id="15" name="Rectangle 14"/>
+              <a:t>课程总结与后续课程（《AI应用基础》进阶）衔接说明。</a:t>
+            </a:r>
+          </a:p>
+        </p:txBody>
+      </p:sp>
+      <p:sp>
+        <p:nvSpPr>
+          <p:cNvPr id="17" name="Rectangle 16"/>
           <p:cNvSpPr/>
           <p:nvPr/>
         </p:nvSpPr>
         <p:spPr>
           <a:xfrm>
-            <a:off x="6600000" y="2700000"/>
-            <a:ext cx="2400000" cy="620000"/>
+            <a:off x="500000" y="6500000"/>
+            <a:ext cx="11100000" cy="20000"/>
           </a:xfrm>
           <a:prstGeom prst="rect">
             <a:avLst/>
           </a:prstGeom>
           <a:solidFill>
-            <a:srgbClr val="F3F6FD"/>
+            <a:srgbClr val="C9D4EE"/>
           </a:solidFill>
           <a:ln>
-            <a:solidFill>
-              <a:srgbClr val="C9D4EE"/>
-            </a:solidFill>
+            <a:noFill/>
           </a:ln>
           <a:effectLst/>
         </p:spPr>
@@ -6314,320 +8989,14 @@
       </p:sp>
       <p:sp>
         <p:nvSpPr>
-          <p:cNvPr id="16" name="TextBox 15"/>
-          <p:cNvSpPr txBox="1"/>
-          <p:nvPr/>
-        </p:nvSpPr>
-        <p:spPr>
-          <a:xfrm>
-            <a:off x="6600000" y="2800000"/>
-            <a:ext cx="2400000" cy="480000"/>
-          </a:xfrm>
-          <a:prstGeom prst="rect">
-            <a:avLst/>
-          </a:prstGeom>
-          <a:noFill/>
-        </p:spPr>
-        <p:txBody>
-          <a:bodyPr wrap="square" anchor="t">
-            <a:spAutoFit/>
-          </a:bodyPr>
-          <a:lstStyle/>
-          <a:p>
-            <a:pPr algn="ctr">
-              <a:lnSpc>
-                <a:spcPct val="110000"/>
-              </a:lnSpc>
-              <a:spcAft>
-                <a:spcPts val="600"/>
-              </a:spcAft>
-            </a:pPr>
-            <a:r>
-              <a:rPr sz="1300" b="0">
-                <a:solidFill>
-                  <a:srgbClr val="010328"/>
-                </a:solidFill>
-                <a:latin typeface="微软雅黑"/>
-              </a:rPr>
-              <a:t>现场运行</a:t>
-            </a:r>
-          </a:p>
-        </p:txBody>
-      </p:sp>
-      <p:sp>
-        <p:nvSpPr>
-          <p:cNvPr id="17" name="Rectangle 16"/>
-          <p:cNvSpPr/>
-          <p:nvPr/>
-        </p:nvSpPr>
-        <p:spPr>
-          <a:xfrm>
-            <a:off x="800000" y="3320000"/>
-            <a:ext cx="3400000" cy="620000"/>
-          </a:xfrm>
-          <a:prstGeom prst="rect">
-            <a:avLst/>
-          </a:prstGeom>
-          <a:solidFill>
-            <a:srgbClr val="FFFFFF"/>
-          </a:solidFill>
-          <a:ln>
-            <a:solidFill>
-              <a:srgbClr val="C9D4EE"/>
-            </a:solidFill>
-          </a:ln>
-          <a:effectLst/>
-        </p:spPr>
-        <p:style>
-          <a:lnRef idx="1">
-            <a:schemeClr val="accent1"/>
-          </a:lnRef>
-          <a:fillRef idx="3">
-            <a:schemeClr val="accent1"/>
-          </a:fillRef>
-          <a:effectRef idx="2">
-            <a:schemeClr val="accent1"/>
-          </a:effectRef>
-          <a:fontRef idx="minor">
-            <a:schemeClr val="lt1"/>
-          </a:fontRef>
-        </p:style>
-        <p:txBody>
-          <a:bodyPr rtlCol="0" anchor="ctr"/>
-          <a:lstStyle/>
-          <a:p>
-            <a:pPr algn="ctr"/>
-          </a:p>
-        </p:txBody>
-      </p:sp>
-      <p:sp>
-        <p:nvSpPr>
           <p:cNvPr id="18" name="TextBox 17"/>
           <p:cNvSpPr txBox="1"/>
           <p:nvPr/>
         </p:nvSpPr>
         <p:spPr>
           <a:xfrm>
-            <a:off x="800000" y="3420000"/>
-            <a:ext cx="3400000" cy="480000"/>
-          </a:xfrm>
-          <a:prstGeom prst="rect">
-            <a:avLst/>
-          </a:prstGeom>
-          <a:noFill/>
-        </p:spPr>
-        <p:txBody>
-          <a:bodyPr wrap="square" anchor="t">
-            <a:spAutoFit/>
-          </a:bodyPr>
-          <a:lstStyle/>
-          <a:p>
-            <a:pPr algn="ctr">
-              <a:lnSpc>
-                <a:spcPct val="110000"/>
-              </a:lnSpc>
-              <a:spcAft>
-                <a:spcPts val="600"/>
-              </a:spcAft>
-            </a:pPr>
-            <a:r>
-              <a:rPr sz="1300" b="1">
-                <a:solidFill>
-                  <a:srgbClr val="010328"/>
-                </a:solidFill>
-                <a:latin typeface="微软雅黑"/>
-              </a:rPr>
-              <a:t>问答</a:t>
-            </a:r>
-          </a:p>
-        </p:txBody>
-      </p:sp>
-      <p:sp>
-        <p:nvSpPr>
-          <p:cNvPr id="19" name="Rectangle 18"/>
-          <p:cNvSpPr/>
-          <p:nvPr/>
-        </p:nvSpPr>
-        <p:spPr>
-          <a:xfrm>
-            <a:off x="4200000" y="3320000"/>
-            <a:ext cx="2400000" cy="620000"/>
-          </a:xfrm>
-          <a:prstGeom prst="rect">
-            <a:avLst/>
-          </a:prstGeom>
-          <a:solidFill>
-            <a:srgbClr val="FFFFFF"/>
-          </a:solidFill>
-          <a:ln>
-            <a:solidFill>
-              <a:srgbClr val="C9D4EE"/>
-            </a:solidFill>
-          </a:ln>
-          <a:effectLst/>
-        </p:spPr>
-        <p:style>
-          <a:lnRef idx="1">
-            <a:schemeClr val="accent1"/>
-          </a:lnRef>
-          <a:fillRef idx="3">
-            <a:schemeClr val="accent1"/>
-          </a:fillRef>
-          <a:effectRef idx="2">
-            <a:schemeClr val="accent1"/>
-          </a:effectRef>
-          <a:fontRef idx="minor">
-            <a:schemeClr val="lt1"/>
-          </a:fontRef>
-        </p:style>
-        <p:txBody>
-          <a:bodyPr rtlCol="0" anchor="ctr"/>
-          <a:lstStyle/>
-          <a:p>
-            <a:pPr algn="ctr"/>
-          </a:p>
-        </p:txBody>
-      </p:sp>
-      <p:sp>
-        <p:nvSpPr>
-          <p:cNvPr id="20" name="TextBox 19"/>
-          <p:cNvSpPr txBox="1"/>
-          <p:nvPr/>
-        </p:nvSpPr>
-        <p:spPr>
-          <a:xfrm>
-            <a:off x="4200000" y="3420000"/>
-            <a:ext cx="2400000" cy="480000"/>
-          </a:xfrm>
-          <a:prstGeom prst="rect">
-            <a:avLst/>
-          </a:prstGeom>
-          <a:noFill/>
-        </p:spPr>
-        <p:txBody>
-          <a:bodyPr wrap="square" anchor="t">
-            <a:spAutoFit/>
-          </a:bodyPr>
-          <a:lstStyle/>
-          <a:p>
-            <a:pPr algn="ctr">
-              <a:lnSpc>
-                <a:spcPct val="110000"/>
-              </a:lnSpc>
-              <a:spcAft>
-                <a:spcPts val="600"/>
-              </a:spcAft>
-            </a:pPr>
-            <a:r>
-              <a:rPr sz="1300" b="0">
-                <a:solidFill>
-                  <a:srgbClr val="010328"/>
-                </a:solidFill>
-                <a:latin typeface="微软雅黑"/>
-              </a:rPr>
-              <a:t>5min</a:t>
-            </a:r>
-          </a:p>
-        </p:txBody>
-      </p:sp>
-      <p:sp>
-        <p:nvSpPr>
-          <p:cNvPr id="21" name="Rectangle 20"/>
-          <p:cNvSpPr/>
-          <p:nvPr/>
-        </p:nvSpPr>
-        <p:spPr>
-          <a:xfrm>
-            <a:off x="6600000" y="3320000"/>
-            <a:ext cx="2400000" cy="620000"/>
-          </a:xfrm>
-          <a:prstGeom prst="rect">
-            <a:avLst/>
-          </a:prstGeom>
-          <a:solidFill>
-            <a:srgbClr val="FFFFFF"/>
-          </a:solidFill>
-          <a:ln>
-            <a:solidFill>
-              <a:srgbClr val="C9D4EE"/>
-            </a:solidFill>
-          </a:ln>
-          <a:effectLst/>
-        </p:spPr>
-        <p:style>
-          <a:lnRef idx="1">
-            <a:schemeClr val="accent1"/>
-          </a:lnRef>
-          <a:fillRef idx="3">
-            <a:schemeClr val="accent1"/>
-          </a:fillRef>
-          <a:effectRef idx="2">
-            <a:schemeClr val="accent1"/>
-          </a:effectRef>
-          <a:fontRef idx="minor">
-            <a:schemeClr val="lt1"/>
-          </a:fontRef>
-        </p:style>
-        <p:txBody>
-          <a:bodyPr rtlCol="0" anchor="ctr"/>
-          <a:lstStyle/>
-          <a:p>
-            <a:pPr algn="ctr"/>
-          </a:p>
-        </p:txBody>
-      </p:sp>
-      <p:sp>
-        <p:nvSpPr>
-          <p:cNvPr id="22" name="TextBox 21"/>
-          <p:cNvSpPr txBox="1"/>
-          <p:nvPr/>
-        </p:nvSpPr>
-        <p:spPr>
-          <a:xfrm>
-            <a:off x="6600000" y="3420000"/>
-            <a:ext cx="2400000" cy="480000"/>
-          </a:xfrm>
-          <a:prstGeom prst="rect">
-            <a:avLst/>
-          </a:prstGeom>
-          <a:noFill/>
-        </p:spPr>
-        <p:txBody>
-          <a:bodyPr wrap="square" anchor="t">
-            <a:spAutoFit/>
-          </a:bodyPr>
-          <a:lstStyle/>
-          <a:p>
-            <a:pPr algn="ctr">
-              <a:lnSpc>
-                <a:spcPct val="110000"/>
-              </a:lnSpc>
-              <a:spcAft>
-                <a:spcPts val="600"/>
-              </a:spcAft>
-            </a:pPr>
-            <a:r>
-              <a:rPr sz="1300" b="0">
-                <a:solidFill>
-                  <a:srgbClr val="010328"/>
-                </a:solidFill>
-                <a:latin typeface="微软雅黑"/>
-              </a:rPr>
-              <a:t>必答+抽答</a:t>
-            </a:r>
-          </a:p>
-        </p:txBody>
-      </p:sp>
-      <p:sp>
-        <p:nvSpPr>
-          <p:cNvPr id="23" name="TextBox 22"/>
-          <p:cNvSpPr txBox="1"/>
-          <p:nvPr/>
-        </p:nvSpPr>
-        <p:spPr>
-          <a:xfrm>
-            <a:off x="800000" y="4060000"/>
-            <a:ext cx="10600000" cy="380000"/>
+            <a:off x="500000" y="6540000"/>
+            <a:ext cx="7000000" cy="300000"/>
           </a:xfrm>
           <a:prstGeom prst="rect">
             <a:avLst/>
@@ -6649,92 +9018,6 @@
               </a:spcAft>
             </a:pPr>
             <a:r>
-              <a:rPr sz="1300" b="1">
-                <a:solidFill>
-                  <a:srgbClr val="F5670F"/>
-                </a:solidFill>
-                <a:latin typeface="微软雅黑"/>
-              </a:rPr>
-              <a:t>按D/C/B/A四级现场评分</a:t>
-            </a:r>
-          </a:p>
-        </p:txBody>
-      </p:sp>
-      <p:sp>
-        <p:nvSpPr>
-          <p:cNvPr id="24" name="Rectangle 23"/>
-          <p:cNvSpPr/>
-          <p:nvPr/>
-        </p:nvSpPr>
-        <p:spPr>
-          <a:xfrm>
-            <a:off x="500000" y="6500000"/>
-            <a:ext cx="11100000" cy="20000"/>
-          </a:xfrm>
-          <a:prstGeom prst="rect">
-            <a:avLst/>
-          </a:prstGeom>
-          <a:solidFill>
-            <a:srgbClr val="C9D4EE"/>
-          </a:solidFill>
-          <a:ln>
-            <a:noFill/>
-          </a:ln>
-          <a:effectLst/>
-        </p:spPr>
-        <p:style>
-          <a:lnRef idx="1">
-            <a:schemeClr val="accent1"/>
-          </a:lnRef>
-          <a:fillRef idx="3">
-            <a:schemeClr val="accent1"/>
-          </a:fillRef>
-          <a:effectRef idx="2">
-            <a:schemeClr val="accent1"/>
-          </a:effectRef>
-          <a:fontRef idx="minor">
-            <a:schemeClr val="lt1"/>
-          </a:fontRef>
-        </p:style>
-        <p:txBody>
-          <a:bodyPr rtlCol="0" anchor="ctr"/>
-          <a:lstStyle/>
-          <a:p>
-            <a:pPr algn="ctr"/>
-          </a:p>
-        </p:txBody>
-      </p:sp>
-      <p:sp>
-        <p:nvSpPr>
-          <p:cNvPr id="25" name="TextBox 24"/>
-          <p:cNvSpPr txBox="1"/>
-          <p:nvPr/>
-        </p:nvSpPr>
-        <p:spPr>
-          <a:xfrm>
-            <a:off x="500000" y="6540000"/>
-            <a:ext cx="7000000" cy="300000"/>
-          </a:xfrm>
-          <a:prstGeom prst="rect">
-            <a:avLst/>
-          </a:prstGeom>
-          <a:noFill/>
-        </p:spPr>
-        <p:txBody>
-          <a:bodyPr wrap="square" anchor="t">
-            <a:spAutoFit/>
-          </a:bodyPr>
-          <a:lstStyle/>
-          <a:p>
-            <a:pPr algn="l">
-              <a:lnSpc>
-                <a:spcPct val="110000"/>
-              </a:lnSpc>
-              <a:spcAft>
-                <a:spcPts val="600"/>
-              </a:spcAft>
-            </a:pPr>
-            <a:r>
               <a:rPr sz="1000" b="0">
                 <a:solidFill>
                   <a:srgbClr val="8A97B5"/>
@@ -6748,7 +9031,7 @@
       </p:sp>
       <p:sp>
         <p:nvSpPr>
-          <p:cNvPr id="26" name="TextBox 25"/>
+          <p:cNvPr id="19" name="TextBox 18"/>
           <p:cNvSpPr txBox="1"/>
           <p:nvPr/>
         </p:nvSpPr>
@@ -6783,7 +9066,7 @@
                 </a:solidFill>
                 <a:latin typeface="微软雅黑"/>
               </a:rPr>
-              <a:t>4 / 7</a:t>
+              <a:t>4 / 13</a:t>
             </a:r>
           </a:p>
         </p:txBody>
@@ -6911,7 +9194,7 @@
           <a:noFill/>
         </p:spPr>
         <p:txBody>
-          <a:bodyPr wrap="square" anchor="t">
+          <a:bodyPr wrap="square" anchor="ctr">
             <a:spAutoFit/>
           </a:bodyPr>
           <a:lstStyle/>
@@ -6931,7 +9214,7 @@
                 </a:solidFill>
                 <a:latin typeface="微软雅黑"/>
               </a:rPr>
-              <a:t>实施任务：工单Z《综合项目答辩专场》</a:t>
+              <a:t>正式答辩流程</a:t>
             </a:r>
           </a:p>
         </p:txBody>
@@ -6944,14 +9227,14 @@
         </p:nvSpPr>
         <p:spPr>
           <a:xfrm>
-            <a:off x="800000" y="1950000"/>
-            <a:ext cx="6300000" cy="3900000"/>
+            <a:off x="800000" y="2000000"/>
+            <a:ext cx="3400000" cy="700000"/>
           </a:xfrm>
           <a:prstGeom prst="rect">
             <a:avLst/>
           </a:prstGeom>
           <a:solidFill>
-            <a:srgbClr val="F3F6FD"/>
+            <a:srgbClr val="010328"/>
           </a:solidFill>
           <a:ln>
             <a:noFill/>
@@ -6988,8 +9271,8 @@
         </p:nvSpPr>
         <p:spPr>
           <a:xfrm>
-            <a:off x="1000000" y="2100000"/>
-            <a:ext cx="5900000" cy="3600000"/>
+            <a:off x="800000" y="2120000"/>
+            <a:ext cx="3400000" cy="500000"/>
           </a:xfrm>
           <a:prstGeom prst="rect">
             <a:avLst/>
@@ -7002,103 +9285,306 @@
           </a:bodyPr>
           <a:lstStyle/>
           <a:p>
-            <a:pPr algn="l">
+            <a:pPr algn="ctr">
               <a:lnSpc>
-                <a:spcPct val="130000"/>
+                <a:spcPct val="110000"/>
               </a:lnSpc>
               <a:spcAft>
                 <a:spcPts val="600"/>
               </a:spcAft>
             </a:pPr>
             <a:r>
-              <a:rPr sz="1500" b="1">
-                <a:solidFill>
-                  <a:srgbClr val="0545E8"/>
+              <a:rPr sz="1400" b="1">
+                <a:solidFill>
+                  <a:srgbClr val="FFFFFF"/>
                 </a:solidFill>
                 <a:latin typeface="微软雅黑"/>
               </a:rPr>
-              <a:t>实施步骤</a:t>
-            </a:r>
-          </a:p>
-          <a:p>
-            <a:pPr algn="l">
+              <a:t>环节</a:t>
+            </a:r>
+          </a:p>
+        </p:txBody>
+      </p:sp>
+      <p:sp>
+        <p:nvSpPr>
+          <p:cNvPr id="7" name="Rectangle 6"/>
+          <p:cNvSpPr/>
+          <p:nvPr/>
+        </p:nvSpPr>
+        <p:spPr>
+          <a:xfrm>
+            <a:off x="4200000" y="2000000"/>
+            <a:ext cx="2400000" cy="700000"/>
+          </a:xfrm>
+          <a:prstGeom prst="rect">
+            <a:avLst/>
+          </a:prstGeom>
+          <a:solidFill>
+            <a:srgbClr val="010328"/>
+          </a:solidFill>
+          <a:ln>
+            <a:noFill/>
+          </a:ln>
+          <a:effectLst/>
+        </p:spPr>
+        <p:style>
+          <a:lnRef idx="1">
+            <a:schemeClr val="accent1"/>
+          </a:lnRef>
+          <a:fillRef idx="3">
+            <a:schemeClr val="accent1"/>
+          </a:fillRef>
+          <a:effectRef idx="2">
+            <a:schemeClr val="accent1"/>
+          </a:effectRef>
+          <a:fontRef idx="minor">
+            <a:schemeClr val="lt1"/>
+          </a:fontRef>
+        </p:style>
+        <p:txBody>
+          <a:bodyPr rtlCol="0" anchor="ctr"/>
+          <a:lstStyle/>
+          <a:p>
+            <a:pPr algn="ctr"/>
+          </a:p>
+        </p:txBody>
+      </p:sp>
+      <p:sp>
+        <p:nvSpPr>
+          <p:cNvPr id="8" name="TextBox 7"/>
+          <p:cNvSpPr txBox="1"/>
+          <p:nvPr/>
+        </p:nvSpPr>
+        <p:spPr>
+          <a:xfrm>
+            <a:off x="4200000" y="2120000"/>
+            <a:ext cx="2400000" cy="500000"/>
+          </a:xfrm>
+          <a:prstGeom prst="rect">
+            <a:avLst/>
+          </a:prstGeom>
+          <a:noFill/>
+        </p:spPr>
+        <p:txBody>
+          <a:bodyPr wrap="square" anchor="t">
+            <a:spAutoFit/>
+          </a:bodyPr>
+          <a:lstStyle/>
+          <a:p>
+            <a:pPr algn="ctr">
               <a:lnSpc>
-                <a:spcPct val="130000"/>
+                <a:spcPct val="110000"/>
               </a:lnSpc>
               <a:spcAft>
                 <a:spcPts val="600"/>
               </a:spcAft>
             </a:pPr>
             <a:r>
-              <a:rPr sz="1400" b="0">
-                <a:solidFill>
-                  <a:srgbClr val="010328"/>
+              <a:rPr sz="1400" b="1">
+                <a:solidFill>
+                  <a:srgbClr val="FFFFFF"/>
                 </a:solidFill>
                 <a:latin typeface="微软雅黑"/>
               </a:rPr>
-              <a:t>1. 正式答辩(8+5分钟)</a:t>
-            </a:r>
-          </a:p>
-          <a:p>
-            <a:pPr algn="l">
+              <a:t>时长</a:t>
+            </a:r>
+          </a:p>
+        </p:txBody>
+      </p:sp>
+      <p:sp>
+        <p:nvSpPr>
+          <p:cNvPr id="9" name="Rectangle 8"/>
+          <p:cNvSpPr/>
+          <p:nvPr/>
+        </p:nvSpPr>
+        <p:spPr>
+          <a:xfrm>
+            <a:off x="6600000" y="2000000"/>
+            <a:ext cx="2400000" cy="700000"/>
+          </a:xfrm>
+          <a:prstGeom prst="rect">
+            <a:avLst/>
+          </a:prstGeom>
+          <a:solidFill>
+            <a:srgbClr val="010328"/>
+          </a:solidFill>
+          <a:ln>
+            <a:noFill/>
+          </a:ln>
+          <a:effectLst/>
+        </p:spPr>
+        <p:style>
+          <a:lnRef idx="1">
+            <a:schemeClr val="accent1"/>
+          </a:lnRef>
+          <a:fillRef idx="3">
+            <a:schemeClr val="accent1"/>
+          </a:fillRef>
+          <a:effectRef idx="2">
+            <a:schemeClr val="accent1"/>
+          </a:effectRef>
+          <a:fontRef idx="minor">
+            <a:schemeClr val="lt1"/>
+          </a:fontRef>
+        </p:style>
+        <p:txBody>
+          <a:bodyPr rtlCol="0" anchor="ctr"/>
+          <a:lstStyle/>
+          <a:p>
+            <a:pPr algn="ctr"/>
+          </a:p>
+        </p:txBody>
+      </p:sp>
+      <p:sp>
+        <p:nvSpPr>
+          <p:cNvPr id="10" name="TextBox 9"/>
+          <p:cNvSpPr txBox="1"/>
+          <p:nvPr/>
+        </p:nvSpPr>
+        <p:spPr>
+          <a:xfrm>
+            <a:off x="6600000" y="2120000"/>
+            <a:ext cx="2400000" cy="500000"/>
+          </a:xfrm>
+          <a:prstGeom prst="rect">
+            <a:avLst/>
+          </a:prstGeom>
+          <a:noFill/>
+        </p:spPr>
+        <p:txBody>
+          <a:bodyPr wrap="square" anchor="t">
+            <a:spAutoFit/>
+          </a:bodyPr>
+          <a:lstStyle/>
+          <a:p>
+            <a:pPr algn="ctr">
               <a:lnSpc>
-                <a:spcPct val="130000"/>
+                <a:spcPct val="110000"/>
               </a:lnSpc>
               <a:spcAft>
                 <a:spcPts val="600"/>
               </a:spcAft>
             </a:pPr>
             <a:r>
-              <a:rPr sz="1400" b="0">
-                <a:solidFill>
-                  <a:srgbClr val="010328"/>
+              <a:rPr sz="1400" b="1">
+                <a:solidFill>
+                  <a:srgbClr val="FFFFFF"/>
                 </a:solidFill>
                 <a:latin typeface="微软雅黑"/>
               </a:rPr>
-              <a:t>2. 组间互评+个人反思</a:t>
-            </a:r>
-          </a:p>
-          <a:p>
-            <a:pPr algn="l">
+              <a:t>要求</a:t>
+            </a:r>
+          </a:p>
+        </p:txBody>
+      </p:sp>
+      <p:sp>
+        <p:nvSpPr>
+          <p:cNvPr id="11" name="Rectangle 10"/>
+          <p:cNvSpPr/>
+          <p:nvPr/>
+        </p:nvSpPr>
+        <p:spPr>
+          <a:xfrm>
+            <a:off x="800000" y="2700000"/>
+            <a:ext cx="3400000" cy="620000"/>
+          </a:xfrm>
+          <a:prstGeom prst="rect">
+            <a:avLst/>
+          </a:prstGeom>
+          <a:solidFill>
+            <a:srgbClr val="F3F6FD"/>
+          </a:solidFill>
+          <a:ln>
+            <a:solidFill>
+              <a:srgbClr val="C9D4EE"/>
+            </a:solidFill>
+          </a:ln>
+          <a:effectLst/>
+        </p:spPr>
+        <p:style>
+          <a:lnRef idx="1">
+            <a:schemeClr val="accent1"/>
+          </a:lnRef>
+          <a:fillRef idx="3">
+            <a:schemeClr val="accent1"/>
+          </a:fillRef>
+          <a:effectRef idx="2">
+            <a:schemeClr val="accent1"/>
+          </a:effectRef>
+          <a:fontRef idx="minor">
+            <a:schemeClr val="lt1"/>
+          </a:fontRef>
+        </p:style>
+        <p:txBody>
+          <a:bodyPr rtlCol="0" anchor="ctr"/>
+          <a:lstStyle/>
+          <a:p>
+            <a:pPr algn="ctr"/>
+          </a:p>
+        </p:txBody>
+      </p:sp>
+      <p:sp>
+        <p:nvSpPr>
+          <p:cNvPr id="12" name="TextBox 11"/>
+          <p:cNvSpPr txBox="1"/>
+          <p:nvPr/>
+        </p:nvSpPr>
+        <p:spPr>
+          <a:xfrm>
+            <a:off x="800000" y="2800000"/>
+            <a:ext cx="3400000" cy="480000"/>
+          </a:xfrm>
+          <a:prstGeom prst="rect">
+            <a:avLst/>
+          </a:prstGeom>
+          <a:noFill/>
+        </p:spPr>
+        <p:txBody>
+          <a:bodyPr wrap="square" anchor="t">
+            <a:spAutoFit/>
+          </a:bodyPr>
+          <a:lstStyle/>
+          <a:p>
+            <a:pPr algn="ctr">
               <a:lnSpc>
-                <a:spcPct val="130000"/>
+                <a:spcPct val="110000"/>
               </a:lnSpc>
               <a:spcAft>
                 <a:spcPts val="600"/>
               </a:spcAft>
             </a:pPr>
             <a:r>
-              <a:rPr sz="1400" b="0">
+              <a:rPr sz="1300" b="1">
                 <a:solidFill>
                   <a:srgbClr val="010328"/>
                 </a:solidFill>
                 <a:latin typeface="微软雅黑"/>
               </a:rPr>
-              <a:t>3. 提交代码/报告/PPT/视频/贡献表</a:t>
-            </a:r>
-          </a:p>
-        </p:txBody>
-      </p:sp>
-      <p:sp>
-        <p:nvSpPr>
-          <p:cNvPr id="7" name="Rectangle 6"/>
+              <a:t>演示</a:t>
+            </a:r>
+          </a:p>
+        </p:txBody>
+      </p:sp>
+      <p:sp>
+        <p:nvSpPr>
+          <p:cNvPr id="13" name="Rectangle 12"/>
           <p:cNvSpPr/>
           <p:nvPr/>
         </p:nvSpPr>
         <p:spPr>
           <a:xfrm>
-            <a:off x="7400000" y="1950000"/>
-            <a:ext cx="4000000" cy="1850000"/>
+            <a:off x="4200000" y="2700000"/>
+            <a:ext cx="2400000" cy="620000"/>
           </a:xfrm>
           <a:prstGeom prst="rect">
             <a:avLst/>
           </a:prstGeom>
           <a:solidFill>
-            <a:srgbClr val="E8F1E8"/>
+            <a:srgbClr val="F3F6FD"/>
           </a:solidFill>
           <a:ln>
             <a:solidFill>
-              <a:srgbClr val="0475B6"/>
+              <a:srgbClr val="C9D4EE"/>
             </a:solidFill>
           </a:ln>
           <a:effectLst/>
@@ -7127,14 +9613,408 @@
       </p:sp>
       <p:sp>
         <p:nvSpPr>
-          <p:cNvPr id="8" name="TextBox 7"/>
+          <p:cNvPr id="14" name="TextBox 13"/>
           <p:cNvSpPr txBox="1"/>
           <p:nvPr/>
         </p:nvSpPr>
         <p:spPr>
           <a:xfrm>
-            <a:off x="7550000" y="2080000"/>
-            <a:ext cx="3750000" cy="1650000"/>
+            <a:off x="4200000" y="2800000"/>
+            <a:ext cx="2400000" cy="480000"/>
+          </a:xfrm>
+          <a:prstGeom prst="rect">
+            <a:avLst/>
+          </a:prstGeom>
+          <a:noFill/>
+        </p:spPr>
+        <p:txBody>
+          <a:bodyPr wrap="square" anchor="t">
+            <a:spAutoFit/>
+          </a:bodyPr>
+          <a:lstStyle/>
+          <a:p>
+            <a:pPr algn="ctr">
+              <a:lnSpc>
+                <a:spcPct val="110000"/>
+              </a:lnSpc>
+              <a:spcAft>
+                <a:spcPts val="600"/>
+              </a:spcAft>
+            </a:pPr>
+            <a:r>
+              <a:rPr sz="1300" b="0">
+                <a:solidFill>
+                  <a:srgbClr val="010328"/>
+                </a:solidFill>
+                <a:latin typeface="微软雅黑"/>
+              </a:rPr>
+              <a:t>8min</a:t>
+            </a:r>
+          </a:p>
+        </p:txBody>
+      </p:sp>
+      <p:sp>
+        <p:nvSpPr>
+          <p:cNvPr id="15" name="Rectangle 14"/>
+          <p:cNvSpPr/>
+          <p:nvPr/>
+        </p:nvSpPr>
+        <p:spPr>
+          <a:xfrm>
+            <a:off x="6600000" y="2700000"/>
+            <a:ext cx="2400000" cy="620000"/>
+          </a:xfrm>
+          <a:prstGeom prst="rect">
+            <a:avLst/>
+          </a:prstGeom>
+          <a:solidFill>
+            <a:srgbClr val="F3F6FD"/>
+          </a:solidFill>
+          <a:ln>
+            <a:solidFill>
+              <a:srgbClr val="C9D4EE"/>
+            </a:solidFill>
+          </a:ln>
+          <a:effectLst/>
+        </p:spPr>
+        <p:style>
+          <a:lnRef idx="1">
+            <a:schemeClr val="accent1"/>
+          </a:lnRef>
+          <a:fillRef idx="3">
+            <a:schemeClr val="accent1"/>
+          </a:fillRef>
+          <a:effectRef idx="2">
+            <a:schemeClr val="accent1"/>
+          </a:effectRef>
+          <a:fontRef idx="minor">
+            <a:schemeClr val="lt1"/>
+          </a:fontRef>
+        </p:style>
+        <p:txBody>
+          <a:bodyPr rtlCol="0" anchor="ctr"/>
+          <a:lstStyle/>
+          <a:p>
+            <a:pPr algn="ctr"/>
+          </a:p>
+        </p:txBody>
+      </p:sp>
+      <p:sp>
+        <p:nvSpPr>
+          <p:cNvPr id="16" name="TextBox 15"/>
+          <p:cNvSpPr txBox="1"/>
+          <p:nvPr/>
+        </p:nvSpPr>
+        <p:spPr>
+          <a:xfrm>
+            <a:off x="6600000" y="2800000"/>
+            <a:ext cx="2400000" cy="480000"/>
+          </a:xfrm>
+          <a:prstGeom prst="rect">
+            <a:avLst/>
+          </a:prstGeom>
+          <a:noFill/>
+        </p:spPr>
+        <p:txBody>
+          <a:bodyPr wrap="square" anchor="t">
+            <a:spAutoFit/>
+          </a:bodyPr>
+          <a:lstStyle/>
+          <a:p>
+            <a:pPr algn="ctr">
+              <a:lnSpc>
+                <a:spcPct val="110000"/>
+              </a:lnSpc>
+              <a:spcAft>
+                <a:spcPts val="600"/>
+              </a:spcAft>
+            </a:pPr>
+            <a:r>
+              <a:rPr sz="1300" b="0">
+                <a:solidFill>
+                  <a:srgbClr val="010328"/>
+                </a:solidFill>
+                <a:latin typeface="微软雅黑"/>
+              </a:rPr>
+              <a:t>现场运行</a:t>
+            </a:r>
+          </a:p>
+        </p:txBody>
+      </p:sp>
+      <p:sp>
+        <p:nvSpPr>
+          <p:cNvPr id="17" name="Rectangle 16"/>
+          <p:cNvSpPr/>
+          <p:nvPr/>
+        </p:nvSpPr>
+        <p:spPr>
+          <a:xfrm>
+            <a:off x="800000" y="3320000"/>
+            <a:ext cx="3400000" cy="620000"/>
+          </a:xfrm>
+          <a:prstGeom prst="rect">
+            <a:avLst/>
+          </a:prstGeom>
+          <a:solidFill>
+            <a:srgbClr val="FFFFFF"/>
+          </a:solidFill>
+          <a:ln>
+            <a:solidFill>
+              <a:srgbClr val="C9D4EE"/>
+            </a:solidFill>
+          </a:ln>
+          <a:effectLst/>
+        </p:spPr>
+        <p:style>
+          <a:lnRef idx="1">
+            <a:schemeClr val="accent1"/>
+          </a:lnRef>
+          <a:fillRef idx="3">
+            <a:schemeClr val="accent1"/>
+          </a:fillRef>
+          <a:effectRef idx="2">
+            <a:schemeClr val="accent1"/>
+          </a:effectRef>
+          <a:fontRef idx="minor">
+            <a:schemeClr val="lt1"/>
+          </a:fontRef>
+        </p:style>
+        <p:txBody>
+          <a:bodyPr rtlCol="0" anchor="ctr"/>
+          <a:lstStyle/>
+          <a:p>
+            <a:pPr algn="ctr"/>
+          </a:p>
+        </p:txBody>
+      </p:sp>
+      <p:sp>
+        <p:nvSpPr>
+          <p:cNvPr id="18" name="TextBox 17"/>
+          <p:cNvSpPr txBox="1"/>
+          <p:nvPr/>
+        </p:nvSpPr>
+        <p:spPr>
+          <a:xfrm>
+            <a:off x="800000" y="3420000"/>
+            <a:ext cx="3400000" cy="480000"/>
+          </a:xfrm>
+          <a:prstGeom prst="rect">
+            <a:avLst/>
+          </a:prstGeom>
+          <a:noFill/>
+        </p:spPr>
+        <p:txBody>
+          <a:bodyPr wrap="square" anchor="t">
+            <a:spAutoFit/>
+          </a:bodyPr>
+          <a:lstStyle/>
+          <a:p>
+            <a:pPr algn="ctr">
+              <a:lnSpc>
+                <a:spcPct val="110000"/>
+              </a:lnSpc>
+              <a:spcAft>
+                <a:spcPts val="600"/>
+              </a:spcAft>
+            </a:pPr>
+            <a:r>
+              <a:rPr sz="1300" b="1">
+                <a:solidFill>
+                  <a:srgbClr val="010328"/>
+                </a:solidFill>
+                <a:latin typeface="微软雅黑"/>
+              </a:rPr>
+              <a:t>问答</a:t>
+            </a:r>
+          </a:p>
+        </p:txBody>
+      </p:sp>
+      <p:sp>
+        <p:nvSpPr>
+          <p:cNvPr id="19" name="Rectangle 18"/>
+          <p:cNvSpPr/>
+          <p:nvPr/>
+        </p:nvSpPr>
+        <p:spPr>
+          <a:xfrm>
+            <a:off x="4200000" y="3320000"/>
+            <a:ext cx="2400000" cy="620000"/>
+          </a:xfrm>
+          <a:prstGeom prst="rect">
+            <a:avLst/>
+          </a:prstGeom>
+          <a:solidFill>
+            <a:srgbClr val="FFFFFF"/>
+          </a:solidFill>
+          <a:ln>
+            <a:solidFill>
+              <a:srgbClr val="C9D4EE"/>
+            </a:solidFill>
+          </a:ln>
+          <a:effectLst/>
+        </p:spPr>
+        <p:style>
+          <a:lnRef idx="1">
+            <a:schemeClr val="accent1"/>
+          </a:lnRef>
+          <a:fillRef idx="3">
+            <a:schemeClr val="accent1"/>
+          </a:fillRef>
+          <a:effectRef idx="2">
+            <a:schemeClr val="accent1"/>
+          </a:effectRef>
+          <a:fontRef idx="minor">
+            <a:schemeClr val="lt1"/>
+          </a:fontRef>
+        </p:style>
+        <p:txBody>
+          <a:bodyPr rtlCol="0" anchor="ctr"/>
+          <a:lstStyle/>
+          <a:p>
+            <a:pPr algn="ctr"/>
+          </a:p>
+        </p:txBody>
+      </p:sp>
+      <p:sp>
+        <p:nvSpPr>
+          <p:cNvPr id="20" name="TextBox 19"/>
+          <p:cNvSpPr txBox="1"/>
+          <p:nvPr/>
+        </p:nvSpPr>
+        <p:spPr>
+          <a:xfrm>
+            <a:off x="4200000" y="3420000"/>
+            <a:ext cx="2400000" cy="480000"/>
+          </a:xfrm>
+          <a:prstGeom prst="rect">
+            <a:avLst/>
+          </a:prstGeom>
+          <a:noFill/>
+        </p:spPr>
+        <p:txBody>
+          <a:bodyPr wrap="square" anchor="t">
+            <a:spAutoFit/>
+          </a:bodyPr>
+          <a:lstStyle/>
+          <a:p>
+            <a:pPr algn="ctr">
+              <a:lnSpc>
+                <a:spcPct val="110000"/>
+              </a:lnSpc>
+              <a:spcAft>
+                <a:spcPts val="600"/>
+              </a:spcAft>
+            </a:pPr>
+            <a:r>
+              <a:rPr sz="1300" b="0">
+                <a:solidFill>
+                  <a:srgbClr val="010328"/>
+                </a:solidFill>
+                <a:latin typeface="微软雅黑"/>
+              </a:rPr>
+              <a:t>5min</a:t>
+            </a:r>
+          </a:p>
+        </p:txBody>
+      </p:sp>
+      <p:sp>
+        <p:nvSpPr>
+          <p:cNvPr id="21" name="Rectangle 20"/>
+          <p:cNvSpPr/>
+          <p:nvPr/>
+        </p:nvSpPr>
+        <p:spPr>
+          <a:xfrm>
+            <a:off x="6600000" y="3320000"/>
+            <a:ext cx="2400000" cy="620000"/>
+          </a:xfrm>
+          <a:prstGeom prst="rect">
+            <a:avLst/>
+          </a:prstGeom>
+          <a:solidFill>
+            <a:srgbClr val="FFFFFF"/>
+          </a:solidFill>
+          <a:ln>
+            <a:solidFill>
+              <a:srgbClr val="C9D4EE"/>
+            </a:solidFill>
+          </a:ln>
+          <a:effectLst/>
+        </p:spPr>
+        <p:style>
+          <a:lnRef idx="1">
+            <a:schemeClr val="accent1"/>
+          </a:lnRef>
+          <a:fillRef idx="3">
+            <a:schemeClr val="accent1"/>
+          </a:fillRef>
+          <a:effectRef idx="2">
+            <a:schemeClr val="accent1"/>
+          </a:effectRef>
+          <a:fontRef idx="minor">
+            <a:schemeClr val="lt1"/>
+          </a:fontRef>
+        </p:style>
+        <p:txBody>
+          <a:bodyPr rtlCol="0" anchor="ctr"/>
+          <a:lstStyle/>
+          <a:p>
+            <a:pPr algn="ctr"/>
+          </a:p>
+        </p:txBody>
+      </p:sp>
+      <p:sp>
+        <p:nvSpPr>
+          <p:cNvPr id="22" name="TextBox 21"/>
+          <p:cNvSpPr txBox="1"/>
+          <p:nvPr/>
+        </p:nvSpPr>
+        <p:spPr>
+          <a:xfrm>
+            <a:off x="6600000" y="3420000"/>
+            <a:ext cx="2400000" cy="480000"/>
+          </a:xfrm>
+          <a:prstGeom prst="rect">
+            <a:avLst/>
+          </a:prstGeom>
+          <a:noFill/>
+        </p:spPr>
+        <p:txBody>
+          <a:bodyPr wrap="square" anchor="t">
+            <a:spAutoFit/>
+          </a:bodyPr>
+          <a:lstStyle/>
+          <a:p>
+            <a:pPr algn="ctr">
+              <a:lnSpc>
+                <a:spcPct val="110000"/>
+              </a:lnSpc>
+              <a:spcAft>
+                <a:spcPts val="600"/>
+              </a:spcAft>
+            </a:pPr>
+            <a:r>
+              <a:rPr sz="1300" b="0">
+                <a:solidFill>
+                  <a:srgbClr val="010328"/>
+                </a:solidFill>
+                <a:latin typeface="微软雅黑"/>
+              </a:rPr>
+              <a:t>必答+抽答</a:t>
+            </a:r>
+          </a:p>
+        </p:txBody>
+      </p:sp>
+      <p:sp>
+        <p:nvSpPr>
+          <p:cNvPr id="23" name="TextBox 22"/>
+          <p:cNvSpPr txBox="1"/>
+          <p:nvPr/>
+        </p:nvSpPr>
+        <p:spPr>
+          <a:xfrm>
+            <a:off x="800000" y="4060000"/>
+            <a:ext cx="10600000" cy="380000"/>
           </a:xfrm>
           <a:prstGeom prst="rect">
             <a:avLst/>
@@ -7156,15 +10036,82 @@
               </a:spcAft>
             </a:pPr>
             <a:r>
-              <a:rPr sz="1400" b="1">
-                <a:solidFill>
-                  <a:srgbClr val="0475B6"/>
+              <a:rPr sz="1300" b="1">
+                <a:solidFill>
+                  <a:srgbClr val="F5670F"/>
                 </a:solidFill>
                 <a:latin typeface="微软雅黑"/>
               </a:rPr>
-              <a:t>及格标准（D）</a:t>
-            </a:r>
-          </a:p>
+              <a:t>按D/C/B/A四级现场评分</a:t>
+            </a:r>
+          </a:p>
+        </p:txBody>
+      </p:sp>
+      <p:sp>
+        <p:nvSpPr>
+          <p:cNvPr id="24" name="Rectangle 23"/>
+          <p:cNvSpPr/>
+          <p:nvPr/>
+        </p:nvSpPr>
+        <p:spPr>
+          <a:xfrm>
+            <a:off x="500000" y="6500000"/>
+            <a:ext cx="11100000" cy="20000"/>
+          </a:xfrm>
+          <a:prstGeom prst="rect">
+            <a:avLst/>
+          </a:prstGeom>
+          <a:solidFill>
+            <a:srgbClr val="C9D4EE"/>
+          </a:solidFill>
+          <a:ln>
+            <a:noFill/>
+          </a:ln>
+          <a:effectLst/>
+        </p:spPr>
+        <p:style>
+          <a:lnRef idx="1">
+            <a:schemeClr val="accent1"/>
+          </a:lnRef>
+          <a:fillRef idx="3">
+            <a:schemeClr val="accent1"/>
+          </a:fillRef>
+          <a:effectRef idx="2">
+            <a:schemeClr val="accent1"/>
+          </a:effectRef>
+          <a:fontRef idx="minor">
+            <a:schemeClr val="lt1"/>
+          </a:fontRef>
+        </p:style>
+        <p:txBody>
+          <a:bodyPr rtlCol="0" anchor="ctr"/>
+          <a:lstStyle/>
+          <a:p>
+            <a:pPr algn="ctr"/>
+          </a:p>
+        </p:txBody>
+      </p:sp>
+      <p:sp>
+        <p:nvSpPr>
+          <p:cNvPr id="25" name="TextBox 24"/>
+          <p:cNvSpPr txBox="1"/>
+          <p:nvPr/>
+        </p:nvSpPr>
+        <p:spPr>
+          <a:xfrm>
+            <a:off x="500000" y="6540000"/>
+            <a:ext cx="7000000" cy="300000"/>
+          </a:xfrm>
+          <a:prstGeom prst="rect">
+            <a:avLst/>
+          </a:prstGeom>
+          <a:noFill/>
+        </p:spPr>
+        <p:txBody>
+          <a:bodyPr wrap="square" anchor="t">
+            <a:spAutoFit/>
+          </a:bodyPr>
+          <a:lstStyle/>
           <a:p>
             <a:pPr algn="l">
               <a:lnSpc>
@@ -7175,199 +10122,6 @@
               </a:spcAft>
             </a:pPr>
             <a:r>
-              <a:rPr sz="1300" b="0">
-                <a:solidFill>
-                  <a:srgbClr val="010328"/>
-                </a:solidFill>
-                <a:latin typeface="微软雅黑"/>
-              </a:rPr>
-              <a:t>功能基本完整+能演示主流程</a:t>
-            </a:r>
-          </a:p>
-        </p:txBody>
-      </p:sp>
-      <p:sp>
-        <p:nvSpPr>
-          <p:cNvPr id="9" name="Rectangle 8"/>
-          <p:cNvSpPr/>
-          <p:nvPr/>
-        </p:nvSpPr>
-        <p:spPr>
-          <a:xfrm>
-            <a:off x="7400000" y="3950000"/>
-            <a:ext cx="4000000" cy="1850000"/>
-          </a:xfrm>
-          <a:prstGeom prst="rect">
-            <a:avLst/>
-          </a:prstGeom>
-          <a:solidFill>
-            <a:srgbClr val="FDF0E6"/>
-          </a:solidFill>
-          <a:ln>
-            <a:solidFill>
-              <a:srgbClr val="F5670F"/>
-            </a:solidFill>
-          </a:ln>
-          <a:effectLst/>
-        </p:spPr>
-        <p:style>
-          <a:lnRef idx="1">
-            <a:schemeClr val="accent1"/>
-          </a:lnRef>
-          <a:fillRef idx="3">
-            <a:schemeClr val="accent1"/>
-          </a:fillRef>
-          <a:effectRef idx="2">
-            <a:schemeClr val="accent1"/>
-          </a:effectRef>
-          <a:fontRef idx="minor">
-            <a:schemeClr val="lt1"/>
-          </a:fontRef>
-        </p:style>
-        <p:txBody>
-          <a:bodyPr rtlCol="0" anchor="ctr"/>
-          <a:lstStyle/>
-          <a:p>
-            <a:pPr algn="ctr"/>
-          </a:p>
-        </p:txBody>
-      </p:sp>
-      <p:sp>
-        <p:nvSpPr>
-          <p:cNvPr id="10" name="TextBox 9"/>
-          <p:cNvSpPr txBox="1"/>
-          <p:nvPr/>
-        </p:nvSpPr>
-        <p:spPr>
-          <a:xfrm>
-            <a:off x="7550000" y="4080000"/>
-            <a:ext cx="3750000" cy="1650000"/>
-          </a:xfrm>
-          <a:prstGeom prst="rect">
-            <a:avLst/>
-          </a:prstGeom>
-          <a:noFill/>
-        </p:spPr>
-        <p:txBody>
-          <a:bodyPr wrap="square" anchor="t">
-            <a:spAutoFit/>
-          </a:bodyPr>
-          <a:lstStyle/>
-          <a:p>
-            <a:pPr algn="l">
-              <a:lnSpc>
-                <a:spcPct val="110000"/>
-              </a:lnSpc>
-              <a:spcAft>
-                <a:spcPts val="600"/>
-              </a:spcAft>
-            </a:pPr>
-            <a:r>
-              <a:rPr sz="1400" b="1">
-                <a:solidFill>
-                  <a:srgbClr val="F5670F"/>
-                </a:solidFill>
-                <a:latin typeface="微软雅黑"/>
-              </a:rPr>
-              <a:t>优秀标准（B+）</a:t>
-            </a:r>
-          </a:p>
-          <a:p>
-            <a:pPr algn="l">
-              <a:lnSpc>
-                <a:spcPct val="110000"/>
-              </a:lnSpc>
-              <a:spcAft>
-                <a:spcPts val="600"/>
-              </a:spcAft>
-            </a:pPr>
-            <a:r>
-              <a:rPr sz="1300" b="0">
-                <a:solidFill>
-                  <a:srgbClr val="010328"/>
-                </a:solidFill>
-                <a:latin typeface="微软雅黑"/>
-              </a:rPr>
-              <a:t>规范率≥95%+架构清晰+创新点</a:t>
-            </a:r>
-          </a:p>
-        </p:txBody>
-      </p:sp>
-      <p:sp>
-        <p:nvSpPr>
-          <p:cNvPr id="11" name="Rectangle 10"/>
-          <p:cNvSpPr/>
-          <p:nvPr/>
-        </p:nvSpPr>
-        <p:spPr>
-          <a:xfrm>
-            <a:off x="500000" y="6500000"/>
-            <a:ext cx="11100000" cy="20000"/>
-          </a:xfrm>
-          <a:prstGeom prst="rect">
-            <a:avLst/>
-          </a:prstGeom>
-          <a:solidFill>
-            <a:srgbClr val="C9D4EE"/>
-          </a:solidFill>
-          <a:ln>
-            <a:noFill/>
-          </a:ln>
-          <a:effectLst/>
-        </p:spPr>
-        <p:style>
-          <a:lnRef idx="1">
-            <a:schemeClr val="accent1"/>
-          </a:lnRef>
-          <a:fillRef idx="3">
-            <a:schemeClr val="accent1"/>
-          </a:fillRef>
-          <a:effectRef idx="2">
-            <a:schemeClr val="accent1"/>
-          </a:effectRef>
-          <a:fontRef idx="minor">
-            <a:schemeClr val="lt1"/>
-          </a:fontRef>
-        </p:style>
-        <p:txBody>
-          <a:bodyPr rtlCol="0" anchor="ctr"/>
-          <a:lstStyle/>
-          <a:p>
-            <a:pPr algn="ctr"/>
-          </a:p>
-        </p:txBody>
-      </p:sp>
-      <p:sp>
-        <p:nvSpPr>
-          <p:cNvPr id="12" name="TextBox 11"/>
-          <p:cNvSpPr txBox="1"/>
-          <p:nvPr/>
-        </p:nvSpPr>
-        <p:spPr>
-          <a:xfrm>
-            <a:off x="500000" y="6540000"/>
-            <a:ext cx="7000000" cy="300000"/>
-          </a:xfrm>
-          <a:prstGeom prst="rect">
-            <a:avLst/>
-          </a:prstGeom>
-          <a:noFill/>
-        </p:spPr>
-        <p:txBody>
-          <a:bodyPr wrap="square" anchor="t">
-            <a:spAutoFit/>
-          </a:bodyPr>
-          <a:lstStyle/>
-          <a:p>
-            <a:pPr algn="l">
-              <a:lnSpc>
-                <a:spcPct val="110000"/>
-              </a:lnSpc>
-              <a:spcAft>
-                <a:spcPts val="600"/>
-              </a:spcAft>
-            </a:pPr>
-            <a:r>
               <a:rPr sz="1000" b="0">
                 <a:solidFill>
                   <a:srgbClr val="8A97B5"/>
@@ -7381,7 +10135,7 @@
       </p:sp>
       <p:sp>
         <p:nvSpPr>
-          <p:cNvPr id="13" name="TextBox 12"/>
+          <p:cNvPr id="26" name="TextBox 25"/>
           <p:cNvSpPr txBox="1"/>
           <p:nvPr/>
         </p:nvSpPr>
@@ -7416,7 +10170,7 @@
                 </a:solidFill>
                 <a:latin typeface="微软雅黑"/>
               </a:rPr>
-              <a:t>5 / 7</a:t>
+              <a:t>5 / 13</a:t>
             </a:r>
           </a:p>
         </p:txBody>
@@ -7564,7 +10318,7 @@
                 </a:solidFill>
                 <a:latin typeface="微软雅黑"/>
               </a:rPr>
-              <a:t>总结评价与课后任务</a:t>
+              <a:t>实施任务：工单Z《综合项目答辩专场》</a:t>
             </a:r>
           </a:p>
         </p:txBody>
@@ -7578,7 +10332,7 @@
         <p:spPr>
           <a:xfrm>
             <a:off x="800000" y="1950000"/>
-            <a:ext cx="10600000" cy="1500000"/>
+            <a:ext cx="6300000" cy="3900000"/>
           </a:xfrm>
           <a:prstGeom prst="rect">
             <a:avLst/>
@@ -7621,8 +10375,153 @@
         </p:nvSpPr>
         <p:spPr>
           <a:xfrm>
-            <a:off x="1000000" y="2050000"/>
-            <a:ext cx="10300000" cy="1400000"/>
+            <a:off x="1000000" y="2100000"/>
+            <a:ext cx="5900000" cy="3600000"/>
+          </a:xfrm>
+          <a:prstGeom prst="rect">
+            <a:avLst/>
+          </a:prstGeom>
+          <a:noFill/>
+        </p:spPr>
+        <p:txBody>
+          <a:bodyPr wrap="square" anchor="t">
+            <a:spAutoFit/>
+          </a:bodyPr>
+          <a:lstStyle/>
+          <a:p>
+            <a:pPr algn="l">
+              <a:lnSpc>
+                <a:spcPct val="130000"/>
+              </a:lnSpc>
+              <a:spcAft>
+                <a:spcPts val="600"/>
+              </a:spcAft>
+            </a:pPr>
+            <a:r>
+              <a:rPr sz="1500" b="1">
+                <a:solidFill>
+                  <a:srgbClr val="0545E8"/>
+                </a:solidFill>
+                <a:latin typeface="微软雅黑"/>
+              </a:rPr>
+              <a:t>实施步骤</a:t>
+            </a:r>
+          </a:p>
+          <a:p>
+            <a:pPr algn="l">
+              <a:lnSpc>
+                <a:spcPct val="130000"/>
+              </a:lnSpc>
+              <a:spcAft>
+                <a:spcPts val="600"/>
+              </a:spcAft>
+            </a:pPr>
+            <a:r>
+              <a:rPr sz="1400" b="0">
+                <a:solidFill>
+                  <a:srgbClr val="010328"/>
+                </a:solidFill>
+                <a:latin typeface="微软雅黑"/>
+              </a:rPr>
+              <a:t>1. 正式答辩(8+5分钟)</a:t>
+            </a:r>
+          </a:p>
+          <a:p>
+            <a:pPr algn="l">
+              <a:lnSpc>
+                <a:spcPct val="130000"/>
+              </a:lnSpc>
+              <a:spcAft>
+                <a:spcPts val="600"/>
+              </a:spcAft>
+            </a:pPr>
+            <a:r>
+              <a:rPr sz="1400" b="0">
+                <a:solidFill>
+                  <a:srgbClr val="010328"/>
+                </a:solidFill>
+                <a:latin typeface="微软雅黑"/>
+              </a:rPr>
+              <a:t>2. 组间互评+个人反思</a:t>
+            </a:r>
+          </a:p>
+          <a:p>
+            <a:pPr algn="l">
+              <a:lnSpc>
+                <a:spcPct val="130000"/>
+              </a:lnSpc>
+              <a:spcAft>
+                <a:spcPts val="600"/>
+              </a:spcAft>
+            </a:pPr>
+            <a:r>
+              <a:rPr sz="1400" b="0">
+                <a:solidFill>
+                  <a:srgbClr val="010328"/>
+                </a:solidFill>
+                <a:latin typeface="微软雅黑"/>
+              </a:rPr>
+              <a:t>3. 提交代码/报告/PPT/视频/贡献表</a:t>
+            </a:r>
+          </a:p>
+        </p:txBody>
+      </p:sp>
+      <p:sp>
+        <p:nvSpPr>
+          <p:cNvPr id="7" name="Rectangle 6"/>
+          <p:cNvSpPr/>
+          <p:nvPr/>
+        </p:nvSpPr>
+        <p:spPr>
+          <a:xfrm>
+            <a:off x="7400000" y="1950000"/>
+            <a:ext cx="4000000" cy="1850000"/>
+          </a:xfrm>
+          <a:prstGeom prst="rect">
+            <a:avLst/>
+          </a:prstGeom>
+          <a:solidFill>
+            <a:srgbClr val="E8F1E8"/>
+          </a:solidFill>
+          <a:ln>
+            <a:solidFill>
+              <a:srgbClr val="0475B6"/>
+            </a:solidFill>
+          </a:ln>
+          <a:effectLst/>
+        </p:spPr>
+        <p:style>
+          <a:lnRef idx="1">
+            <a:schemeClr val="accent1"/>
+          </a:lnRef>
+          <a:fillRef idx="3">
+            <a:schemeClr val="accent1"/>
+          </a:fillRef>
+          <a:effectRef idx="2">
+            <a:schemeClr val="accent1"/>
+          </a:effectRef>
+          <a:fontRef idx="minor">
+            <a:schemeClr val="lt1"/>
+          </a:fontRef>
+        </p:style>
+        <p:txBody>
+          <a:bodyPr rtlCol="0" anchor="ctr"/>
+          <a:lstStyle/>
+          <a:p>
+            <a:pPr algn="ctr"/>
+          </a:p>
+        </p:txBody>
+      </p:sp>
+      <p:sp>
+        <p:nvSpPr>
+          <p:cNvPr id="8" name="TextBox 7"/>
+          <p:cNvSpPr txBox="1"/>
+          <p:nvPr/>
+        </p:nvSpPr>
+        <p:spPr>
+          <a:xfrm>
+            <a:off x="7550000" y="2080000"/>
+            <a:ext cx="3750000" cy="1650000"/>
           </a:xfrm>
           <a:prstGeom prst="rect">
             <a:avLst/>
@@ -7644,13 +10543,13 @@
               </a:spcAft>
             </a:pPr>
             <a:r>
-              <a:rPr sz="1500" b="1">
-                <a:solidFill>
-                  <a:srgbClr val="0545E8"/>
+              <a:rPr sz="1400" b="1">
+                <a:solidFill>
+                  <a:srgbClr val="0475B6"/>
                 </a:solidFill>
                 <a:latin typeface="微软雅黑"/>
               </a:rPr>
-              <a:t>评价（10分钟）：</a:t>
+              <a:t>及格标准（D）</a:t>
             </a:r>
           </a:p>
           <a:p>
@@ -7663,167 +10562,60 @@
               </a:spcAft>
             </a:pPr>
             <a:r>
-              <a:rPr sz="1400" b="0">
+              <a:rPr sz="1300" b="0">
                 <a:solidFill>
                   <a:srgbClr val="010328"/>
                 </a:solidFill>
                 <a:latin typeface="微软雅黑"/>
               </a:rPr>
-              <a:t>按D/C/B/A量表当堂评分；工单24小时内反馈评语与改进建议。</a:t>
-            </a:r>
-          </a:p>
-        </p:txBody>
-      </p:sp>
-      <p:sp>
-        <p:nvSpPr>
-          <p:cNvPr id="7" name="TextBox 6"/>
-          <p:cNvSpPr txBox="1"/>
-          <p:nvPr/>
-        </p:nvSpPr>
-        <p:spPr>
-          <a:xfrm>
-            <a:off x="850000" y="3700000"/>
-            <a:ext cx="10600000" cy="700000"/>
-          </a:xfrm>
-          <a:prstGeom prst="rect">
-            <a:avLst/>
-          </a:prstGeom>
-          <a:noFill/>
-        </p:spPr>
-        <p:txBody>
-          <a:bodyPr wrap="square" anchor="t">
-            <a:spAutoFit/>
-          </a:bodyPr>
-          <a:lstStyle/>
-          <a:p>
-            <a:pPr algn="l">
-              <a:lnSpc>
-                <a:spcPct val="120000"/>
-              </a:lnSpc>
-              <a:spcAft>
-                <a:spcPts val="600"/>
-              </a:spcAft>
-            </a:pPr>
-            <a:r>
-              <a:rPr sz="1400" b="1">
-                <a:solidFill>
-                  <a:srgbClr val="F5670F"/>
-                </a:solidFill>
-                <a:latin typeface="微软雅黑"/>
-              </a:rPr>
-              <a:t>1. </a:t>
-            </a:r>
-            <a:r>
-              <a:rPr sz="1400" b="0">
-                <a:solidFill>
-                  <a:srgbClr val="010328"/>
-                </a:solidFill>
-                <a:latin typeface="微软雅黑"/>
-              </a:rPr>
-              <a:t>1. 提交综合项目完整材料：代码、报告、演示视频；</a:t>
-            </a:r>
-          </a:p>
-        </p:txBody>
-      </p:sp>
-      <p:sp>
-        <p:nvSpPr>
-          <p:cNvPr id="8" name="TextBox 7"/>
-          <p:cNvSpPr txBox="1"/>
-          <p:nvPr/>
-        </p:nvSpPr>
-        <p:spPr>
-          <a:xfrm>
-            <a:off x="850000" y="4420000"/>
-            <a:ext cx="10600000" cy="700000"/>
-          </a:xfrm>
-          <a:prstGeom prst="rect">
-            <a:avLst/>
-          </a:prstGeom>
-          <a:noFill/>
-        </p:spPr>
-        <p:txBody>
-          <a:bodyPr wrap="square" anchor="t">
-            <a:spAutoFit/>
-          </a:bodyPr>
-          <a:lstStyle/>
-          <a:p>
-            <a:pPr algn="l">
-              <a:lnSpc>
-                <a:spcPct val="120000"/>
-              </a:lnSpc>
-              <a:spcAft>
-                <a:spcPts val="600"/>
-              </a:spcAft>
-            </a:pPr>
-            <a:r>
-              <a:rPr sz="1400" b="1">
-                <a:solidFill>
-                  <a:srgbClr val="F5670F"/>
-                </a:solidFill>
-                <a:latin typeface="微软雅黑"/>
-              </a:rPr>
-              <a:t>2. </a:t>
-            </a:r>
-            <a:r>
-              <a:rPr sz="1400" b="0">
-                <a:solidFill>
-                  <a:srgbClr val="010328"/>
-                </a:solidFill>
-                <a:latin typeface="微软雅黑"/>
-              </a:rPr>
-              <a:t>2. 完成课程学习反思（一页纸总结）；</a:t>
-            </a:r>
-          </a:p>
-        </p:txBody>
-      </p:sp>
-      <p:sp>
-        <p:nvSpPr>
-          <p:cNvPr id="9" name="TextBox 8"/>
-          <p:cNvSpPr txBox="1"/>
-          <p:nvPr/>
-        </p:nvSpPr>
-        <p:spPr>
-          <a:xfrm>
-            <a:off x="850000" y="5140000"/>
-            <a:ext cx="10600000" cy="700000"/>
-          </a:xfrm>
-          <a:prstGeom prst="rect">
-            <a:avLst/>
-          </a:prstGeom>
-          <a:noFill/>
-        </p:spPr>
-        <p:txBody>
-          <a:bodyPr wrap="square" anchor="t">
-            <a:spAutoFit/>
-          </a:bodyPr>
-          <a:lstStyle/>
-          <a:p>
-            <a:pPr algn="l">
-              <a:lnSpc>
-                <a:spcPct val="120000"/>
-              </a:lnSpc>
-              <a:spcAft>
-                <a:spcPts val="600"/>
-              </a:spcAft>
-            </a:pPr>
-            <a:r>
-              <a:rPr sz="1400" b="1">
-                <a:solidFill>
-                  <a:srgbClr val="F5670F"/>
-                </a:solidFill>
-                <a:latin typeface="微软雅黑"/>
-              </a:rPr>
-              <a:t>3. </a:t>
-            </a:r>
-            <a:r>
-              <a:rPr sz="1400" b="0">
-                <a:solidFill>
-                  <a:srgbClr val="010328"/>
-                </a:solidFill>
-                <a:latin typeface="微软雅黑"/>
-              </a:rPr>
-              <a:t>3. 了解后续《AI应用基础》课程衔接内容。</a:t>
-            </a:r>
+              <a:t>功能基本完整+能演示主流程</a:t>
+            </a:r>
+          </a:p>
+        </p:txBody>
+      </p:sp>
+      <p:sp>
+        <p:nvSpPr>
+          <p:cNvPr id="9" name="Rectangle 8"/>
+          <p:cNvSpPr/>
+          <p:nvPr/>
+        </p:nvSpPr>
+        <p:spPr>
+          <a:xfrm>
+            <a:off x="7400000" y="3950000"/>
+            <a:ext cx="4000000" cy="1850000"/>
+          </a:xfrm>
+          <a:prstGeom prst="rect">
+            <a:avLst/>
+          </a:prstGeom>
+          <a:solidFill>
+            <a:srgbClr val="FDF0E6"/>
+          </a:solidFill>
+          <a:ln>
+            <a:solidFill>
+              <a:srgbClr val="F5670F"/>
+            </a:solidFill>
+          </a:ln>
+          <a:effectLst/>
+        </p:spPr>
+        <p:style>
+          <a:lnRef idx="1">
+            <a:schemeClr val="accent1"/>
+          </a:lnRef>
+          <a:fillRef idx="3">
+            <a:schemeClr val="accent1"/>
+          </a:fillRef>
+          <a:effectRef idx="2">
+            <a:schemeClr val="accent1"/>
+          </a:effectRef>
+          <a:fontRef idx="minor">
+            <a:schemeClr val="lt1"/>
+          </a:fontRef>
+        </p:style>
+        <p:txBody>
+          <a:bodyPr rtlCol="0" anchor="ctr"/>
+          <a:lstStyle/>
+          <a:p>
+            <a:pPr algn="ctr"/>
           </a:p>
         </p:txBody>
       </p:sp>
@@ -7835,8 +10627,8 @@
         </p:nvSpPr>
         <p:spPr>
           <a:xfrm>
-            <a:off x="850000" y="5960000"/>
-            <a:ext cx="10600000" cy="500000"/>
+            <a:off x="7550000" y="4080000"/>
+            <a:ext cx="3750000" cy="1650000"/>
           </a:xfrm>
           <a:prstGeom prst="rect">
             <a:avLst/>
@@ -7858,91 +10650,15 @@
               </a:spcAft>
             </a:pPr>
             <a:r>
-              <a:rPr sz="1300" b="1">
-                <a:solidFill>
-                  <a:srgbClr val="0475B6"/>
+              <a:rPr sz="1400" b="1">
+                <a:solidFill>
+                  <a:srgbClr val="F5670F"/>
                 </a:solidFill>
                 <a:latin typeface="微软雅黑"/>
               </a:rPr>
-              <a:t>下次课预告：</a:t>
-            </a:r>
-            <a:r>
-              <a:rPr sz="1300" b="0">
-                <a:solidFill>
-                  <a:srgbClr val="44546A"/>
-                </a:solidFill>
-                <a:latin typeface="微软雅黑"/>
-              </a:rPr>
-              <a:t>见下次课工单任务书</a:t>
-            </a:r>
-          </a:p>
-        </p:txBody>
-      </p:sp>
-      <p:sp>
-        <p:nvSpPr>
-          <p:cNvPr id="11" name="Rectangle 10"/>
-          <p:cNvSpPr/>
-          <p:nvPr/>
-        </p:nvSpPr>
-        <p:spPr>
-          <a:xfrm>
-            <a:off x="500000" y="6500000"/>
-            <a:ext cx="11100000" cy="20000"/>
-          </a:xfrm>
-          <a:prstGeom prst="rect">
-            <a:avLst/>
-          </a:prstGeom>
-          <a:solidFill>
-            <a:srgbClr val="C9D4EE"/>
-          </a:solidFill>
-          <a:ln>
-            <a:noFill/>
-          </a:ln>
-          <a:effectLst/>
-        </p:spPr>
-        <p:style>
-          <a:lnRef idx="1">
-            <a:schemeClr val="accent1"/>
-          </a:lnRef>
-          <a:fillRef idx="3">
-            <a:schemeClr val="accent1"/>
-          </a:fillRef>
-          <a:effectRef idx="2">
-            <a:schemeClr val="accent1"/>
-          </a:effectRef>
-          <a:fontRef idx="minor">
-            <a:schemeClr val="lt1"/>
-          </a:fontRef>
-        </p:style>
-        <p:txBody>
-          <a:bodyPr rtlCol="0" anchor="ctr"/>
-          <a:lstStyle/>
-          <a:p>
-            <a:pPr algn="ctr"/>
-          </a:p>
-        </p:txBody>
-      </p:sp>
-      <p:sp>
-        <p:nvSpPr>
-          <p:cNvPr id="12" name="TextBox 11"/>
-          <p:cNvSpPr txBox="1"/>
-          <p:nvPr/>
-        </p:nvSpPr>
-        <p:spPr>
-          <a:xfrm>
-            <a:off x="500000" y="6540000"/>
-            <a:ext cx="7000000" cy="300000"/>
-          </a:xfrm>
-          <a:prstGeom prst="rect">
-            <a:avLst/>
-          </a:prstGeom>
-          <a:noFill/>
-        </p:spPr>
-        <p:txBody>
-          <a:bodyPr wrap="square" anchor="t">
-            <a:spAutoFit/>
-          </a:bodyPr>
-          <a:lstStyle/>
+              <a:t>优秀标准（B+）</a:t>
+            </a:r>
+          </a:p>
           <a:p>
             <a:pPr algn="l">
               <a:lnSpc>
@@ -7953,6 +10669,92 @@
               </a:spcAft>
             </a:pPr>
             <a:r>
+              <a:rPr sz="1300" b="0">
+                <a:solidFill>
+                  <a:srgbClr val="010328"/>
+                </a:solidFill>
+                <a:latin typeface="微软雅黑"/>
+              </a:rPr>
+              <a:t>规范率≥95%+架构清晰+创新点</a:t>
+            </a:r>
+          </a:p>
+        </p:txBody>
+      </p:sp>
+      <p:sp>
+        <p:nvSpPr>
+          <p:cNvPr id="11" name="Rectangle 10"/>
+          <p:cNvSpPr/>
+          <p:nvPr/>
+        </p:nvSpPr>
+        <p:spPr>
+          <a:xfrm>
+            <a:off x="500000" y="6500000"/>
+            <a:ext cx="11100000" cy="20000"/>
+          </a:xfrm>
+          <a:prstGeom prst="rect">
+            <a:avLst/>
+          </a:prstGeom>
+          <a:solidFill>
+            <a:srgbClr val="C9D4EE"/>
+          </a:solidFill>
+          <a:ln>
+            <a:noFill/>
+          </a:ln>
+          <a:effectLst/>
+        </p:spPr>
+        <p:style>
+          <a:lnRef idx="1">
+            <a:schemeClr val="accent1"/>
+          </a:lnRef>
+          <a:fillRef idx="3">
+            <a:schemeClr val="accent1"/>
+          </a:fillRef>
+          <a:effectRef idx="2">
+            <a:schemeClr val="accent1"/>
+          </a:effectRef>
+          <a:fontRef idx="minor">
+            <a:schemeClr val="lt1"/>
+          </a:fontRef>
+        </p:style>
+        <p:txBody>
+          <a:bodyPr rtlCol="0" anchor="ctr"/>
+          <a:lstStyle/>
+          <a:p>
+            <a:pPr algn="ctr"/>
+          </a:p>
+        </p:txBody>
+      </p:sp>
+      <p:sp>
+        <p:nvSpPr>
+          <p:cNvPr id="12" name="TextBox 11"/>
+          <p:cNvSpPr txBox="1"/>
+          <p:nvPr/>
+        </p:nvSpPr>
+        <p:spPr>
+          <a:xfrm>
+            <a:off x="500000" y="6540000"/>
+            <a:ext cx="7000000" cy="300000"/>
+          </a:xfrm>
+          <a:prstGeom prst="rect">
+            <a:avLst/>
+          </a:prstGeom>
+          <a:noFill/>
+        </p:spPr>
+        <p:txBody>
+          <a:bodyPr wrap="square" anchor="t">
+            <a:spAutoFit/>
+          </a:bodyPr>
+          <a:lstStyle/>
+          <a:p>
+            <a:pPr algn="l">
+              <a:lnSpc>
+                <a:spcPct val="110000"/>
+              </a:lnSpc>
+              <a:spcAft>
+                <a:spcPts val="600"/>
+              </a:spcAft>
+            </a:pPr>
+            <a:r>
               <a:rPr sz="1000" b="0">
                 <a:solidFill>
                   <a:srgbClr val="8A97B5"/>
@@ -8001,7 +10803,7 @@
                 </a:solidFill>
                 <a:latin typeface="微软雅黑"/>
               </a:rPr>
-              <a:t>6 / 7</a:t>
+              <a:t>9 / 13</a:t>
             </a:r>
           </a:p>
         </p:txBody>
@@ -8033,7 +10835,7 @@
         <p:spPr>
           <a:xfrm>
             <a:off x="0" y="0"/>
-            <a:ext cx="12192000" cy="6858000"/>
+            <a:ext cx="12192000" cy="1150000"/>
           </a:xfrm>
           <a:prstGeom prst="rect">
             <a:avLst/>
@@ -8076,8 +10878,8 @@
         </p:nvSpPr>
         <p:spPr>
           <a:xfrm>
-            <a:off x="0" y="2880360"/>
-            <a:ext cx="12192000" cy="50000"/>
+            <a:off x="0" y="1150000"/>
+            <a:ext cx="2600000" cy="70000"/>
           </a:xfrm>
           <a:prstGeom prst="rect">
             <a:avLst/>
@@ -8120,8 +10922,8 @@
         </p:nvSpPr>
         <p:spPr>
           <a:xfrm>
-            <a:off x="0" y="1645920"/>
-            <a:ext cx="12192000" cy="1500000"/>
+            <a:off x="700000" y="300000"/>
+            <a:ext cx="10792000" cy="700000"/>
           </a:xfrm>
           <a:prstGeom prst="rect">
             <a:avLst/>
@@ -8134,7 +10936,7 @@
           </a:bodyPr>
           <a:lstStyle/>
           <a:p>
-            <a:pPr algn="ctr">
+            <a:pPr algn="l">
               <a:lnSpc>
                 <a:spcPct val="110000"/>
               </a:lnSpc>
@@ -8143,27 +10945,71 @@
               </a:spcAft>
             </a:pPr>
             <a:r>
-              <a:rPr sz="5400" b="1">
+              <a:rPr sz="2400" b="1">
                 <a:solidFill>
                   <a:srgbClr val="FFFFFF"/>
                 </a:solidFill>
                 <a:latin typeface="微软雅黑"/>
               </a:rPr>
-              <a:t>THANKS</a:t>
-            </a:r>
-          </a:p>
-        </p:txBody>
-      </p:sp>
-      <p:sp>
-        <p:nvSpPr>
-          <p:cNvPr id="5" name="TextBox 4"/>
+              <a:t>总结评价与课后任务</a:t>
+            </a:r>
+          </a:p>
+        </p:txBody>
+      </p:sp>
+      <p:sp>
+        <p:nvSpPr>
+          <p:cNvPr id="5" name="Rectangle 4"/>
+          <p:cNvSpPr/>
+          <p:nvPr/>
+        </p:nvSpPr>
+        <p:spPr>
+          <a:xfrm>
+            <a:off x="800000" y="1950000"/>
+            <a:ext cx="10600000" cy="1500000"/>
+          </a:xfrm>
+          <a:prstGeom prst="rect">
+            <a:avLst/>
+          </a:prstGeom>
+          <a:solidFill>
+            <a:srgbClr val="F3F6FD"/>
+          </a:solidFill>
+          <a:ln>
+            <a:noFill/>
+          </a:ln>
+          <a:effectLst/>
+        </p:spPr>
+        <p:style>
+          <a:lnRef idx="1">
+            <a:schemeClr val="accent1"/>
+          </a:lnRef>
+          <a:fillRef idx="3">
+            <a:schemeClr val="accent1"/>
+          </a:fillRef>
+          <a:effectRef idx="2">
+            <a:schemeClr val="accent1"/>
+          </a:effectRef>
+          <a:fontRef idx="minor">
+            <a:schemeClr val="lt1"/>
+          </a:fontRef>
+        </p:style>
+        <p:txBody>
+          <a:bodyPr rtlCol="0" anchor="ctr"/>
+          <a:lstStyle/>
+          <a:p>
+            <a:pPr algn="ctr"/>
+          </a:p>
+        </p:txBody>
+      </p:sp>
+      <p:sp>
+        <p:nvSpPr>
+          <p:cNvPr id="6" name="TextBox 5"/>
           <p:cNvSpPr txBox="1"/>
           <p:nvPr/>
         </p:nvSpPr>
         <p:spPr>
           <a:xfrm>
-            <a:off x="0" y="3429000"/>
-            <a:ext cx="12192000" cy="800000"/>
+            <a:off x="1000000" y="2050000"/>
+            <a:ext cx="10300000" cy="1400000"/>
           </a:xfrm>
           <a:prstGeom prst="rect">
             <a:avLst/>
@@ -8176,7 +11022,7 @@
           </a:bodyPr>
           <a:lstStyle/>
           <a:p>
-            <a:pPr algn="ctr">
+            <a:pPr algn="l">
               <a:lnSpc>
                 <a:spcPct val="110000"/>
               </a:lnSpc>
@@ -8185,40 +11031,17 @@
               </a:spcAft>
             </a:pPr>
             <a:r>
-              <a:rPr sz="2200" b="1">
-                <a:solidFill>
-                  <a:srgbClr val="F5670F"/>
+              <a:rPr sz="1500" b="1">
+                <a:solidFill>
+                  <a:srgbClr val="0545E8"/>
                 </a:solidFill>
                 <a:latin typeface="微软雅黑"/>
               </a:rPr>
-              <a:t>感谢聆听 · 动手实践出真知</a:t>
-            </a:r>
-          </a:p>
-        </p:txBody>
-      </p:sp>
-      <p:sp>
-        <p:nvSpPr>
-          <p:cNvPr id="6" name="TextBox 5"/>
-          <p:cNvSpPr txBox="1"/>
-          <p:nvPr/>
-        </p:nvSpPr>
-        <p:spPr>
-          <a:xfrm>
-            <a:off x="0" y="4526280"/>
-            <a:ext cx="12192000" cy="600000"/>
-          </a:xfrm>
-          <a:prstGeom prst="rect">
-            <a:avLst/>
-          </a:prstGeom>
-          <a:noFill/>
-        </p:spPr>
-        <p:txBody>
-          <a:bodyPr wrap="square" anchor="t">
-            <a:spAutoFit/>
-          </a:bodyPr>
-          <a:lstStyle/>
-          <a:p>
-            <a:pPr algn="ctr">
+              <a:t>评价（10分钟）：</a:t>
+            </a:r>
+          </a:p>
+          <a:p>
+            <a:pPr algn="l">
               <a:lnSpc>
                 <a:spcPct val="110000"/>
               </a:lnSpc>
@@ -8229,11 +11052,343 @@
             <a:r>
               <a:rPr sz="1400" b="0">
                 <a:solidFill>
-                  <a:srgbClr val="BBC6E6"/>
+                  <a:srgbClr val="010328"/>
                 </a:solidFill>
                 <a:latin typeface="微软雅黑"/>
               </a:rPr>
-              <a:t>以生为本   |   做中学 · 学中做</a:t>
+              <a:t>按D/C/B/A量表当堂评分；工单24小时内反馈评语与改进建议。</a:t>
+            </a:r>
+          </a:p>
+        </p:txBody>
+      </p:sp>
+      <p:sp>
+        <p:nvSpPr>
+          <p:cNvPr id="7" name="TextBox 6"/>
+          <p:cNvSpPr txBox="1"/>
+          <p:nvPr/>
+        </p:nvSpPr>
+        <p:spPr>
+          <a:xfrm>
+            <a:off x="850000" y="3700000"/>
+            <a:ext cx="10600000" cy="700000"/>
+          </a:xfrm>
+          <a:prstGeom prst="rect">
+            <a:avLst/>
+          </a:prstGeom>
+          <a:noFill/>
+        </p:spPr>
+        <p:txBody>
+          <a:bodyPr wrap="square" anchor="t">
+            <a:spAutoFit/>
+          </a:bodyPr>
+          <a:lstStyle/>
+          <a:p>
+            <a:pPr algn="l">
+              <a:lnSpc>
+                <a:spcPct val="120000"/>
+              </a:lnSpc>
+              <a:spcAft>
+                <a:spcPts val="600"/>
+              </a:spcAft>
+            </a:pPr>
+            <a:r>
+              <a:rPr sz="1400" b="1">
+                <a:solidFill>
+                  <a:srgbClr val="F5670F"/>
+                </a:solidFill>
+                <a:latin typeface="微软雅黑"/>
+              </a:rPr>
+              <a:t>1. </a:t>
+            </a:r>
+            <a:r>
+              <a:rPr sz="1400" b="0">
+                <a:solidFill>
+                  <a:srgbClr val="010328"/>
+                </a:solidFill>
+                <a:latin typeface="微软雅黑"/>
+              </a:rPr>
+              <a:t>1. 提交综合项目完整材料：代码、报告、演示视频；</a:t>
+            </a:r>
+          </a:p>
+        </p:txBody>
+      </p:sp>
+      <p:sp>
+        <p:nvSpPr>
+          <p:cNvPr id="8" name="TextBox 7"/>
+          <p:cNvSpPr txBox="1"/>
+          <p:nvPr/>
+        </p:nvSpPr>
+        <p:spPr>
+          <a:xfrm>
+            <a:off x="850000" y="4420000"/>
+            <a:ext cx="10600000" cy="700000"/>
+          </a:xfrm>
+          <a:prstGeom prst="rect">
+            <a:avLst/>
+          </a:prstGeom>
+          <a:noFill/>
+        </p:spPr>
+        <p:txBody>
+          <a:bodyPr wrap="square" anchor="t">
+            <a:spAutoFit/>
+          </a:bodyPr>
+          <a:lstStyle/>
+          <a:p>
+            <a:pPr algn="l">
+              <a:lnSpc>
+                <a:spcPct val="120000"/>
+              </a:lnSpc>
+              <a:spcAft>
+                <a:spcPts val="600"/>
+              </a:spcAft>
+            </a:pPr>
+            <a:r>
+              <a:rPr sz="1400" b="1">
+                <a:solidFill>
+                  <a:srgbClr val="F5670F"/>
+                </a:solidFill>
+                <a:latin typeface="微软雅黑"/>
+              </a:rPr>
+              <a:t>2. </a:t>
+            </a:r>
+            <a:r>
+              <a:rPr sz="1400" b="0">
+                <a:solidFill>
+                  <a:srgbClr val="010328"/>
+                </a:solidFill>
+                <a:latin typeface="微软雅黑"/>
+              </a:rPr>
+              <a:t>2. 完成课程学习反思（一页纸总结）；</a:t>
+            </a:r>
+          </a:p>
+        </p:txBody>
+      </p:sp>
+      <p:sp>
+        <p:nvSpPr>
+          <p:cNvPr id="9" name="TextBox 8"/>
+          <p:cNvSpPr txBox="1"/>
+          <p:nvPr/>
+        </p:nvSpPr>
+        <p:spPr>
+          <a:xfrm>
+            <a:off x="850000" y="5140000"/>
+            <a:ext cx="10600000" cy="700000"/>
+          </a:xfrm>
+          <a:prstGeom prst="rect">
+            <a:avLst/>
+          </a:prstGeom>
+          <a:noFill/>
+        </p:spPr>
+        <p:txBody>
+          <a:bodyPr wrap="square" anchor="t">
+            <a:spAutoFit/>
+          </a:bodyPr>
+          <a:lstStyle/>
+          <a:p>
+            <a:pPr algn="l">
+              <a:lnSpc>
+                <a:spcPct val="120000"/>
+              </a:lnSpc>
+              <a:spcAft>
+                <a:spcPts val="600"/>
+              </a:spcAft>
+            </a:pPr>
+            <a:r>
+              <a:rPr sz="1400" b="1">
+                <a:solidFill>
+                  <a:srgbClr val="F5670F"/>
+                </a:solidFill>
+                <a:latin typeface="微软雅黑"/>
+              </a:rPr>
+              <a:t>3. </a:t>
+            </a:r>
+            <a:r>
+              <a:rPr sz="1400" b="0">
+                <a:solidFill>
+                  <a:srgbClr val="010328"/>
+                </a:solidFill>
+                <a:latin typeface="微软雅黑"/>
+              </a:rPr>
+              <a:t>3. 了解后续《AI应用基础》课程衔接内容。</a:t>
+            </a:r>
+          </a:p>
+        </p:txBody>
+      </p:sp>
+      <p:sp>
+        <p:nvSpPr>
+          <p:cNvPr id="10" name="TextBox 9"/>
+          <p:cNvSpPr txBox="1"/>
+          <p:nvPr/>
+        </p:nvSpPr>
+        <p:spPr>
+          <a:xfrm>
+            <a:off x="850000" y="5960000"/>
+            <a:ext cx="10600000" cy="500000"/>
+          </a:xfrm>
+          <a:prstGeom prst="rect">
+            <a:avLst/>
+          </a:prstGeom>
+          <a:noFill/>
+        </p:spPr>
+        <p:txBody>
+          <a:bodyPr wrap="square" anchor="t">
+            <a:spAutoFit/>
+          </a:bodyPr>
+          <a:lstStyle/>
+          <a:p>
+            <a:pPr algn="l">
+              <a:lnSpc>
+                <a:spcPct val="110000"/>
+              </a:lnSpc>
+              <a:spcAft>
+                <a:spcPts val="600"/>
+              </a:spcAft>
+            </a:pPr>
+            <a:r>
+              <a:rPr sz="1300" b="1">
+                <a:solidFill>
+                  <a:srgbClr val="0475B6"/>
+                </a:solidFill>
+                <a:latin typeface="微软雅黑"/>
+              </a:rPr>
+              <a:t>下次课预告：</a:t>
+            </a:r>
+            <a:r>
+              <a:rPr sz="1300" b="0">
+                <a:solidFill>
+                  <a:srgbClr val="44546A"/>
+                </a:solidFill>
+                <a:latin typeface="微软雅黑"/>
+              </a:rPr>
+              <a:t>见下次课工单任务书</a:t>
+            </a:r>
+          </a:p>
+        </p:txBody>
+      </p:sp>
+      <p:sp>
+        <p:nvSpPr>
+          <p:cNvPr id="11" name="Rectangle 10"/>
+          <p:cNvSpPr/>
+          <p:nvPr/>
+        </p:nvSpPr>
+        <p:spPr>
+          <a:xfrm>
+            <a:off x="500000" y="6500000"/>
+            <a:ext cx="11100000" cy="20000"/>
+          </a:xfrm>
+          <a:prstGeom prst="rect">
+            <a:avLst/>
+          </a:prstGeom>
+          <a:solidFill>
+            <a:srgbClr val="C9D4EE"/>
+          </a:solidFill>
+          <a:ln>
+            <a:noFill/>
+          </a:ln>
+          <a:effectLst/>
+        </p:spPr>
+        <p:style>
+          <a:lnRef idx="1">
+            <a:schemeClr val="accent1"/>
+          </a:lnRef>
+          <a:fillRef idx="3">
+            <a:schemeClr val="accent1"/>
+          </a:fillRef>
+          <a:effectRef idx="2">
+            <a:schemeClr val="accent1"/>
+          </a:effectRef>
+          <a:fontRef idx="minor">
+            <a:schemeClr val="lt1"/>
+          </a:fontRef>
+        </p:style>
+        <p:txBody>
+          <a:bodyPr rtlCol="0" anchor="ctr"/>
+          <a:lstStyle/>
+          <a:p>
+            <a:pPr algn="ctr"/>
+          </a:p>
+        </p:txBody>
+      </p:sp>
+      <p:sp>
+        <p:nvSpPr>
+          <p:cNvPr id="12" name="TextBox 11"/>
+          <p:cNvSpPr txBox="1"/>
+          <p:nvPr/>
+        </p:nvSpPr>
+        <p:spPr>
+          <a:xfrm>
+            <a:off x="500000" y="6540000"/>
+            <a:ext cx="7000000" cy="300000"/>
+          </a:xfrm>
+          <a:prstGeom prst="rect">
+            <a:avLst/>
+          </a:prstGeom>
+          <a:noFill/>
+        </p:spPr>
+        <p:txBody>
+          <a:bodyPr wrap="square" anchor="t">
+            <a:spAutoFit/>
+          </a:bodyPr>
+          <a:lstStyle/>
+          <a:p>
+            <a:pPr algn="l">
+              <a:lnSpc>
+                <a:spcPct val="110000"/>
+              </a:lnSpc>
+              <a:spcAft>
+                <a:spcPts val="600"/>
+              </a:spcAft>
+            </a:pPr>
+            <a:r>
+              <a:rPr sz="1000" b="0">
+                <a:solidFill>
+                  <a:srgbClr val="8A97B5"/>
+                </a:solidFill>
+                <a:latin typeface="微软雅黑"/>
+              </a:rPr>
+              <a:t>两江智造集团 · Python编程基础</a:t>
+            </a:r>
+          </a:p>
+        </p:txBody>
+      </p:sp>
+      <p:sp>
+        <p:nvSpPr>
+          <p:cNvPr id="13" name="TextBox 12"/>
+          <p:cNvSpPr txBox="1"/>
+          <p:nvPr/>
+        </p:nvSpPr>
+        <p:spPr>
+          <a:xfrm>
+            <a:off x="10600000" y="6540000"/>
+            <a:ext cx="1000000" cy="300000"/>
+          </a:xfrm>
+          <a:prstGeom prst="rect">
+            <a:avLst/>
+          </a:prstGeom>
+          <a:noFill/>
+        </p:spPr>
+        <p:txBody>
+          <a:bodyPr wrap="square" anchor="t">
+            <a:spAutoFit/>
+          </a:bodyPr>
+          <a:lstStyle/>
+          <a:p>
+            <a:pPr algn="r">
+              <a:lnSpc>
+                <a:spcPct val="110000"/>
+              </a:lnSpc>
+              <a:spcAft>
+                <a:spcPts val="600"/>
+              </a:spcAft>
+            </a:pPr>
+            <a:r>
+              <a:rPr sz="1000" b="0">
+                <a:solidFill>
+                  <a:srgbClr val="8A97B5"/>
+                </a:solidFill>
+                <a:latin typeface="微软雅黑"/>
+              </a:rPr>
+              <a:t>10 / 13</a:t>
             </a:r>
           </a:p>
         </p:txBody>
@@ -8258,14 +11413,102 @@
       <p:grpSpPr/>
       <p:sp>
         <p:nvSpPr>
-          <p:cNvPr id="2" name="TextBox 1"/>
+          <p:cNvPr id="2" name="Rectangle 1"/>
+          <p:cNvSpPr/>
+          <p:nvPr/>
+        </p:nvSpPr>
+        <p:spPr>
+          <a:xfrm>
+            <a:off x="0" y="0"/>
+            <a:ext cx="12192000" cy="6858000"/>
+          </a:xfrm>
+          <a:prstGeom prst="rect">
+            <a:avLst/>
+          </a:prstGeom>
+          <a:solidFill>
+            <a:srgbClr val="010328"/>
+          </a:solidFill>
+          <a:ln>
+            <a:noFill/>
+          </a:ln>
+          <a:effectLst/>
+        </p:spPr>
+        <p:style>
+          <a:lnRef idx="1">
+            <a:schemeClr val="accent1"/>
+          </a:lnRef>
+          <a:fillRef idx="3">
+            <a:schemeClr val="accent1"/>
+          </a:fillRef>
+          <a:effectRef idx="2">
+            <a:schemeClr val="accent1"/>
+          </a:effectRef>
+          <a:fontRef idx="minor">
+            <a:schemeClr val="lt1"/>
+          </a:fontRef>
+        </p:style>
+        <p:txBody>
+          <a:bodyPr rtlCol="0" anchor="ctr"/>
+          <a:lstStyle/>
+          <a:p>
+            <a:pPr algn="ctr"/>
+          </a:p>
+        </p:txBody>
+      </p:sp>
+      <p:sp>
+        <p:nvSpPr>
+          <p:cNvPr id="3" name="Rectangle 2"/>
+          <p:cNvSpPr/>
+          <p:nvPr/>
+        </p:nvSpPr>
+        <p:spPr>
+          <a:xfrm>
+            <a:off x="0" y="2880360"/>
+            <a:ext cx="12192000" cy="50000"/>
+          </a:xfrm>
+          <a:prstGeom prst="rect">
+            <a:avLst/>
+          </a:prstGeom>
+          <a:solidFill>
+            <a:srgbClr val="F5670F"/>
+          </a:solidFill>
+          <a:ln>
+            <a:noFill/>
+          </a:ln>
+          <a:effectLst/>
+        </p:spPr>
+        <p:style>
+          <a:lnRef idx="1">
+            <a:schemeClr val="accent1"/>
+          </a:lnRef>
+          <a:fillRef idx="3">
+            <a:schemeClr val="accent1"/>
+          </a:fillRef>
+          <a:effectRef idx="2">
+            <a:schemeClr val="accent1"/>
+          </a:effectRef>
+          <a:fontRef idx="minor">
+            <a:schemeClr val="lt1"/>
+          </a:fontRef>
+        </p:style>
+        <p:txBody>
+          <a:bodyPr rtlCol="0" anchor="ctr"/>
+          <a:lstStyle/>
+          <a:p>
+            <a:pPr algn="ctr"/>
+          </a:p>
+        </p:txBody>
+      </p:sp>
+      <p:sp>
+        <p:nvSpPr>
+          <p:cNvPr id="4" name="TextBox 3"/>
           <p:cNvSpPr txBox="1"/>
           <p:nvPr/>
         </p:nvSpPr>
         <p:spPr>
           <a:xfrm>
-            <a:off x="548640" y="320040"/>
-            <a:ext cx="11094720" cy="914400"/>
+            <a:off x="0" y="1645920"/>
+            <a:ext cx="12192000" cy="1500000"/>
           </a:xfrm>
           <a:prstGeom prst="rect">
             <a:avLst/>
@@ -8273,28 +11516,41 @@
           <a:noFill/>
         </p:spPr>
         <p:txBody>
-          <a:bodyPr wrap="none">
+          <a:bodyPr wrap="square" anchor="t">
             <a:spAutoFit/>
           </a:bodyPr>
           <a:lstStyle/>
           <a:p>
-            <a:r>
-              <a:rPr sz="3000" b="1"/>
-              <a:t>安全与合规警示（操作前必读）</a:t>
-            </a:r>
-          </a:p>
-        </p:txBody>
-      </p:sp>
-      <p:sp>
-        <p:nvSpPr>
-          <p:cNvPr id="3" name="TextBox 2"/>
+            <a:pPr algn="ctr">
+              <a:lnSpc>
+                <a:spcPct val="110000"/>
+              </a:lnSpc>
+              <a:spcAft>
+                <a:spcPts val="600"/>
+              </a:spcAft>
+            </a:pPr>
+            <a:r>
+              <a:rPr sz="5400" b="1">
+                <a:solidFill>
+                  <a:srgbClr val="FFFFFF"/>
+                </a:solidFill>
+                <a:latin typeface="微软雅黑"/>
+              </a:rPr>
+              <a:t>THANKS</a:t>
+            </a:r>
+          </a:p>
+        </p:txBody>
+      </p:sp>
+      <p:sp>
+        <p:nvSpPr>
+          <p:cNvPr id="5" name="TextBox 4"/>
           <p:cNvSpPr txBox="1"/>
           <p:nvPr/>
         </p:nvSpPr>
         <p:spPr>
           <a:xfrm>
-            <a:off x="731520" y="1371600"/>
-            <a:ext cx="10728960" cy="4663440"/>
+            <a:off x="0" y="3429000"/>
+            <a:ext cx="12192000" cy="800000"/>
           </a:xfrm>
           <a:prstGeom prst="rect">
             <a:avLst/>
@@ -8302,69 +11558,69 @@
           <a:noFill/>
         </p:spPr>
         <p:txBody>
-          <a:bodyPr wrap="square">
+          <a:bodyPr wrap="square" anchor="t">
             <a:spAutoFit/>
           </a:bodyPr>
           <a:lstStyle/>
           <a:p>
-            <a:pPr>
+            <a:pPr algn="ctr">
+              <a:lnSpc>
+                <a:spcPct val="110000"/>
+              </a:lnSpc>
               <a:spcAft>
-                <a:spcPts val="1000"/>
+                <a:spcPts val="600"/>
               </a:spcAft>
             </a:pPr>
             <a:r>
-              <a:rPr sz="1800"/>
-              <a:t>1. 上机前确认本工位电源开关与急停位置，确认设备处于安全状态。</a:t>
-            </a:r>
-          </a:p>
-          <a:p>
-            <a:pPr>
+              <a:rPr sz="2200" b="1">
+                <a:solidFill>
+                  <a:srgbClr val="F5670F"/>
+                </a:solidFill>
+                <a:latin typeface="微软雅黑"/>
+              </a:rPr>
+              <a:t>感谢聆听 · 动手实践出真知</a:t>
+            </a:r>
+          </a:p>
+        </p:txBody>
+      </p:sp>
+      <p:sp>
+        <p:nvSpPr>
+          <p:cNvPr id="6" name="TextBox 5"/>
+          <p:cNvSpPr txBox="1"/>
+          <p:nvPr/>
+        </p:nvSpPr>
+        <p:spPr>
+          <a:xfrm>
+            <a:off x="0" y="4526280"/>
+            <a:ext cx="12192000" cy="600000"/>
+          </a:xfrm>
+          <a:prstGeom prst="rect">
+            <a:avLst/>
+          </a:prstGeom>
+          <a:noFill/>
+        </p:spPr>
+        <p:txBody>
+          <a:bodyPr wrap="square" anchor="t">
+            <a:spAutoFit/>
+          </a:bodyPr>
+          <a:lstStyle/>
+          <a:p>
+            <a:pPr algn="ctr">
+              <a:lnSpc>
+                <a:spcPct val="110000"/>
+              </a:lnSpc>
               <a:spcAft>
-                <a:spcPts val="1000"/>
+                <a:spcPts val="600"/>
               </a:spcAft>
             </a:pPr>
             <a:r>
-              <a:rPr sz="1800"/>
-              <a:t>2. 涉及接线的操作一律先断电、后验电、再作业，禁止带电插拔。</a:t>
-            </a:r>
-          </a:p>
-          <a:p>
-            <a:pPr>
-              <a:spcAft>
-                <a:spcPts val="1000"/>
-              </a:spcAft>
-            </a:pPr>
-            <a:r>
-              <a:rPr sz="1800"/>
-              <a:t>3. 身体任何部位不进入设备运动/散热区域，长发束起，不佩戴悬垂饰物。</a:t>
-            </a:r>
-          </a:p>
-          <a:p>
-            <a:pPr>
-              <a:spcAft>
-                <a:spcPts val="1000"/>
-              </a:spcAft>
-            </a:pPr>
-            <a:r>
-              <a:rPr sz="1800"/>
-              <a:t>4. 调试程序前先静态检查、再低速小样本试运行，确认无异常后放大规模。</a:t>
-            </a:r>
-          </a:p>
-          <a:p>
-            <a:pPr>
-              <a:spcAft>
-                <a:spcPts val="1000"/>
-              </a:spcAft>
-            </a:pPr>
-            <a:r>
-              <a:rPr sz="1800"/>
-              <a:t>5. 任何不确定或异常情况，立即停止操作并报告指导教师，不擅自处置。</a:t>
-            </a:r>
-          </a:p>
-          <a:p>
-            <a:r>
-              <a:rPr sz="1400" b="1"/>
-              <a:t>以上任一条违反，本次任务按课程标准「安全规范一票否决」条款记 0 分并中止实训。</a:t>
+              <a:rPr sz="1400" b="0">
+                <a:solidFill>
+                  <a:srgbClr val="BBC6E6"/>
+                </a:solidFill>
+                <a:latin typeface="微软雅黑"/>
+              </a:rPr>
+              <a:t>以生为本   |   做中学 · 学中做</a:t>
             </a:r>
           </a:p>
         </p:txBody>

--- a/V2授课PPT/W12-第24次课-正式答辩专场.pptx
+++ b/V2授课PPT/W12-第24次课-正式答辩专场.pptx
@@ -13,6 +13,8 @@
     <p:sldId id="370" r:id="rId18"/>
     <p:sldId id="371" r:id="rId19"/>
     <p:sldId id="372" r:id="rId20"/>
+    <p:sldId id="373" r:id="rId21"/>
+    <p:sldId id="374" r:id="rId22"/>
     <p:sldId id="320" r:id="rId72"/>
     <p:sldId id="339" r:id="rId91"/>
     <p:sldId id="366" r:id="rId118"/>
@@ -4327,14 +4329,102 @@
       <p:grpSpPr/>
       <p:sp>
         <p:nvSpPr>
-          <p:cNvPr id="2" name="TextBox 1"/>
+          <p:cNvPr id="2" name="Rectangle 1"/>
+          <p:cNvSpPr/>
+          <p:nvPr/>
+        </p:nvSpPr>
+        <p:spPr>
+          <a:xfrm>
+            <a:off x="0" y="0"/>
+            <a:ext cx="12192000" cy="1150000"/>
+          </a:xfrm>
+          <a:prstGeom prst="rect">
+            <a:avLst/>
+          </a:prstGeom>
+          <a:solidFill>
+            <a:srgbClr val="010328"/>
+          </a:solidFill>
+          <a:ln>
+            <a:noFill/>
+          </a:ln>
+          <a:effectLst/>
+        </p:spPr>
+        <p:style>
+          <a:lnRef idx="1">
+            <a:schemeClr val="accent1"/>
+          </a:lnRef>
+          <a:fillRef idx="3">
+            <a:schemeClr val="accent1"/>
+          </a:fillRef>
+          <a:effectRef idx="2">
+            <a:schemeClr val="accent1"/>
+          </a:effectRef>
+          <a:fontRef idx="minor">
+            <a:schemeClr val="lt1"/>
+          </a:fontRef>
+        </p:style>
+        <p:txBody>
+          <a:bodyPr rtlCol="0" anchor="ctr"/>
+          <a:lstStyle/>
+          <a:p>
+            <a:pPr algn="ctr"/>
+          </a:p>
+        </p:txBody>
+      </p:sp>
+      <p:sp>
+        <p:nvSpPr>
+          <p:cNvPr id="3" name="Rectangle 2"/>
+          <p:cNvSpPr/>
+          <p:nvPr/>
+        </p:nvSpPr>
+        <p:spPr>
+          <a:xfrm>
+            <a:off x="0" y="1150000"/>
+            <a:ext cx="2600000" cy="70000"/>
+          </a:xfrm>
+          <a:prstGeom prst="rect">
+            <a:avLst/>
+          </a:prstGeom>
+          <a:solidFill>
+            <a:srgbClr val="F5670F"/>
+          </a:solidFill>
+          <a:ln>
+            <a:noFill/>
+          </a:ln>
+          <a:effectLst/>
+        </p:spPr>
+        <p:style>
+          <a:lnRef idx="1">
+            <a:schemeClr val="accent1"/>
+          </a:lnRef>
+          <a:fillRef idx="3">
+            <a:schemeClr val="accent1"/>
+          </a:fillRef>
+          <a:effectRef idx="2">
+            <a:schemeClr val="accent1"/>
+          </a:effectRef>
+          <a:fontRef idx="minor">
+            <a:schemeClr val="lt1"/>
+          </a:fontRef>
+        </p:style>
+        <p:txBody>
+          <a:bodyPr rtlCol="0" anchor="ctr"/>
+          <a:lstStyle/>
+          <a:p>
+            <a:pPr algn="ctr"/>
+          </a:p>
+        </p:txBody>
+      </p:sp>
+      <p:sp>
+        <p:nvSpPr>
+          <p:cNvPr id="4" name="TextBox 3"/>
           <p:cNvSpPr txBox="1"/>
           <p:nvPr/>
         </p:nvSpPr>
         <p:spPr>
           <a:xfrm>
-            <a:off x="548640" y="320040"/>
-            <a:ext cx="11094720" cy="914400"/>
+            <a:off x="700000" y="300000"/>
+            <a:ext cx="10792000" cy="700000"/>
           </a:xfrm>
           <a:prstGeom prst="rect">
             <a:avLst/>
@@ -4342,28 +4432,169 @@
           <a:noFill/>
         </p:spPr>
         <p:txBody>
-          <a:bodyPr wrap="none">
+          <a:bodyPr wrap="square" anchor="ctr">
             <a:spAutoFit/>
           </a:bodyPr>
           <a:lstStyle/>
           <a:p>
-            <a:r>
-              <a:rPr sz="3000" b="1"/>
-              <a:t>本讲与岗位任务单的衔接</a:t>
-            </a:r>
-          </a:p>
-        </p:txBody>
-      </p:sp>
-      <p:sp>
-        <p:nvSpPr>
-          <p:cNvPr id="3" name="TextBox 2"/>
+            <a:pPr algn="l">
+              <a:lnSpc>
+                <a:spcPct val="110000"/>
+              </a:lnSpc>
+              <a:spcAft>
+                <a:spcPts val="600"/>
+              </a:spcAft>
+            </a:pPr>
+            <a:r>
+              <a:rPr sz="2400" b="1">
+                <a:solidFill>
+                  <a:srgbClr val="FFFFFF"/>
+                </a:solidFill>
+                <a:latin typeface="微软雅黑"/>
+              </a:rPr>
+              <a:t>下次课预告 · 带着问题去下一讲</a:t>
+            </a:r>
+          </a:p>
+        </p:txBody>
+      </p:sp>
+      <p:sp>
+        <p:nvSpPr>
+          <p:cNvPr id="24" name="Rectangle 23"/>
+          <p:cNvSpPr/>
+          <p:nvPr/>
+        </p:nvSpPr>
+        <p:spPr>
+          <a:xfrm>
+            <a:off x="500000" y="6500000"/>
+            <a:ext cx="11100000" cy="20000"/>
+          </a:xfrm>
+          <a:prstGeom prst="rect">
+            <a:avLst/>
+          </a:prstGeom>
+          <a:solidFill>
+            <a:srgbClr val="C9D4EE"/>
+          </a:solidFill>
+          <a:ln>
+            <a:noFill/>
+          </a:ln>
+          <a:effectLst/>
+        </p:spPr>
+        <p:style>
+          <a:lnRef idx="1">
+            <a:schemeClr val="accent1"/>
+          </a:lnRef>
+          <a:fillRef idx="3">
+            <a:schemeClr val="accent1"/>
+          </a:fillRef>
+          <a:effectRef idx="2">
+            <a:schemeClr val="accent1"/>
+          </a:effectRef>
+          <a:fontRef idx="minor">
+            <a:schemeClr val="lt1"/>
+          </a:fontRef>
+        </p:style>
+        <p:txBody>
+          <a:bodyPr rtlCol="0" anchor="ctr"/>
+          <a:lstStyle/>
+          <a:p>
+            <a:pPr algn="ctr"/>
+          </a:p>
+        </p:txBody>
+      </p:sp>
+      <p:sp>
+        <p:nvSpPr>
+          <p:cNvPr id="25" name="TextBox 24"/>
           <p:cNvSpPr txBox="1"/>
           <p:nvPr/>
         </p:nvSpPr>
         <p:spPr>
           <a:xfrm>
-            <a:off x="731520" y="1371600"/>
-            <a:ext cx="10728960" cy="4663440"/>
+            <a:off x="500000" y="6540000"/>
+            <a:ext cx="7000000" cy="300000"/>
+          </a:xfrm>
+          <a:prstGeom prst="rect">
+            <a:avLst/>
+          </a:prstGeom>
+          <a:noFill/>
+        </p:spPr>
+        <p:txBody>
+          <a:bodyPr wrap="square" anchor="t">
+            <a:spAutoFit/>
+          </a:bodyPr>
+          <a:lstStyle/>
+          <a:p>
+            <a:pPr algn="l">
+              <a:lnSpc>
+                <a:spcPct val="110000"/>
+              </a:lnSpc>
+              <a:spcAft>
+                <a:spcPts val="600"/>
+              </a:spcAft>
+            </a:pPr>
+            <a:r>
+              <a:rPr sz="1000" b="0">
+                <a:solidFill>
+                  <a:srgbClr val="8A97B5"/>
+                </a:solidFill>
+                <a:latin typeface="微软雅黑"/>
+              </a:rPr>
+              <a:t>两江智造集团 · Python编程基础</a:t>
+            </a:r>
+          </a:p>
+        </p:txBody>
+      </p:sp>
+      <p:sp>
+        <p:nvSpPr>
+          <p:cNvPr id="26" name="TextBox 25"/>
+          <p:cNvSpPr txBox="1"/>
+          <p:nvPr/>
+        </p:nvSpPr>
+        <p:spPr>
+          <a:xfrm>
+            <a:off x="10600000" y="6540000"/>
+            <a:ext cx="1000000" cy="300000"/>
+          </a:xfrm>
+          <a:prstGeom prst="rect">
+            <a:avLst/>
+          </a:prstGeom>
+          <a:noFill/>
+        </p:spPr>
+        <p:txBody>
+          <a:bodyPr wrap="square" anchor="t">
+            <a:spAutoFit/>
+          </a:bodyPr>
+          <a:lstStyle/>
+          <a:p>
+            <a:pPr algn="r">
+              <a:lnSpc>
+                <a:spcPct val="110000"/>
+              </a:lnSpc>
+              <a:spcAft>
+                <a:spcPts val="600"/>
+              </a:spcAft>
+            </a:pPr>
+            <a:r>
+              <a:rPr sz="1000" b="0">
+                <a:solidFill>
+                  <a:srgbClr val="8A97B5"/>
+                </a:solidFill>
+                <a:latin typeface="微软雅黑"/>
+              </a:rPr>
+              <a:t>10 / 15</a:t>
+            </a:r>
+          </a:p>
+        </p:txBody>
+      </p:sp>
+      <p:sp>
+        <p:nvSpPr>
+          <p:cNvPr id="27" name="TextBox 26"/>
+          <p:cNvSpPr txBox="1"/>
+          <p:nvPr/>
+        </p:nvSpPr>
+        <p:spPr>
+          <a:xfrm>
+            <a:off x="457200" y="1389888"/>
+            <a:ext cx="11274552" cy="274320"/>
           </a:xfrm>
           <a:prstGeom prst="rect">
             <a:avLst/>
@@ -4376,47 +4607,262 @@
           </a:bodyPr>
           <a:lstStyle/>
           <a:p>
-            <a:pPr>
-              <a:spcAft>
-                <a:spcPts val="1000"/>
-              </a:spcAft>
-            </a:pPr>
-            <a:r>
-              <a:rPr sz="1800"/>
-              <a:t>本讲在工作过程系统化课程中承担的任务环节：任务实施</a:t>
-            </a:r>
-          </a:p>
-          <a:p>
-            <a:pPr>
-              <a:spcAft>
-                <a:spcPts val="1000"/>
-              </a:spcAft>
-            </a:pPr>
-            <a:r>
-              <a:rPr sz="1800"/>
-              <a:t>考核对齐：过程性成绩取自本讲工单第六节各模块得分合计（满分 100）。</a:t>
-            </a:r>
-          </a:p>
-          <a:p>
-            <a:pPr>
-              <a:spcAft>
-                <a:spcPts val="1000"/>
-              </a:spcAft>
-            </a:pPr>
-            <a:r>
-              <a:rPr sz="1800"/>
-              <a:t>达标线：综合成绩≥60 分，且无安全红线一票否决记录</a:t>
-            </a:r>
-          </a:p>
-          <a:p>
-            <a:pPr>
-              <a:spcAft>
-                <a:spcPts val="1000"/>
-              </a:spcAft>
-            </a:pPr>
-            <a:r>
-              <a:rPr sz="1800"/>
-              <a:t>无效工单判定：未打安全勾、无本人签字、无三方联签。</a:t>
+            <a:r>
+              <a:rPr sz="1050" b="0">
+                <a:solidFill>
+                  <a:srgbClr val="6B7280"/>
+                </a:solidFill>
+                <a:latin typeface="微软雅黑"/>
+              </a:rPr>
+              <a:t>带着问题去下一讲——预习任务与自测问题逐字取自课程安排，课前完成。</a:t>
+            </a:r>
+          </a:p>
+        </p:txBody>
+      </p:sp>
+      <p:sp>
+        <p:nvSpPr>
+          <p:cNvPr id="28" name="Rectangle 27"/>
+          <p:cNvSpPr/>
+          <p:nvPr/>
+        </p:nvSpPr>
+        <p:spPr>
+          <a:xfrm>
+            <a:off x="457200" y="1920240"/>
+            <a:ext cx="11274552" cy="960120"/>
+          </a:xfrm>
+          <a:prstGeom prst="rect">
+            <a:avLst/>
+          </a:prstGeom>
+          <a:solidFill>
+            <a:srgbClr val="F7F9FC"/>
+          </a:solidFill>
+          <a:ln>
+            <a:solidFill>
+              <a:srgbClr val="D6DCE4"/>
+            </a:solidFill>
+          </a:ln>
+          <a:effectLst/>
+        </p:spPr>
+        <p:style>
+          <a:lnRef idx="1">
+            <a:schemeClr val="accent1"/>
+          </a:lnRef>
+          <a:fillRef idx="3">
+            <a:schemeClr val="accent1"/>
+          </a:fillRef>
+          <a:effectRef idx="2">
+            <a:schemeClr val="accent1"/>
+          </a:effectRef>
+          <a:fontRef idx="minor">
+            <a:schemeClr val="lt1"/>
+          </a:fontRef>
+        </p:style>
+        <p:txBody>
+          <a:bodyPr rtlCol="0" anchor="ctr" wrap="square"/>
+          <a:lstStyle/>
+          <a:p>
+            <a:pPr algn="ctr"/>
+          </a:p>
+        </p:txBody>
+      </p:sp>
+      <p:sp>
+        <p:nvSpPr>
+          <p:cNvPr id="29" name="Rectangle 28"/>
+          <p:cNvSpPr/>
+          <p:nvPr/>
+        </p:nvSpPr>
+        <p:spPr>
+          <a:xfrm>
+            <a:off x="457200" y="1920240"/>
+            <a:ext cx="82296" cy="960120"/>
+          </a:xfrm>
+          <a:prstGeom prst="rect">
+            <a:avLst/>
+          </a:prstGeom>
+          <a:solidFill>
+            <a:srgbClr val="2F5D8C"/>
+          </a:solidFill>
+          <a:ln>
+            <a:noFill/>
+          </a:ln>
+          <a:effectLst/>
+        </p:spPr>
+        <p:style>
+          <a:lnRef idx="1">
+            <a:schemeClr val="accent1"/>
+          </a:lnRef>
+          <a:fillRef idx="3">
+            <a:schemeClr val="accent1"/>
+          </a:fillRef>
+          <a:effectRef idx="2">
+            <a:schemeClr val="accent1"/>
+          </a:effectRef>
+          <a:fontRef idx="minor">
+            <a:schemeClr val="lt1"/>
+          </a:fontRef>
+        </p:style>
+        <p:txBody>
+          <a:bodyPr rtlCol="0" anchor="ctr" wrap="square"/>
+          <a:lstStyle/>
+          <a:p>
+            <a:pPr algn="ctr"/>
+          </a:p>
+        </p:txBody>
+      </p:sp>
+      <p:sp>
+        <p:nvSpPr>
+          <p:cNvPr id="30" name="TextBox 29"/>
+          <p:cNvSpPr txBox="1"/>
+          <p:nvPr/>
+        </p:nvSpPr>
+        <p:spPr>
+          <a:xfrm>
+            <a:off x="685800" y="2084832"/>
+            <a:ext cx="10881360" cy="685800"/>
+          </a:xfrm>
+          <a:prstGeom prst="rect">
+            <a:avLst/>
+          </a:prstGeom>
+          <a:noFill/>
+        </p:spPr>
+        <p:txBody>
+          <a:bodyPr wrap="square">
+            <a:spAutoFit/>
+          </a:bodyPr>
+          <a:lstStyle/>
+          <a:p>
+            <a:r>
+              <a:rPr sz="1050" b="0">
+                <a:solidFill>
+                  <a:srgbClr val="2B2F36"/>
+                </a:solidFill>
+                <a:latin typeface="微软雅黑"/>
+              </a:rPr>
+              <a:t>主题：见课程教学日历</a:t>
+            </a:r>
+          </a:p>
+        </p:txBody>
+      </p:sp>
+      <p:sp>
+        <p:nvSpPr>
+          <p:cNvPr id="31" name="Rectangle 30"/>
+          <p:cNvSpPr/>
+          <p:nvPr/>
+        </p:nvSpPr>
+        <p:spPr>
+          <a:xfrm>
+            <a:off x="457200" y="3026664"/>
+            <a:ext cx="11274552" cy="960120"/>
+          </a:xfrm>
+          <a:prstGeom prst="rect">
+            <a:avLst/>
+          </a:prstGeom>
+          <a:solidFill>
+            <a:srgbClr val="F7F9FC"/>
+          </a:solidFill>
+          <a:ln>
+            <a:solidFill>
+              <a:srgbClr val="D6DCE4"/>
+            </a:solidFill>
+          </a:ln>
+          <a:effectLst/>
+        </p:spPr>
+        <p:style>
+          <a:lnRef idx="1">
+            <a:schemeClr val="accent1"/>
+          </a:lnRef>
+          <a:fillRef idx="3">
+            <a:schemeClr val="accent1"/>
+          </a:fillRef>
+          <a:effectRef idx="2">
+            <a:schemeClr val="accent1"/>
+          </a:effectRef>
+          <a:fontRef idx="minor">
+            <a:schemeClr val="lt1"/>
+          </a:fontRef>
+        </p:style>
+        <p:txBody>
+          <a:bodyPr rtlCol="0" anchor="ctr" wrap="square"/>
+          <a:lstStyle/>
+          <a:p>
+            <a:pPr algn="ctr"/>
+          </a:p>
+        </p:txBody>
+      </p:sp>
+      <p:sp>
+        <p:nvSpPr>
+          <p:cNvPr id="32" name="Rectangle 31"/>
+          <p:cNvSpPr/>
+          <p:nvPr/>
+        </p:nvSpPr>
+        <p:spPr>
+          <a:xfrm>
+            <a:off x="457200" y="3026664"/>
+            <a:ext cx="82296" cy="960120"/>
+          </a:xfrm>
+          <a:prstGeom prst="rect">
+            <a:avLst/>
+          </a:prstGeom>
+          <a:solidFill>
+            <a:srgbClr val="2F5D8C"/>
+          </a:solidFill>
+          <a:ln>
+            <a:noFill/>
+          </a:ln>
+          <a:effectLst/>
+        </p:spPr>
+        <p:style>
+          <a:lnRef idx="1">
+            <a:schemeClr val="accent1"/>
+          </a:lnRef>
+          <a:fillRef idx="3">
+            <a:schemeClr val="accent1"/>
+          </a:fillRef>
+          <a:effectRef idx="2">
+            <a:schemeClr val="accent1"/>
+          </a:effectRef>
+          <a:fontRef idx="minor">
+            <a:schemeClr val="lt1"/>
+          </a:fontRef>
+        </p:style>
+        <p:txBody>
+          <a:bodyPr rtlCol="0" anchor="ctr" wrap="square"/>
+          <a:lstStyle/>
+          <a:p>
+            <a:pPr algn="ctr"/>
+          </a:p>
+        </p:txBody>
+      </p:sp>
+      <p:sp>
+        <p:nvSpPr>
+          <p:cNvPr id="33" name="TextBox 32"/>
+          <p:cNvSpPr txBox="1"/>
+          <p:nvPr/>
+        </p:nvSpPr>
+        <p:spPr>
+          <a:xfrm>
+            <a:off x="685800" y="3191256"/>
+            <a:ext cx="10881360" cy="685800"/>
+          </a:xfrm>
+          <a:prstGeom prst="rect">
+            <a:avLst/>
+          </a:prstGeom>
+          <a:noFill/>
+        </p:spPr>
+        <p:txBody>
+          <a:bodyPr wrap="square">
+            <a:spAutoFit/>
+          </a:bodyPr>
+          <a:lstStyle/>
+          <a:p>
+            <a:r>
+              <a:rPr sz="1050" b="0">
+                <a:solidFill>
+                  <a:srgbClr val="2B2F36"/>
+                </a:solidFill>
+                <a:latin typeface="微软雅黑"/>
+              </a:rPr>
+              <a:t>预习快问：见导学单</a:t>
             </a:r>
           </a:p>
         </p:txBody>
@@ -4544,7 +4990,7 @@
           <a:noFill/>
         </p:spPr>
         <p:txBody>
-          <a:bodyPr wrap="square" anchor="ctr">
+          <a:bodyPr wrap="square" anchor="t">
             <a:spAutoFit/>
           </a:bodyPr>
           <a:lstStyle/>
@@ -4564,27 +5010,27 @@
                 </a:solidFill>
                 <a:latin typeface="微软雅黑"/>
               </a:rPr>
-              <a:t>本课重难点地图 · 老师划重点（动手前必看）</a:t>
-            </a:r>
-          </a:p>
-        </p:txBody>
-      </p:sp>
-      <p:sp>
-        <p:nvSpPr>
-          <p:cNvPr id="24" name="Rectangle 23"/>
+              <a:t>实施任务：工单Z《综合项目答辩专场》</a:t>
+            </a:r>
+          </a:p>
+        </p:txBody>
+      </p:sp>
+      <p:sp>
+        <p:nvSpPr>
+          <p:cNvPr id="5" name="Rectangle 4"/>
           <p:cNvSpPr/>
           <p:nvPr/>
         </p:nvSpPr>
         <p:spPr>
           <a:xfrm>
-            <a:off x="500000" y="6500000"/>
-            <a:ext cx="11100000" cy="20000"/>
+            <a:off x="800000" y="1950000"/>
+            <a:ext cx="6300000" cy="3900000"/>
           </a:xfrm>
           <a:prstGeom prst="rect">
             <a:avLst/>
           </a:prstGeom>
           <a:solidFill>
-            <a:srgbClr val="C9D4EE"/>
+            <a:srgbClr val="F3F6FD"/>
           </a:solidFill>
           <a:ln>
             <a:noFill/>
@@ -4615,14 +5061,159 @@
       </p:sp>
       <p:sp>
         <p:nvSpPr>
-          <p:cNvPr id="25" name="TextBox 24"/>
+          <p:cNvPr id="6" name="TextBox 5"/>
           <p:cNvSpPr txBox="1"/>
           <p:nvPr/>
         </p:nvSpPr>
         <p:spPr>
           <a:xfrm>
-            <a:off x="500000" y="6540000"/>
-            <a:ext cx="7000000" cy="300000"/>
+            <a:off x="1000000" y="2100000"/>
+            <a:ext cx="5900000" cy="3600000"/>
+          </a:xfrm>
+          <a:prstGeom prst="rect">
+            <a:avLst/>
+          </a:prstGeom>
+          <a:noFill/>
+        </p:spPr>
+        <p:txBody>
+          <a:bodyPr wrap="square" anchor="t">
+            <a:spAutoFit/>
+          </a:bodyPr>
+          <a:lstStyle/>
+          <a:p>
+            <a:pPr algn="l">
+              <a:lnSpc>
+                <a:spcPct val="130000"/>
+              </a:lnSpc>
+              <a:spcAft>
+                <a:spcPts val="600"/>
+              </a:spcAft>
+            </a:pPr>
+            <a:r>
+              <a:rPr sz="1500" b="1">
+                <a:solidFill>
+                  <a:srgbClr val="0545E8"/>
+                </a:solidFill>
+                <a:latin typeface="微软雅黑"/>
+              </a:rPr>
+              <a:t>实施步骤</a:t>
+            </a:r>
+          </a:p>
+          <a:p>
+            <a:pPr algn="l">
+              <a:lnSpc>
+                <a:spcPct val="130000"/>
+              </a:lnSpc>
+              <a:spcAft>
+                <a:spcPts val="600"/>
+              </a:spcAft>
+            </a:pPr>
+            <a:r>
+              <a:rPr sz="1400" b="0">
+                <a:solidFill>
+                  <a:srgbClr val="010328"/>
+                </a:solidFill>
+                <a:latin typeface="微软雅黑"/>
+              </a:rPr>
+              <a:t>1. 正式答辩(8+5分钟)</a:t>
+            </a:r>
+          </a:p>
+          <a:p>
+            <a:pPr algn="l">
+              <a:lnSpc>
+                <a:spcPct val="130000"/>
+              </a:lnSpc>
+              <a:spcAft>
+                <a:spcPts val="600"/>
+              </a:spcAft>
+            </a:pPr>
+            <a:r>
+              <a:rPr sz="1400" b="0">
+                <a:solidFill>
+                  <a:srgbClr val="010328"/>
+                </a:solidFill>
+                <a:latin typeface="微软雅黑"/>
+              </a:rPr>
+              <a:t>2. 组间互评+个人反思</a:t>
+            </a:r>
+          </a:p>
+          <a:p>
+            <a:pPr algn="l">
+              <a:lnSpc>
+                <a:spcPct val="130000"/>
+              </a:lnSpc>
+              <a:spcAft>
+                <a:spcPts val="600"/>
+              </a:spcAft>
+            </a:pPr>
+            <a:r>
+              <a:rPr sz="1400" b="0">
+                <a:solidFill>
+                  <a:srgbClr val="010328"/>
+                </a:solidFill>
+                <a:latin typeface="微软雅黑"/>
+              </a:rPr>
+              <a:t>3. 提交代码/报告/PPT/视频/贡献表</a:t>
+            </a:r>
+          </a:p>
+        </p:txBody>
+      </p:sp>
+      <p:sp>
+        <p:nvSpPr>
+          <p:cNvPr id="7" name="Rectangle 6"/>
+          <p:cNvSpPr/>
+          <p:nvPr/>
+        </p:nvSpPr>
+        <p:spPr>
+          <a:xfrm>
+            <a:off x="7400000" y="1950000"/>
+            <a:ext cx="4000000" cy="1850000"/>
+          </a:xfrm>
+          <a:prstGeom prst="rect">
+            <a:avLst/>
+          </a:prstGeom>
+          <a:solidFill>
+            <a:srgbClr val="E8F1E8"/>
+          </a:solidFill>
+          <a:ln>
+            <a:solidFill>
+              <a:srgbClr val="0475B6"/>
+            </a:solidFill>
+          </a:ln>
+          <a:effectLst/>
+        </p:spPr>
+        <p:style>
+          <a:lnRef idx="1">
+            <a:schemeClr val="accent1"/>
+          </a:lnRef>
+          <a:fillRef idx="3">
+            <a:schemeClr val="accent1"/>
+          </a:fillRef>
+          <a:effectRef idx="2">
+            <a:schemeClr val="accent1"/>
+          </a:effectRef>
+          <a:fontRef idx="minor">
+            <a:schemeClr val="lt1"/>
+          </a:fontRef>
+        </p:style>
+        <p:txBody>
+          <a:bodyPr rtlCol="0" anchor="ctr"/>
+          <a:lstStyle/>
+          <a:p>
+            <a:pPr algn="ctr"/>
+          </a:p>
+        </p:txBody>
+      </p:sp>
+      <p:sp>
+        <p:nvSpPr>
+          <p:cNvPr id="8" name="TextBox 7"/>
+          <p:cNvSpPr txBox="1"/>
+          <p:nvPr/>
+        </p:nvSpPr>
+        <p:spPr>
+          <a:xfrm>
+            <a:off x="7550000" y="2080000"/>
+            <a:ext cx="3750000" cy="1650000"/>
           </a:xfrm>
           <a:prstGeom prst="rect">
             <a:avLst/>
@@ -4644,6 +5235,218 @@
               </a:spcAft>
             </a:pPr>
             <a:r>
+              <a:rPr sz="1400" b="1">
+                <a:solidFill>
+                  <a:srgbClr val="0475B6"/>
+                </a:solidFill>
+                <a:latin typeface="微软雅黑"/>
+              </a:rPr>
+              <a:t>及格标准（D）</a:t>
+            </a:r>
+          </a:p>
+          <a:p>
+            <a:pPr algn="l">
+              <a:lnSpc>
+                <a:spcPct val="110000"/>
+              </a:lnSpc>
+              <a:spcAft>
+                <a:spcPts val="600"/>
+              </a:spcAft>
+            </a:pPr>
+            <a:r>
+              <a:rPr sz="1300" b="0">
+                <a:solidFill>
+                  <a:srgbClr val="010328"/>
+                </a:solidFill>
+                <a:latin typeface="微软雅黑"/>
+              </a:rPr>
+              <a:t>功能基本完整+能演示主流程</a:t>
+            </a:r>
+          </a:p>
+        </p:txBody>
+      </p:sp>
+      <p:sp>
+        <p:nvSpPr>
+          <p:cNvPr id="9" name="Rectangle 8"/>
+          <p:cNvSpPr/>
+          <p:nvPr/>
+        </p:nvSpPr>
+        <p:spPr>
+          <a:xfrm>
+            <a:off x="7400000" y="3950000"/>
+            <a:ext cx="4000000" cy="1850000"/>
+          </a:xfrm>
+          <a:prstGeom prst="rect">
+            <a:avLst/>
+          </a:prstGeom>
+          <a:solidFill>
+            <a:srgbClr val="FDF0E6"/>
+          </a:solidFill>
+          <a:ln>
+            <a:solidFill>
+              <a:srgbClr val="F5670F"/>
+            </a:solidFill>
+          </a:ln>
+          <a:effectLst/>
+        </p:spPr>
+        <p:style>
+          <a:lnRef idx="1">
+            <a:schemeClr val="accent1"/>
+          </a:lnRef>
+          <a:fillRef idx="3">
+            <a:schemeClr val="accent1"/>
+          </a:fillRef>
+          <a:effectRef idx="2">
+            <a:schemeClr val="accent1"/>
+          </a:effectRef>
+          <a:fontRef idx="minor">
+            <a:schemeClr val="lt1"/>
+          </a:fontRef>
+        </p:style>
+        <p:txBody>
+          <a:bodyPr rtlCol="0" anchor="ctr"/>
+          <a:lstStyle/>
+          <a:p>
+            <a:pPr algn="ctr"/>
+          </a:p>
+        </p:txBody>
+      </p:sp>
+      <p:sp>
+        <p:nvSpPr>
+          <p:cNvPr id="10" name="TextBox 9"/>
+          <p:cNvSpPr txBox="1"/>
+          <p:nvPr/>
+        </p:nvSpPr>
+        <p:spPr>
+          <a:xfrm>
+            <a:off x="7550000" y="4080000"/>
+            <a:ext cx="3750000" cy="1650000"/>
+          </a:xfrm>
+          <a:prstGeom prst="rect">
+            <a:avLst/>
+          </a:prstGeom>
+          <a:noFill/>
+        </p:spPr>
+        <p:txBody>
+          <a:bodyPr wrap="square" anchor="t">
+            <a:spAutoFit/>
+          </a:bodyPr>
+          <a:lstStyle/>
+          <a:p>
+            <a:pPr algn="l">
+              <a:lnSpc>
+                <a:spcPct val="110000"/>
+              </a:lnSpc>
+              <a:spcAft>
+                <a:spcPts val="600"/>
+              </a:spcAft>
+            </a:pPr>
+            <a:r>
+              <a:rPr sz="1400" b="1">
+                <a:solidFill>
+                  <a:srgbClr val="F5670F"/>
+                </a:solidFill>
+                <a:latin typeface="微软雅黑"/>
+              </a:rPr>
+              <a:t>优秀标准（B+）</a:t>
+            </a:r>
+          </a:p>
+          <a:p>
+            <a:pPr algn="l">
+              <a:lnSpc>
+                <a:spcPct val="110000"/>
+              </a:lnSpc>
+              <a:spcAft>
+                <a:spcPts val="600"/>
+              </a:spcAft>
+            </a:pPr>
+            <a:r>
+              <a:rPr sz="1300" b="0">
+                <a:solidFill>
+                  <a:srgbClr val="010328"/>
+                </a:solidFill>
+                <a:latin typeface="微软雅黑"/>
+              </a:rPr>
+              <a:t>规范率≥95%+架构清晰+创新点</a:t>
+            </a:r>
+          </a:p>
+        </p:txBody>
+      </p:sp>
+      <p:sp>
+        <p:nvSpPr>
+          <p:cNvPr id="11" name="Rectangle 10"/>
+          <p:cNvSpPr/>
+          <p:nvPr/>
+        </p:nvSpPr>
+        <p:spPr>
+          <a:xfrm>
+            <a:off x="500000" y="6500000"/>
+            <a:ext cx="11100000" cy="20000"/>
+          </a:xfrm>
+          <a:prstGeom prst="rect">
+            <a:avLst/>
+          </a:prstGeom>
+          <a:solidFill>
+            <a:srgbClr val="C9D4EE"/>
+          </a:solidFill>
+          <a:ln>
+            <a:noFill/>
+          </a:ln>
+          <a:effectLst/>
+        </p:spPr>
+        <p:style>
+          <a:lnRef idx="1">
+            <a:schemeClr val="accent1"/>
+          </a:lnRef>
+          <a:fillRef idx="3">
+            <a:schemeClr val="accent1"/>
+          </a:fillRef>
+          <a:effectRef idx="2">
+            <a:schemeClr val="accent1"/>
+          </a:effectRef>
+          <a:fontRef idx="minor">
+            <a:schemeClr val="lt1"/>
+          </a:fontRef>
+        </p:style>
+        <p:txBody>
+          <a:bodyPr rtlCol="0" anchor="ctr"/>
+          <a:lstStyle/>
+          <a:p>
+            <a:pPr algn="ctr"/>
+          </a:p>
+        </p:txBody>
+      </p:sp>
+      <p:sp>
+        <p:nvSpPr>
+          <p:cNvPr id="12" name="TextBox 11"/>
+          <p:cNvSpPr txBox="1"/>
+          <p:nvPr/>
+        </p:nvSpPr>
+        <p:spPr>
+          <a:xfrm>
+            <a:off x="500000" y="6540000"/>
+            <a:ext cx="7000000" cy="300000"/>
+          </a:xfrm>
+          <a:prstGeom prst="rect">
+            <a:avLst/>
+          </a:prstGeom>
+          <a:noFill/>
+        </p:spPr>
+        <p:txBody>
+          <a:bodyPr wrap="square" anchor="t">
+            <a:spAutoFit/>
+          </a:bodyPr>
+          <a:lstStyle/>
+          <a:p>
+            <a:pPr algn="l">
+              <a:lnSpc>
+                <a:spcPct val="110000"/>
+              </a:lnSpc>
+              <a:spcAft>
+                <a:spcPts val="600"/>
+              </a:spcAft>
+            </a:pPr>
+            <a:r>
               <a:rPr sz="1000" b="0">
                 <a:solidFill>
                   <a:srgbClr val="8A97B5"/>
@@ -4657,7 +5460,7 @@
       </p:sp>
       <p:sp>
         <p:nvSpPr>
-          <p:cNvPr id="26" name="TextBox 25"/>
+          <p:cNvPr id="13" name="TextBox 12"/>
           <p:cNvSpPr txBox="1"/>
           <p:nvPr/>
         </p:nvSpPr>
@@ -4692,839 +5495,7 @@
                 </a:solidFill>
                 <a:latin typeface="微软雅黑"/>
               </a:rPr>
-              <a:t>6 / 13</a:t>
-            </a:r>
-          </a:p>
-        </p:txBody>
-      </p:sp>
-      <p:sp>
-        <p:nvSpPr>
-          <p:cNvPr id="27" name="TextBox 26"/>
-          <p:cNvSpPr txBox="1"/>
-          <p:nvPr/>
-        </p:nvSpPr>
-        <p:spPr>
-          <a:xfrm>
-            <a:off x="457200" y="1389888"/>
-            <a:ext cx="11274552" cy="274320"/>
-          </a:xfrm>
-          <a:prstGeom prst="rect">
-            <a:avLst/>
-          </a:prstGeom>
-          <a:noFill/>
-        </p:spPr>
-        <p:txBody>
-          <a:bodyPr wrap="square">
-            <a:spAutoFit/>
-          </a:bodyPr>
-          <a:lstStyle/>
-          <a:p>
-            <a:r>
-              <a:rPr sz="1050" b="0">
-                <a:solidFill>
-                  <a:srgbClr val="6B7280"/>
-                </a:solidFill>
-                <a:latin typeface="微软雅黑"/>
-              </a:rPr>
-              <a:t>动手前先看这页：重点要会什么、难点会卡在哪、哪里最容易错、学没学会怎么自测。</a:t>
-            </a:r>
-          </a:p>
-        </p:txBody>
-      </p:sp>
-      <p:sp>
-        <p:nvSpPr>
-          <p:cNvPr id="28" name="Rectangle 27"/>
-          <p:cNvSpPr/>
-          <p:nvPr/>
-        </p:nvSpPr>
-        <p:spPr>
-          <a:xfrm>
-            <a:off x="457200" y="1783080"/>
-            <a:ext cx="5532120" cy="3127248"/>
-          </a:xfrm>
-          <a:prstGeom prst="rect">
-            <a:avLst/>
-          </a:prstGeom>
-          <a:solidFill>
-            <a:srgbClr val="FFFFFF"/>
-          </a:solidFill>
-          <a:ln>
-            <a:solidFill>
-              <a:srgbClr val="D6DCE4"/>
-            </a:solidFill>
-          </a:ln>
-          <a:effectLst/>
-        </p:spPr>
-        <p:style>
-          <a:lnRef idx="1">
-            <a:schemeClr val="accent1"/>
-          </a:lnRef>
-          <a:fillRef idx="3">
-            <a:schemeClr val="accent1"/>
-          </a:fillRef>
-          <a:effectRef idx="2">
-            <a:schemeClr val="accent1"/>
-          </a:effectRef>
-          <a:fontRef idx="minor">
-            <a:schemeClr val="lt1"/>
-          </a:fontRef>
-        </p:style>
-        <p:txBody>
-          <a:bodyPr rtlCol="0" anchor="ctr" wrap="square"/>
-          <a:lstStyle/>
-          <a:p>
-            <a:pPr algn="ctr"/>
-          </a:p>
-        </p:txBody>
-      </p:sp>
-      <p:sp>
-        <p:nvSpPr>
-          <p:cNvPr id="29" name="Rectangle 28"/>
-          <p:cNvSpPr/>
-          <p:nvPr/>
-        </p:nvSpPr>
-        <p:spPr>
-          <a:xfrm>
-            <a:off x="457200" y="1783080"/>
-            <a:ext cx="5532120" cy="365760"/>
-          </a:xfrm>
-          <a:prstGeom prst="rect">
-            <a:avLst/>
-          </a:prstGeom>
-          <a:solidFill>
-            <a:srgbClr val="2F5D8C"/>
-          </a:solidFill>
-          <a:ln>
-            <a:noFill/>
-          </a:ln>
-          <a:effectLst/>
-        </p:spPr>
-        <p:style>
-          <a:lnRef idx="1">
-            <a:schemeClr val="accent1"/>
-          </a:lnRef>
-          <a:fillRef idx="3">
-            <a:schemeClr val="accent1"/>
-          </a:fillRef>
-          <a:effectRef idx="2">
-            <a:schemeClr val="accent1"/>
-          </a:effectRef>
-          <a:fontRef idx="minor">
-            <a:schemeClr val="lt1"/>
-          </a:fontRef>
-        </p:style>
-        <p:txBody>
-          <a:bodyPr rtlCol="0" anchor="ctr" wrap="square"/>
-          <a:lstStyle/>
-          <a:p>
-            <a:pPr algn="ctr"/>
-          </a:p>
-        </p:txBody>
-      </p:sp>
-      <p:sp>
-        <p:nvSpPr>
-          <p:cNvPr id="30" name="TextBox 29"/>
-          <p:cNvSpPr txBox="1"/>
-          <p:nvPr/>
-        </p:nvSpPr>
-        <p:spPr>
-          <a:xfrm>
-            <a:off x="566928" y="1819656"/>
-            <a:ext cx="5312664" cy="292608"/>
-          </a:xfrm>
-          <a:prstGeom prst="rect">
-            <a:avLst/>
-          </a:prstGeom>
-          <a:noFill/>
-        </p:spPr>
-        <p:txBody>
-          <a:bodyPr wrap="square">
-            <a:spAutoFit/>
-          </a:bodyPr>
-          <a:lstStyle/>
-          <a:p>
-            <a:r>
-              <a:rPr sz="1150" b="1">
-                <a:solidFill>
-                  <a:srgbClr val="FFFFFF"/>
-                </a:solidFill>
-                <a:latin typeface="微软雅黑"/>
-              </a:rPr>
-              <a:t>重点 · 必会必考（本课知识点全景）</a:t>
-            </a:r>
-          </a:p>
-        </p:txBody>
-      </p:sp>
-      <p:sp>
-        <p:nvSpPr>
-          <p:cNvPr id="31" name="TextBox 30"/>
-          <p:cNvSpPr txBox="1"/>
-          <p:nvPr/>
-        </p:nvSpPr>
-        <p:spPr>
-          <a:xfrm>
-            <a:off x="621792" y="2267712"/>
-            <a:ext cx="5257800" cy="2560320"/>
-          </a:xfrm>
-          <a:prstGeom prst="rect">
-            <a:avLst/>
-          </a:prstGeom>
-          <a:noFill/>
-        </p:spPr>
-        <p:txBody>
-          <a:bodyPr wrap="square">
-            <a:spAutoFit/>
-          </a:bodyPr>
-          <a:lstStyle/>
-          <a:p>
-            <a:r>
-              <a:rPr sz="950" b="0">
-                <a:solidFill>
-                  <a:srgbClr val="2B2F36"/>
-                </a:solidFill>
-                <a:latin typeface="微软雅黑"/>
-              </a:rPr>
-              <a:t>◆ B01 checklist三清单｜checklist=飞行前检查单：功能/规范/演示逐项打勾</a:t>
-            </a:r>
-          </a:p>
-          <a:p>
-            <a:r>
-              <a:rPr sz="950" b="0">
-                <a:solidFill>
-                  <a:srgbClr val="2B2F36"/>
-                </a:solidFill>
-                <a:latin typeface="微软雅黑"/>
-              </a:rPr>
-              <a:t>◆ B02 答辩四段结构｜四段=时间盒：1分钟分工+5分钟演示+2分钟总结+提问</a:t>
-            </a:r>
-          </a:p>
-          <a:p>
-            <a:r>
-              <a:rPr sz="950" b="0">
-                <a:solidFill>
-                  <a:srgbClr val="2B2F36"/>
-                </a:solidFill>
-                <a:latin typeface="微软雅黑"/>
-              </a:rPr>
-              <a:t>◆ B03 bad-case预案｜bad-case预案=答辩灭火器：评委必点脏数据，提前备好</a:t>
-            </a:r>
-          </a:p>
-          <a:p>
-            <a:r>
-              <a:rPr sz="950" b="0">
-                <a:solidFill>
-                  <a:srgbClr val="2B2F36"/>
-                </a:solidFill>
-                <a:latin typeface="微软雅黑"/>
-              </a:rPr>
-              <a:t>◆ B04 贡献表与Git核对｜贡献表对Git=口头对台账——谁写的代码提交记录说了算</a:t>
-            </a:r>
-          </a:p>
-          <a:p>
-            <a:r>
-              <a:rPr sz="950" b="0">
-                <a:solidFill>
-                  <a:srgbClr val="2B2F36"/>
-                </a:solidFill>
-                <a:latin typeface="微软雅黑"/>
-              </a:rPr>
-              <a:t>◆ B05 个人问责制｜个人问责=随机点名必答题——组分与个人分分开</a:t>
-            </a:r>
-          </a:p>
-          <a:p>
-            <a:r>
-              <a:rPr sz="950" b="0">
-                <a:solidFill>
-                  <a:srgbClr val="2B2F36"/>
-                </a:solidFill>
-                <a:latin typeface="微软雅黑"/>
-              </a:rPr>
-              <a:t>◆ B06 时间盒弹性｜时间盒弹性=人多就切5+3分钟——超时打断不解释</a:t>
-            </a:r>
-          </a:p>
-        </p:txBody>
-      </p:sp>
-      <p:sp>
-        <p:nvSpPr>
-          <p:cNvPr id="32" name="Rectangle 31"/>
-          <p:cNvSpPr/>
-          <p:nvPr/>
-        </p:nvSpPr>
-        <p:spPr>
-          <a:xfrm>
-            <a:off x="6144768" y="1783080"/>
-            <a:ext cx="5586984" cy="1481328"/>
-          </a:xfrm>
-          <a:prstGeom prst="rect">
-            <a:avLst/>
-          </a:prstGeom>
-          <a:solidFill>
-            <a:srgbClr val="FFFFFF"/>
-          </a:solidFill>
-          <a:ln>
-            <a:solidFill>
-              <a:srgbClr val="D6DCE4"/>
-            </a:solidFill>
-          </a:ln>
-          <a:effectLst/>
-        </p:spPr>
-        <p:style>
-          <a:lnRef idx="1">
-            <a:schemeClr val="accent1"/>
-          </a:lnRef>
-          <a:fillRef idx="3">
-            <a:schemeClr val="accent1"/>
-          </a:fillRef>
-          <a:effectRef idx="2">
-            <a:schemeClr val="accent1"/>
-          </a:effectRef>
-          <a:fontRef idx="minor">
-            <a:schemeClr val="lt1"/>
-          </a:fontRef>
-        </p:style>
-        <p:txBody>
-          <a:bodyPr rtlCol="0" anchor="ctr" wrap="square"/>
-          <a:lstStyle/>
-          <a:p>
-            <a:pPr algn="ctr"/>
-          </a:p>
-        </p:txBody>
-      </p:sp>
-      <p:sp>
-        <p:nvSpPr>
-          <p:cNvPr id="33" name="Rectangle 32"/>
-          <p:cNvSpPr/>
-          <p:nvPr/>
-        </p:nvSpPr>
-        <p:spPr>
-          <a:xfrm>
-            <a:off x="6144768" y="1783080"/>
-            <a:ext cx="5586984" cy="365760"/>
-          </a:xfrm>
-          <a:prstGeom prst="rect">
-            <a:avLst/>
-          </a:prstGeom>
-          <a:solidFill>
-            <a:srgbClr val="8A4B2D"/>
-          </a:solidFill>
-          <a:ln>
-            <a:noFill/>
-          </a:ln>
-          <a:effectLst/>
-        </p:spPr>
-        <p:style>
-          <a:lnRef idx="1">
-            <a:schemeClr val="accent1"/>
-          </a:lnRef>
-          <a:fillRef idx="3">
-            <a:schemeClr val="accent1"/>
-          </a:fillRef>
-          <a:effectRef idx="2">
-            <a:schemeClr val="accent1"/>
-          </a:effectRef>
-          <a:fontRef idx="minor">
-            <a:schemeClr val="lt1"/>
-          </a:fontRef>
-        </p:style>
-        <p:txBody>
-          <a:bodyPr rtlCol="0" anchor="ctr" wrap="square"/>
-          <a:lstStyle/>
-          <a:p>
-            <a:pPr algn="ctr"/>
-          </a:p>
-        </p:txBody>
-      </p:sp>
-      <p:sp>
-        <p:nvSpPr>
-          <p:cNvPr id="34" name="TextBox 33"/>
-          <p:cNvSpPr txBox="1"/>
-          <p:nvPr/>
-        </p:nvSpPr>
-        <p:spPr>
-          <a:xfrm>
-            <a:off x="6254496" y="1819656"/>
-            <a:ext cx="5367528" cy="292608"/>
-          </a:xfrm>
-          <a:prstGeom prst="rect">
-            <a:avLst/>
-          </a:prstGeom>
-          <a:noFill/>
-        </p:spPr>
-        <p:txBody>
-          <a:bodyPr wrap="square">
-            <a:spAutoFit/>
-          </a:bodyPr>
-          <a:lstStyle/>
-          <a:p>
-            <a:r>
-              <a:rPr sz="1150" b="1">
-                <a:solidFill>
-                  <a:srgbClr val="FFFFFF"/>
-                </a:solidFill>
-                <a:latin typeface="微软雅黑"/>
-              </a:rPr>
-              <a:t>难点 · 易卡壳（下一页逐个击破）</a:t>
-            </a:r>
-          </a:p>
-        </p:txBody>
-      </p:sp>
-      <p:sp>
-        <p:nvSpPr>
-          <p:cNvPr id="35" name="TextBox 34"/>
-          <p:cNvSpPr txBox="1"/>
-          <p:nvPr/>
-        </p:nvSpPr>
-        <p:spPr>
-          <a:xfrm>
-            <a:off x="6309360" y="2231136"/>
-            <a:ext cx="5303520" cy="960120"/>
-          </a:xfrm>
-          <a:prstGeom prst="rect">
-            <a:avLst/>
-          </a:prstGeom>
-          <a:noFill/>
-        </p:spPr>
-        <p:txBody>
-          <a:bodyPr wrap="square">
-            <a:spAutoFit/>
-          </a:bodyPr>
-          <a:lstStyle/>
-          <a:p>
-            <a:r>
-              <a:rPr sz="900" b="0">
-                <a:solidFill>
-                  <a:srgbClr val="2B2F36"/>
-                </a:solidFill>
-                <a:latin typeface="微软雅黑"/>
-              </a:rPr>
-              <a:t>▲ 误区：靠'我觉得都OK'——清单逐项过，漏一项扣一项</a:t>
-            </a:r>
-          </a:p>
-          <a:p>
-            <a:r>
-              <a:rPr sz="900" b="0">
-                <a:solidFill>
-                  <a:srgbClr val="2B2F36"/>
-                </a:solidFill>
-                <a:latin typeface="微软雅黑"/>
-              </a:rPr>
-              <a:t>▲ 误区：先讲代码再演示——先跑通给结果，评委要有耐心阈值</a:t>
-            </a:r>
-          </a:p>
-          <a:p>
-            <a:r>
-              <a:rPr sz="900" b="0">
-                <a:solidFill>
-                  <a:srgbClr val="2B2F36"/>
-                </a:solidFill>
-                <a:latin typeface="微软雅黑"/>
-              </a:rPr>
-              <a:t>▲ 误区：崩溃不扣死分，崩溃无预案才扣——兜底体现工程态度</a:t>
-            </a:r>
-          </a:p>
-        </p:txBody>
-      </p:sp>
-      <p:sp>
-        <p:nvSpPr>
-          <p:cNvPr id="36" name="Rectangle 35"/>
-          <p:cNvSpPr/>
-          <p:nvPr/>
-        </p:nvSpPr>
-        <p:spPr>
-          <a:xfrm>
-            <a:off x="6144768" y="3401568"/>
-            <a:ext cx="5586984" cy="1508760"/>
-          </a:xfrm>
-          <a:prstGeom prst="rect">
-            <a:avLst/>
-          </a:prstGeom>
-          <a:solidFill>
-            <a:srgbClr val="FFFFFF"/>
-          </a:solidFill>
-          <a:ln>
-            <a:solidFill>
-              <a:srgbClr val="D6DCE4"/>
-            </a:solidFill>
-          </a:ln>
-          <a:effectLst/>
-        </p:spPr>
-        <p:style>
-          <a:lnRef idx="1">
-            <a:schemeClr val="accent1"/>
-          </a:lnRef>
-          <a:fillRef idx="3">
-            <a:schemeClr val="accent1"/>
-          </a:fillRef>
-          <a:effectRef idx="2">
-            <a:schemeClr val="accent1"/>
-          </a:effectRef>
-          <a:fontRef idx="minor">
-            <a:schemeClr val="lt1"/>
-          </a:fontRef>
-        </p:style>
-        <p:txBody>
-          <a:bodyPr rtlCol="0" anchor="ctr" wrap="square"/>
-          <a:lstStyle/>
-          <a:p>
-            <a:pPr algn="ctr"/>
-          </a:p>
-        </p:txBody>
-      </p:sp>
-      <p:sp>
-        <p:nvSpPr>
-          <p:cNvPr id="37" name="Rectangle 36"/>
-          <p:cNvSpPr/>
-          <p:nvPr/>
-        </p:nvSpPr>
-        <p:spPr>
-          <a:xfrm>
-            <a:off x="6144768" y="3401568"/>
-            <a:ext cx="5586984" cy="365760"/>
-          </a:xfrm>
-          <a:prstGeom prst="rect">
-            <a:avLst/>
-          </a:prstGeom>
-          <a:solidFill>
-            <a:srgbClr val="9A3B3B"/>
-          </a:solidFill>
-          <a:ln>
-            <a:noFill/>
-          </a:ln>
-          <a:effectLst/>
-        </p:spPr>
-        <p:style>
-          <a:lnRef idx="1">
-            <a:schemeClr val="accent1"/>
-          </a:lnRef>
-          <a:fillRef idx="3">
-            <a:schemeClr val="accent1"/>
-          </a:fillRef>
-          <a:effectRef idx="2">
-            <a:schemeClr val="accent1"/>
-          </a:effectRef>
-          <a:fontRef idx="minor">
-            <a:schemeClr val="lt1"/>
-          </a:fontRef>
-        </p:style>
-        <p:txBody>
-          <a:bodyPr rtlCol="0" anchor="ctr" wrap="square"/>
-          <a:lstStyle/>
-          <a:p>
-            <a:pPr algn="ctr"/>
-          </a:p>
-        </p:txBody>
-      </p:sp>
-      <p:sp>
-        <p:nvSpPr>
-          <p:cNvPr id="38" name="TextBox 37"/>
-          <p:cNvSpPr txBox="1"/>
-          <p:nvPr/>
-        </p:nvSpPr>
-        <p:spPr>
-          <a:xfrm>
-            <a:off x="6254496" y="3438144"/>
-            <a:ext cx="5367528" cy="292608"/>
-          </a:xfrm>
-          <a:prstGeom prst="rect">
-            <a:avLst/>
-          </a:prstGeom>
-          <a:noFill/>
-        </p:spPr>
-        <p:txBody>
-          <a:bodyPr wrap="square">
-            <a:spAutoFit/>
-          </a:bodyPr>
-          <a:lstStyle/>
-          <a:p>
-            <a:r>
-              <a:rPr sz="1150" b="1">
-                <a:solidFill>
-                  <a:srgbClr val="FFFFFF"/>
-                </a:solidFill>
-                <a:latin typeface="微软雅黑"/>
-              </a:rPr>
-              <a:t>高频易错 · 动手前先记住</a:t>
-            </a:r>
-          </a:p>
-        </p:txBody>
-      </p:sp>
-      <p:sp>
-        <p:nvSpPr>
-          <p:cNvPr id="39" name="TextBox 38"/>
-          <p:cNvSpPr txBox="1"/>
-          <p:nvPr/>
-        </p:nvSpPr>
-        <p:spPr>
-          <a:xfrm>
-            <a:off x="6309360" y="3849624"/>
-            <a:ext cx="5303520" cy="960120"/>
-          </a:xfrm>
-          <a:prstGeom prst="rect">
-            <a:avLst/>
-          </a:prstGeom>
-          <a:noFill/>
-        </p:spPr>
-        <p:txBody>
-          <a:bodyPr wrap="square">
-            <a:spAutoFit/>
-          </a:bodyPr>
-          <a:lstStyle/>
-          <a:p>
-            <a:r>
-              <a:rPr sz="900" b="0">
-                <a:solidFill>
-                  <a:srgbClr val="2B2F36"/>
-                </a:solidFill>
-                <a:latin typeface="微软雅黑"/>
-              </a:rPr>
-              <a:t>✗ 现场装依赖 → 答辩机预演</a:t>
-            </a:r>
-          </a:p>
-          <a:p>
-            <a:r>
-              <a:rPr sz="900" b="0">
-                <a:solidFill>
-                  <a:srgbClr val="2B2F36"/>
-                </a:solidFill>
-                <a:latin typeface="微软雅黑"/>
-              </a:rPr>
-              <a:t>✗ 只讲不演示 → 必须现场运行</a:t>
-            </a:r>
-          </a:p>
-          <a:p>
-            <a:r>
-              <a:rPr sz="900" b="0">
-                <a:solidFill>
-                  <a:srgbClr val="2B2F36"/>
-                </a:solidFill>
-                <a:latin typeface="微软雅黑"/>
-              </a:rPr>
-              <a:t>✗ 超时 → 按5+3彩排两遍</a:t>
-            </a:r>
-          </a:p>
-        </p:txBody>
-      </p:sp>
-      <p:sp>
-        <p:nvSpPr>
-          <p:cNvPr id="40" name="Rectangle 39"/>
-          <p:cNvSpPr/>
-          <p:nvPr/>
-        </p:nvSpPr>
-        <p:spPr>
-          <a:xfrm>
-            <a:off x="457200" y="5047488"/>
-            <a:ext cx="11274552" cy="1207008"/>
-          </a:xfrm>
-          <a:prstGeom prst="rect">
-            <a:avLst/>
-          </a:prstGeom>
-          <a:solidFill>
-            <a:srgbClr val="FFFFFF"/>
-          </a:solidFill>
-          <a:ln>
-            <a:solidFill>
-              <a:srgbClr val="D6DCE4"/>
-            </a:solidFill>
-          </a:ln>
-          <a:effectLst/>
-        </p:spPr>
-        <p:style>
-          <a:lnRef idx="1">
-            <a:schemeClr val="accent1"/>
-          </a:lnRef>
-          <a:fillRef idx="3">
-            <a:schemeClr val="accent1"/>
-          </a:fillRef>
-          <a:effectRef idx="2">
-            <a:schemeClr val="accent1"/>
-          </a:effectRef>
-          <a:fontRef idx="minor">
-            <a:schemeClr val="lt1"/>
-          </a:fontRef>
-        </p:style>
-        <p:txBody>
-          <a:bodyPr rtlCol="0" anchor="ctr" wrap="square"/>
-          <a:lstStyle/>
-          <a:p>
-            <a:pPr algn="ctr"/>
-          </a:p>
-        </p:txBody>
-      </p:sp>
-      <p:sp>
-        <p:nvSpPr>
-          <p:cNvPr id="41" name="Rectangle 40"/>
-          <p:cNvSpPr/>
-          <p:nvPr/>
-        </p:nvSpPr>
-        <p:spPr>
-          <a:xfrm>
-            <a:off x="457200" y="5047488"/>
-            <a:ext cx="11274552" cy="365760"/>
-          </a:xfrm>
-          <a:prstGeom prst="rect">
-            <a:avLst/>
-          </a:prstGeom>
-          <a:solidFill>
-            <a:srgbClr val="2E7D46"/>
-          </a:solidFill>
-          <a:ln>
-            <a:noFill/>
-          </a:ln>
-          <a:effectLst/>
-        </p:spPr>
-        <p:style>
-          <a:lnRef idx="1">
-            <a:schemeClr val="accent1"/>
-          </a:lnRef>
-          <a:fillRef idx="3">
-            <a:schemeClr val="accent1"/>
-          </a:fillRef>
-          <a:effectRef idx="2">
-            <a:schemeClr val="accent1"/>
-          </a:effectRef>
-          <a:fontRef idx="minor">
-            <a:schemeClr val="lt1"/>
-          </a:fontRef>
-        </p:style>
-        <p:txBody>
-          <a:bodyPr rtlCol="0" anchor="ctr" wrap="square"/>
-          <a:lstStyle/>
-          <a:p>
-            <a:pPr algn="ctr"/>
-          </a:p>
-        </p:txBody>
-      </p:sp>
-      <p:sp>
-        <p:nvSpPr>
-          <p:cNvPr id="42" name="TextBox 41"/>
-          <p:cNvSpPr txBox="1"/>
-          <p:nvPr/>
-        </p:nvSpPr>
-        <p:spPr>
-          <a:xfrm>
-            <a:off x="566928" y="5084064"/>
-            <a:ext cx="11055096" cy="292608"/>
-          </a:xfrm>
-          <a:prstGeom prst="rect">
-            <a:avLst/>
-          </a:prstGeom>
-          <a:noFill/>
-        </p:spPr>
-        <p:txBody>
-          <a:bodyPr wrap="square">
-            <a:spAutoFit/>
-          </a:bodyPr>
-          <a:lstStyle/>
-          <a:p>
-            <a:r>
-              <a:rPr sz="1150" b="1">
-                <a:solidFill>
-                  <a:srgbClr val="FFFFFF"/>
-                </a:solidFill>
-                <a:latin typeface="微软雅黑"/>
-              </a:rPr>
-              <a:t>达标自问 · 学没学会，问自己这四句（当堂评分同口径）</a:t>
-            </a:r>
-          </a:p>
-        </p:txBody>
-      </p:sp>
-      <p:sp>
-        <p:nvSpPr>
-          <p:cNvPr id="43" name="TextBox 42"/>
-          <p:cNvSpPr txBox="1"/>
-          <p:nvPr/>
-        </p:nvSpPr>
-        <p:spPr>
-          <a:xfrm>
-            <a:off x="621792" y="5458968"/>
-            <a:ext cx="10972800" cy="768096"/>
-          </a:xfrm>
-          <a:prstGeom prst="rect">
-            <a:avLst/>
-          </a:prstGeom>
-          <a:noFill/>
-        </p:spPr>
-        <p:txBody>
-          <a:bodyPr wrap="square">
-            <a:spAutoFit/>
-          </a:bodyPr>
-          <a:lstStyle/>
-          <a:p>
-            <a:r>
-              <a:rPr sz="900" b="0">
-                <a:solidFill>
-                  <a:srgbClr val="2B2F36"/>
-                </a:solidFill>
-                <a:latin typeface="微软雅黑"/>
-              </a:rPr>
-              <a:t>① 及格线我能过吗——功能基本完整+能演示主流程</a:t>
-            </a:r>
-          </a:p>
-          <a:p>
-            <a:r>
-              <a:rPr sz="900" b="0">
-                <a:solidFill>
-                  <a:srgbClr val="2B2F36"/>
-                </a:solidFill>
-                <a:latin typeface="微软雅黑"/>
-              </a:rPr>
-              <a:t>② 优秀线我够吗——规范率≥95%+架构清晰+创新点</a:t>
-            </a:r>
-          </a:p>
-          <a:p>
-            <a:r>
-              <a:rPr sz="900" b="0">
-                <a:solidFill>
-                  <a:srgbClr val="2B2F36"/>
-                </a:solidFill>
-                <a:latin typeface="微软雅黑"/>
-              </a:rPr>
-              <a:t>③ 技能点我能独立做出来吗——对照技能点页 S1–S4 逐条自测</a:t>
-            </a:r>
-          </a:p>
-          <a:p>
-            <a:r>
-              <a:rPr sz="900" b="0">
-                <a:solidFill>
-                  <a:srgbClr val="2B2F36"/>
-                </a:solidFill>
-                <a:latin typeface="微软雅黑"/>
-              </a:rPr>
-              <a:t>④ 报错了先查「常见错误速查」页再举手——错误信息逐字读一遍，八成自己能修</a:t>
-            </a:r>
-          </a:p>
-        </p:txBody>
-      </p:sp>
-      <p:sp>
-        <p:nvSpPr>
-          <p:cNvPr id="44" name="TextBox 43"/>
-          <p:cNvSpPr txBox="1"/>
-          <p:nvPr/>
-        </p:nvSpPr>
-        <p:spPr>
-          <a:xfrm>
-            <a:off x="457200" y="6281928"/>
-            <a:ext cx="9601200" cy="182880"/>
-          </a:xfrm>
-          <a:prstGeom prst="rect">
-            <a:avLst/>
-          </a:prstGeom>
-          <a:noFill/>
-        </p:spPr>
-        <p:txBody>
-          <a:bodyPr wrap="square">
-            <a:spAutoFit/>
-          </a:bodyPr>
-          <a:lstStyle/>
-          <a:p>
-            <a:r>
-              <a:rPr sz="750" b="0">
-                <a:solidFill>
-                  <a:srgbClr val="6B7280"/>
-                </a:solidFill>
-                <a:latin typeface="微软雅黑"/>
-              </a:rPr>
-              <a:t>素材来源：同周《第23次课-项目终验联调与预答辩》知识卡与避坑清单（逐字摘录）</a:t>
+              <a:t>11 / 15</a:t>
             </a:r>
           </a:p>
         </p:txBody>
@@ -5652,7 +5623,7 @@
           <a:noFill/>
         </p:spPr>
         <p:txBody>
-          <a:bodyPr wrap="square" anchor="ctr">
+          <a:bodyPr wrap="square" anchor="t">
             <a:spAutoFit/>
           </a:bodyPr>
           <a:lstStyle/>
@@ -5672,27 +5643,27 @@
                 </a:solidFill>
                 <a:latin typeface="微软雅黑"/>
               </a:rPr>
-              <a:t>难点逐个击破 · 零基础照做就能会</a:t>
-            </a:r>
-          </a:p>
-        </p:txBody>
-      </p:sp>
-      <p:sp>
-        <p:nvSpPr>
-          <p:cNvPr id="24" name="Rectangle 23"/>
+              <a:t>总结评价与课后任务</a:t>
+            </a:r>
+          </a:p>
+        </p:txBody>
+      </p:sp>
+      <p:sp>
+        <p:nvSpPr>
+          <p:cNvPr id="5" name="Rectangle 4"/>
           <p:cNvSpPr/>
           <p:nvPr/>
         </p:nvSpPr>
         <p:spPr>
           <a:xfrm>
-            <a:off x="500000" y="6500000"/>
-            <a:ext cx="11100000" cy="20000"/>
+            <a:off x="800000" y="1950000"/>
+            <a:ext cx="10600000" cy="1500000"/>
           </a:xfrm>
           <a:prstGeom prst="rect">
             <a:avLst/>
           </a:prstGeom>
           <a:solidFill>
-            <a:srgbClr val="C9D4EE"/>
+            <a:srgbClr val="F3F6FD"/>
           </a:solidFill>
           <a:ln>
             <a:noFill/>
@@ -5723,14 +5694,14 @@
       </p:sp>
       <p:sp>
         <p:nvSpPr>
-          <p:cNvPr id="25" name="TextBox 24"/>
+          <p:cNvPr id="6" name="TextBox 5"/>
           <p:cNvSpPr txBox="1"/>
           <p:nvPr/>
         </p:nvSpPr>
         <p:spPr>
           <a:xfrm>
-            <a:off x="500000" y="6540000"/>
-            <a:ext cx="7000000" cy="300000"/>
+            <a:off x="1000000" y="2050000"/>
+            <a:ext cx="10300000" cy="1400000"/>
           </a:xfrm>
           <a:prstGeom prst="rect">
             <a:avLst/>
@@ -5752,6 +5723,315 @@
               </a:spcAft>
             </a:pPr>
             <a:r>
+              <a:rPr sz="1500" b="1">
+                <a:solidFill>
+                  <a:srgbClr val="0545E8"/>
+                </a:solidFill>
+                <a:latin typeface="微软雅黑"/>
+              </a:rPr>
+              <a:t>评价（10分钟）：</a:t>
+            </a:r>
+          </a:p>
+          <a:p>
+            <a:pPr algn="l">
+              <a:lnSpc>
+                <a:spcPct val="110000"/>
+              </a:lnSpc>
+              <a:spcAft>
+                <a:spcPts val="600"/>
+              </a:spcAft>
+            </a:pPr>
+            <a:r>
+              <a:rPr sz="1400" b="0">
+                <a:solidFill>
+                  <a:srgbClr val="010328"/>
+                </a:solidFill>
+                <a:latin typeface="微软雅黑"/>
+              </a:rPr>
+              <a:t>按D/C/B/A量表当堂评分；工单24小时内反馈评语与改进建议。</a:t>
+            </a:r>
+          </a:p>
+        </p:txBody>
+      </p:sp>
+      <p:sp>
+        <p:nvSpPr>
+          <p:cNvPr id="7" name="TextBox 6"/>
+          <p:cNvSpPr txBox="1"/>
+          <p:nvPr/>
+        </p:nvSpPr>
+        <p:spPr>
+          <a:xfrm>
+            <a:off x="850000" y="3700000"/>
+            <a:ext cx="10600000" cy="700000"/>
+          </a:xfrm>
+          <a:prstGeom prst="rect">
+            <a:avLst/>
+          </a:prstGeom>
+          <a:noFill/>
+        </p:spPr>
+        <p:txBody>
+          <a:bodyPr wrap="square" anchor="t">
+            <a:spAutoFit/>
+          </a:bodyPr>
+          <a:lstStyle/>
+          <a:p>
+            <a:pPr algn="l">
+              <a:lnSpc>
+                <a:spcPct val="120000"/>
+              </a:lnSpc>
+              <a:spcAft>
+                <a:spcPts val="600"/>
+              </a:spcAft>
+            </a:pPr>
+            <a:r>
+              <a:rPr sz="1400" b="1">
+                <a:solidFill>
+                  <a:srgbClr val="F5670F"/>
+                </a:solidFill>
+                <a:latin typeface="微软雅黑"/>
+              </a:rPr>
+              <a:t>1. </a:t>
+            </a:r>
+            <a:r>
+              <a:rPr sz="1400" b="0">
+                <a:solidFill>
+                  <a:srgbClr val="010328"/>
+                </a:solidFill>
+                <a:latin typeface="微软雅黑"/>
+              </a:rPr>
+              <a:t>1. 提交综合项目完整材料：代码、报告、演示视频；</a:t>
+            </a:r>
+          </a:p>
+        </p:txBody>
+      </p:sp>
+      <p:sp>
+        <p:nvSpPr>
+          <p:cNvPr id="8" name="TextBox 7"/>
+          <p:cNvSpPr txBox="1"/>
+          <p:nvPr/>
+        </p:nvSpPr>
+        <p:spPr>
+          <a:xfrm>
+            <a:off x="850000" y="4420000"/>
+            <a:ext cx="10600000" cy="700000"/>
+          </a:xfrm>
+          <a:prstGeom prst="rect">
+            <a:avLst/>
+          </a:prstGeom>
+          <a:noFill/>
+        </p:spPr>
+        <p:txBody>
+          <a:bodyPr wrap="square" anchor="t">
+            <a:spAutoFit/>
+          </a:bodyPr>
+          <a:lstStyle/>
+          <a:p>
+            <a:pPr algn="l">
+              <a:lnSpc>
+                <a:spcPct val="120000"/>
+              </a:lnSpc>
+              <a:spcAft>
+                <a:spcPts val="600"/>
+              </a:spcAft>
+            </a:pPr>
+            <a:r>
+              <a:rPr sz="1400" b="1">
+                <a:solidFill>
+                  <a:srgbClr val="F5670F"/>
+                </a:solidFill>
+                <a:latin typeface="微软雅黑"/>
+              </a:rPr>
+              <a:t>2. </a:t>
+            </a:r>
+            <a:r>
+              <a:rPr sz="1400" b="0">
+                <a:solidFill>
+                  <a:srgbClr val="010328"/>
+                </a:solidFill>
+                <a:latin typeface="微软雅黑"/>
+              </a:rPr>
+              <a:t>2. 完成课程学习反思（一页纸总结）；</a:t>
+            </a:r>
+          </a:p>
+        </p:txBody>
+      </p:sp>
+      <p:sp>
+        <p:nvSpPr>
+          <p:cNvPr id="9" name="TextBox 8"/>
+          <p:cNvSpPr txBox="1"/>
+          <p:nvPr/>
+        </p:nvSpPr>
+        <p:spPr>
+          <a:xfrm>
+            <a:off x="850000" y="5140000"/>
+            <a:ext cx="10600000" cy="700000"/>
+          </a:xfrm>
+          <a:prstGeom prst="rect">
+            <a:avLst/>
+          </a:prstGeom>
+          <a:noFill/>
+        </p:spPr>
+        <p:txBody>
+          <a:bodyPr wrap="square" anchor="t">
+            <a:spAutoFit/>
+          </a:bodyPr>
+          <a:lstStyle/>
+          <a:p>
+            <a:pPr algn="l">
+              <a:lnSpc>
+                <a:spcPct val="120000"/>
+              </a:lnSpc>
+              <a:spcAft>
+                <a:spcPts val="600"/>
+              </a:spcAft>
+            </a:pPr>
+            <a:r>
+              <a:rPr sz="1400" b="1">
+                <a:solidFill>
+                  <a:srgbClr val="F5670F"/>
+                </a:solidFill>
+                <a:latin typeface="微软雅黑"/>
+              </a:rPr>
+              <a:t>3. </a:t>
+            </a:r>
+            <a:r>
+              <a:rPr sz="1400" b="0">
+                <a:solidFill>
+                  <a:srgbClr val="010328"/>
+                </a:solidFill>
+                <a:latin typeface="微软雅黑"/>
+              </a:rPr>
+              <a:t>3. 了解后续《AI应用基础》课程衔接内容。</a:t>
+            </a:r>
+          </a:p>
+        </p:txBody>
+      </p:sp>
+      <p:sp>
+        <p:nvSpPr>
+          <p:cNvPr id="10" name="TextBox 9"/>
+          <p:cNvSpPr txBox="1"/>
+          <p:nvPr/>
+        </p:nvSpPr>
+        <p:spPr>
+          <a:xfrm>
+            <a:off x="850000" y="5960000"/>
+            <a:ext cx="10600000" cy="500000"/>
+          </a:xfrm>
+          <a:prstGeom prst="rect">
+            <a:avLst/>
+          </a:prstGeom>
+          <a:noFill/>
+        </p:spPr>
+        <p:txBody>
+          <a:bodyPr wrap="square" anchor="t">
+            <a:spAutoFit/>
+          </a:bodyPr>
+          <a:lstStyle/>
+          <a:p>
+            <a:pPr algn="l">
+              <a:lnSpc>
+                <a:spcPct val="110000"/>
+              </a:lnSpc>
+              <a:spcAft>
+                <a:spcPts val="600"/>
+              </a:spcAft>
+            </a:pPr>
+            <a:r>
+              <a:rPr sz="1300" b="1">
+                <a:solidFill>
+                  <a:srgbClr val="0475B6"/>
+                </a:solidFill>
+                <a:latin typeface="微软雅黑"/>
+              </a:rPr>
+              <a:t>下次课预告：</a:t>
+            </a:r>
+            <a:r>
+              <a:rPr sz="1300" b="0">
+                <a:solidFill>
+                  <a:srgbClr val="44546A"/>
+                </a:solidFill>
+                <a:latin typeface="微软雅黑"/>
+              </a:rPr>
+              <a:t>见下次课工单任务书</a:t>
+            </a:r>
+          </a:p>
+        </p:txBody>
+      </p:sp>
+      <p:sp>
+        <p:nvSpPr>
+          <p:cNvPr id="11" name="Rectangle 10"/>
+          <p:cNvSpPr/>
+          <p:nvPr/>
+        </p:nvSpPr>
+        <p:spPr>
+          <a:xfrm>
+            <a:off x="500000" y="6500000"/>
+            <a:ext cx="11100000" cy="20000"/>
+          </a:xfrm>
+          <a:prstGeom prst="rect">
+            <a:avLst/>
+          </a:prstGeom>
+          <a:solidFill>
+            <a:srgbClr val="C9D4EE"/>
+          </a:solidFill>
+          <a:ln>
+            <a:noFill/>
+          </a:ln>
+          <a:effectLst/>
+        </p:spPr>
+        <p:style>
+          <a:lnRef idx="1">
+            <a:schemeClr val="accent1"/>
+          </a:lnRef>
+          <a:fillRef idx="3">
+            <a:schemeClr val="accent1"/>
+          </a:fillRef>
+          <a:effectRef idx="2">
+            <a:schemeClr val="accent1"/>
+          </a:effectRef>
+          <a:fontRef idx="minor">
+            <a:schemeClr val="lt1"/>
+          </a:fontRef>
+        </p:style>
+        <p:txBody>
+          <a:bodyPr rtlCol="0" anchor="ctr"/>
+          <a:lstStyle/>
+          <a:p>
+            <a:pPr algn="ctr"/>
+          </a:p>
+        </p:txBody>
+      </p:sp>
+      <p:sp>
+        <p:nvSpPr>
+          <p:cNvPr id="12" name="TextBox 11"/>
+          <p:cNvSpPr txBox="1"/>
+          <p:nvPr/>
+        </p:nvSpPr>
+        <p:spPr>
+          <a:xfrm>
+            <a:off x="500000" y="6540000"/>
+            <a:ext cx="7000000" cy="300000"/>
+          </a:xfrm>
+          <a:prstGeom prst="rect">
+            <a:avLst/>
+          </a:prstGeom>
+          <a:noFill/>
+        </p:spPr>
+        <p:txBody>
+          <a:bodyPr wrap="square" anchor="t">
+            <a:spAutoFit/>
+          </a:bodyPr>
+          <a:lstStyle/>
+          <a:p>
+            <a:pPr algn="l">
+              <a:lnSpc>
+                <a:spcPct val="110000"/>
+              </a:lnSpc>
+              <a:spcAft>
+                <a:spcPts val="600"/>
+              </a:spcAft>
+            </a:pPr>
+            <a:r>
               <a:rPr sz="1000" b="0">
                 <a:solidFill>
                   <a:srgbClr val="8A97B5"/>
@@ -5765,7 +6045,7 @@
       </p:sp>
       <p:sp>
         <p:nvSpPr>
-          <p:cNvPr id="26" name="TextBox 25"/>
+          <p:cNvPr id="13" name="TextBox 12"/>
           <p:cNvSpPr txBox="1"/>
           <p:nvPr/>
         </p:nvSpPr>
@@ -5800,1025 +6080,7 @@
                 </a:solidFill>
                 <a:latin typeface="微软雅黑"/>
               </a:rPr>
-              <a:t>7 / 13</a:t>
-            </a:r>
-          </a:p>
-        </p:txBody>
-      </p:sp>
-      <p:sp>
-        <p:nvSpPr>
-          <p:cNvPr id="27" name="TextBox 26"/>
-          <p:cNvSpPr txBox="1"/>
-          <p:nvPr/>
-        </p:nvSpPr>
-        <p:spPr>
-          <a:xfrm>
-            <a:off x="457200" y="1389888"/>
-            <a:ext cx="11274552" cy="274320"/>
-          </a:xfrm>
-          <a:prstGeom prst="rect">
-            <a:avLst/>
-          </a:prstGeom>
-          <a:noFill/>
-        </p:spPr>
-        <p:txBody>
-          <a:bodyPr wrap="square">
-            <a:spAutoFit/>
-          </a:bodyPr>
-          <a:lstStyle/>
-          <a:p>
-            <a:r>
-              <a:rPr sz="1050" b="0">
-                <a:solidFill>
-                  <a:srgbClr val="6B7280"/>
-                </a:solidFill>
-                <a:latin typeface="微软雅黑"/>
-              </a:rPr>
-              <a:t>每个难点四步走：先看「为什么容易栽」对号入座 → 记住「一招破解」→ 照「动手验证」做一遍 → 做不出回知识详解页。</a:t>
-            </a:r>
-          </a:p>
-        </p:txBody>
-      </p:sp>
-      <p:sp>
-        <p:nvSpPr>
-          <p:cNvPr id="28" name="Rectangle 27"/>
-          <p:cNvSpPr/>
-          <p:nvPr/>
-        </p:nvSpPr>
-        <p:spPr>
-          <a:xfrm>
-            <a:off x="457200" y="1783080"/>
-            <a:ext cx="11274552" cy="1481328"/>
-          </a:xfrm>
-          <a:prstGeom prst="rect">
-            <a:avLst/>
-          </a:prstGeom>
-          <a:solidFill>
-            <a:srgbClr val="F7F9FC"/>
-          </a:solidFill>
-          <a:ln>
-            <a:solidFill>
-              <a:srgbClr val="D6DCE4"/>
-            </a:solidFill>
-          </a:ln>
-          <a:effectLst/>
-        </p:spPr>
-        <p:style>
-          <a:lnRef idx="1">
-            <a:schemeClr val="accent1"/>
-          </a:lnRef>
-          <a:fillRef idx="3">
-            <a:schemeClr val="accent1"/>
-          </a:fillRef>
-          <a:effectRef idx="2">
-            <a:schemeClr val="accent1"/>
-          </a:effectRef>
-          <a:fontRef idx="minor">
-            <a:schemeClr val="lt1"/>
-          </a:fontRef>
-        </p:style>
-        <p:txBody>
-          <a:bodyPr rtlCol="0" anchor="ctr" wrap="square"/>
-          <a:lstStyle/>
-          <a:p>
-            <a:pPr algn="ctr"/>
-          </a:p>
-        </p:txBody>
-      </p:sp>
-      <p:sp>
-        <p:nvSpPr>
-          <p:cNvPr id="29" name="Rectangle 28"/>
-          <p:cNvSpPr/>
-          <p:nvPr/>
-        </p:nvSpPr>
-        <p:spPr>
-          <a:xfrm>
-            <a:off x="457200" y="1783080"/>
-            <a:ext cx="82296" cy="1481328"/>
-          </a:xfrm>
-          <a:prstGeom prst="rect">
-            <a:avLst/>
-          </a:prstGeom>
-          <a:solidFill>
-            <a:srgbClr val="8A4B2D"/>
-          </a:solidFill>
-          <a:ln>
-            <a:noFill/>
-          </a:ln>
-          <a:effectLst/>
-        </p:spPr>
-        <p:style>
-          <a:lnRef idx="1">
-            <a:schemeClr val="accent1"/>
-          </a:lnRef>
-          <a:fillRef idx="3">
-            <a:schemeClr val="accent1"/>
-          </a:fillRef>
-          <a:effectRef idx="2">
-            <a:schemeClr val="accent1"/>
-          </a:effectRef>
-          <a:fontRef idx="minor">
-            <a:schemeClr val="lt1"/>
-          </a:fontRef>
-        </p:style>
-        <p:txBody>
-          <a:bodyPr rtlCol="0" anchor="ctr" wrap="square"/>
-          <a:lstStyle/>
-          <a:p>
-            <a:pPr algn="ctr"/>
-          </a:p>
-        </p:txBody>
-      </p:sp>
-      <p:sp>
-        <p:nvSpPr>
-          <p:cNvPr id="30" name="TextBox 29"/>
-          <p:cNvSpPr txBox="1"/>
-          <p:nvPr/>
-        </p:nvSpPr>
-        <p:spPr>
-          <a:xfrm>
-            <a:off x="658368" y="1828800"/>
-            <a:ext cx="10972800" cy="274320"/>
-          </a:xfrm>
-          <a:prstGeom prst="rect">
-            <a:avLst/>
-          </a:prstGeom>
-          <a:noFill/>
-        </p:spPr>
-        <p:txBody>
-          <a:bodyPr wrap="square">
-            <a:spAutoFit/>
-          </a:bodyPr>
-          <a:lstStyle/>
-          <a:p>
-            <a:r>
-              <a:rPr sz="1100" b="1">
-                <a:solidFill>
-                  <a:srgbClr val="8A4B2D"/>
-                </a:solidFill>
-                <a:latin typeface="微软雅黑"/>
-              </a:rPr>
-              <a:t>难点1：B01 checklist三清单</a:t>
-            </a:r>
-          </a:p>
-        </p:txBody>
-      </p:sp>
-      <p:sp>
-        <p:nvSpPr>
-          <p:cNvPr id="31" name="TextBox 30"/>
-          <p:cNvSpPr txBox="1"/>
-          <p:nvPr/>
-        </p:nvSpPr>
-        <p:spPr>
-          <a:xfrm>
-            <a:off x="658368" y="2148840"/>
-            <a:ext cx="3566160" cy="219456"/>
-          </a:xfrm>
-          <a:prstGeom prst="rect">
-            <a:avLst/>
-          </a:prstGeom>
-          <a:noFill/>
-        </p:spPr>
-        <p:txBody>
-          <a:bodyPr wrap="square">
-            <a:spAutoFit/>
-          </a:bodyPr>
-          <a:lstStyle/>
-          <a:p>
-            <a:r>
-              <a:rPr sz="900" b="1">
-                <a:solidFill>
-                  <a:srgbClr val="B5533A"/>
-                </a:solidFill>
-                <a:latin typeface="微软雅黑"/>
-              </a:rPr>
-              <a:t>为什么容易栽</a:t>
-            </a:r>
-          </a:p>
-        </p:txBody>
-      </p:sp>
-      <p:sp>
-        <p:nvSpPr>
-          <p:cNvPr id="32" name="TextBox 31"/>
-          <p:cNvSpPr txBox="1"/>
-          <p:nvPr/>
-        </p:nvSpPr>
-        <p:spPr>
-          <a:xfrm>
-            <a:off x="658368" y="2386584"/>
-            <a:ext cx="3584448" cy="822960"/>
-          </a:xfrm>
-          <a:prstGeom prst="rect">
-            <a:avLst/>
-          </a:prstGeom>
-          <a:noFill/>
-        </p:spPr>
-        <p:txBody>
-          <a:bodyPr wrap="square">
-            <a:spAutoFit/>
-          </a:bodyPr>
-          <a:lstStyle/>
-          <a:p>
-            <a:r>
-              <a:rPr sz="850" b="0">
-                <a:solidFill>
-                  <a:srgbClr val="2B2F36"/>
-                </a:solidFill>
-                <a:latin typeface="微软雅黑"/>
-              </a:rPr>
-              <a:t>误区：靠'我觉得都OK'——清单逐项过，漏一项扣一项</a:t>
-            </a:r>
-          </a:p>
-        </p:txBody>
-      </p:sp>
-      <p:sp>
-        <p:nvSpPr>
-          <p:cNvPr id="33" name="TextBox 32"/>
-          <p:cNvSpPr txBox="1"/>
-          <p:nvPr/>
-        </p:nvSpPr>
-        <p:spPr>
-          <a:xfrm>
-            <a:off x="4334255" y="2148840"/>
-            <a:ext cx="3566160" cy="219456"/>
-          </a:xfrm>
-          <a:prstGeom prst="rect">
-            <a:avLst/>
-          </a:prstGeom>
-          <a:noFill/>
-        </p:spPr>
-        <p:txBody>
-          <a:bodyPr wrap="square">
-            <a:spAutoFit/>
-          </a:bodyPr>
-          <a:lstStyle/>
-          <a:p>
-            <a:r>
-              <a:rPr sz="900" b="1">
-                <a:solidFill>
-                  <a:srgbClr val="2E7D46"/>
-                </a:solidFill>
-                <a:latin typeface="微软雅黑"/>
-              </a:rPr>
-              <a:t>一招破解（记住这句）</a:t>
-            </a:r>
-          </a:p>
-        </p:txBody>
-      </p:sp>
-      <p:sp>
-        <p:nvSpPr>
-          <p:cNvPr id="34" name="TextBox 33"/>
-          <p:cNvSpPr txBox="1"/>
-          <p:nvPr/>
-        </p:nvSpPr>
-        <p:spPr>
-          <a:xfrm>
-            <a:off x="4334255" y="2386584"/>
-            <a:ext cx="3584448" cy="822960"/>
-          </a:xfrm>
-          <a:prstGeom prst="rect">
-            <a:avLst/>
-          </a:prstGeom>
-          <a:noFill/>
-        </p:spPr>
-        <p:txBody>
-          <a:bodyPr wrap="square">
-            <a:spAutoFit/>
-          </a:bodyPr>
-          <a:lstStyle/>
-          <a:p>
-            <a:r>
-              <a:rPr sz="850" b="0">
-                <a:solidFill>
-                  <a:srgbClr val="2B2F36"/>
-                </a:solidFill>
-                <a:latin typeface="微软雅黑"/>
-              </a:rPr>
-              <a:t>checklist=飞行前检查单：功能/规范/演示逐项打勾</a:t>
-            </a:r>
-          </a:p>
-        </p:txBody>
-      </p:sp>
-      <p:sp>
-        <p:nvSpPr>
-          <p:cNvPr id="35" name="TextBox 34"/>
-          <p:cNvSpPr txBox="1"/>
-          <p:nvPr/>
-        </p:nvSpPr>
-        <p:spPr>
-          <a:xfrm>
-            <a:off x="8010143" y="2148840"/>
-            <a:ext cx="3566160" cy="219456"/>
-          </a:xfrm>
-          <a:prstGeom prst="rect">
-            <a:avLst/>
-          </a:prstGeom>
-          <a:noFill/>
-        </p:spPr>
-        <p:txBody>
-          <a:bodyPr wrap="square">
-            <a:spAutoFit/>
-          </a:bodyPr>
-          <a:lstStyle/>
-          <a:p>
-            <a:r>
-              <a:rPr sz="900" b="1">
-                <a:solidFill>
-                  <a:srgbClr val="35506E"/>
-                </a:solidFill>
-                <a:latin typeface="微软雅黑"/>
-              </a:rPr>
-              <a:t>动手验证（照做一遍）</a:t>
-            </a:r>
-          </a:p>
-        </p:txBody>
-      </p:sp>
-      <p:sp>
-        <p:nvSpPr>
-          <p:cNvPr id="36" name="TextBox 35"/>
-          <p:cNvSpPr txBox="1"/>
-          <p:nvPr/>
-        </p:nvSpPr>
-        <p:spPr>
-          <a:xfrm>
-            <a:off x="8010143" y="2386584"/>
-            <a:ext cx="3584448" cy="822960"/>
-          </a:xfrm>
-          <a:prstGeom prst="rect">
-            <a:avLst/>
-          </a:prstGeom>
-          <a:noFill/>
-        </p:spPr>
-        <p:txBody>
-          <a:bodyPr wrap="square">
-            <a:spAutoFit/>
-          </a:bodyPr>
-          <a:lstStyle/>
-          <a:p>
-            <a:r>
-              <a:rPr sz="850" b="0">
-                <a:solidFill>
-                  <a:srgbClr val="2B2F36"/>
-                </a:solidFill>
-                <a:latin typeface="微软雅黑"/>
-              </a:rPr>
-              <a:t>终验不靠记忆靠清单——工程师与飞行员同一套方法 □全部功能可跑 □PEP8规范 □运行截图齐</a:t>
-            </a:r>
-          </a:p>
-        </p:txBody>
-      </p:sp>
-      <p:sp>
-        <p:nvSpPr>
-          <p:cNvPr id="37" name="Rectangle 36"/>
-          <p:cNvSpPr/>
-          <p:nvPr/>
-        </p:nvSpPr>
-        <p:spPr>
-          <a:xfrm>
-            <a:off x="457200" y="3383280"/>
-            <a:ext cx="11274552" cy="1481328"/>
-          </a:xfrm>
-          <a:prstGeom prst="rect">
-            <a:avLst/>
-          </a:prstGeom>
-          <a:solidFill>
-            <a:srgbClr val="F7F9FC"/>
-          </a:solidFill>
-          <a:ln>
-            <a:solidFill>
-              <a:srgbClr val="D6DCE4"/>
-            </a:solidFill>
-          </a:ln>
-          <a:effectLst/>
-        </p:spPr>
-        <p:style>
-          <a:lnRef idx="1">
-            <a:schemeClr val="accent1"/>
-          </a:lnRef>
-          <a:fillRef idx="3">
-            <a:schemeClr val="accent1"/>
-          </a:fillRef>
-          <a:effectRef idx="2">
-            <a:schemeClr val="accent1"/>
-          </a:effectRef>
-          <a:fontRef idx="minor">
-            <a:schemeClr val="lt1"/>
-          </a:fontRef>
-        </p:style>
-        <p:txBody>
-          <a:bodyPr rtlCol="0" anchor="ctr" wrap="square"/>
-          <a:lstStyle/>
-          <a:p>
-            <a:pPr algn="ctr"/>
-          </a:p>
-        </p:txBody>
-      </p:sp>
-      <p:sp>
-        <p:nvSpPr>
-          <p:cNvPr id="38" name="Rectangle 37"/>
-          <p:cNvSpPr/>
-          <p:nvPr/>
-        </p:nvSpPr>
-        <p:spPr>
-          <a:xfrm>
-            <a:off x="457200" y="3383280"/>
-            <a:ext cx="82296" cy="1481328"/>
-          </a:xfrm>
-          <a:prstGeom prst="rect">
-            <a:avLst/>
-          </a:prstGeom>
-          <a:solidFill>
-            <a:srgbClr val="8A4B2D"/>
-          </a:solidFill>
-          <a:ln>
-            <a:noFill/>
-          </a:ln>
-          <a:effectLst/>
-        </p:spPr>
-        <p:style>
-          <a:lnRef idx="1">
-            <a:schemeClr val="accent1"/>
-          </a:lnRef>
-          <a:fillRef idx="3">
-            <a:schemeClr val="accent1"/>
-          </a:fillRef>
-          <a:effectRef idx="2">
-            <a:schemeClr val="accent1"/>
-          </a:effectRef>
-          <a:fontRef idx="minor">
-            <a:schemeClr val="lt1"/>
-          </a:fontRef>
-        </p:style>
-        <p:txBody>
-          <a:bodyPr rtlCol="0" anchor="ctr" wrap="square"/>
-          <a:lstStyle/>
-          <a:p>
-            <a:pPr algn="ctr"/>
-          </a:p>
-        </p:txBody>
-      </p:sp>
-      <p:sp>
-        <p:nvSpPr>
-          <p:cNvPr id="39" name="TextBox 38"/>
-          <p:cNvSpPr txBox="1"/>
-          <p:nvPr/>
-        </p:nvSpPr>
-        <p:spPr>
-          <a:xfrm>
-            <a:off x="658368" y="3429000"/>
-            <a:ext cx="10972800" cy="274320"/>
-          </a:xfrm>
-          <a:prstGeom prst="rect">
-            <a:avLst/>
-          </a:prstGeom>
-          <a:noFill/>
-        </p:spPr>
-        <p:txBody>
-          <a:bodyPr wrap="square">
-            <a:spAutoFit/>
-          </a:bodyPr>
-          <a:lstStyle/>
-          <a:p>
-            <a:r>
-              <a:rPr sz="1100" b="1">
-                <a:solidFill>
-                  <a:srgbClr val="8A4B2D"/>
-                </a:solidFill>
-                <a:latin typeface="微软雅黑"/>
-              </a:rPr>
-              <a:t>难点2：B02 答辩四段结构</a:t>
-            </a:r>
-          </a:p>
-        </p:txBody>
-      </p:sp>
-      <p:sp>
-        <p:nvSpPr>
-          <p:cNvPr id="40" name="TextBox 39"/>
-          <p:cNvSpPr txBox="1"/>
-          <p:nvPr/>
-        </p:nvSpPr>
-        <p:spPr>
-          <a:xfrm>
-            <a:off x="658368" y="3749040"/>
-            <a:ext cx="3566160" cy="219456"/>
-          </a:xfrm>
-          <a:prstGeom prst="rect">
-            <a:avLst/>
-          </a:prstGeom>
-          <a:noFill/>
-        </p:spPr>
-        <p:txBody>
-          <a:bodyPr wrap="square">
-            <a:spAutoFit/>
-          </a:bodyPr>
-          <a:lstStyle/>
-          <a:p>
-            <a:r>
-              <a:rPr sz="900" b="1">
-                <a:solidFill>
-                  <a:srgbClr val="B5533A"/>
-                </a:solidFill>
-                <a:latin typeface="微软雅黑"/>
-              </a:rPr>
-              <a:t>为什么容易栽</a:t>
-            </a:r>
-          </a:p>
-        </p:txBody>
-      </p:sp>
-      <p:sp>
-        <p:nvSpPr>
-          <p:cNvPr id="41" name="TextBox 40"/>
-          <p:cNvSpPr txBox="1"/>
-          <p:nvPr/>
-        </p:nvSpPr>
-        <p:spPr>
-          <a:xfrm>
-            <a:off x="658368" y="3986784"/>
-            <a:ext cx="3584448" cy="822960"/>
-          </a:xfrm>
-          <a:prstGeom prst="rect">
-            <a:avLst/>
-          </a:prstGeom>
-          <a:noFill/>
-        </p:spPr>
-        <p:txBody>
-          <a:bodyPr wrap="square">
-            <a:spAutoFit/>
-          </a:bodyPr>
-          <a:lstStyle/>
-          <a:p>
-            <a:r>
-              <a:rPr sz="850" b="0">
-                <a:solidFill>
-                  <a:srgbClr val="2B2F36"/>
-                </a:solidFill>
-                <a:latin typeface="微软雅黑"/>
-              </a:rPr>
-              <a:t>误区：先讲代码再演示——先跑通给结果，评委要有耐心阈值</a:t>
-            </a:r>
-          </a:p>
-        </p:txBody>
-      </p:sp>
-      <p:sp>
-        <p:nvSpPr>
-          <p:cNvPr id="42" name="TextBox 41"/>
-          <p:cNvSpPr txBox="1"/>
-          <p:nvPr/>
-        </p:nvSpPr>
-        <p:spPr>
-          <a:xfrm>
-            <a:off x="4334255" y="3749040"/>
-            <a:ext cx="3566160" cy="219456"/>
-          </a:xfrm>
-          <a:prstGeom prst="rect">
-            <a:avLst/>
-          </a:prstGeom>
-          <a:noFill/>
-        </p:spPr>
-        <p:txBody>
-          <a:bodyPr wrap="square">
-            <a:spAutoFit/>
-          </a:bodyPr>
-          <a:lstStyle/>
-          <a:p>
-            <a:r>
-              <a:rPr sz="900" b="1">
-                <a:solidFill>
-                  <a:srgbClr val="2E7D46"/>
-                </a:solidFill>
-                <a:latin typeface="微软雅黑"/>
-              </a:rPr>
-              <a:t>一招破解（记住这句）</a:t>
-            </a:r>
-          </a:p>
-        </p:txBody>
-      </p:sp>
-      <p:sp>
-        <p:nvSpPr>
-          <p:cNvPr id="43" name="TextBox 42"/>
-          <p:cNvSpPr txBox="1"/>
-          <p:nvPr/>
-        </p:nvSpPr>
-        <p:spPr>
-          <a:xfrm>
-            <a:off x="4334255" y="3986784"/>
-            <a:ext cx="3584448" cy="822960"/>
-          </a:xfrm>
-          <a:prstGeom prst="rect">
-            <a:avLst/>
-          </a:prstGeom>
-          <a:noFill/>
-        </p:spPr>
-        <p:txBody>
-          <a:bodyPr wrap="square">
-            <a:spAutoFit/>
-          </a:bodyPr>
-          <a:lstStyle/>
-          <a:p>
-            <a:r>
-              <a:rPr sz="850" b="0">
-                <a:solidFill>
-                  <a:srgbClr val="2B2F36"/>
-                </a:solidFill>
-                <a:latin typeface="微软雅黑"/>
-              </a:rPr>
-              <a:t>四段=时间盒：1分钟分工+5分钟演示+2分钟总结+提问</a:t>
-            </a:r>
-          </a:p>
-        </p:txBody>
-      </p:sp>
-      <p:sp>
-        <p:nvSpPr>
-          <p:cNvPr id="44" name="TextBox 43"/>
-          <p:cNvSpPr txBox="1"/>
-          <p:nvPr/>
-        </p:nvSpPr>
-        <p:spPr>
-          <a:xfrm>
-            <a:off x="8010143" y="3749040"/>
-            <a:ext cx="3566160" cy="219456"/>
-          </a:xfrm>
-          <a:prstGeom prst="rect">
-            <a:avLst/>
-          </a:prstGeom>
-          <a:noFill/>
-        </p:spPr>
-        <p:txBody>
-          <a:bodyPr wrap="square">
-            <a:spAutoFit/>
-          </a:bodyPr>
-          <a:lstStyle/>
-          <a:p>
-            <a:r>
-              <a:rPr sz="900" b="1">
-                <a:solidFill>
-                  <a:srgbClr val="35506E"/>
-                </a:solidFill>
-                <a:latin typeface="微软雅黑"/>
-              </a:rPr>
-              <a:t>动手验证（照做一遍）</a:t>
-            </a:r>
-          </a:p>
-        </p:txBody>
-      </p:sp>
-      <p:sp>
-        <p:nvSpPr>
-          <p:cNvPr id="45" name="TextBox 44"/>
-          <p:cNvSpPr txBox="1"/>
-          <p:nvPr/>
-        </p:nvSpPr>
-        <p:spPr>
-          <a:xfrm>
-            <a:off x="8010143" y="3986784"/>
-            <a:ext cx="3584448" cy="822960"/>
-          </a:xfrm>
-          <a:prstGeom prst="rect">
-            <a:avLst/>
-          </a:prstGeom>
-          <a:noFill/>
-        </p:spPr>
-        <p:txBody>
-          <a:bodyPr wrap="square">
-            <a:spAutoFit/>
-          </a:bodyPr>
-          <a:lstStyle/>
-          <a:p>
-            <a:r>
-              <a:rPr sz="850" b="0">
-                <a:solidFill>
-                  <a:srgbClr val="2B2F36"/>
-                </a:solidFill>
-                <a:latin typeface="微软雅黑"/>
-              </a:rPr>
-              <a:t>小组答辩8分钟时间盒——超时直接打断 '我们4人分工…→现在演示…→收获是…'</a:t>
-            </a:r>
-          </a:p>
-        </p:txBody>
-      </p:sp>
-      <p:sp>
-        <p:nvSpPr>
-          <p:cNvPr id="46" name="Rectangle 45"/>
-          <p:cNvSpPr/>
-          <p:nvPr/>
-        </p:nvSpPr>
-        <p:spPr>
-          <a:xfrm>
-            <a:off x="457200" y="4983480"/>
-            <a:ext cx="11274552" cy="1481328"/>
-          </a:xfrm>
-          <a:prstGeom prst="rect">
-            <a:avLst/>
-          </a:prstGeom>
-          <a:solidFill>
-            <a:srgbClr val="F7F9FC"/>
-          </a:solidFill>
-          <a:ln>
-            <a:solidFill>
-              <a:srgbClr val="D6DCE4"/>
-            </a:solidFill>
-          </a:ln>
-          <a:effectLst/>
-        </p:spPr>
-        <p:style>
-          <a:lnRef idx="1">
-            <a:schemeClr val="accent1"/>
-          </a:lnRef>
-          <a:fillRef idx="3">
-            <a:schemeClr val="accent1"/>
-          </a:fillRef>
-          <a:effectRef idx="2">
-            <a:schemeClr val="accent1"/>
-          </a:effectRef>
-          <a:fontRef idx="minor">
-            <a:schemeClr val="lt1"/>
-          </a:fontRef>
-        </p:style>
-        <p:txBody>
-          <a:bodyPr rtlCol="0" anchor="ctr" wrap="square"/>
-          <a:lstStyle/>
-          <a:p>
-            <a:pPr algn="ctr"/>
-          </a:p>
-        </p:txBody>
-      </p:sp>
-      <p:sp>
-        <p:nvSpPr>
-          <p:cNvPr id="47" name="Rectangle 46"/>
-          <p:cNvSpPr/>
-          <p:nvPr/>
-        </p:nvSpPr>
-        <p:spPr>
-          <a:xfrm>
-            <a:off x="457200" y="4983480"/>
-            <a:ext cx="82296" cy="1481328"/>
-          </a:xfrm>
-          <a:prstGeom prst="rect">
-            <a:avLst/>
-          </a:prstGeom>
-          <a:solidFill>
-            <a:srgbClr val="8A4B2D"/>
-          </a:solidFill>
-          <a:ln>
-            <a:noFill/>
-          </a:ln>
-          <a:effectLst/>
-        </p:spPr>
-        <p:style>
-          <a:lnRef idx="1">
-            <a:schemeClr val="accent1"/>
-          </a:lnRef>
-          <a:fillRef idx="3">
-            <a:schemeClr val="accent1"/>
-          </a:fillRef>
-          <a:effectRef idx="2">
-            <a:schemeClr val="accent1"/>
-          </a:effectRef>
-          <a:fontRef idx="minor">
-            <a:schemeClr val="lt1"/>
-          </a:fontRef>
-        </p:style>
-        <p:txBody>
-          <a:bodyPr rtlCol="0" anchor="ctr" wrap="square"/>
-          <a:lstStyle/>
-          <a:p>
-            <a:pPr algn="ctr"/>
-          </a:p>
-        </p:txBody>
-      </p:sp>
-      <p:sp>
-        <p:nvSpPr>
-          <p:cNvPr id="48" name="TextBox 47"/>
-          <p:cNvSpPr txBox="1"/>
-          <p:nvPr/>
-        </p:nvSpPr>
-        <p:spPr>
-          <a:xfrm>
-            <a:off x="658368" y="5029200"/>
-            <a:ext cx="10972800" cy="274320"/>
-          </a:xfrm>
-          <a:prstGeom prst="rect">
-            <a:avLst/>
-          </a:prstGeom>
-          <a:noFill/>
-        </p:spPr>
-        <p:txBody>
-          <a:bodyPr wrap="square">
-            <a:spAutoFit/>
-          </a:bodyPr>
-          <a:lstStyle/>
-          <a:p>
-            <a:r>
-              <a:rPr sz="1100" b="1">
-                <a:solidFill>
-                  <a:srgbClr val="8A4B2D"/>
-                </a:solidFill>
-                <a:latin typeface="微软雅黑"/>
-              </a:rPr>
-              <a:t>难点3：B03 bad-case预案</a:t>
-            </a:r>
-          </a:p>
-        </p:txBody>
-      </p:sp>
-      <p:sp>
-        <p:nvSpPr>
-          <p:cNvPr id="49" name="TextBox 48"/>
-          <p:cNvSpPr txBox="1"/>
-          <p:nvPr/>
-        </p:nvSpPr>
-        <p:spPr>
-          <a:xfrm>
-            <a:off x="658368" y="5349240"/>
-            <a:ext cx="3566160" cy="219456"/>
-          </a:xfrm>
-          <a:prstGeom prst="rect">
-            <a:avLst/>
-          </a:prstGeom>
-          <a:noFill/>
-        </p:spPr>
-        <p:txBody>
-          <a:bodyPr wrap="square">
-            <a:spAutoFit/>
-          </a:bodyPr>
-          <a:lstStyle/>
-          <a:p>
-            <a:r>
-              <a:rPr sz="900" b="1">
-                <a:solidFill>
-                  <a:srgbClr val="B5533A"/>
-                </a:solidFill>
-                <a:latin typeface="微软雅黑"/>
-              </a:rPr>
-              <a:t>为什么容易栽</a:t>
-            </a:r>
-          </a:p>
-        </p:txBody>
-      </p:sp>
-      <p:sp>
-        <p:nvSpPr>
-          <p:cNvPr id="50" name="TextBox 49"/>
-          <p:cNvSpPr txBox="1"/>
-          <p:nvPr/>
-        </p:nvSpPr>
-        <p:spPr>
-          <a:xfrm>
-            <a:off x="658368" y="5586984"/>
-            <a:ext cx="3584448" cy="822960"/>
-          </a:xfrm>
-          <a:prstGeom prst="rect">
-            <a:avLst/>
-          </a:prstGeom>
-          <a:noFill/>
-        </p:spPr>
-        <p:txBody>
-          <a:bodyPr wrap="square">
-            <a:spAutoFit/>
-          </a:bodyPr>
-          <a:lstStyle/>
-          <a:p>
-            <a:r>
-              <a:rPr sz="850" b="0">
-                <a:solidFill>
-                  <a:srgbClr val="2B2F36"/>
-                </a:solidFill>
-                <a:latin typeface="微软雅黑"/>
-              </a:rPr>
-              <a:t>误区：崩溃不扣死分，崩溃无预案才扣——兜底体现工程态度</a:t>
-            </a:r>
-          </a:p>
-        </p:txBody>
-      </p:sp>
-      <p:sp>
-        <p:nvSpPr>
-          <p:cNvPr id="51" name="TextBox 50"/>
-          <p:cNvSpPr txBox="1"/>
-          <p:nvPr/>
-        </p:nvSpPr>
-        <p:spPr>
-          <a:xfrm>
-            <a:off x="4334255" y="5349240"/>
-            <a:ext cx="3566160" cy="219456"/>
-          </a:xfrm>
-          <a:prstGeom prst="rect">
-            <a:avLst/>
-          </a:prstGeom>
-          <a:noFill/>
-        </p:spPr>
-        <p:txBody>
-          <a:bodyPr wrap="square">
-            <a:spAutoFit/>
-          </a:bodyPr>
-          <a:lstStyle/>
-          <a:p>
-            <a:r>
-              <a:rPr sz="900" b="1">
-                <a:solidFill>
-                  <a:srgbClr val="2E7D46"/>
-                </a:solidFill>
-                <a:latin typeface="微软雅黑"/>
-              </a:rPr>
-              <a:t>一招破解（记住这句）</a:t>
-            </a:r>
-          </a:p>
-        </p:txBody>
-      </p:sp>
-      <p:sp>
-        <p:nvSpPr>
-          <p:cNvPr id="52" name="TextBox 51"/>
-          <p:cNvSpPr txBox="1"/>
-          <p:nvPr/>
-        </p:nvSpPr>
-        <p:spPr>
-          <a:xfrm>
-            <a:off x="4334255" y="5586984"/>
-            <a:ext cx="3584448" cy="822960"/>
-          </a:xfrm>
-          <a:prstGeom prst="rect">
-            <a:avLst/>
-          </a:prstGeom>
-          <a:noFill/>
-        </p:spPr>
-        <p:txBody>
-          <a:bodyPr wrap="square">
-            <a:spAutoFit/>
-          </a:bodyPr>
-          <a:lstStyle/>
-          <a:p>
-            <a:r>
-              <a:rPr sz="850" b="0">
-                <a:solidFill>
-                  <a:srgbClr val="2B2F36"/>
-                </a:solidFill>
-                <a:latin typeface="微软雅黑"/>
-              </a:rPr>
-              <a:t>bad-case预案=答辩灭火器：评委必点脏数据，提前备好</a:t>
-            </a:r>
-          </a:p>
-        </p:txBody>
-      </p:sp>
-      <p:sp>
-        <p:nvSpPr>
-          <p:cNvPr id="53" name="TextBox 52"/>
-          <p:cNvSpPr txBox="1"/>
-          <p:nvPr/>
-        </p:nvSpPr>
-        <p:spPr>
-          <a:xfrm>
-            <a:off x="8010143" y="5349240"/>
-            <a:ext cx="3566160" cy="219456"/>
-          </a:xfrm>
-          <a:prstGeom prst="rect">
-            <a:avLst/>
-          </a:prstGeom>
-          <a:noFill/>
-        </p:spPr>
-        <p:txBody>
-          <a:bodyPr wrap="square">
-            <a:spAutoFit/>
-          </a:bodyPr>
-          <a:lstStyle/>
-          <a:p>
-            <a:r>
-              <a:rPr sz="900" b="1">
-                <a:solidFill>
-                  <a:srgbClr val="35506E"/>
-                </a:solidFill>
-                <a:latin typeface="微软雅黑"/>
-              </a:rPr>
-              <a:t>动手验证（照做一遍）</a:t>
-            </a:r>
-          </a:p>
-        </p:txBody>
-      </p:sp>
-      <p:sp>
-        <p:nvSpPr>
-          <p:cNvPr id="54" name="TextBox 53"/>
-          <p:cNvSpPr txBox="1"/>
-          <p:nvPr/>
-        </p:nvSpPr>
-        <p:spPr>
-          <a:xfrm>
-            <a:off x="8010143" y="5586984"/>
-            <a:ext cx="3584448" cy="822960"/>
-          </a:xfrm>
-          <a:prstGeom prst="rect">
-            <a:avLst/>
-          </a:prstGeom>
-          <a:noFill/>
-        </p:spPr>
-        <p:txBody>
-          <a:bodyPr wrap="square">
-            <a:spAutoFit/>
-          </a:bodyPr>
-          <a:lstStyle/>
-          <a:p>
-            <a:r>
-              <a:rPr sz="850" b="0">
-                <a:solidFill>
-                  <a:srgbClr val="2B2F36"/>
-                </a:solidFill>
-                <a:latin typeface="微软雅黑"/>
-              </a:rPr>
-              <a:t>预演评委可能的刁钻输入——温度=abc不能崩 输入'温度=abc'→友好报错并提示重输</a:t>
+              <a:t>12 / 15</a:t>
             </a:r>
           </a:p>
         </p:txBody>
@@ -6850,7 +6112,7 @@
         <p:spPr>
           <a:xfrm>
             <a:off x="0" y="0"/>
-            <a:ext cx="12192000" cy="1150000"/>
+            <a:ext cx="12192000" cy="6858000"/>
           </a:xfrm>
           <a:prstGeom prst="rect">
             <a:avLst/>
@@ -6893,8 +6155,8 @@
         </p:nvSpPr>
         <p:spPr>
           <a:xfrm>
-            <a:off x="0" y="1150000"/>
-            <a:ext cx="2600000" cy="70000"/>
+            <a:off x="0" y="2880360"/>
+            <a:ext cx="12192000" cy="50000"/>
           </a:xfrm>
           <a:prstGeom prst="rect">
             <a:avLst/>
@@ -6937,8 +6199,8 @@
         </p:nvSpPr>
         <p:spPr>
           <a:xfrm>
-            <a:off x="700000" y="300000"/>
-            <a:ext cx="10792000" cy="700000"/>
+            <a:off x="0" y="1645920"/>
+            <a:ext cx="12192000" cy="1500000"/>
           </a:xfrm>
           <a:prstGeom prst="rect">
             <a:avLst/>
@@ -6946,12 +6208,12 @@
           <a:noFill/>
         </p:spPr>
         <p:txBody>
-          <a:bodyPr wrap="square" anchor="ctr">
+          <a:bodyPr wrap="square" anchor="t">
             <a:spAutoFit/>
           </a:bodyPr>
           <a:lstStyle/>
           <a:p>
-            <a:pPr algn="l">
+            <a:pPr algn="ctr">
               <a:lnSpc>
                 <a:spcPct val="110000"/>
               </a:lnSpc>
@@ -6960,71 +6222,27 @@
               </a:spcAft>
             </a:pPr>
             <a:r>
-              <a:rPr sz="2400" b="1">
+              <a:rPr sz="5400" b="1">
                 <a:solidFill>
                   <a:srgbClr val="FFFFFF"/>
                 </a:solidFill>
                 <a:latin typeface="微软雅黑"/>
               </a:rPr>
-              <a:t>承上启下 · 动手前避坑清单</a:t>
-            </a:r>
-          </a:p>
-        </p:txBody>
-      </p:sp>
-      <p:sp>
-        <p:nvSpPr>
-          <p:cNvPr id="24" name="Rectangle 23"/>
-          <p:cNvSpPr/>
-          <p:nvPr/>
-        </p:nvSpPr>
-        <p:spPr>
-          <a:xfrm>
-            <a:off x="500000" y="6500000"/>
-            <a:ext cx="11100000" cy="20000"/>
-          </a:xfrm>
-          <a:prstGeom prst="rect">
-            <a:avLst/>
-          </a:prstGeom>
-          <a:solidFill>
-            <a:srgbClr val="C9D4EE"/>
-          </a:solidFill>
-          <a:ln>
-            <a:noFill/>
-          </a:ln>
-          <a:effectLst/>
-        </p:spPr>
-        <p:style>
-          <a:lnRef idx="1">
-            <a:schemeClr val="accent1"/>
-          </a:lnRef>
-          <a:fillRef idx="3">
-            <a:schemeClr val="accent1"/>
-          </a:fillRef>
-          <a:effectRef idx="2">
-            <a:schemeClr val="accent1"/>
-          </a:effectRef>
-          <a:fontRef idx="minor">
-            <a:schemeClr val="lt1"/>
-          </a:fontRef>
-        </p:style>
-        <p:txBody>
-          <a:bodyPr rtlCol="0" anchor="ctr"/>
-          <a:lstStyle/>
-          <a:p>
-            <a:pPr algn="ctr"/>
-          </a:p>
-        </p:txBody>
-      </p:sp>
-      <p:sp>
-        <p:nvSpPr>
-          <p:cNvPr id="25" name="TextBox 24"/>
+              <a:t>THANKS</a:t>
+            </a:r>
+          </a:p>
+        </p:txBody>
+      </p:sp>
+      <p:sp>
+        <p:nvSpPr>
+          <p:cNvPr id="5" name="TextBox 4"/>
           <p:cNvSpPr txBox="1"/>
           <p:nvPr/>
         </p:nvSpPr>
         <p:spPr>
           <a:xfrm>
-            <a:off x="500000" y="6540000"/>
-            <a:ext cx="7000000" cy="300000"/>
+            <a:off x="0" y="3429000"/>
+            <a:ext cx="12192000" cy="800000"/>
           </a:xfrm>
           <a:prstGeom prst="rect">
             <a:avLst/>
@@ -7037,7 +6255,7 @@
           </a:bodyPr>
           <a:lstStyle/>
           <a:p>
-            <a:pPr algn="l">
+            <a:pPr algn="ctr">
               <a:lnSpc>
                 <a:spcPct val="110000"/>
               </a:lnSpc>
@@ -7046,27 +6264,27 @@
               </a:spcAft>
             </a:pPr>
             <a:r>
-              <a:rPr sz="1000" b="0">
-                <a:solidFill>
-                  <a:srgbClr val="8A97B5"/>
-                </a:solidFill>
-                <a:latin typeface="微软雅黑"/>
-              </a:rPr>
-              <a:t>两江智造集团 · Python编程基础</a:t>
-            </a:r>
-          </a:p>
-        </p:txBody>
-      </p:sp>
-      <p:sp>
-        <p:nvSpPr>
-          <p:cNvPr id="26" name="TextBox 25"/>
+              <a:rPr sz="2200" b="1">
+                <a:solidFill>
+                  <a:srgbClr val="F5670F"/>
+                </a:solidFill>
+                <a:latin typeface="微软雅黑"/>
+              </a:rPr>
+              <a:t>感谢聆听 · 动手实践出真知</a:t>
+            </a:r>
+          </a:p>
+        </p:txBody>
+      </p:sp>
+      <p:sp>
+        <p:nvSpPr>
+          <p:cNvPr id="6" name="TextBox 5"/>
           <p:cNvSpPr txBox="1"/>
           <p:nvPr/>
         </p:nvSpPr>
         <p:spPr>
           <a:xfrm>
-            <a:off x="10600000" y="6540000"/>
-            <a:ext cx="1000000" cy="300000"/>
+            <a:off x="0" y="4526280"/>
+            <a:ext cx="12192000" cy="600000"/>
           </a:xfrm>
           <a:prstGeom prst="rect">
             <a:avLst/>
@@ -7079,7 +6297,7 @@
           </a:bodyPr>
           <a:lstStyle/>
           <a:p>
-            <a:pPr algn="r">
+            <a:pPr algn="ctr">
               <a:lnSpc>
                 <a:spcPct val="110000"/>
               </a:lnSpc>
@@ -7088,27 +6306,74 @@
               </a:spcAft>
             </a:pPr>
             <a:r>
-              <a:rPr sz="1000" b="0">
-                <a:solidFill>
-                  <a:srgbClr val="8A97B5"/>
-                </a:solidFill>
-                <a:latin typeface="微软雅黑"/>
-              </a:rPr>
-              <a:t>8 / 13</a:t>
-            </a:r>
-          </a:p>
-        </p:txBody>
-      </p:sp>
-      <p:sp>
-        <p:nvSpPr>
-          <p:cNvPr id="27" name="TextBox 26"/>
+              <a:rPr sz="1400" b="0">
+                <a:solidFill>
+                  <a:srgbClr val="BBC6E6"/>
+                </a:solidFill>
+                <a:latin typeface="微软雅黑"/>
+              </a:rPr>
+              <a:t>以生为本   |   做中学 · 学中做</a:t>
+            </a:r>
+          </a:p>
+        </p:txBody>
+      </p:sp>
+    </p:spTree>
+  </p:cSld>
+  <p:clrMapOvr>
+    <a:masterClrMapping/>
+  </p:clrMapOvr>
+</p:sld>
+</file>
+
+<file path=ppt/slides/slide14.xml><?xml version="1.0" encoding="utf-8"?>
+<p:sld xmlns:a="http://schemas.openxmlformats.org/drawingml/2006/main" xmlns:p="http://schemas.openxmlformats.org/presentationml/2006/main" xmlns:r="http://schemas.openxmlformats.org/officeDocument/2006/relationships">
+  <p:cSld>
+    <p:spTree>
+      <p:nvGrpSpPr>
+        <p:cNvPr id="1" name=""/>
+        <p:cNvGrpSpPr/>
+        <p:nvPr/>
+      </p:nvGrpSpPr>
+      <p:grpSpPr/>
+      <p:sp>
+        <p:nvSpPr>
+          <p:cNvPr id="2" name="TextBox 1"/>
           <p:cNvSpPr txBox="1"/>
           <p:nvPr/>
         </p:nvSpPr>
         <p:spPr>
           <a:xfrm>
-            <a:off x="457200" y="1389888"/>
-            <a:ext cx="11274552" cy="274320"/>
+            <a:off x="548640" y="320040"/>
+            <a:ext cx="11094720" cy="914400"/>
+          </a:xfrm>
+          <a:prstGeom prst="rect">
+            <a:avLst/>
+          </a:prstGeom>
+          <a:noFill/>
+        </p:spPr>
+        <p:txBody>
+          <a:bodyPr wrap="none">
+            <a:spAutoFit/>
+          </a:bodyPr>
+          <a:lstStyle/>
+          <a:p>
+            <a:r>
+              <a:rPr sz="3000" b="1"/>
+              <a:t>本任务六步法导航</a:t>
+            </a:r>
+          </a:p>
+        </p:txBody>
+      </p:sp>
+      <p:sp>
+        <p:nvSpPr>
+          <p:cNvPr id="3" name="TextBox 2"/>
+          <p:cNvSpPr txBox="1"/>
+          <p:nvPr/>
+        </p:nvSpPr>
+        <p:spPr>
+          <a:xfrm>
+            <a:off x="731520" y="1371600"/>
+            <a:ext cx="10728960" cy="4663440"/>
           </a:xfrm>
           <a:prstGeom prst="rect">
             <a:avLst/>
@@ -7121,118 +6386,108 @@
           </a:bodyPr>
           <a:lstStyle/>
           <a:p>
-            <a:r>
-              <a:rPr sz="1050" b="0">
-                <a:solidFill>
-                  <a:srgbClr val="6B7280"/>
-                </a:solidFill>
-                <a:latin typeface="微软雅黑"/>
-              </a:rPr>
-              <a:t>本讲是动手冲刺课：先把上周完整讲解里的高频翻车点过一遍，再开工——每条都是历届学生真实踩过的坑。</a:t>
-            </a:r>
-          </a:p>
-        </p:txBody>
-      </p:sp>
-      <p:sp>
-        <p:nvSpPr>
-          <p:cNvPr id="28" name="Rectangle 27"/>
-          <p:cNvSpPr/>
-          <p:nvPr/>
-        </p:nvSpPr>
-        <p:spPr>
-          <a:xfrm>
-            <a:off x="457200" y="1783080"/>
-            <a:ext cx="5532120" cy="2061972"/>
-          </a:xfrm>
-          <a:prstGeom prst="rect">
-            <a:avLst/>
-          </a:prstGeom>
-          <a:solidFill>
-            <a:srgbClr val="FFFFFF"/>
-          </a:solidFill>
-          <a:ln>
-            <a:solidFill>
-              <a:srgbClr val="D6DCE4"/>
-            </a:solidFill>
-          </a:ln>
-          <a:effectLst/>
-        </p:spPr>
-        <p:style>
-          <a:lnRef idx="1">
-            <a:schemeClr val="accent1"/>
-          </a:lnRef>
-          <a:fillRef idx="3">
-            <a:schemeClr val="accent1"/>
-          </a:fillRef>
-          <a:effectRef idx="2">
-            <a:schemeClr val="accent1"/>
-          </a:effectRef>
-          <a:fontRef idx="minor">
-            <a:schemeClr val="lt1"/>
-          </a:fontRef>
-        </p:style>
-        <p:txBody>
-          <a:bodyPr rtlCol="0" anchor="ctr" wrap="square"/>
-          <a:lstStyle/>
-          <a:p>
-            <a:pPr algn="ctr"/>
-          </a:p>
-        </p:txBody>
-      </p:sp>
-      <p:sp>
-        <p:nvSpPr>
-          <p:cNvPr id="29" name="Rectangle 28"/>
-          <p:cNvSpPr/>
-          <p:nvPr/>
-        </p:nvSpPr>
-        <p:spPr>
-          <a:xfrm>
-            <a:off x="457200" y="1783080"/>
-            <a:ext cx="82296" cy="2061972"/>
-          </a:xfrm>
-          <a:prstGeom prst="rect">
-            <a:avLst/>
-          </a:prstGeom>
-          <a:solidFill>
-            <a:srgbClr val="9A3B3B"/>
-          </a:solidFill>
-          <a:ln>
-            <a:noFill/>
-          </a:ln>
-          <a:effectLst/>
-        </p:spPr>
-        <p:style>
-          <a:lnRef idx="1">
-            <a:schemeClr val="accent1"/>
-          </a:lnRef>
-          <a:fillRef idx="3">
-            <a:schemeClr val="accent1"/>
-          </a:fillRef>
-          <a:effectRef idx="2">
-            <a:schemeClr val="accent1"/>
-          </a:effectRef>
-          <a:fontRef idx="minor">
-            <a:schemeClr val="lt1"/>
-          </a:fontRef>
-        </p:style>
-        <p:txBody>
-          <a:bodyPr rtlCol="0" anchor="ctr" wrap="square"/>
-          <a:lstStyle/>
-          <a:p>
-            <a:pPr algn="ctr"/>
-          </a:p>
-        </p:txBody>
-      </p:sp>
-      <p:sp>
-        <p:nvSpPr>
-          <p:cNvPr id="30" name="TextBox 29"/>
+            <a:pPr>
+              <a:spcAft>
+                <a:spcPts val="1000"/>
+              </a:spcAft>
+            </a:pPr>
+            <a:r>
+              <a:rPr sz="1800"/>
+              <a:t>六步法：资讯 → 计划 → 决策 → 实施 → 检查 → 评估</a:t>
+            </a:r>
+          </a:p>
+          <a:p>
+            <a:pPr>
+              <a:spcAft>
+                <a:spcPts val="1000"/>
+              </a:spcAft>
+            </a:pPr>
+            <a:r>
+              <a:rPr sz="1800"/>
+              <a:t>本讲对应工单：《程序设计基础》分层任务工单</a:t>
+            </a:r>
+          </a:p>
+          <a:p>
+            <a:pPr>
+              <a:spcAft>
+                <a:spcPts val="1000"/>
+              </a:spcAft>
+            </a:pPr>
+            <a:r>
+              <a:rPr sz="1800"/>
+              <a:t>课堂产出：工单第六节实施记录须当堂填写，含操作前安全打勾与学生本人签字。</a:t>
+            </a:r>
+          </a:p>
+          <a:p>
+            <a:pPr>
+              <a:spcAft>
+                <a:spcPts val="1000"/>
+              </a:spcAft>
+            </a:pPr>
+            <a:r>
+              <a:rPr sz="1800"/>
+              <a:t>课后交付：班组长／操作员／教师三方联签后交回，缺签视为未交付。</a:t>
+            </a:r>
+          </a:p>
+        </p:txBody>
+      </p:sp>
+    </p:spTree>
+  </p:cSld>
+  <p:clrMapOvr>
+    <a:masterClrMapping/>
+  </p:clrMapOvr>
+</p:sld>
+</file>
+
+<file path=ppt/slides/slide15.xml><?xml version="1.0" encoding="utf-8"?>
+<p:sld xmlns:a="http://schemas.openxmlformats.org/drawingml/2006/main" xmlns:p="http://schemas.openxmlformats.org/presentationml/2006/main" xmlns:r="http://schemas.openxmlformats.org/officeDocument/2006/relationships">
+  <p:cSld>
+    <p:spTree>
+      <p:nvGrpSpPr>
+        <p:cNvPr id="1" name=""/>
+        <p:cNvGrpSpPr/>
+        <p:nvPr/>
+      </p:nvGrpSpPr>
+      <p:grpSpPr/>
+      <p:sp>
+        <p:nvSpPr>
+          <p:cNvPr id="2" name="TextBox 1"/>
           <p:cNvSpPr txBox="1"/>
           <p:nvPr/>
         </p:nvSpPr>
         <p:spPr>
           <a:xfrm>
-            <a:off x="658368" y="1847088"/>
-            <a:ext cx="5166359" cy="274320"/>
+            <a:off x="548640" y="320040"/>
+            <a:ext cx="11094720" cy="914400"/>
+          </a:xfrm>
+          <a:prstGeom prst="rect">
+            <a:avLst/>
+          </a:prstGeom>
+          <a:noFill/>
+        </p:spPr>
+        <p:txBody>
+          <a:bodyPr wrap="none">
+            <a:spAutoFit/>
+          </a:bodyPr>
+          <a:lstStyle/>
+          <a:p>
+            <a:r>
+              <a:rPr sz="3000" b="1"/>
+              <a:t>本讲与岗位任务单的衔接</a:t>
+            </a:r>
+          </a:p>
+        </p:txBody>
+      </p:sp>
+      <p:sp>
+        <p:nvSpPr>
+          <p:cNvPr id="3" name="TextBox 2"/>
+          <p:cNvSpPr txBox="1"/>
+          <p:nvPr/>
+        </p:nvSpPr>
+        <p:spPr>
+          <a:xfrm>
+            <a:off x="731520" y="1371600"/>
+            <a:ext cx="10728960" cy="4663440"/>
           </a:xfrm>
           <a:prstGeom prst="rect">
             <a:avLst/>
@@ -7245,431 +6500,47 @@
           </a:bodyPr>
           <a:lstStyle/>
           <a:p>
-            <a:r>
-              <a:rPr sz="1050" b="1">
-                <a:solidFill>
-                  <a:srgbClr val="B5533A"/>
-                </a:solidFill>
-                <a:latin typeface="微软雅黑"/>
-              </a:rPr>
-              <a:t>✗ 现场装依赖</a:t>
-            </a:r>
-          </a:p>
-        </p:txBody>
-      </p:sp>
-      <p:sp>
-        <p:nvSpPr>
-          <p:cNvPr id="31" name="TextBox 30"/>
-          <p:cNvSpPr txBox="1"/>
-          <p:nvPr/>
-        </p:nvSpPr>
-        <p:spPr>
-          <a:xfrm>
-            <a:off x="658368" y="2167128"/>
-            <a:ext cx="5166359" cy="868680"/>
-          </a:xfrm>
-          <a:prstGeom prst="rect">
-            <a:avLst/>
-          </a:prstGeom>
-          <a:noFill/>
-        </p:spPr>
-        <p:txBody>
-          <a:bodyPr wrap="square">
-            <a:spAutoFit/>
-          </a:bodyPr>
-          <a:lstStyle/>
-          <a:p>
-            <a:r>
-              <a:rPr sz="900" b="0">
-                <a:solidFill>
-                  <a:srgbClr val="2B2F36"/>
-                </a:solidFill>
-                <a:latin typeface="微软雅黑"/>
-              </a:rPr>
-              <a:t>原因：没提前试跑</a:t>
-            </a:r>
-          </a:p>
-          <a:p>
-            <a:r>
-              <a:rPr sz="900" b="0">
-                <a:solidFill>
-                  <a:srgbClr val="2B2F36"/>
-                </a:solidFill>
-                <a:latin typeface="微软雅黑"/>
-              </a:rPr>
-              <a:t>✔ 解决：答辩机预演</a:t>
-            </a:r>
-          </a:p>
-        </p:txBody>
-      </p:sp>
-      <p:sp>
-        <p:nvSpPr>
-          <p:cNvPr id="32" name="Rectangle 31"/>
-          <p:cNvSpPr/>
-          <p:nvPr/>
-        </p:nvSpPr>
-        <p:spPr>
-          <a:xfrm>
-            <a:off x="6199632" y="1783080"/>
-            <a:ext cx="5532120" cy="2061972"/>
-          </a:xfrm>
-          <a:prstGeom prst="rect">
-            <a:avLst/>
-          </a:prstGeom>
-          <a:solidFill>
-            <a:srgbClr val="FFFFFF"/>
-          </a:solidFill>
-          <a:ln>
-            <a:solidFill>
-              <a:srgbClr val="D6DCE4"/>
-            </a:solidFill>
-          </a:ln>
-          <a:effectLst/>
-        </p:spPr>
-        <p:style>
-          <a:lnRef idx="1">
-            <a:schemeClr val="accent1"/>
-          </a:lnRef>
-          <a:fillRef idx="3">
-            <a:schemeClr val="accent1"/>
-          </a:fillRef>
-          <a:effectRef idx="2">
-            <a:schemeClr val="accent1"/>
-          </a:effectRef>
-          <a:fontRef idx="minor">
-            <a:schemeClr val="lt1"/>
-          </a:fontRef>
-        </p:style>
-        <p:txBody>
-          <a:bodyPr rtlCol="0" anchor="ctr" wrap="square"/>
-          <a:lstStyle/>
-          <a:p>
-            <a:pPr algn="ctr"/>
-          </a:p>
-        </p:txBody>
-      </p:sp>
-      <p:sp>
-        <p:nvSpPr>
-          <p:cNvPr id="33" name="Rectangle 32"/>
-          <p:cNvSpPr/>
-          <p:nvPr/>
-        </p:nvSpPr>
-        <p:spPr>
-          <a:xfrm>
-            <a:off x="6199632" y="1783080"/>
-            <a:ext cx="82296" cy="2061972"/>
-          </a:xfrm>
-          <a:prstGeom prst="rect">
-            <a:avLst/>
-          </a:prstGeom>
-          <a:solidFill>
-            <a:srgbClr val="9A3B3B"/>
-          </a:solidFill>
-          <a:ln>
-            <a:noFill/>
-          </a:ln>
-          <a:effectLst/>
-        </p:spPr>
-        <p:style>
-          <a:lnRef idx="1">
-            <a:schemeClr val="accent1"/>
-          </a:lnRef>
-          <a:fillRef idx="3">
-            <a:schemeClr val="accent1"/>
-          </a:fillRef>
-          <a:effectRef idx="2">
-            <a:schemeClr val="accent1"/>
-          </a:effectRef>
-          <a:fontRef idx="minor">
-            <a:schemeClr val="lt1"/>
-          </a:fontRef>
-        </p:style>
-        <p:txBody>
-          <a:bodyPr rtlCol="0" anchor="ctr" wrap="square"/>
-          <a:lstStyle/>
-          <a:p>
-            <a:pPr algn="ctr"/>
-          </a:p>
-        </p:txBody>
-      </p:sp>
-      <p:sp>
-        <p:nvSpPr>
-          <p:cNvPr id="34" name="TextBox 33"/>
-          <p:cNvSpPr txBox="1"/>
-          <p:nvPr/>
-        </p:nvSpPr>
-        <p:spPr>
-          <a:xfrm>
-            <a:off x="6400800" y="1847088"/>
-            <a:ext cx="5166359" cy="274320"/>
-          </a:xfrm>
-          <a:prstGeom prst="rect">
-            <a:avLst/>
-          </a:prstGeom>
-          <a:noFill/>
-        </p:spPr>
-        <p:txBody>
-          <a:bodyPr wrap="square">
-            <a:spAutoFit/>
-          </a:bodyPr>
-          <a:lstStyle/>
-          <a:p>
-            <a:r>
-              <a:rPr sz="1050" b="1">
-                <a:solidFill>
-                  <a:srgbClr val="B5533A"/>
-                </a:solidFill>
-                <a:latin typeface="微软雅黑"/>
-              </a:rPr>
-              <a:t>✗ 只讲不演示</a:t>
-            </a:r>
-          </a:p>
-        </p:txBody>
-      </p:sp>
-      <p:sp>
-        <p:nvSpPr>
-          <p:cNvPr id="35" name="TextBox 34"/>
-          <p:cNvSpPr txBox="1"/>
-          <p:nvPr/>
-        </p:nvSpPr>
-        <p:spPr>
-          <a:xfrm>
-            <a:off x="6400800" y="2167128"/>
-            <a:ext cx="5166359" cy="868680"/>
-          </a:xfrm>
-          <a:prstGeom prst="rect">
-            <a:avLst/>
-          </a:prstGeom>
-          <a:noFill/>
-        </p:spPr>
-        <p:txBody>
-          <a:bodyPr wrap="square">
-            <a:spAutoFit/>
-          </a:bodyPr>
-          <a:lstStyle/>
-          <a:p>
-            <a:r>
-              <a:rPr sz="900" b="0">
-                <a:solidFill>
-                  <a:srgbClr val="2B2F36"/>
-                </a:solidFill>
-                <a:latin typeface="微软雅黑"/>
-              </a:rPr>
-              <a:t>原因：空谈</a:t>
-            </a:r>
-          </a:p>
-          <a:p>
-            <a:r>
-              <a:rPr sz="900" b="0">
-                <a:solidFill>
-                  <a:srgbClr val="2B2F36"/>
-                </a:solidFill>
-                <a:latin typeface="微软雅黑"/>
-              </a:rPr>
-              <a:t>✔ 解决：必须现场运行</a:t>
-            </a:r>
-          </a:p>
-        </p:txBody>
-      </p:sp>
-      <p:sp>
-        <p:nvSpPr>
-          <p:cNvPr id="36" name="Rectangle 35"/>
-          <p:cNvSpPr/>
-          <p:nvPr/>
-        </p:nvSpPr>
-        <p:spPr>
-          <a:xfrm>
-            <a:off x="457200" y="3973068"/>
-            <a:ext cx="5532120" cy="2061972"/>
-          </a:xfrm>
-          <a:prstGeom prst="rect">
-            <a:avLst/>
-          </a:prstGeom>
-          <a:solidFill>
-            <a:srgbClr val="FFFFFF"/>
-          </a:solidFill>
-          <a:ln>
-            <a:solidFill>
-              <a:srgbClr val="D6DCE4"/>
-            </a:solidFill>
-          </a:ln>
-          <a:effectLst/>
-        </p:spPr>
-        <p:style>
-          <a:lnRef idx="1">
-            <a:schemeClr val="accent1"/>
-          </a:lnRef>
-          <a:fillRef idx="3">
-            <a:schemeClr val="accent1"/>
-          </a:fillRef>
-          <a:effectRef idx="2">
-            <a:schemeClr val="accent1"/>
-          </a:effectRef>
-          <a:fontRef idx="minor">
-            <a:schemeClr val="lt1"/>
-          </a:fontRef>
-        </p:style>
-        <p:txBody>
-          <a:bodyPr rtlCol="0" anchor="ctr" wrap="square"/>
-          <a:lstStyle/>
-          <a:p>
-            <a:pPr algn="ctr"/>
-          </a:p>
-        </p:txBody>
-      </p:sp>
-      <p:sp>
-        <p:nvSpPr>
-          <p:cNvPr id="37" name="Rectangle 36"/>
-          <p:cNvSpPr/>
-          <p:nvPr/>
-        </p:nvSpPr>
-        <p:spPr>
-          <a:xfrm>
-            <a:off x="457200" y="3973068"/>
-            <a:ext cx="82296" cy="2061972"/>
-          </a:xfrm>
-          <a:prstGeom prst="rect">
-            <a:avLst/>
-          </a:prstGeom>
-          <a:solidFill>
-            <a:srgbClr val="9A3B3B"/>
-          </a:solidFill>
-          <a:ln>
-            <a:noFill/>
-          </a:ln>
-          <a:effectLst/>
-        </p:spPr>
-        <p:style>
-          <a:lnRef idx="1">
-            <a:schemeClr val="accent1"/>
-          </a:lnRef>
-          <a:fillRef idx="3">
-            <a:schemeClr val="accent1"/>
-          </a:fillRef>
-          <a:effectRef idx="2">
-            <a:schemeClr val="accent1"/>
-          </a:effectRef>
-          <a:fontRef idx="minor">
-            <a:schemeClr val="lt1"/>
-          </a:fontRef>
-        </p:style>
-        <p:txBody>
-          <a:bodyPr rtlCol="0" anchor="ctr" wrap="square"/>
-          <a:lstStyle/>
-          <a:p>
-            <a:pPr algn="ctr"/>
-          </a:p>
-        </p:txBody>
-      </p:sp>
-      <p:sp>
-        <p:nvSpPr>
-          <p:cNvPr id="38" name="TextBox 37"/>
-          <p:cNvSpPr txBox="1"/>
-          <p:nvPr/>
-        </p:nvSpPr>
-        <p:spPr>
-          <a:xfrm>
-            <a:off x="658368" y="4037076"/>
-            <a:ext cx="5166359" cy="274320"/>
-          </a:xfrm>
-          <a:prstGeom prst="rect">
-            <a:avLst/>
-          </a:prstGeom>
-          <a:noFill/>
-        </p:spPr>
-        <p:txBody>
-          <a:bodyPr wrap="square">
-            <a:spAutoFit/>
-          </a:bodyPr>
-          <a:lstStyle/>
-          <a:p>
-            <a:r>
-              <a:rPr sz="1050" b="1">
-                <a:solidFill>
-                  <a:srgbClr val="B5533A"/>
-                </a:solidFill>
-                <a:latin typeface="微软雅黑"/>
-              </a:rPr>
-              <a:t>✗ 超时</a:t>
-            </a:r>
-          </a:p>
-        </p:txBody>
-      </p:sp>
-      <p:sp>
-        <p:nvSpPr>
-          <p:cNvPr id="39" name="TextBox 38"/>
-          <p:cNvSpPr txBox="1"/>
-          <p:nvPr/>
-        </p:nvSpPr>
-        <p:spPr>
-          <a:xfrm>
-            <a:off x="658368" y="4357116"/>
-            <a:ext cx="5166359" cy="868680"/>
-          </a:xfrm>
-          <a:prstGeom prst="rect">
-            <a:avLst/>
-          </a:prstGeom>
-          <a:noFill/>
-        </p:spPr>
-        <p:txBody>
-          <a:bodyPr wrap="square">
-            <a:spAutoFit/>
-          </a:bodyPr>
-          <a:lstStyle/>
-          <a:p>
-            <a:r>
-              <a:rPr sz="900" b="0">
-                <a:solidFill>
-                  <a:srgbClr val="2B2F36"/>
-                </a:solidFill>
-                <a:latin typeface="微软雅黑"/>
-              </a:rPr>
-              <a:t>原因：没掐表</a:t>
-            </a:r>
-          </a:p>
-          <a:p>
-            <a:r>
-              <a:rPr sz="900" b="0">
-                <a:solidFill>
-                  <a:srgbClr val="2B2F36"/>
-                </a:solidFill>
-                <a:latin typeface="微软雅黑"/>
-              </a:rPr>
-              <a:t>✔ 解决：按5+3彩排两遍</a:t>
-            </a:r>
-          </a:p>
-        </p:txBody>
-      </p:sp>
-      <p:sp>
-        <p:nvSpPr>
-          <p:cNvPr id="40" name="TextBox 39"/>
-          <p:cNvSpPr txBox="1"/>
-          <p:nvPr/>
-        </p:nvSpPr>
-        <p:spPr>
-          <a:xfrm>
-            <a:off x="457200" y="6281928"/>
-            <a:ext cx="9601200" cy="182880"/>
-          </a:xfrm>
-          <a:prstGeom prst="rect">
-            <a:avLst/>
-          </a:prstGeom>
-          <a:noFill/>
-        </p:spPr>
-        <p:txBody>
-          <a:bodyPr wrap="square">
-            <a:spAutoFit/>
-          </a:bodyPr>
-          <a:lstStyle/>
-          <a:p>
-            <a:r>
-              <a:rPr sz="750" b="0">
-                <a:solidFill>
-                  <a:srgbClr val="6B7280"/>
-                </a:solidFill>
-                <a:latin typeface="微软雅黑"/>
-              </a:rPr>
-              <a:t>素材来源：同周《第23次课-项目终验联调与预答辩》知识卡与避坑清单（逐字摘录）</a:t>
+            <a:pPr>
+              <a:spcAft>
+                <a:spcPts val="1000"/>
+              </a:spcAft>
+            </a:pPr>
+            <a:r>
+              <a:rPr sz="1800"/>
+              <a:t>本讲在工作过程系统化课程中承担的任务环节：任务实施</a:t>
+            </a:r>
+          </a:p>
+          <a:p>
+            <a:pPr>
+              <a:spcAft>
+                <a:spcPts val="1000"/>
+              </a:spcAft>
+            </a:pPr>
+            <a:r>
+              <a:rPr sz="1800"/>
+              <a:t>考核对齐：过程性成绩取自本讲工单第六节各模块得分合计（满分 100）。</a:t>
+            </a:r>
+          </a:p>
+          <a:p>
+            <a:pPr>
+              <a:spcAft>
+                <a:spcPts val="1000"/>
+              </a:spcAft>
+            </a:pPr>
+            <a:r>
+              <a:rPr sz="1800"/>
+              <a:t>达标线：综合成绩≥60 分，且无安全红线一票否决记录</a:t>
+            </a:r>
+          </a:p>
+          <a:p>
+            <a:pPr>
+              <a:spcAft>
+                <a:spcPts val="1000"/>
+              </a:spcAft>
+            </a:pPr>
+            <a:r>
+              <a:rPr sz="1800"/>
+              <a:t>无效工单判定：未打安全勾、无本人签字、无三方联签。</a:t>
             </a:r>
           </a:p>
         </p:txBody>
@@ -8274,7 +7145,7 @@
                 </a:solidFill>
                 <a:latin typeface="微软雅黑"/>
               </a:rPr>
-              <a:t>3 / 13</a:t>
+              <a:t>3 / 15</a:t>
             </a:r>
           </a:p>
         </p:txBody>
@@ -9066,7 +7937,7 @@
                 </a:solidFill>
                 <a:latin typeface="微软雅黑"/>
               </a:rPr>
-              <a:t>4 / 13</a:t>
+              <a:t>4 / 15</a:t>
             </a:r>
           </a:p>
         </p:txBody>
@@ -10170,7 +9041,7 @@
                 </a:solidFill>
                 <a:latin typeface="微软雅黑"/>
               </a:rPr>
-              <a:t>5 / 13</a:t>
+              <a:t>5 / 15</a:t>
             </a:r>
           </a:p>
         </p:txBody>
@@ -10298,7 +9169,7 @@
           <a:noFill/>
         </p:spPr>
         <p:txBody>
-          <a:bodyPr wrap="square" anchor="t">
+          <a:bodyPr wrap="square" anchor="ctr">
             <a:spAutoFit/>
           </a:bodyPr>
           <a:lstStyle/>
@@ -10318,27 +9189,27 @@
                 </a:solidFill>
                 <a:latin typeface="微软雅黑"/>
               </a:rPr>
-              <a:t>实施任务：工单Z《综合项目答辩专场》</a:t>
-            </a:r>
-          </a:p>
-        </p:txBody>
-      </p:sp>
-      <p:sp>
-        <p:nvSpPr>
-          <p:cNvPr id="5" name="Rectangle 4"/>
+              <a:t>本课重难点地图 · 老师划重点（动手前必看）</a:t>
+            </a:r>
+          </a:p>
+        </p:txBody>
+      </p:sp>
+      <p:sp>
+        <p:nvSpPr>
+          <p:cNvPr id="24" name="Rectangle 23"/>
           <p:cNvSpPr/>
           <p:nvPr/>
         </p:nvSpPr>
         <p:spPr>
           <a:xfrm>
-            <a:off x="800000" y="1950000"/>
-            <a:ext cx="6300000" cy="3900000"/>
+            <a:off x="500000" y="6500000"/>
+            <a:ext cx="11100000" cy="20000"/>
           </a:xfrm>
           <a:prstGeom prst="rect">
             <a:avLst/>
           </a:prstGeom>
           <a:solidFill>
-            <a:srgbClr val="F3F6FD"/>
+            <a:srgbClr val="C9D4EE"/>
           </a:solidFill>
           <a:ln>
             <a:noFill/>
@@ -10369,159 +9240,14 @@
       </p:sp>
       <p:sp>
         <p:nvSpPr>
-          <p:cNvPr id="6" name="TextBox 5"/>
+          <p:cNvPr id="25" name="TextBox 24"/>
           <p:cNvSpPr txBox="1"/>
           <p:nvPr/>
         </p:nvSpPr>
         <p:spPr>
           <a:xfrm>
-            <a:off x="1000000" y="2100000"/>
-            <a:ext cx="5900000" cy="3600000"/>
-          </a:xfrm>
-          <a:prstGeom prst="rect">
-            <a:avLst/>
-          </a:prstGeom>
-          <a:noFill/>
-        </p:spPr>
-        <p:txBody>
-          <a:bodyPr wrap="square" anchor="t">
-            <a:spAutoFit/>
-          </a:bodyPr>
-          <a:lstStyle/>
-          <a:p>
-            <a:pPr algn="l">
-              <a:lnSpc>
-                <a:spcPct val="130000"/>
-              </a:lnSpc>
-              <a:spcAft>
-                <a:spcPts val="600"/>
-              </a:spcAft>
-            </a:pPr>
-            <a:r>
-              <a:rPr sz="1500" b="1">
-                <a:solidFill>
-                  <a:srgbClr val="0545E8"/>
-                </a:solidFill>
-                <a:latin typeface="微软雅黑"/>
-              </a:rPr>
-              <a:t>实施步骤</a:t>
-            </a:r>
-          </a:p>
-          <a:p>
-            <a:pPr algn="l">
-              <a:lnSpc>
-                <a:spcPct val="130000"/>
-              </a:lnSpc>
-              <a:spcAft>
-                <a:spcPts val="600"/>
-              </a:spcAft>
-            </a:pPr>
-            <a:r>
-              <a:rPr sz="1400" b="0">
-                <a:solidFill>
-                  <a:srgbClr val="010328"/>
-                </a:solidFill>
-                <a:latin typeface="微软雅黑"/>
-              </a:rPr>
-              <a:t>1. 正式答辩(8+5分钟)</a:t>
-            </a:r>
-          </a:p>
-          <a:p>
-            <a:pPr algn="l">
-              <a:lnSpc>
-                <a:spcPct val="130000"/>
-              </a:lnSpc>
-              <a:spcAft>
-                <a:spcPts val="600"/>
-              </a:spcAft>
-            </a:pPr>
-            <a:r>
-              <a:rPr sz="1400" b="0">
-                <a:solidFill>
-                  <a:srgbClr val="010328"/>
-                </a:solidFill>
-                <a:latin typeface="微软雅黑"/>
-              </a:rPr>
-              <a:t>2. 组间互评+个人反思</a:t>
-            </a:r>
-          </a:p>
-          <a:p>
-            <a:pPr algn="l">
-              <a:lnSpc>
-                <a:spcPct val="130000"/>
-              </a:lnSpc>
-              <a:spcAft>
-                <a:spcPts val="600"/>
-              </a:spcAft>
-            </a:pPr>
-            <a:r>
-              <a:rPr sz="1400" b="0">
-                <a:solidFill>
-                  <a:srgbClr val="010328"/>
-                </a:solidFill>
-                <a:latin typeface="微软雅黑"/>
-              </a:rPr>
-              <a:t>3. 提交代码/报告/PPT/视频/贡献表</a:t>
-            </a:r>
-          </a:p>
-        </p:txBody>
-      </p:sp>
-      <p:sp>
-        <p:nvSpPr>
-          <p:cNvPr id="7" name="Rectangle 6"/>
-          <p:cNvSpPr/>
-          <p:nvPr/>
-        </p:nvSpPr>
-        <p:spPr>
-          <a:xfrm>
-            <a:off x="7400000" y="1950000"/>
-            <a:ext cx="4000000" cy="1850000"/>
-          </a:xfrm>
-          <a:prstGeom prst="rect">
-            <a:avLst/>
-          </a:prstGeom>
-          <a:solidFill>
-            <a:srgbClr val="E8F1E8"/>
-          </a:solidFill>
-          <a:ln>
-            <a:solidFill>
-              <a:srgbClr val="0475B6"/>
-            </a:solidFill>
-          </a:ln>
-          <a:effectLst/>
-        </p:spPr>
-        <p:style>
-          <a:lnRef idx="1">
-            <a:schemeClr val="accent1"/>
-          </a:lnRef>
-          <a:fillRef idx="3">
-            <a:schemeClr val="accent1"/>
-          </a:fillRef>
-          <a:effectRef idx="2">
-            <a:schemeClr val="accent1"/>
-          </a:effectRef>
-          <a:fontRef idx="minor">
-            <a:schemeClr val="lt1"/>
-          </a:fontRef>
-        </p:style>
-        <p:txBody>
-          <a:bodyPr rtlCol="0" anchor="ctr"/>
-          <a:lstStyle/>
-          <a:p>
-            <a:pPr algn="ctr"/>
-          </a:p>
-        </p:txBody>
-      </p:sp>
-      <p:sp>
-        <p:nvSpPr>
-          <p:cNvPr id="8" name="TextBox 7"/>
-          <p:cNvSpPr txBox="1"/>
-          <p:nvPr/>
-        </p:nvSpPr>
-        <p:spPr>
-          <a:xfrm>
-            <a:off x="7550000" y="2080000"/>
-            <a:ext cx="3750000" cy="1650000"/>
+            <a:off x="500000" y="6540000"/>
+            <a:ext cx="7000000" cy="300000"/>
           </a:xfrm>
           <a:prstGeom prst="rect">
             <a:avLst/>
@@ -10543,218 +9269,6 @@
               </a:spcAft>
             </a:pPr>
             <a:r>
-              <a:rPr sz="1400" b="1">
-                <a:solidFill>
-                  <a:srgbClr val="0475B6"/>
-                </a:solidFill>
-                <a:latin typeface="微软雅黑"/>
-              </a:rPr>
-              <a:t>及格标准（D）</a:t>
-            </a:r>
-          </a:p>
-          <a:p>
-            <a:pPr algn="l">
-              <a:lnSpc>
-                <a:spcPct val="110000"/>
-              </a:lnSpc>
-              <a:spcAft>
-                <a:spcPts val="600"/>
-              </a:spcAft>
-            </a:pPr>
-            <a:r>
-              <a:rPr sz="1300" b="0">
-                <a:solidFill>
-                  <a:srgbClr val="010328"/>
-                </a:solidFill>
-                <a:latin typeface="微软雅黑"/>
-              </a:rPr>
-              <a:t>功能基本完整+能演示主流程</a:t>
-            </a:r>
-          </a:p>
-        </p:txBody>
-      </p:sp>
-      <p:sp>
-        <p:nvSpPr>
-          <p:cNvPr id="9" name="Rectangle 8"/>
-          <p:cNvSpPr/>
-          <p:nvPr/>
-        </p:nvSpPr>
-        <p:spPr>
-          <a:xfrm>
-            <a:off x="7400000" y="3950000"/>
-            <a:ext cx="4000000" cy="1850000"/>
-          </a:xfrm>
-          <a:prstGeom prst="rect">
-            <a:avLst/>
-          </a:prstGeom>
-          <a:solidFill>
-            <a:srgbClr val="FDF0E6"/>
-          </a:solidFill>
-          <a:ln>
-            <a:solidFill>
-              <a:srgbClr val="F5670F"/>
-            </a:solidFill>
-          </a:ln>
-          <a:effectLst/>
-        </p:spPr>
-        <p:style>
-          <a:lnRef idx="1">
-            <a:schemeClr val="accent1"/>
-          </a:lnRef>
-          <a:fillRef idx="3">
-            <a:schemeClr val="accent1"/>
-          </a:fillRef>
-          <a:effectRef idx="2">
-            <a:schemeClr val="accent1"/>
-          </a:effectRef>
-          <a:fontRef idx="minor">
-            <a:schemeClr val="lt1"/>
-          </a:fontRef>
-        </p:style>
-        <p:txBody>
-          <a:bodyPr rtlCol="0" anchor="ctr"/>
-          <a:lstStyle/>
-          <a:p>
-            <a:pPr algn="ctr"/>
-          </a:p>
-        </p:txBody>
-      </p:sp>
-      <p:sp>
-        <p:nvSpPr>
-          <p:cNvPr id="10" name="TextBox 9"/>
-          <p:cNvSpPr txBox="1"/>
-          <p:nvPr/>
-        </p:nvSpPr>
-        <p:spPr>
-          <a:xfrm>
-            <a:off x="7550000" y="4080000"/>
-            <a:ext cx="3750000" cy="1650000"/>
-          </a:xfrm>
-          <a:prstGeom prst="rect">
-            <a:avLst/>
-          </a:prstGeom>
-          <a:noFill/>
-        </p:spPr>
-        <p:txBody>
-          <a:bodyPr wrap="square" anchor="t">
-            <a:spAutoFit/>
-          </a:bodyPr>
-          <a:lstStyle/>
-          <a:p>
-            <a:pPr algn="l">
-              <a:lnSpc>
-                <a:spcPct val="110000"/>
-              </a:lnSpc>
-              <a:spcAft>
-                <a:spcPts val="600"/>
-              </a:spcAft>
-            </a:pPr>
-            <a:r>
-              <a:rPr sz="1400" b="1">
-                <a:solidFill>
-                  <a:srgbClr val="F5670F"/>
-                </a:solidFill>
-                <a:latin typeface="微软雅黑"/>
-              </a:rPr>
-              <a:t>优秀标准（B+）</a:t>
-            </a:r>
-          </a:p>
-          <a:p>
-            <a:pPr algn="l">
-              <a:lnSpc>
-                <a:spcPct val="110000"/>
-              </a:lnSpc>
-              <a:spcAft>
-                <a:spcPts val="600"/>
-              </a:spcAft>
-            </a:pPr>
-            <a:r>
-              <a:rPr sz="1300" b="0">
-                <a:solidFill>
-                  <a:srgbClr val="010328"/>
-                </a:solidFill>
-                <a:latin typeface="微软雅黑"/>
-              </a:rPr>
-              <a:t>规范率≥95%+架构清晰+创新点</a:t>
-            </a:r>
-          </a:p>
-        </p:txBody>
-      </p:sp>
-      <p:sp>
-        <p:nvSpPr>
-          <p:cNvPr id="11" name="Rectangle 10"/>
-          <p:cNvSpPr/>
-          <p:nvPr/>
-        </p:nvSpPr>
-        <p:spPr>
-          <a:xfrm>
-            <a:off x="500000" y="6500000"/>
-            <a:ext cx="11100000" cy="20000"/>
-          </a:xfrm>
-          <a:prstGeom prst="rect">
-            <a:avLst/>
-          </a:prstGeom>
-          <a:solidFill>
-            <a:srgbClr val="C9D4EE"/>
-          </a:solidFill>
-          <a:ln>
-            <a:noFill/>
-          </a:ln>
-          <a:effectLst/>
-        </p:spPr>
-        <p:style>
-          <a:lnRef idx="1">
-            <a:schemeClr val="accent1"/>
-          </a:lnRef>
-          <a:fillRef idx="3">
-            <a:schemeClr val="accent1"/>
-          </a:fillRef>
-          <a:effectRef idx="2">
-            <a:schemeClr val="accent1"/>
-          </a:effectRef>
-          <a:fontRef idx="minor">
-            <a:schemeClr val="lt1"/>
-          </a:fontRef>
-        </p:style>
-        <p:txBody>
-          <a:bodyPr rtlCol="0" anchor="ctr"/>
-          <a:lstStyle/>
-          <a:p>
-            <a:pPr algn="ctr"/>
-          </a:p>
-        </p:txBody>
-      </p:sp>
-      <p:sp>
-        <p:nvSpPr>
-          <p:cNvPr id="12" name="TextBox 11"/>
-          <p:cNvSpPr txBox="1"/>
-          <p:nvPr/>
-        </p:nvSpPr>
-        <p:spPr>
-          <a:xfrm>
-            <a:off x="500000" y="6540000"/>
-            <a:ext cx="7000000" cy="300000"/>
-          </a:xfrm>
-          <a:prstGeom prst="rect">
-            <a:avLst/>
-          </a:prstGeom>
-          <a:noFill/>
-        </p:spPr>
-        <p:txBody>
-          <a:bodyPr wrap="square" anchor="t">
-            <a:spAutoFit/>
-          </a:bodyPr>
-          <a:lstStyle/>
-          <a:p>
-            <a:pPr algn="l">
-              <a:lnSpc>
-                <a:spcPct val="110000"/>
-              </a:lnSpc>
-              <a:spcAft>
-                <a:spcPts val="600"/>
-              </a:spcAft>
-            </a:pPr>
-            <a:r>
               <a:rPr sz="1000" b="0">
                 <a:solidFill>
                   <a:srgbClr val="8A97B5"/>
@@ -10768,7 +9282,7 @@
       </p:sp>
       <p:sp>
         <p:nvSpPr>
-          <p:cNvPr id="13" name="TextBox 12"/>
+          <p:cNvPr id="26" name="TextBox 25"/>
           <p:cNvSpPr txBox="1"/>
           <p:nvPr/>
         </p:nvSpPr>
@@ -10803,7 +9317,839 @@
                 </a:solidFill>
                 <a:latin typeface="微软雅黑"/>
               </a:rPr>
-              <a:t>9 / 13</a:t>
+              <a:t>6 / 15</a:t>
+            </a:r>
+          </a:p>
+        </p:txBody>
+      </p:sp>
+      <p:sp>
+        <p:nvSpPr>
+          <p:cNvPr id="27" name="TextBox 26"/>
+          <p:cNvSpPr txBox="1"/>
+          <p:nvPr/>
+        </p:nvSpPr>
+        <p:spPr>
+          <a:xfrm>
+            <a:off x="457200" y="1389888"/>
+            <a:ext cx="11274552" cy="274320"/>
+          </a:xfrm>
+          <a:prstGeom prst="rect">
+            <a:avLst/>
+          </a:prstGeom>
+          <a:noFill/>
+        </p:spPr>
+        <p:txBody>
+          <a:bodyPr wrap="square">
+            <a:spAutoFit/>
+          </a:bodyPr>
+          <a:lstStyle/>
+          <a:p>
+            <a:r>
+              <a:rPr sz="1050" b="0">
+                <a:solidFill>
+                  <a:srgbClr val="6B7280"/>
+                </a:solidFill>
+                <a:latin typeface="微软雅黑"/>
+              </a:rPr>
+              <a:t>动手前先看这页：重点要会什么、难点会卡在哪、哪里最容易错、学没学会怎么自测。</a:t>
+            </a:r>
+          </a:p>
+        </p:txBody>
+      </p:sp>
+      <p:sp>
+        <p:nvSpPr>
+          <p:cNvPr id="28" name="Rectangle 27"/>
+          <p:cNvSpPr/>
+          <p:nvPr/>
+        </p:nvSpPr>
+        <p:spPr>
+          <a:xfrm>
+            <a:off x="457200" y="1783080"/>
+            <a:ext cx="5532120" cy="3127248"/>
+          </a:xfrm>
+          <a:prstGeom prst="rect">
+            <a:avLst/>
+          </a:prstGeom>
+          <a:solidFill>
+            <a:srgbClr val="FFFFFF"/>
+          </a:solidFill>
+          <a:ln>
+            <a:solidFill>
+              <a:srgbClr val="D6DCE4"/>
+            </a:solidFill>
+          </a:ln>
+          <a:effectLst/>
+        </p:spPr>
+        <p:style>
+          <a:lnRef idx="1">
+            <a:schemeClr val="accent1"/>
+          </a:lnRef>
+          <a:fillRef idx="3">
+            <a:schemeClr val="accent1"/>
+          </a:fillRef>
+          <a:effectRef idx="2">
+            <a:schemeClr val="accent1"/>
+          </a:effectRef>
+          <a:fontRef idx="minor">
+            <a:schemeClr val="lt1"/>
+          </a:fontRef>
+        </p:style>
+        <p:txBody>
+          <a:bodyPr rtlCol="0" anchor="ctr" wrap="square"/>
+          <a:lstStyle/>
+          <a:p>
+            <a:pPr algn="ctr"/>
+          </a:p>
+        </p:txBody>
+      </p:sp>
+      <p:sp>
+        <p:nvSpPr>
+          <p:cNvPr id="29" name="Rectangle 28"/>
+          <p:cNvSpPr/>
+          <p:nvPr/>
+        </p:nvSpPr>
+        <p:spPr>
+          <a:xfrm>
+            <a:off x="457200" y="1783080"/>
+            <a:ext cx="5532120" cy="365760"/>
+          </a:xfrm>
+          <a:prstGeom prst="rect">
+            <a:avLst/>
+          </a:prstGeom>
+          <a:solidFill>
+            <a:srgbClr val="2F5D8C"/>
+          </a:solidFill>
+          <a:ln>
+            <a:noFill/>
+          </a:ln>
+          <a:effectLst/>
+        </p:spPr>
+        <p:style>
+          <a:lnRef idx="1">
+            <a:schemeClr val="accent1"/>
+          </a:lnRef>
+          <a:fillRef idx="3">
+            <a:schemeClr val="accent1"/>
+          </a:fillRef>
+          <a:effectRef idx="2">
+            <a:schemeClr val="accent1"/>
+          </a:effectRef>
+          <a:fontRef idx="minor">
+            <a:schemeClr val="lt1"/>
+          </a:fontRef>
+        </p:style>
+        <p:txBody>
+          <a:bodyPr rtlCol="0" anchor="ctr" wrap="square"/>
+          <a:lstStyle/>
+          <a:p>
+            <a:pPr algn="ctr"/>
+          </a:p>
+        </p:txBody>
+      </p:sp>
+      <p:sp>
+        <p:nvSpPr>
+          <p:cNvPr id="30" name="TextBox 29"/>
+          <p:cNvSpPr txBox="1"/>
+          <p:nvPr/>
+        </p:nvSpPr>
+        <p:spPr>
+          <a:xfrm>
+            <a:off x="566928" y="1819656"/>
+            <a:ext cx="5312664" cy="292608"/>
+          </a:xfrm>
+          <a:prstGeom prst="rect">
+            <a:avLst/>
+          </a:prstGeom>
+          <a:noFill/>
+        </p:spPr>
+        <p:txBody>
+          <a:bodyPr wrap="square">
+            <a:spAutoFit/>
+          </a:bodyPr>
+          <a:lstStyle/>
+          <a:p>
+            <a:r>
+              <a:rPr sz="1150" b="1">
+                <a:solidFill>
+                  <a:srgbClr val="FFFFFF"/>
+                </a:solidFill>
+                <a:latin typeface="微软雅黑"/>
+              </a:rPr>
+              <a:t>重点 · 必会必考（本课知识点全景）</a:t>
+            </a:r>
+          </a:p>
+        </p:txBody>
+      </p:sp>
+      <p:sp>
+        <p:nvSpPr>
+          <p:cNvPr id="31" name="TextBox 30"/>
+          <p:cNvSpPr txBox="1"/>
+          <p:nvPr/>
+        </p:nvSpPr>
+        <p:spPr>
+          <a:xfrm>
+            <a:off x="621792" y="2267712"/>
+            <a:ext cx="5257800" cy="2560320"/>
+          </a:xfrm>
+          <a:prstGeom prst="rect">
+            <a:avLst/>
+          </a:prstGeom>
+          <a:noFill/>
+        </p:spPr>
+        <p:txBody>
+          <a:bodyPr wrap="square">
+            <a:spAutoFit/>
+          </a:bodyPr>
+          <a:lstStyle/>
+          <a:p>
+            <a:r>
+              <a:rPr sz="950" b="0">
+                <a:solidFill>
+                  <a:srgbClr val="2B2F36"/>
+                </a:solidFill>
+                <a:latin typeface="微软雅黑"/>
+              </a:rPr>
+              <a:t>◆ B01 checklist三清单｜checklist=飞行前检查单：功能/规范/演示逐项打勾</a:t>
+            </a:r>
+          </a:p>
+          <a:p>
+            <a:r>
+              <a:rPr sz="950" b="0">
+                <a:solidFill>
+                  <a:srgbClr val="2B2F36"/>
+                </a:solidFill>
+                <a:latin typeface="微软雅黑"/>
+              </a:rPr>
+              <a:t>◆ B02 答辩四段结构｜四段=时间盒：1分钟分工+5分钟演示+2分钟总结+提问</a:t>
+            </a:r>
+          </a:p>
+          <a:p>
+            <a:r>
+              <a:rPr sz="950" b="0">
+                <a:solidFill>
+                  <a:srgbClr val="2B2F36"/>
+                </a:solidFill>
+                <a:latin typeface="微软雅黑"/>
+              </a:rPr>
+              <a:t>◆ B03 bad-case预案｜bad-case预案=答辩灭火器：评委必点脏数据，提前备好</a:t>
+            </a:r>
+          </a:p>
+          <a:p>
+            <a:r>
+              <a:rPr sz="950" b="0">
+                <a:solidFill>
+                  <a:srgbClr val="2B2F36"/>
+                </a:solidFill>
+                <a:latin typeface="微软雅黑"/>
+              </a:rPr>
+              <a:t>◆ B04 贡献表与Git核对｜贡献表对Git=口头对台账——谁写的代码提交记录说了算</a:t>
+            </a:r>
+          </a:p>
+          <a:p>
+            <a:r>
+              <a:rPr sz="950" b="0">
+                <a:solidFill>
+                  <a:srgbClr val="2B2F36"/>
+                </a:solidFill>
+                <a:latin typeface="微软雅黑"/>
+              </a:rPr>
+              <a:t>◆ B05 个人问责制｜个人问责=随机点名必答题——组分与个人分分开</a:t>
+            </a:r>
+          </a:p>
+          <a:p>
+            <a:r>
+              <a:rPr sz="950" b="0">
+                <a:solidFill>
+                  <a:srgbClr val="2B2F36"/>
+                </a:solidFill>
+                <a:latin typeface="微软雅黑"/>
+              </a:rPr>
+              <a:t>◆ B06 时间盒弹性｜时间盒弹性=人多就切5+3分钟——超时打断不解释</a:t>
+            </a:r>
+          </a:p>
+        </p:txBody>
+      </p:sp>
+      <p:sp>
+        <p:nvSpPr>
+          <p:cNvPr id="32" name="Rectangle 31"/>
+          <p:cNvSpPr/>
+          <p:nvPr/>
+        </p:nvSpPr>
+        <p:spPr>
+          <a:xfrm>
+            <a:off x="6144768" y="1783080"/>
+            <a:ext cx="5586984" cy="1481328"/>
+          </a:xfrm>
+          <a:prstGeom prst="rect">
+            <a:avLst/>
+          </a:prstGeom>
+          <a:solidFill>
+            <a:srgbClr val="FFFFFF"/>
+          </a:solidFill>
+          <a:ln>
+            <a:solidFill>
+              <a:srgbClr val="D6DCE4"/>
+            </a:solidFill>
+          </a:ln>
+          <a:effectLst/>
+        </p:spPr>
+        <p:style>
+          <a:lnRef idx="1">
+            <a:schemeClr val="accent1"/>
+          </a:lnRef>
+          <a:fillRef idx="3">
+            <a:schemeClr val="accent1"/>
+          </a:fillRef>
+          <a:effectRef idx="2">
+            <a:schemeClr val="accent1"/>
+          </a:effectRef>
+          <a:fontRef idx="minor">
+            <a:schemeClr val="lt1"/>
+          </a:fontRef>
+        </p:style>
+        <p:txBody>
+          <a:bodyPr rtlCol="0" anchor="ctr" wrap="square"/>
+          <a:lstStyle/>
+          <a:p>
+            <a:pPr algn="ctr"/>
+          </a:p>
+        </p:txBody>
+      </p:sp>
+      <p:sp>
+        <p:nvSpPr>
+          <p:cNvPr id="33" name="Rectangle 32"/>
+          <p:cNvSpPr/>
+          <p:nvPr/>
+        </p:nvSpPr>
+        <p:spPr>
+          <a:xfrm>
+            <a:off x="6144768" y="1783080"/>
+            <a:ext cx="5586984" cy="365760"/>
+          </a:xfrm>
+          <a:prstGeom prst="rect">
+            <a:avLst/>
+          </a:prstGeom>
+          <a:solidFill>
+            <a:srgbClr val="8A4B2D"/>
+          </a:solidFill>
+          <a:ln>
+            <a:noFill/>
+          </a:ln>
+          <a:effectLst/>
+        </p:spPr>
+        <p:style>
+          <a:lnRef idx="1">
+            <a:schemeClr val="accent1"/>
+          </a:lnRef>
+          <a:fillRef idx="3">
+            <a:schemeClr val="accent1"/>
+          </a:fillRef>
+          <a:effectRef idx="2">
+            <a:schemeClr val="accent1"/>
+          </a:effectRef>
+          <a:fontRef idx="minor">
+            <a:schemeClr val="lt1"/>
+          </a:fontRef>
+        </p:style>
+        <p:txBody>
+          <a:bodyPr rtlCol="0" anchor="ctr" wrap="square"/>
+          <a:lstStyle/>
+          <a:p>
+            <a:pPr algn="ctr"/>
+          </a:p>
+        </p:txBody>
+      </p:sp>
+      <p:sp>
+        <p:nvSpPr>
+          <p:cNvPr id="34" name="TextBox 33"/>
+          <p:cNvSpPr txBox="1"/>
+          <p:nvPr/>
+        </p:nvSpPr>
+        <p:spPr>
+          <a:xfrm>
+            <a:off x="6254496" y="1819656"/>
+            <a:ext cx="5367528" cy="292608"/>
+          </a:xfrm>
+          <a:prstGeom prst="rect">
+            <a:avLst/>
+          </a:prstGeom>
+          <a:noFill/>
+        </p:spPr>
+        <p:txBody>
+          <a:bodyPr wrap="square">
+            <a:spAutoFit/>
+          </a:bodyPr>
+          <a:lstStyle/>
+          <a:p>
+            <a:r>
+              <a:rPr sz="1150" b="1">
+                <a:solidFill>
+                  <a:srgbClr val="FFFFFF"/>
+                </a:solidFill>
+                <a:latin typeface="微软雅黑"/>
+              </a:rPr>
+              <a:t>难点 · 易卡壳（下一页逐个击破）</a:t>
+            </a:r>
+          </a:p>
+        </p:txBody>
+      </p:sp>
+      <p:sp>
+        <p:nvSpPr>
+          <p:cNvPr id="35" name="TextBox 34"/>
+          <p:cNvSpPr txBox="1"/>
+          <p:nvPr/>
+        </p:nvSpPr>
+        <p:spPr>
+          <a:xfrm>
+            <a:off x="6309360" y="2231136"/>
+            <a:ext cx="5303520" cy="960120"/>
+          </a:xfrm>
+          <a:prstGeom prst="rect">
+            <a:avLst/>
+          </a:prstGeom>
+          <a:noFill/>
+        </p:spPr>
+        <p:txBody>
+          <a:bodyPr wrap="square">
+            <a:spAutoFit/>
+          </a:bodyPr>
+          <a:lstStyle/>
+          <a:p>
+            <a:r>
+              <a:rPr sz="900" b="0">
+                <a:solidFill>
+                  <a:srgbClr val="2B2F36"/>
+                </a:solidFill>
+                <a:latin typeface="微软雅黑"/>
+              </a:rPr>
+              <a:t>▲ 误区：靠'我觉得都OK'——清单逐项过，漏一项扣一项</a:t>
+            </a:r>
+          </a:p>
+          <a:p>
+            <a:r>
+              <a:rPr sz="900" b="0">
+                <a:solidFill>
+                  <a:srgbClr val="2B2F36"/>
+                </a:solidFill>
+                <a:latin typeface="微软雅黑"/>
+              </a:rPr>
+              <a:t>▲ 误区：先讲代码再演示——先跑通给结果，评委要有耐心阈值</a:t>
+            </a:r>
+          </a:p>
+          <a:p>
+            <a:r>
+              <a:rPr sz="900" b="0">
+                <a:solidFill>
+                  <a:srgbClr val="2B2F36"/>
+                </a:solidFill>
+                <a:latin typeface="微软雅黑"/>
+              </a:rPr>
+              <a:t>▲ 误区：崩溃不扣死分，崩溃无预案才扣——兜底体现工程态度</a:t>
+            </a:r>
+          </a:p>
+        </p:txBody>
+      </p:sp>
+      <p:sp>
+        <p:nvSpPr>
+          <p:cNvPr id="36" name="Rectangle 35"/>
+          <p:cNvSpPr/>
+          <p:nvPr/>
+        </p:nvSpPr>
+        <p:spPr>
+          <a:xfrm>
+            <a:off x="6144768" y="3401568"/>
+            <a:ext cx="5586984" cy="1508760"/>
+          </a:xfrm>
+          <a:prstGeom prst="rect">
+            <a:avLst/>
+          </a:prstGeom>
+          <a:solidFill>
+            <a:srgbClr val="FFFFFF"/>
+          </a:solidFill>
+          <a:ln>
+            <a:solidFill>
+              <a:srgbClr val="D6DCE4"/>
+            </a:solidFill>
+          </a:ln>
+          <a:effectLst/>
+        </p:spPr>
+        <p:style>
+          <a:lnRef idx="1">
+            <a:schemeClr val="accent1"/>
+          </a:lnRef>
+          <a:fillRef idx="3">
+            <a:schemeClr val="accent1"/>
+          </a:fillRef>
+          <a:effectRef idx="2">
+            <a:schemeClr val="accent1"/>
+          </a:effectRef>
+          <a:fontRef idx="minor">
+            <a:schemeClr val="lt1"/>
+          </a:fontRef>
+        </p:style>
+        <p:txBody>
+          <a:bodyPr rtlCol="0" anchor="ctr" wrap="square"/>
+          <a:lstStyle/>
+          <a:p>
+            <a:pPr algn="ctr"/>
+          </a:p>
+        </p:txBody>
+      </p:sp>
+      <p:sp>
+        <p:nvSpPr>
+          <p:cNvPr id="37" name="Rectangle 36"/>
+          <p:cNvSpPr/>
+          <p:nvPr/>
+        </p:nvSpPr>
+        <p:spPr>
+          <a:xfrm>
+            <a:off x="6144768" y="3401568"/>
+            <a:ext cx="5586984" cy="365760"/>
+          </a:xfrm>
+          <a:prstGeom prst="rect">
+            <a:avLst/>
+          </a:prstGeom>
+          <a:solidFill>
+            <a:srgbClr val="9A3B3B"/>
+          </a:solidFill>
+          <a:ln>
+            <a:noFill/>
+          </a:ln>
+          <a:effectLst/>
+        </p:spPr>
+        <p:style>
+          <a:lnRef idx="1">
+            <a:schemeClr val="accent1"/>
+          </a:lnRef>
+          <a:fillRef idx="3">
+            <a:schemeClr val="accent1"/>
+          </a:fillRef>
+          <a:effectRef idx="2">
+            <a:schemeClr val="accent1"/>
+          </a:effectRef>
+          <a:fontRef idx="minor">
+            <a:schemeClr val="lt1"/>
+          </a:fontRef>
+        </p:style>
+        <p:txBody>
+          <a:bodyPr rtlCol="0" anchor="ctr" wrap="square"/>
+          <a:lstStyle/>
+          <a:p>
+            <a:pPr algn="ctr"/>
+          </a:p>
+        </p:txBody>
+      </p:sp>
+      <p:sp>
+        <p:nvSpPr>
+          <p:cNvPr id="38" name="TextBox 37"/>
+          <p:cNvSpPr txBox="1"/>
+          <p:nvPr/>
+        </p:nvSpPr>
+        <p:spPr>
+          <a:xfrm>
+            <a:off x="6254496" y="3438144"/>
+            <a:ext cx="5367528" cy="292608"/>
+          </a:xfrm>
+          <a:prstGeom prst="rect">
+            <a:avLst/>
+          </a:prstGeom>
+          <a:noFill/>
+        </p:spPr>
+        <p:txBody>
+          <a:bodyPr wrap="square">
+            <a:spAutoFit/>
+          </a:bodyPr>
+          <a:lstStyle/>
+          <a:p>
+            <a:r>
+              <a:rPr sz="1150" b="1">
+                <a:solidFill>
+                  <a:srgbClr val="FFFFFF"/>
+                </a:solidFill>
+                <a:latin typeface="微软雅黑"/>
+              </a:rPr>
+              <a:t>高频易错 · 动手前先记住</a:t>
+            </a:r>
+          </a:p>
+        </p:txBody>
+      </p:sp>
+      <p:sp>
+        <p:nvSpPr>
+          <p:cNvPr id="39" name="TextBox 38"/>
+          <p:cNvSpPr txBox="1"/>
+          <p:nvPr/>
+        </p:nvSpPr>
+        <p:spPr>
+          <a:xfrm>
+            <a:off x="6309360" y="3849624"/>
+            <a:ext cx="5303520" cy="960120"/>
+          </a:xfrm>
+          <a:prstGeom prst="rect">
+            <a:avLst/>
+          </a:prstGeom>
+          <a:noFill/>
+        </p:spPr>
+        <p:txBody>
+          <a:bodyPr wrap="square">
+            <a:spAutoFit/>
+          </a:bodyPr>
+          <a:lstStyle/>
+          <a:p>
+            <a:r>
+              <a:rPr sz="900" b="0">
+                <a:solidFill>
+                  <a:srgbClr val="2B2F36"/>
+                </a:solidFill>
+                <a:latin typeface="微软雅黑"/>
+              </a:rPr>
+              <a:t>✗ 现场装依赖 → 答辩机预演</a:t>
+            </a:r>
+          </a:p>
+          <a:p>
+            <a:r>
+              <a:rPr sz="900" b="0">
+                <a:solidFill>
+                  <a:srgbClr val="2B2F36"/>
+                </a:solidFill>
+                <a:latin typeface="微软雅黑"/>
+              </a:rPr>
+              <a:t>✗ 只讲不演示 → 必须现场运行</a:t>
+            </a:r>
+          </a:p>
+          <a:p>
+            <a:r>
+              <a:rPr sz="900" b="0">
+                <a:solidFill>
+                  <a:srgbClr val="2B2F36"/>
+                </a:solidFill>
+                <a:latin typeface="微软雅黑"/>
+              </a:rPr>
+              <a:t>✗ 超时 → 按5+3彩排两遍</a:t>
+            </a:r>
+          </a:p>
+        </p:txBody>
+      </p:sp>
+      <p:sp>
+        <p:nvSpPr>
+          <p:cNvPr id="40" name="Rectangle 39"/>
+          <p:cNvSpPr/>
+          <p:nvPr/>
+        </p:nvSpPr>
+        <p:spPr>
+          <a:xfrm>
+            <a:off x="457200" y="5047488"/>
+            <a:ext cx="11274552" cy="1207008"/>
+          </a:xfrm>
+          <a:prstGeom prst="rect">
+            <a:avLst/>
+          </a:prstGeom>
+          <a:solidFill>
+            <a:srgbClr val="FFFFFF"/>
+          </a:solidFill>
+          <a:ln>
+            <a:solidFill>
+              <a:srgbClr val="D6DCE4"/>
+            </a:solidFill>
+          </a:ln>
+          <a:effectLst/>
+        </p:spPr>
+        <p:style>
+          <a:lnRef idx="1">
+            <a:schemeClr val="accent1"/>
+          </a:lnRef>
+          <a:fillRef idx="3">
+            <a:schemeClr val="accent1"/>
+          </a:fillRef>
+          <a:effectRef idx="2">
+            <a:schemeClr val="accent1"/>
+          </a:effectRef>
+          <a:fontRef idx="minor">
+            <a:schemeClr val="lt1"/>
+          </a:fontRef>
+        </p:style>
+        <p:txBody>
+          <a:bodyPr rtlCol="0" anchor="ctr" wrap="square"/>
+          <a:lstStyle/>
+          <a:p>
+            <a:pPr algn="ctr"/>
+          </a:p>
+        </p:txBody>
+      </p:sp>
+      <p:sp>
+        <p:nvSpPr>
+          <p:cNvPr id="41" name="Rectangle 40"/>
+          <p:cNvSpPr/>
+          <p:nvPr/>
+        </p:nvSpPr>
+        <p:spPr>
+          <a:xfrm>
+            <a:off x="457200" y="5047488"/>
+            <a:ext cx="11274552" cy="365760"/>
+          </a:xfrm>
+          <a:prstGeom prst="rect">
+            <a:avLst/>
+          </a:prstGeom>
+          <a:solidFill>
+            <a:srgbClr val="2E7D46"/>
+          </a:solidFill>
+          <a:ln>
+            <a:noFill/>
+          </a:ln>
+          <a:effectLst/>
+        </p:spPr>
+        <p:style>
+          <a:lnRef idx="1">
+            <a:schemeClr val="accent1"/>
+          </a:lnRef>
+          <a:fillRef idx="3">
+            <a:schemeClr val="accent1"/>
+          </a:fillRef>
+          <a:effectRef idx="2">
+            <a:schemeClr val="accent1"/>
+          </a:effectRef>
+          <a:fontRef idx="minor">
+            <a:schemeClr val="lt1"/>
+          </a:fontRef>
+        </p:style>
+        <p:txBody>
+          <a:bodyPr rtlCol="0" anchor="ctr" wrap="square"/>
+          <a:lstStyle/>
+          <a:p>
+            <a:pPr algn="ctr"/>
+          </a:p>
+        </p:txBody>
+      </p:sp>
+      <p:sp>
+        <p:nvSpPr>
+          <p:cNvPr id="42" name="TextBox 41"/>
+          <p:cNvSpPr txBox="1"/>
+          <p:nvPr/>
+        </p:nvSpPr>
+        <p:spPr>
+          <a:xfrm>
+            <a:off x="566928" y="5084064"/>
+            <a:ext cx="11055096" cy="292608"/>
+          </a:xfrm>
+          <a:prstGeom prst="rect">
+            <a:avLst/>
+          </a:prstGeom>
+          <a:noFill/>
+        </p:spPr>
+        <p:txBody>
+          <a:bodyPr wrap="square">
+            <a:spAutoFit/>
+          </a:bodyPr>
+          <a:lstStyle/>
+          <a:p>
+            <a:r>
+              <a:rPr sz="1150" b="1">
+                <a:solidFill>
+                  <a:srgbClr val="FFFFFF"/>
+                </a:solidFill>
+                <a:latin typeface="微软雅黑"/>
+              </a:rPr>
+              <a:t>达标自问 · 学没学会，问自己这四句（当堂评分同口径）</a:t>
+            </a:r>
+          </a:p>
+        </p:txBody>
+      </p:sp>
+      <p:sp>
+        <p:nvSpPr>
+          <p:cNvPr id="43" name="TextBox 42"/>
+          <p:cNvSpPr txBox="1"/>
+          <p:nvPr/>
+        </p:nvSpPr>
+        <p:spPr>
+          <a:xfrm>
+            <a:off x="621792" y="5458968"/>
+            <a:ext cx="10972800" cy="768096"/>
+          </a:xfrm>
+          <a:prstGeom prst="rect">
+            <a:avLst/>
+          </a:prstGeom>
+          <a:noFill/>
+        </p:spPr>
+        <p:txBody>
+          <a:bodyPr wrap="square">
+            <a:spAutoFit/>
+          </a:bodyPr>
+          <a:lstStyle/>
+          <a:p>
+            <a:r>
+              <a:rPr sz="900" b="0">
+                <a:solidFill>
+                  <a:srgbClr val="2B2F36"/>
+                </a:solidFill>
+                <a:latin typeface="微软雅黑"/>
+              </a:rPr>
+              <a:t>① 及格线我能过吗——功能基本完整+能演示主流程</a:t>
+            </a:r>
+          </a:p>
+          <a:p>
+            <a:r>
+              <a:rPr sz="900" b="0">
+                <a:solidFill>
+                  <a:srgbClr val="2B2F36"/>
+                </a:solidFill>
+                <a:latin typeface="微软雅黑"/>
+              </a:rPr>
+              <a:t>② 优秀线我够吗——规范率≥95%+架构清晰+创新点</a:t>
+            </a:r>
+          </a:p>
+          <a:p>
+            <a:r>
+              <a:rPr sz="900" b="0">
+                <a:solidFill>
+                  <a:srgbClr val="2B2F36"/>
+                </a:solidFill>
+                <a:latin typeface="微软雅黑"/>
+              </a:rPr>
+              <a:t>③ 技能点我能独立做出来吗——对照技能点页 S1–S4 逐条自测</a:t>
+            </a:r>
+          </a:p>
+          <a:p>
+            <a:r>
+              <a:rPr sz="900" b="0">
+                <a:solidFill>
+                  <a:srgbClr val="2B2F36"/>
+                </a:solidFill>
+                <a:latin typeface="微软雅黑"/>
+              </a:rPr>
+              <a:t>④ 报错了先查「常见错误速查」页再举手——错误信息逐字读一遍，八成自己能修</a:t>
+            </a:r>
+          </a:p>
+        </p:txBody>
+      </p:sp>
+      <p:sp>
+        <p:nvSpPr>
+          <p:cNvPr id="44" name="TextBox 43"/>
+          <p:cNvSpPr txBox="1"/>
+          <p:nvPr/>
+        </p:nvSpPr>
+        <p:spPr>
+          <a:xfrm>
+            <a:off x="457200" y="6281928"/>
+            <a:ext cx="9601200" cy="182880"/>
+          </a:xfrm>
+          <a:prstGeom prst="rect">
+            <a:avLst/>
+          </a:prstGeom>
+          <a:noFill/>
+        </p:spPr>
+        <p:txBody>
+          <a:bodyPr wrap="square">
+            <a:spAutoFit/>
+          </a:bodyPr>
+          <a:lstStyle/>
+          <a:p>
+            <a:r>
+              <a:rPr sz="900" b="0">
+                <a:solidFill>
+                  <a:srgbClr val="6B7280"/>
+                </a:solidFill>
+                <a:latin typeface="微软雅黑"/>
+              </a:rPr>
+              <a:t>素材来源：同周《第23次课-项目终验联调与预答辩》知识卡与避坑清单（逐字摘录）</a:t>
             </a:r>
           </a:p>
         </p:txBody>
@@ -10931,7 +10277,7 @@
           <a:noFill/>
         </p:spPr>
         <p:txBody>
-          <a:bodyPr wrap="square" anchor="t">
+          <a:bodyPr wrap="square" anchor="ctr">
             <a:spAutoFit/>
           </a:bodyPr>
           <a:lstStyle/>
@@ -10951,27 +10297,27 @@
                 </a:solidFill>
                 <a:latin typeface="微软雅黑"/>
               </a:rPr>
-              <a:t>总结评价与课后任务</a:t>
-            </a:r>
-          </a:p>
-        </p:txBody>
-      </p:sp>
-      <p:sp>
-        <p:nvSpPr>
-          <p:cNvPr id="5" name="Rectangle 4"/>
+              <a:t>难点逐个击破 · 零基础照做就能会</a:t>
+            </a:r>
+          </a:p>
+        </p:txBody>
+      </p:sp>
+      <p:sp>
+        <p:nvSpPr>
+          <p:cNvPr id="24" name="Rectangle 23"/>
           <p:cNvSpPr/>
           <p:nvPr/>
         </p:nvSpPr>
         <p:spPr>
           <a:xfrm>
-            <a:off x="800000" y="1950000"/>
-            <a:ext cx="10600000" cy="1500000"/>
+            <a:off x="500000" y="6500000"/>
+            <a:ext cx="11100000" cy="20000"/>
           </a:xfrm>
           <a:prstGeom prst="rect">
             <a:avLst/>
           </a:prstGeom>
           <a:solidFill>
-            <a:srgbClr val="F3F6FD"/>
+            <a:srgbClr val="C9D4EE"/>
           </a:solidFill>
           <a:ln>
             <a:noFill/>
@@ -11002,14 +10348,14 @@
       </p:sp>
       <p:sp>
         <p:nvSpPr>
-          <p:cNvPr id="6" name="TextBox 5"/>
+          <p:cNvPr id="25" name="TextBox 24"/>
           <p:cNvSpPr txBox="1"/>
           <p:nvPr/>
         </p:nvSpPr>
         <p:spPr>
           <a:xfrm>
-            <a:off x="1000000" y="2050000"/>
-            <a:ext cx="10300000" cy="1400000"/>
+            <a:off x="500000" y="6540000"/>
+            <a:ext cx="7000000" cy="300000"/>
           </a:xfrm>
           <a:prstGeom prst="rect">
             <a:avLst/>
@@ -11031,315 +10377,6 @@
               </a:spcAft>
             </a:pPr>
             <a:r>
-              <a:rPr sz="1500" b="1">
-                <a:solidFill>
-                  <a:srgbClr val="0545E8"/>
-                </a:solidFill>
-                <a:latin typeface="微软雅黑"/>
-              </a:rPr>
-              <a:t>评价（10分钟）：</a:t>
-            </a:r>
-          </a:p>
-          <a:p>
-            <a:pPr algn="l">
-              <a:lnSpc>
-                <a:spcPct val="110000"/>
-              </a:lnSpc>
-              <a:spcAft>
-                <a:spcPts val="600"/>
-              </a:spcAft>
-            </a:pPr>
-            <a:r>
-              <a:rPr sz="1400" b="0">
-                <a:solidFill>
-                  <a:srgbClr val="010328"/>
-                </a:solidFill>
-                <a:latin typeface="微软雅黑"/>
-              </a:rPr>
-              <a:t>按D/C/B/A量表当堂评分；工单24小时内反馈评语与改进建议。</a:t>
-            </a:r>
-          </a:p>
-        </p:txBody>
-      </p:sp>
-      <p:sp>
-        <p:nvSpPr>
-          <p:cNvPr id="7" name="TextBox 6"/>
-          <p:cNvSpPr txBox="1"/>
-          <p:nvPr/>
-        </p:nvSpPr>
-        <p:spPr>
-          <a:xfrm>
-            <a:off x="850000" y="3700000"/>
-            <a:ext cx="10600000" cy="700000"/>
-          </a:xfrm>
-          <a:prstGeom prst="rect">
-            <a:avLst/>
-          </a:prstGeom>
-          <a:noFill/>
-        </p:spPr>
-        <p:txBody>
-          <a:bodyPr wrap="square" anchor="t">
-            <a:spAutoFit/>
-          </a:bodyPr>
-          <a:lstStyle/>
-          <a:p>
-            <a:pPr algn="l">
-              <a:lnSpc>
-                <a:spcPct val="120000"/>
-              </a:lnSpc>
-              <a:spcAft>
-                <a:spcPts val="600"/>
-              </a:spcAft>
-            </a:pPr>
-            <a:r>
-              <a:rPr sz="1400" b="1">
-                <a:solidFill>
-                  <a:srgbClr val="F5670F"/>
-                </a:solidFill>
-                <a:latin typeface="微软雅黑"/>
-              </a:rPr>
-              <a:t>1. </a:t>
-            </a:r>
-            <a:r>
-              <a:rPr sz="1400" b="0">
-                <a:solidFill>
-                  <a:srgbClr val="010328"/>
-                </a:solidFill>
-                <a:latin typeface="微软雅黑"/>
-              </a:rPr>
-              <a:t>1. 提交综合项目完整材料：代码、报告、演示视频；</a:t>
-            </a:r>
-          </a:p>
-        </p:txBody>
-      </p:sp>
-      <p:sp>
-        <p:nvSpPr>
-          <p:cNvPr id="8" name="TextBox 7"/>
-          <p:cNvSpPr txBox="1"/>
-          <p:nvPr/>
-        </p:nvSpPr>
-        <p:spPr>
-          <a:xfrm>
-            <a:off x="850000" y="4420000"/>
-            <a:ext cx="10600000" cy="700000"/>
-          </a:xfrm>
-          <a:prstGeom prst="rect">
-            <a:avLst/>
-          </a:prstGeom>
-          <a:noFill/>
-        </p:spPr>
-        <p:txBody>
-          <a:bodyPr wrap="square" anchor="t">
-            <a:spAutoFit/>
-          </a:bodyPr>
-          <a:lstStyle/>
-          <a:p>
-            <a:pPr algn="l">
-              <a:lnSpc>
-                <a:spcPct val="120000"/>
-              </a:lnSpc>
-              <a:spcAft>
-                <a:spcPts val="600"/>
-              </a:spcAft>
-            </a:pPr>
-            <a:r>
-              <a:rPr sz="1400" b="1">
-                <a:solidFill>
-                  <a:srgbClr val="F5670F"/>
-                </a:solidFill>
-                <a:latin typeface="微软雅黑"/>
-              </a:rPr>
-              <a:t>2. </a:t>
-            </a:r>
-            <a:r>
-              <a:rPr sz="1400" b="0">
-                <a:solidFill>
-                  <a:srgbClr val="010328"/>
-                </a:solidFill>
-                <a:latin typeface="微软雅黑"/>
-              </a:rPr>
-              <a:t>2. 完成课程学习反思（一页纸总结）；</a:t>
-            </a:r>
-          </a:p>
-        </p:txBody>
-      </p:sp>
-      <p:sp>
-        <p:nvSpPr>
-          <p:cNvPr id="9" name="TextBox 8"/>
-          <p:cNvSpPr txBox="1"/>
-          <p:nvPr/>
-        </p:nvSpPr>
-        <p:spPr>
-          <a:xfrm>
-            <a:off x="850000" y="5140000"/>
-            <a:ext cx="10600000" cy="700000"/>
-          </a:xfrm>
-          <a:prstGeom prst="rect">
-            <a:avLst/>
-          </a:prstGeom>
-          <a:noFill/>
-        </p:spPr>
-        <p:txBody>
-          <a:bodyPr wrap="square" anchor="t">
-            <a:spAutoFit/>
-          </a:bodyPr>
-          <a:lstStyle/>
-          <a:p>
-            <a:pPr algn="l">
-              <a:lnSpc>
-                <a:spcPct val="120000"/>
-              </a:lnSpc>
-              <a:spcAft>
-                <a:spcPts val="600"/>
-              </a:spcAft>
-            </a:pPr>
-            <a:r>
-              <a:rPr sz="1400" b="1">
-                <a:solidFill>
-                  <a:srgbClr val="F5670F"/>
-                </a:solidFill>
-                <a:latin typeface="微软雅黑"/>
-              </a:rPr>
-              <a:t>3. </a:t>
-            </a:r>
-            <a:r>
-              <a:rPr sz="1400" b="0">
-                <a:solidFill>
-                  <a:srgbClr val="010328"/>
-                </a:solidFill>
-                <a:latin typeface="微软雅黑"/>
-              </a:rPr>
-              <a:t>3. 了解后续《AI应用基础》课程衔接内容。</a:t>
-            </a:r>
-          </a:p>
-        </p:txBody>
-      </p:sp>
-      <p:sp>
-        <p:nvSpPr>
-          <p:cNvPr id="10" name="TextBox 9"/>
-          <p:cNvSpPr txBox="1"/>
-          <p:nvPr/>
-        </p:nvSpPr>
-        <p:spPr>
-          <a:xfrm>
-            <a:off x="850000" y="5960000"/>
-            <a:ext cx="10600000" cy="500000"/>
-          </a:xfrm>
-          <a:prstGeom prst="rect">
-            <a:avLst/>
-          </a:prstGeom>
-          <a:noFill/>
-        </p:spPr>
-        <p:txBody>
-          <a:bodyPr wrap="square" anchor="t">
-            <a:spAutoFit/>
-          </a:bodyPr>
-          <a:lstStyle/>
-          <a:p>
-            <a:pPr algn="l">
-              <a:lnSpc>
-                <a:spcPct val="110000"/>
-              </a:lnSpc>
-              <a:spcAft>
-                <a:spcPts val="600"/>
-              </a:spcAft>
-            </a:pPr>
-            <a:r>
-              <a:rPr sz="1300" b="1">
-                <a:solidFill>
-                  <a:srgbClr val="0475B6"/>
-                </a:solidFill>
-                <a:latin typeface="微软雅黑"/>
-              </a:rPr>
-              <a:t>下次课预告：</a:t>
-            </a:r>
-            <a:r>
-              <a:rPr sz="1300" b="0">
-                <a:solidFill>
-                  <a:srgbClr val="44546A"/>
-                </a:solidFill>
-                <a:latin typeface="微软雅黑"/>
-              </a:rPr>
-              <a:t>见下次课工单任务书</a:t>
-            </a:r>
-          </a:p>
-        </p:txBody>
-      </p:sp>
-      <p:sp>
-        <p:nvSpPr>
-          <p:cNvPr id="11" name="Rectangle 10"/>
-          <p:cNvSpPr/>
-          <p:nvPr/>
-        </p:nvSpPr>
-        <p:spPr>
-          <a:xfrm>
-            <a:off x="500000" y="6500000"/>
-            <a:ext cx="11100000" cy="20000"/>
-          </a:xfrm>
-          <a:prstGeom prst="rect">
-            <a:avLst/>
-          </a:prstGeom>
-          <a:solidFill>
-            <a:srgbClr val="C9D4EE"/>
-          </a:solidFill>
-          <a:ln>
-            <a:noFill/>
-          </a:ln>
-          <a:effectLst/>
-        </p:spPr>
-        <p:style>
-          <a:lnRef idx="1">
-            <a:schemeClr val="accent1"/>
-          </a:lnRef>
-          <a:fillRef idx="3">
-            <a:schemeClr val="accent1"/>
-          </a:fillRef>
-          <a:effectRef idx="2">
-            <a:schemeClr val="accent1"/>
-          </a:effectRef>
-          <a:fontRef idx="minor">
-            <a:schemeClr val="lt1"/>
-          </a:fontRef>
-        </p:style>
-        <p:txBody>
-          <a:bodyPr rtlCol="0" anchor="ctr"/>
-          <a:lstStyle/>
-          <a:p>
-            <a:pPr algn="ctr"/>
-          </a:p>
-        </p:txBody>
-      </p:sp>
-      <p:sp>
-        <p:nvSpPr>
-          <p:cNvPr id="12" name="TextBox 11"/>
-          <p:cNvSpPr txBox="1"/>
-          <p:nvPr/>
-        </p:nvSpPr>
-        <p:spPr>
-          <a:xfrm>
-            <a:off x="500000" y="6540000"/>
-            <a:ext cx="7000000" cy="300000"/>
-          </a:xfrm>
-          <a:prstGeom prst="rect">
-            <a:avLst/>
-          </a:prstGeom>
-          <a:noFill/>
-        </p:spPr>
-        <p:txBody>
-          <a:bodyPr wrap="square" anchor="t">
-            <a:spAutoFit/>
-          </a:bodyPr>
-          <a:lstStyle/>
-          <a:p>
-            <a:pPr algn="l">
-              <a:lnSpc>
-                <a:spcPct val="110000"/>
-              </a:lnSpc>
-              <a:spcAft>
-                <a:spcPts val="600"/>
-              </a:spcAft>
-            </a:pPr>
-            <a:r>
               <a:rPr sz="1000" b="0">
                 <a:solidFill>
                   <a:srgbClr val="8A97B5"/>
@@ -11353,7 +10390,7 @@
       </p:sp>
       <p:sp>
         <p:nvSpPr>
-          <p:cNvPr id="13" name="TextBox 12"/>
+          <p:cNvPr id="26" name="TextBox 25"/>
           <p:cNvSpPr txBox="1"/>
           <p:nvPr/>
         </p:nvSpPr>
@@ -11388,7 +10425,1025 @@
                 </a:solidFill>
                 <a:latin typeface="微软雅黑"/>
               </a:rPr>
-              <a:t>10 / 13</a:t>
+              <a:t>7 / 15</a:t>
+            </a:r>
+          </a:p>
+        </p:txBody>
+      </p:sp>
+      <p:sp>
+        <p:nvSpPr>
+          <p:cNvPr id="27" name="TextBox 26"/>
+          <p:cNvSpPr txBox="1"/>
+          <p:nvPr/>
+        </p:nvSpPr>
+        <p:spPr>
+          <a:xfrm>
+            <a:off x="457200" y="1389888"/>
+            <a:ext cx="11274552" cy="274320"/>
+          </a:xfrm>
+          <a:prstGeom prst="rect">
+            <a:avLst/>
+          </a:prstGeom>
+          <a:noFill/>
+        </p:spPr>
+        <p:txBody>
+          <a:bodyPr wrap="square">
+            <a:spAutoFit/>
+          </a:bodyPr>
+          <a:lstStyle/>
+          <a:p>
+            <a:r>
+              <a:rPr sz="1050" b="0">
+                <a:solidFill>
+                  <a:srgbClr val="6B7280"/>
+                </a:solidFill>
+                <a:latin typeface="微软雅黑"/>
+              </a:rPr>
+              <a:t>每个难点四步走：先看「为什么容易栽」对号入座 → 记住「一招破解」→ 照「动手验证」做一遍 → 做不出回知识详解页。</a:t>
+            </a:r>
+          </a:p>
+        </p:txBody>
+      </p:sp>
+      <p:sp>
+        <p:nvSpPr>
+          <p:cNvPr id="28" name="Rectangle 27"/>
+          <p:cNvSpPr/>
+          <p:nvPr/>
+        </p:nvSpPr>
+        <p:spPr>
+          <a:xfrm>
+            <a:off x="457200" y="1783080"/>
+            <a:ext cx="11274552" cy="1481328"/>
+          </a:xfrm>
+          <a:prstGeom prst="rect">
+            <a:avLst/>
+          </a:prstGeom>
+          <a:solidFill>
+            <a:srgbClr val="F7F9FC"/>
+          </a:solidFill>
+          <a:ln>
+            <a:solidFill>
+              <a:srgbClr val="D6DCE4"/>
+            </a:solidFill>
+          </a:ln>
+          <a:effectLst/>
+        </p:spPr>
+        <p:style>
+          <a:lnRef idx="1">
+            <a:schemeClr val="accent1"/>
+          </a:lnRef>
+          <a:fillRef idx="3">
+            <a:schemeClr val="accent1"/>
+          </a:fillRef>
+          <a:effectRef idx="2">
+            <a:schemeClr val="accent1"/>
+          </a:effectRef>
+          <a:fontRef idx="minor">
+            <a:schemeClr val="lt1"/>
+          </a:fontRef>
+        </p:style>
+        <p:txBody>
+          <a:bodyPr rtlCol="0" anchor="ctr" wrap="square"/>
+          <a:lstStyle/>
+          <a:p>
+            <a:pPr algn="ctr"/>
+          </a:p>
+        </p:txBody>
+      </p:sp>
+      <p:sp>
+        <p:nvSpPr>
+          <p:cNvPr id="29" name="Rectangle 28"/>
+          <p:cNvSpPr/>
+          <p:nvPr/>
+        </p:nvSpPr>
+        <p:spPr>
+          <a:xfrm>
+            <a:off x="457200" y="1783080"/>
+            <a:ext cx="82296" cy="1481328"/>
+          </a:xfrm>
+          <a:prstGeom prst="rect">
+            <a:avLst/>
+          </a:prstGeom>
+          <a:solidFill>
+            <a:srgbClr val="8A4B2D"/>
+          </a:solidFill>
+          <a:ln>
+            <a:noFill/>
+          </a:ln>
+          <a:effectLst/>
+        </p:spPr>
+        <p:style>
+          <a:lnRef idx="1">
+            <a:schemeClr val="accent1"/>
+          </a:lnRef>
+          <a:fillRef idx="3">
+            <a:schemeClr val="accent1"/>
+          </a:fillRef>
+          <a:effectRef idx="2">
+            <a:schemeClr val="accent1"/>
+          </a:effectRef>
+          <a:fontRef idx="minor">
+            <a:schemeClr val="lt1"/>
+          </a:fontRef>
+        </p:style>
+        <p:txBody>
+          <a:bodyPr rtlCol="0" anchor="ctr" wrap="square"/>
+          <a:lstStyle/>
+          <a:p>
+            <a:pPr algn="ctr"/>
+          </a:p>
+        </p:txBody>
+      </p:sp>
+      <p:sp>
+        <p:nvSpPr>
+          <p:cNvPr id="30" name="TextBox 29"/>
+          <p:cNvSpPr txBox="1"/>
+          <p:nvPr/>
+        </p:nvSpPr>
+        <p:spPr>
+          <a:xfrm>
+            <a:off x="658368" y="1828800"/>
+            <a:ext cx="10972800" cy="274320"/>
+          </a:xfrm>
+          <a:prstGeom prst="rect">
+            <a:avLst/>
+          </a:prstGeom>
+          <a:noFill/>
+        </p:spPr>
+        <p:txBody>
+          <a:bodyPr wrap="square">
+            <a:spAutoFit/>
+          </a:bodyPr>
+          <a:lstStyle/>
+          <a:p>
+            <a:r>
+              <a:rPr sz="1100" b="1">
+                <a:solidFill>
+                  <a:srgbClr val="8A4B2D"/>
+                </a:solidFill>
+                <a:latin typeface="微软雅黑"/>
+              </a:rPr>
+              <a:t>难点1：B01 checklist三清单</a:t>
+            </a:r>
+          </a:p>
+        </p:txBody>
+      </p:sp>
+      <p:sp>
+        <p:nvSpPr>
+          <p:cNvPr id="31" name="TextBox 30"/>
+          <p:cNvSpPr txBox="1"/>
+          <p:nvPr/>
+        </p:nvSpPr>
+        <p:spPr>
+          <a:xfrm>
+            <a:off x="658368" y="2148840"/>
+            <a:ext cx="3566160" cy="219456"/>
+          </a:xfrm>
+          <a:prstGeom prst="rect">
+            <a:avLst/>
+          </a:prstGeom>
+          <a:noFill/>
+        </p:spPr>
+        <p:txBody>
+          <a:bodyPr wrap="square">
+            <a:spAutoFit/>
+          </a:bodyPr>
+          <a:lstStyle/>
+          <a:p>
+            <a:r>
+              <a:rPr sz="900" b="1">
+                <a:solidFill>
+                  <a:srgbClr val="B5533A"/>
+                </a:solidFill>
+                <a:latin typeface="微软雅黑"/>
+              </a:rPr>
+              <a:t>为什么容易栽</a:t>
+            </a:r>
+          </a:p>
+        </p:txBody>
+      </p:sp>
+      <p:sp>
+        <p:nvSpPr>
+          <p:cNvPr id="32" name="TextBox 31"/>
+          <p:cNvSpPr txBox="1"/>
+          <p:nvPr/>
+        </p:nvSpPr>
+        <p:spPr>
+          <a:xfrm>
+            <a:off x="658368" y="2386584"/>
+            <a:ext cx="3584448" cy="822960"/>
+          </a:xfrm>
+          <a:prstGeom prst="rect">
+            <a:avLst/>
+          </a:prstGeom>
+          <a:noFill/>
+        </p:spPr>
+        <p:txBody>
+          <a:bodyPr wrap="square">
+            <a:spAutoFit/>
+          </a:bodyPr>
+          <a:lstStyle/>
+          <a:p>
+            <a:r>
+              <a:rPr sz="900" b="0">
+                <a:solidFill>
+                  <a:srgbClr val="2B2F36"/>
+                </a:solidFill>
+                <a:latin typeface="微软雅黑"/>
+              </a:rPr>
+              <a:t>误区：靠'我觉得都OK'——清单逐项过，漏一项扣一项</a:t>
+            </a:r>
+          </a:p>
+        </p:txBody>
+      </p:sp>
+      <p:sp>
+        <p:nvSpPr>
+          <p:cNvPr id="33" name="TextBox 32"/>
+          <p:cNvSpPr txBox="1"/>
+          <p:nvPr/>
+        </p:nvSpPr>
+        <p:spPr>
+          <a:xfrm>
+            <a:off x="4334255" y="2148840"/>
+            <a:ext cx="3566160" cy="219456"/>
+          </a:xfrm>
+          <a:prstGeom prst="rect">
+            <a:avLst/>
+          </a:prstGeom>
+          <a:noFill/>
+        </p:spPr>
+        <p:txBody>
+          <a:bodyPr wrap="square">
+            <a:spAutoFit/>
+          </a:bodyPr>
+          <a:lstStyle/>
+          <a:p>
+            <a:r>
+              <a:rPr sz="900" b="1">
+                <a:solidFill>
+                  <a:srgbClr val="2E7D46"/>
+                </a:solidFill>
+                <a:latin typeface="微软雅黑"/>
+              </a:rPr>
+              <a:t>一招破解（记住这句）</a:t>
+            </a:r>
+          </a:p>
+        </p:txBody>
+      </p:sp>
+      <p:sp>
+        <p:nvSpPr>
+          <p:cNvPr id="34" name="TextBox 33"/>
+          <p:cNvSpPr txBox="1"/>
+          <p:nvPr/>
+        </p:nvSpPr>
+        <p:spPr>
+          <a:xfrm>
+            <a:off x="4334255" y="2386584"/>
+            <a:ext cx="3584448" cy="822960"/>
+          </a:xfrm>
+          <a:prstGeom prst="rect">
+            <a:avLst/>
+          </a:prstGeom>
+          <a:noFill/>
+        </p:spPr>
+        <p:txBody>
+          <a:bodyPr wrap="square">
+            <a:spAutoFit/>
+          </a:bodyPr>
+          <a:lstStyle/>
+          <a:p>
+            <a:r>
+              <a:rPr sz="900" b="0">
+                <a:solidFill>
+                  <a:srgbClr val="2B2F36"/>
+                </a:solidFill>
+                <a:latin typeface="微软雅黑"/>
+              </a:rPr>
+              <a:t>checklist=飞行前检查单：功能/规范/演示逐项打勾</a:t>
+            </a:r>
+          </a:p>
+        </p:txBody>
+      </p:sp>
+      <p:sp>
+        <p:nvSpPr>
+          <p:cNvPr id="35" name="TextBox 34"/>
+          <p:cNvSpPr txBox="1"/>
+          <p:nvPr/>
+        </p:nvSpPr>
+        <p:spPr>
+          <a:xfrm>
+            <a:off x="8010143" y="2148840"/>
+            <a:ext cx="3566160" cy="219456"/>
+          </a:xfrm>
+          <a:prstGeom prst="rect">
+            <a:avLst/>
+          </a:prstGeom>
+          <a:noFill/>
+        </p:spPr>
+        <p:txBody>
+          <a:bodyPr wrap="square">
+            <a:spAutoFit/>
+          </a:bodyPr>
+          <a:lstStyle/>
+          <a:p>
+            <a:r>
+              <a:rPr sz="900" b="1">
+                <a:solidFill>
+                  <a:srgbClr val="35506E"/>
+                </a:solidFill>
+                <a:latin typeface="微软雅黑"/>
+              </a:rPr>
+              <a:t>动手验证（照做一遍）</a:t>
+            </a:r>
+          </a:p>
+        </p:txBody>
+      </p:sp>
+      <p:sp>
+        <p:nvSpPr>
+          <p:cNvPr id="36" name="TextBox 35"/>
+          <p:cNvSpPr txBox="1"/>
+          <p:nvPr/>
+        </p:nvSpPr>
+        <p:spPr>
+          <a:xfrm>
+            <a:off x="8010143" y="2386584"/>
+            <a:ext cx="3584448" cy="822960"/>
+          </a:xfrm>
+          <a:prstGeom prst="rect">
+            <a:avLst/>
+          </a:prstGeom>
+          <a:noFill/>
+        </p:spPr>
+        <p:txBody>
+          <a:bodyPr wrap="square">
+            <a:spAutoFit/>
+          </a:bodyPr>
+          <a:lstStyle/>
+          <a:p>
+            <a:r>
+              <a:rPr sz="900" b="0">
+                <a:solidFill>
+                  <a:srgbClr val="2B2F36"/>
+                </a:solidFill>
+                <a:latin typeface="微软雅黑"/>
+              </a:rPr>
+              <a:t>终验不靠记忆靠清单——工程师与飞行员同一套方法 □全部功能可跑 □PEP8规范 □运行截图齐</a:t>
+            </a:r>
+          </a:p>
+        </p:txBody>
+      </p:sp>
+      <p:sp>
+        <p:nvSpPr>
+          <p:cNvPr id="37" name="Rectangle 36"/>
+          <p:cNvSpPr/>
+          <p:nvPr/>
+        </p:nvSpPr>
+        <p:spPr>
+          <a:xfrm>
+            <a:off x="457200" y="3383280"/>
+            <a:ext cx="11274552" cy="1481328"/>
+          </a:xfrm>
+          <a:prstGeom prst="rect">
+            <a:avLst/>
+          </a:prstGeom>
+          <a:solidFill>
+            <a:srgbClr val="F7F9FC"/>
+          </a:solidFill>
+          <a:ln>
+            <a:solidFill>
+              <a:srgbClr val="D6DCE4"/>
+            </a:solidFill>
+          </a:ln>
+          <a:effectLst/>
+        </p:spPr>
+        <p:style>
+          <a:lnRef idx="1">
+            <a:schemeClr val="accent1"/>
+          </a:lnRef>
+          <a:fillRef idx="3">
+            <a:schemeClr val="accent1"/>
+          </a:fillRef>
+          <a:effectRef idx="2">
+            <a:schemeClr val="accent1"/>
+          </a:effectRef>
+          <a:fontRef idx="minor">
+            <a:schemeClr val="lt1"/>
+          </a:fontRef>
+        </p:style>
+        <p:txBody>
+          <a:bodyPr rtlCol="0" anchor="ctr" wrap="square"/>
+          <a:lstStyle/>
+          <a:p>
+            <a:pPr algn="ctr"/>
+          </a:p>
+        </p:txBody>
+      </p:sp>
+      <p:sp>
+        <p:nvSpPr>
+          <p:cNvPr id="38" name="Rectangle 37"/>
+          <p:cNvSpPr/>
+          <p:nvPr/>
+        </p:nvSpPr>
+        <p:spPr>
+          <a:xfrm>
+            <a:off x="457200" y="3383280"/>
+            <a:ext cx="82296" cy="1481328"/>
+          </a:xfrm>
+          <a:prstGeom prst="rect">
+            <a:avLst/>
+          </a:prstGeom>
+          <a:solidFill>
+            <a:srgbClr val="8A4B2D"/>
+          </a:solidFill>
+          <a:ln>
+            <a:noFill/>
+          </a:ln>
+          <a:effectLst/>
+        </p:spPr>
+        <p:style>
+          <a:lnRef idx="1">
+            <a:schemeClr val="accent1"/>
+          </a:lnRef>
+          <a:fillRef idx="3">
+            <a:schemeClr val="accent1"/>
+          </a:fillRef>
+          <a:effectRef idx="2">
+            <a:schemeClr val="accent1"/>
+          </a:effectRef>
+          <a:fontRef idx="minor">
+            <a:schemeClr val="lt1"/>
+          </a:fontRef>
+        </p:style>
+        <p:txBody>
+          <a:bodyPr rtlCol="0" anchor="ctr" wrap="square"/>
+          <a:lstStyle/>
+          <a:p>
+            <a:pPr algn="ctr"/>
+          </a:p>
+        </p:txBody>
+      </p:sp>
+      <p:sp>
+        <p:nvSpPr>
+          <p:cNvPr id="39" name="TextBox 38"/>
+          <p:cNvSpPr txBox="1"/>
+          <p:nvPr/>
+        </p:nvSpPr>
+        <p:spPr>
+          <a:xfrm>
+            <a:off x="658368" y="3429000"/>
+            <a:ext cx="10972800" cy="274320"/>
+          </a:xfrm>
+          <a:prstGeom prst="rect">
+            <a:avLst/>
+          </a:prstGeom>
+          <a:noFill/>
+        </p:spPr>
+        <p:txBody>
+          <a:bodyPr wrap="square">
+            <a:spAutoFit/>
+          </a:bodyPr>
+          <a:lstStyle/>
+          <a:p>
+            <a:r>
+              <a:rPr sz="1100" b="1">
+                <a:solidFill>
+                  <a:srgbClr val="8A4B2D"/>
+                </a:solidFill>
+                <a:latin typeface="微软雅黑"/>
+              </a:rPr>
+              <a:t>难点2：B02 答辩四段结构</a:t>
+            </a:r>
+          </a:p>
+        </p:txBody>
+      </p:sp>
+      <p:sp>
+        <p:nvSpPr>
+          <p:cNvPr id="40" name="TextBox 39"/>
+          <p:cNvSpPr txBox="1"/>
+          <p:nvPr/>
+        </p:nvSpPr>
+        <p:spPr>
+          <a:xfrm>
+            <a:off x="658368" y="3749040"/>
+            <a:ext cx="3566160" cy="219456"/>
+          </a:xfrm>
+          <a:prstGeom prst="rect">
+            <a:avLst/>
+          </a:prstGeom>
+          <a:noFill/>
+        </p:spPr>
+        <p:txBody>
+          <a:bodyPr wrap="square">
+            <a:spAutoFit/>
+          </a:bodyPr>
+          <a:lstStyle/>
+          <a:p>
+            <a:r>
+              <a:rPr sz="900" b="1">
+                <a:solidFill>
+                  <a:srgbClr val="B5533A"/>
+                </a:solidFill>
+                <a:latin typeface="微软雅黑"/>
+              </a:rPr>
+              <a:t>为什么容易栽</a:t>
+            </a:r>
+          </a:p>
+        </p:txBody>
+      </p:sp>
+      <p:sp>
+        <p:nvSpPr>
+          <p:cNvPr id="41" name="TextBox 40"/>
+          <p:cNvSpPr txBox="1"/>
+          <p:nvPr/>
+        </p:nvSpPr>
+        <p:spPr>
+          <a:xfrm>
+            <a:off x="658368" y="3986784"/>
+            <a:ext cx="3584448" cy="822960"/>
+          </a:xfrm>
+          <a:prstGeom prst="rect">
+            <a:avLst/>
+          </a:prstGeom>
+          <a:noFill/>
+        </p:spPr>
+        <p:txBody>
+          <a:bodyPr wrap="square">
+            <a:spAutoFit/>
+          </a:bodyPr>
+          <a:lstStyle/>
+          <a:p>
+            <a:r>
+              <a:rPr sz="900" b="0">
+                <a:solidFill>
+                  <a:srgbClr val="2B2F36"/>
+                </a:solidFill>
+                <a:latin typeface="微软雅黑"/>
+              </a:rPr>
+              <a:t>误区：先讲代码再演示——先跑通给结果，评委要有耐心阈值</a:t>
+            </a:r>
+          </a:p>
+        </p:txBody>
+      </p:sp>
+      <p:sp>
+        <p:nvSpPr>
+          <p:cNvPr id="42" name="TextBox 41"/>
+          <p:cNvSpPr txBox="1"/>
+          <p:nvPr/>
+        </p:nvSpPr>
+        <p:spPr>
+          <a:xfrm>
+            <a:off x="4334255" y="3749040"/>
+            <a:ext cx="3566160" cy="219456"/>
+          </a:xfrm>
+          <a:prstGeom prst="rect">
+            <a:avLst/>
+          </a:prstGeom>
+          <a:noFill/>
+        </p:spPr>
+        <p:txBody>
+          <a:bodyPr wrap="square">
+            <a:spAutoFit/>
+          </a:bodyPr>
+          <a:lstStyle/>
+          <a:p>
+            <a:r>
+              <a:rPr sz="900" b="1">
+                <a:solidFill>
+                  <a:srgbClr val="2E7D46"/>
+                </a:solidFill>
+                <a:latin typeface="微软雅黑"/>
+              </a:rPr>
+              <a:t>一招破解（记住这句）</a:t>
+            </a:r>
+          </a:p>
+        </p:txBody>
+      </p:sp>
+      <p:sp>
+        <p:nvSpPr>
+          <p:cNvPr id="43" name="TextBox 42"/>
+          <p:cNvSpPr txBox="1"/>
+          <p:nvPr/>
+        </p:nvSpPr>
+        <p:spPr>
+          <a:xfrm>
+            <a:off x="4334255" y="3986784"/>
+            <a:ext cx="3584448" cy="822960"/>
+          </a:xfrm>
+          <a:prstGeom prst="rect">
+            <a:avLst/>
+          </a:prstGeom>
+          <a:noFill/>
+        </p:spPr>
+        <p:txBody>
+          <a:bodyPr wrap="square">
+            <a:spAutoFit/>
+          </a:bodyPr>
+          <a:lstStyle/>
+          <a:p>
+            <a:r>
+              <a:rPr sz="900" b="0">
+                <a:solidFill>
+                  <a:srgbClr val="2B2F36"/>
+                </a:solidFill>
+                <a:latin typeface="微软雅黑"/>
+              </a:rPr>
+              <a:t>四段=时间盒：1分钟分工+5分钟演示+2分钟总结+提问</a:t>
+            </a:r>
+          </a:p>
+        </p:txBody>
+      </p:sp>
+      <p:sp>
+        <p:nvSpPr>
+          <p:cNvPr id="44" name="TextBox 43"/>
+          <p:cNvSpPr txBox="1"/>
+          <p:nvPr/>
+        </p:nvSpPr>
+        <p:spPr>
+          <a:xfrm>
+            <a:off x="8010143" y="3749040"/>
+            <a:ext cx="3566160" cy="219456"/>
+          </a:xfrm>
+          <a:prstGeom prst="rect">
+            <a:avLst/>
+          </a:prstGeom>
+          <a:noFill/>
+        </p:spPr>
+        <p:txBody>
+          <a:bodyPr wrap="square">
+            <a:spAutoFit/>
+          </a:bodyPr>
+          <a:lstStyle/>
+          <a:p>
+            <a:r>
+              <a:rPr sz="900" b="1">
+                <a:solidFill>
+                  <a:srgbClr val="35506E"/>
+                </a:solidFill>
+                <a:latin typeface="微软雅黑"/>
+              </a:rPr>
+              <a:t>动手验证（照做一遍）</a:t>
+            </a:r>
+          </a:p>
+        </p:txBody>
+      </p:sp>
+      <p:sp>
+        <p:nvSpPr>
+          <p:cNvPr id="45" name="TextBox 44"/>
+          <p:cNvSpPr txBox="1"/>
+          <p:nvPr/>
+        </p:nvSpPr>
+        <p:spPr>
+          <a:xfrm>
+            <a:off x="8010143" y="3986784"/>
+            <a:ext cx="3584448" cy="822960"/>
+          </a:xfrm>
+          <a:prstGeom prst="rect">
+            <a:avLst/>
+          </a:prstGeom>
+          <a:noFill/>
+        </p:spPr>
+        <p:txBody>
+          <a:bodyPr wrap="square">
+            <a:spAutoFit/>
+          </a:bodyPr>
+          <a:lstStyle/>
+          <a:p>
+            <a:r>
+              <a:rPr sz="900" b="0">
+                <a:solidFill>
+                  <a:srgbClr val="2B2F36"/>
+                </a:solidFill>
+                <a:latin typeface="微软雅黑"/>
+              </a:rPr>
+              <a:t>小组答辩8分钟时间盒——超时直接打断 '我们4人分工…→现在演示…→收获是…'</a:t>
+            </a:r>
+          </a:p>
+        </p:txBody>
+      </p:sp>
+      <p:sp>
+        <p:nvSpPr>
+          <p:cNvPr id="46" name="Rectangle 45"/>
+          <p:cNvSpPr/>
+          <p:nvPr/>
+        </p:nvSpPr>
+        <p:spPr>
+          <a:xfrm>
+            <a:off x="457200" y="4983480"/>
+            <a:ext cx="11274552" cy="1481328"/>
+          </a:xfrm>
+          <a:prstGeom prst="rect">
+            <a:avLst/>
+          </a:prstGeom>
+          <a:solidFill>
+            <a:srgbClr val="F7F9FC"/>
+          </a:solidFill>
+          <a:ln>
+            <a:solidFill>
+              <a:srgbClr val="D6DCE4"/>
+            </a:solidFill>
+          </a:ln>
+          <a:effectLst/>
+        </p:spPr>
+        <p:style>
+          <a:lnRef idx="1">
+            <a:schemeClr val="accent1"/>
+          </a:lnRef>
+          <a:fillRef idx="3">
+            <a:schemeClr val="accent1"/>
+          </a:fillRef>
+          <a:effectRef idx="2">
+            <a:schemeClr val="accent1"/>
+          </a:effectRef>
+          <a:fontRef idx="minor">
+            <a:schemeClr val="lt1"/>
+          </a:fontRef>
+        </p:style>
+        <p:txBody>
+          <a:bodyPr rtlCol="0" anchor="ctr" wrap="square"/>
+          <a:lstStyle/>
+          <a:p>
+            <a:pPr algn="ctr"/>
+          </a:p>
+        </p:txBody>
+      </p:sp>
+      <p:sp>
+        <p:nvSpPr>
+          <p:cNvPr id="47" name="Rectangle 46"/>
+          <p:cNvSpPr/>
+          <p:nvPr/>
+        </p:nvSpPr>
+        <p:spPr>
+          <a:xfrm>
+            <a:off x="457200" y="4983480"/>
+            <a:ext cx="82296" cy="1481328"/>
+          </a:xfrm>
+          <a:prstGeom prst="rect">
+            <a:avLst/>
+          </a:prstGeom>
+          <a:solidFill>
+            <a:srgbClr val="8A4B2D"/>
+          </a:solidFill>
+          <a:ln>
+            <a:noFill/>
+          </a:ln>
+          <a:effectLst/>
+        </p:spPr>
+        <p:style>
+          <a:lnRef idx="1">
+            <a:schemeClr val="accent1"/>
+          </a:lnRef>
+          <a:fillRef idx="3">
+            <a:schemeClr val="accent1"/>
+          </a:fillRef>
+          <a:effectRef idx="2">
+            <a:schemeClr val="accent1"/>
+          </a:effectRef>
+          <a:fontRef idx="minor">
+            <a:schemeClr val="lt1"/>
+          </a:fontRef>
+        </p:style>
+        <p:txBody>
+          <a:bodyPr rtlCol="0" anchor="ctr" wrap="square"/>
+          <a:lstStyle/>
+          <a:p>
+            <a:pPr algn="ctr"/>
+          </a:p>
+        </p:txBody>
+      </p:sp>
+      <p:sp>
+        <p:nvSpPr>
+          <p:cNvPr id="48" name="TextBox 47"/>
+          <p:cNvSpPr txBox="1"/>
+          <p:nvPr/>
+        </p:nvSpPr>
+        <p:spPr>
+          <a:xfrm>
+            <a:off x="658368" y="5029200"/>
+            <a:ext cx="10972800" cy="274320"/>
+          </a:xfrm>
+          <a:prstGeom prst="rect">
+            <a:avLst/>
+          </a:prstGeom>
+          <a:noFill/>
+        </p:spPr>
+        <p:txBody>
+          <a:bodyPr wrap="square">
+            <a:spAutoFit/>
+          </a:bodyPr>
+          <a:lstStyle/>
+          <a:p>
+            <a:r>
+              <a:rPr sz="1100" b="1">
+                <a:solidFill>
+                  <a:srgbClr val="8A4B2D"/>
+                </a:solidFill>
+                <a:latin typeface="微软雅黑"/>
+              </a:rPr>
+              <a:t>难点3：B03 bad-case预案</a:t>
+            </a:r>
+          </a:p>
+        </p:txBody>
+      </p:sp>
+      <p:sp>
+        <p:nvSpPr>
+          <p:cNvPr id="49" name="TextBox 48"/>
+          <p:cNvSpPr txBox="1"/>
+          <p:nvPr/>
+        </p:nvSpPr>
+        <p:spPr>
+          <a:xfrm>
+            <a:off x="658368" y="5349240"/>
+            <a:ext cx="3566160" cy="219456"/>
+          </a:xfrm>
+          <a:prstGeom prst="rect">
+            <a:avLst/>
+          </a:prstGeom>
+          <a:noFill/>
+        </p:spPr>
+        <p:txBody>
+          <a:bodyPr wrap="square">
+            <a:spAutoFit/>
+          </a:bodyPr>
+          <a:lstStyle/>
+          <a:p>
+            <a:r>
+              <a:rPr sz="900" b="1">
+                <a:solidFill>
+                  <a:srgbClr val="B5533A"/>
+                </a:solidFill>
+                <a:latin typeface="微软雅黑"/>
+              </a:rPr>
+              <a:t>为什么容易栽</a:t>
+            </a:r>
+          </a:p>
+        </p:txBody>
+      </p:sp>
+      <p:sp>
+        <p:nvSpPr>
+          <p:cNvPr id="50" name="TextBox 49"/>
+          <p:cNvSpPr txBox="1"/>
+          <p:nvPr/>
+        </p:nvSpPr>
+        <p:spPr>
+          <a:xfrm>
+            <a:off x="658368" y="5586984"/>
+            <a:ext cx="3584448" cy="822960"/>
+          </a:xfrm>
+          <a:prstGeom prst="rect">
+            <a:avLst/>
+          </a:prstGeom>
+          <a:noFill/>
+        </p:spPr>
+        <p:txBody>
+          <a:bodyPr wrap="square">
+            <a:spAutoFit/>
+          </a:bodyPr>
+          <a:lstStyle/>
+          <a:p>
+            <a:r>
+              <a:rPr sz="900" b="0">
+                <a:solidFill>
+                  <a:srgbClr val="2B2F36"/>
+                </a:solidFill>
+                <a:latin typeface="微软雅黑"/>
+              </a:rPr>
+              <a:t>误区：崩溃不扣死分，崩溃无预案才扣——兜底体现工程态度</a:t>
+            </a:r>
+          </a:p>
+        </p:txBody>
+      </p:sp>
+      <p:sp>
+        <p:nvSpPr>
+          <p:cNvPr id="51" name="TextBox 50"/>
+          <p:cNvSpPr txBox="1"/>
+          <p:nvPr/>
+        </p:nvSpPr>
+        <p:spPr>
+          <a:xfrm>
+            <a:off x="4334255" y="5349240"/>
+            <a:ext cx="3566160" cy="219456"/>
+          </a:xfrm>
+          <a:prstGeom prst="rect">
+            <a:avLst/>
+          </a:prstGeom>
+          <a:noFill/>
+        </p:spPr>
+        <p:txBody>
+          <a:bodyPr wrap="square">
+            <a:spAutoFit/>
+          </a:bodyPr>
+          <a:lstStyle/>
+          <a:p>
+            <a:r>
+              <a:rPr sz="900" b="1">
+                <a:solidFill>
+                  <a:srgbClr val="2E7D46"/>
+                </a:solidFill>
+                <a:latin typeface="微软雅黑"/>
+              </a:rPr>
+              <a:t>一招破解（记住这句）</a:t>
+            </a:r>
+          </a:p>
+        </p:txBody>
+      </p:sp>
+      <p:sp>
+        <p:nvSpPr>
+          <p:cNvPr id="52" name="TextBox 51"/>
+          <p:cNvSpPr txBox="1"/>
+          <p:nvPr/>
+        </p:nvSpPr>
+        <p:spPr>
+          <a:xfrm>
+            <a:off x="4334255" y="5586984"/>
+            <a:ext cx="3584448" cy="822960"/>
+          </a:xfrm>
+          <a:prstGeom prst="rect">
+            <a:avLst/>
+          </a:prstGeom>
+          <a:noFill/>
+        </p:spPr>
+        <p:txBody>
+          <a:bodyPr wrap="square">
+            <a:spAutoFit/>
+          </a:bodyPr>
+          <a:lstStyle/>
+          <a:p>
+            <a:r>
+              <a:rPr sz="900" b="0">
+                <a:solidFill>
+                  <a:srgbClr val="2B2F36"/>
+                </a:solidFill>
+                <a:latin typeface="微软雅黑"/>
+              </a:rPr>
+              <a:t>bad-case预案=答辩灭火器：评委必点脏数据，提前备好</a:t>
+            </a:r>
+          </a:p>
+        </p:txBody>
+      </p:sp>
+      <p:sp>
+        <p:nvSpPr>
+          <p:cNvPr id="53" name="TextBox 52"/>
+          <p:cNvSpPr txBox="1"/>
+          <p:nvPr/>
+        </p:nvSpPr>
+        <p:spPr>
+          <a:xfrm>
+            <a:off x="8010143" y="5349240"/>
+            <a:ext cx="3566160" cy="219456"/>
+          </a:xfrm>
+          <a:prstGeom prst="rect">
+            <a:avLst/>
+          </a:prstGeom>
+          <a:noFill/>
+        </p:spPr>
+        <p:txBody>
+          <a:bodyPr wrap="square">
+            <a:spAutoFit/>
+          </a:bodyPr>
+          <a:lstStyle/>
+          <a:p>
+            <a:r>
+              <a:rPr sz="900" b="1">
+                <a:solidFill>
+                  <a:srgbClr val="35506E"/>
+                </a:solidFill>
+                <a:latin typeface="微软雅黑"/>
+              </a:rPr>
+              <a:t>动手验证（照做一遍）</a:t>
+            </a:r>
+          </a:p>
+        </p:txBody>
+      </p:sp>
+      <p:sp>
+        <p:nvSpPr>
+          <p:cNvPr id="54" name="TextBox 53"/>
+          <p:cNvSpPr txBox="1"/>
+          <p:nvPr/>
+        </p:nvSpPr>
+        <p:spPr>
+          <a:xfrm>
+            <a:off x="8010143" y="5586984"/>
+            <a:ext cx="3584448" cy="822960"/>
+          </a:xfrm>
+          <a:prstGeom prst="rect">
+            <a:avLst/>
+          </a:prstGeom>
+          <a:noFill/>
+        </p:spPr>
+        <p:txBody>
+          <a:bodyPr wrap="square">
+            <a:spAutoFit/>
+          </a:bodyPr>
+          <a:lstStyle/>
+          <a:p>
+            <a:r>
+              <a:rPr sz="900" b="0">
+                <a:solidFill>
+                  <a:srgbClr val="2B2F36"/>
+                </a:solidFill>
+                <a:latin typeface="微软雅黑"/>
+              </a:rPr>
+              <a:t>预演评委可能的刁钻输入——温度=abc不能崩 输入'温度=abc'→友好报错并提示重输</a:t>
             </a:r>
           </a:p>
         </p:txBody>
@@ -11420,7 +11475,7 @@
         <p:spPr>
           <a:xfrm>
             <a:off x="0" y="0"/>
-            <a:ext cx="12192000" cy="6858000"/>
+            <a:ext cx="12192000" cy="1150000"/>
           </a:xfrm>
           <a:prstGeom prst="rect">
             <a:avLst/>
@@ -11463,8 +11518,8 @@
         </p:nvSpPr>
         <p:spPr>
           <a:xfrm>
-            <a:off x="0" y="2880360"/>
-            <a:ext cx="12192000" cy="50000"/>
+            <a:off x="0" y="1150000"/>
+            <a:ext cx="2600000" cy="70000"/>
           </a:xfrm>
           <a:prstGeom prst="rect">
             <a:avLst/>
@@ -11507,8 +11562,8 @@
         </p:nvSpPr>
         <p:spPr>
           <a:xfrm>
-            <a:off x="0" y="1645920"/>
-            <a:ext cx="12192000" cy="1500000"/>
+            <a:off x="700000" y="300000"/>
+            <a:ext cx="10792000" cy="700000"/>
           </a:xfrm>
           <a:prstGeom prst="rect">
             <a:avLst/>
@@ -11516,12 +11571,12 @@
           <a:noFill/>
         </p:spPr>
         <p:txBody>
-          <a:bodyPr wrap="square" anchor="t">
+          <a:bodyPr wrap="square" anchor="ctr">
             <a:spAutoFit/>
           </a:bodyPr>
           <a:lstStyle/>
           <a:p>
-            <a:pPr algn="ctr">
+            <a:pPr algn="l">
               <a:lnSpc>
                 <a:spcPct val="110000"/>
               </a:lnSpc>
@@ -11530,27 +11585,71 @@
               </a:spcAft>
             </a:pPr>
             <a:r>
-              <a:rPr sz="5400" b="1">
+              <a:rPr sz="2400" b="1">
                 <a:solidFill>
                   <a:srgbClr val="FFFFFF"/>
                 </a:solidFill>
                 <a:latin typeface="微软雅黑"/>
               </a:rPr>
-              <a:t>THANKS</a:t>
-            </a:r>
-          </a:p>
-        </p:txBody>
-      </p:sp>
-      <p:sp>
-        <p:nvSpPr>
-          <p:cNvPr id="5" name="TextBox 4"/>
+              <a:t>承上启下 · 动手前避坑清单</a:t>
+            </a:r>
+          </a:p>
+        </p:txBody>
+      </p:sp>
+      <p:sp>
+        <p:nvSpPr>
+          <p:cNvPr id="24" name="Rectangle 23"/>
+          <p:cNvSpPr/>
+          <p:nvPr/>
+        </p:nvSpPr>
+        <p:spPr>
+          <a:xfrm>
+            <a:off x="500000" y="6500000"/>
+            <a:ext cx="11100000" cy="20000"/>
+          </a:xfrm>
+          <a:prstGeom prst="rect">
+            <a:avLst/>
+          </a:prstGeom>
+          <a:solidFill>
+            <a:srgbClr val="C9D4EE"/>
+          </a:solidFill>
+          <a:ln>
+            <a:noFill/>
+          </a:ln>
+          <a:effectLst/>
+        </p:spPr>
+        <p:style>
+          <a:lnRef idx="1">
+            <a:schemeClr val="accent1"/>
+          </a:lnRef>
+          <a:fillRef idx="3">
+            <a:schemeClr val="accent1"/>
+          </a:fillRef>
+          <a:effectRef idx="2">
+            <a:schemeClr val="accent1"/>
+          </a:effectRef>
+          <a:fontRef idx="minor">
+            <a:schemeClr val="lt1"/>
+          </a:fontRef>
+        </p:style>
+        <p:txBody>
+          <a:bodyPr rtlCol="0" anchor="ctr"/>
+          <a:lstStyle/>
+          <a:p>
+            <a:pPr algn="ctr"/>
+          </a:p>
+        </p:txBody>
+      </p:sp>
+      <p:sp>
+        <p:nvSpPr>
+          <p:cNvPr id="25" name="TextBox 24"/>
           <p:cNvSpPr txBox="1"/>
           <p:nvPr/>
         </p:nvSpPr>
         <p:spPr>
           <a:xfrm>
-            <a:off x="0" y="3429000"/>
-            <a:ext cx="12192000" cy="800000"/>
+            <a:off x="500000" y="6540000"/>
+            <a:ext cx="7000000" cy="300000"/>
           </a:xfrm>
           <a:prstGeom prst="rect">
             <a:avLst/>
@@ -11563,7 +11662,7 @@
           </a:bodyPr>
           <a:lstStyle/>
           <a:p>
-            <a:pPr algn="ctr">
+            <a:pPr algn="l">
               <a:lnSpc>
                 <a:spcPct val="110000"/>
               </a:lnSpc>
@@ -11572,27 +11671,27 @@
               </a:spcAft>
             </a:pPr>
             <a:r>
-              <a:rPr sz="2200" b="1">
-                <a:solidFill>
-                  <a:srgbClr val="F5670F"/>
-                </a:solidFill>
-                <a:latin typeface="微软雅黑"/>
-              </a:rPr>
-              <a:t>感谢聆听 · 动手实践出真知</a:t>
-            </a:r>
-          </a:p>
-        </p:txBody>
-      </p:sp>
-      <p:sp>
-        <p:nvSpPr>
-          <p:cNvPr id="6" name="TextBox 5"/>
+              <a:rPr sz="1000" b="0">
+                <a:solidFill>
+                  <a:srgbClr val="8A97B5"/>
+                </a:solidFill>
+                <a:latin typeface="微软雅黑"/>
+              </a:rPr>
+              <a:t>两江智造集团 · Python编程基础</a:t>
+            </a:r>
+          </a:p>
+        </p:txBody>
+      </p:sp>
+      <p:sp>
+        <p:nvSpPr>
+          <p:cNvPr id="26" name="TextBox 25"/>
           <p:cNvSpPr txBox="1"/>
           <p:nvPr/>
         </p:nvSpPr>
         <p:spPr>
           <a:xfrm>
-            <a:off x="0" y="4526280"/>
-            <a:ext cx="12192000" cy="600000"/>
+            <a:off x="10600000" y="6540000"/>
+            <a:ext cx="1000000" cy="300000"/>
           </a:xfrm>
           <a:prstGeom prst="rect">
             <a:avLst/>
@@ -11605,7 +11704,7 @@
           </a:bodyPr>
           <a:lstStyle/>
           <a:p>
-            <a:pPr algn="ctr">
+            <a:pPr algn="r">
               <a:lnSpc>
                 <a:spcPct val="110000"/>
               </a:lnSpc>
@@ -11614,13 +11713,588 @@
               </a:spcAft>
             </a:pPr>
             <a:r>
-              <a:rPr sz="1400" b="0">
-                <a:solidFill>
-                  <a:srgbClr val="BBC6E6"/>
-                </a:solidFill>
-                <a:latin typeface="微软雅黑"/>
-              </a:rPr>
-              <a:t>以生为本   |   做中学 · 学中做</a:t>
+              <a:rPr sz="1000" b="0">
+                <a:solidFill>
+                  <a:srgbClr val="8A97B5"/>
+                </a:solidFill>
+                <a:latin typeface="微软雅黑"/>
+              </a:rPr>
+              <a:t>8 / 15</a:t>
+            </a:r>
+          </a:p>
+        </p:txBody>
+      </p:sp>
+      <p:sp>
+        <p:nvSpPr>
+          <p:cNvPr id="27" name="TextBox 26"/>
+          <p:cNvSpPr txBox="1"/>
+          <p:nvPr/>
+        </p:nvSpPr>
+        <p:spPr>
+          <a:xfrm>
+            <a:off x="457200" y="1389888"/>
+            <a:ext cx="11274552" cy="274320"/>
+          </a:xfrm>
+          <a:prstGeom prst="rect">
+            <a:avLst/>
+          </a:prstGeom>
+          <a:noFill/>
+        </p:spPr>
+        <p:txBody>
+          <a:bodyPr wrap="square">
+            <a:spAutoFit/>
+          </a:bodyPr>
+          <a:lstStyle/>
+          <a:p>
+            <a:r>
+              <a:rPr sz="1050" b="0">
+                <a:solidFill>
+                  <a:srgbClr val="6B7280"/>
+                </a:solidFill>
+                <a:latin typeface="微软雅黑"/>
+              </a:rPr>
+              <a:t>本讲是动手冲刺课：先把上周完整讲解里的高频翻车点过一遍，再开工——每条都是历届学生真实踩过的坑。</a:t>
+            </a:r>
+          </a:p>
+        </p:txBody>
+      </p:sp>
+      <p:sp>
+        <p:nvSpPr>
+          <p:cNvPr id="28" name="Rectangle 27"/>
+          <p:cNvSpPr/>
+          <p:nvPr/>
+        </p:nvSpPr>
+        <p:spPr>
+          <a:xfrm>
+            <a:off x="457200" y="1783080"/>
+            <a:ext cx="5532120" cy="2061972"/>
+          </a:xfrm>
+          <a:prstGeom prst="rect">
+            <a:avLst/>
+          </a:prstGeom>
+          <a:solidFill>
+            <a:srgbClr val="FFFFFF"/>
+          </a:solidFill>
+          <a:ln>
+            <a:solidFill>
+              <a:srgbClr val="D6DCE4"/>
+            </a:solidFill>
+          </a:ln>
+          <a:effectLst/>
+        </p:spPr>
+        <p:style>
+          <a:lnRef idx="1">
+            <a:schemeClr val="accent1"/>
+          </a:lnRef>
+          <a:fillRef idx="3">
+            <a:schemeClr val="accent1"/>
+          </a:fillRef>
+          <a:effectRef idx="2">
+            <a:schemeClr val="accent1"/>
+          </a:effectRef>
+          <a:fontRef idx="minor">
+            <a:schemeClr val="lt1"/>
+          </a:fontRef>
+        </p:style>
+        <p:txBody>
+          <a:bodyPr rtlCol="0" anchor="ctr" wrap="square"/>
+          <a:lstStyle/>
+          <a:p>
+            <a:pPr algn="ctr"/>
+          </a:p>
+        </p:txBody>
+      </p:sp>
+      <p:sp>
+        <p:nvSpPr>
+          <p:cNvPr id="29" name="Rectangle 28"/>
+          <p:cNvSpPr/>
+          <p:nvPr/>
+        </p:nvSpPr>
+        <p:spPr>
+          <a:xfrm>
+            <a:off x="457200" y="1783080"/>
+            <a:ext cx="82296" cy="2061972"/>
+          </a:xfrm>
+          <a:prstGeom prst="rect">
+            <a:avLst/>
+          </a:prstGeom>
+          <a:solidFill>
+            <a:srgbClr val="9A3B3B"/>
+          </a:solidFill>
+          <a:ln>
+            <a:noFill/>
+          </a:ln>
+          <a:effectLst/>
+        </p:spPr>
+        <p:style>
+          <a:lnRef idx="1">
+            <a:schemeClr val="accent1"/>
+          </a:lnRef>
+          <a:fillRef idx="3">
+            <a:schemeClr val="accent1"/>
+          </a:fillRef>
+          <a:effectRef idx="2">
+            <a:schemeClr val="accent1"/>
+          </a:effectRef>
+          <a:fontRef idx="minor">
+            <a:schemeClr val="lt1"/>
+          </a:fontRef>
+        </p:style>
+        <p:txBody>
+          <a:bodyPr rtlCol="0" anchor="ctr" wrap="square"/>
+          <a:lstStyle/>
+          <a:p>
+            <a:pPr algn="ctr"/>
+          </a:p>
+        </p:txBody>
+      </p:sp>
+      <p:sp>
+        <p:nvSpPr>
+          <p:cNvPr id="30" name="TextBox 29"/>
+          <p:cNvSpPr txBox="1"/>
+          <p:nvPr/>
+        </p:nvSpPr>
+        <p:spPr>
+          <a:xfrm>
+            <a:off x="658368" y="1847088"/>
+            <a:ext cx="5166359" cy="274320"/>
+          </a:xfrm>
+          <a:prstGeom prst="rect">
+            <a:avLst/>
+          </a:prstGeom>
+          <a:noFill/>
+        </p:spPr>
+        <p:txBody>
+          <a:bodyPr wrap="square">
+            <a:spAutoFit/>
+          </a:bodyPr>
+          <a:lstStyle/>
+          <a:p>
+            <a:r>
+              <a:rPr sz="1050" b="1">
+                <a:solidFill>
+                  <a:srgbClr val="B5533A"/>
+                </a:solidFill>
+                <a:latin typeface="微软雅黑"/>
+              </a:rPr>
+              <a:t>✗ 现场装依赖</a:t>
+            </a:r>
+          </a:p>
+        </p:txBody>
+      </p:sp>
+      <p:sp>
+        <p:nvSpPr>
+          <p:cNvPr id="31" name="TextBox 30"/>
+          <p:cNvSpPr txBox="1"/>
+          <p:nvPr/>
+        </p:nvSpPr>
+        <p:spPr>
+          <a:xfrm>
+            <a:off x="658368" y="2167128"/>
+            <a:ext cx="5166359" cy="868680"/>
+          </a:xfrm>
+          <a:prstGeom prst="rect">
+            <a:avLst/>
+          </a:prstGeom>
+          <a:noFill/>
+        </p:spPr>
+        <p:txBody>
+          <a:bodyPr wrap="square">
+            <a:spAutoFit/>
+          </a:bodyPr>
+          <a:lstStyle/>
+          <a:p>
+            <a:r>
+              <a:rPr sz="900" b="0">
+                <a:solidFill>
+                  <a:srgbClr val="2B2F36"/>
+                </a:solidFill>
+                <a:latin typeface="微软雅黑"/>
+              </a:rPr>
+              <a:t>原因：没提前试跑</a:t>
+            </a:r>
+          </a:p>
+          <a:p>
+            <a:r>
+              <a:rPr sz="900" b="0">
+                <a:solidFill>
+                  <a:srgbClr val="2B2F36"/>
+                </a:solidFill>
+                <a:latin typeface="微软雅黑"/>
+              </a:rPr>
+              <a:t>✔ 解决：答辩机预演</a:t>
+            </a:r>
+          </a:p>
+        </p:txBody>
+      </p:sp>
+      <p:sp>
+        <p:nvSpPr>
+          <p:cNvPr id="32" name="Rectangle 31"/>
+          <p:cNvSpPr/>
+          <p:nvPr/>
+        </p:nvSpPr>
+        <p:spPr>
+          <a:xfrm>
+            <a:off x="6199632" y="1783080"/>
+            <a:ext cx="5532120" cy="2061972"/>
+          </a:xfrm>
+          <a:prstGeom prst="rect">
+            <a:avLst/>
+          </a:prstGeom>
+          <a:solidFill>
+            <a:srgbClr val="FFFFFF"/>
+          </a:solidFill>
+          <a:ln>
+            <a:solidFill>
+              <a:srgbClr val="D6DCE4"/>
+            </a:solidFill>
+          </a:ln>
+          <a:effectLst/>
+        </p:spPr>
+        <p:style>
+          <a:lnRef idx="1">
+            <a:schemeClr val="accent1"/>
+          </a:lnRef>
+          <a:fillRef idx="3">
+            <a:schemeClr val="accent1"/>
+          </a:fillRef>
+          <a:effectRef idx="2">
+            <a:schemeClr val="accent1"/>
+          </a:effectRef>
+          <a:fontRef idx="minor">
+            <a:schemeClr val="lt1"/>
+          </a:fontRef>
+        </p:style>
+        <p:txBody>
+          <a:bodyPr rtlCol="0" anchor="ctr" wrap="square"/>
+          <a:lstStyle/>
+          <a:p>
+            <a:pPr algn="ctr"/>
+          </a:p>
+        </p:txBody>
+      </p:sp>
+      <p:sp>
+        <p:nvSpPr>
+          <p:cNvPr id="33" name="Rectangle 32"/>
+          <p:cNvSpPr/>
+          <p:nvPr/>
+        </p:nvSpPr>
+        <p:spPr>
+          <a:xfrm>
+            <a:off x="6199632" y="1783080"/>
+            <a:ext cx="82296" cy="2061972"/>
+          </a:xfrm>
+          <a:prstGeom prst="rect">
+            <a:avLst/>
+          </a:prstGeom>
+          <a:solidFill>
+            <a:srgbClr val="9A3B3B"/>
+          </a:solidFill>
+          <a:ln>
+            <a:noFill/>
+          </a:ln>
+          <a:effectLst/>
+        </p:spPr>
+        <p:style>
+          <a:lnRef idx="1">
+            <a:schemeClr val="accent1"/>
+          </a:lnRef>
+          <a:fillRef idx="3">
+            <a:schemeClr val="accent1"/>
+          </a:fillRef>
+          <a:effectRef idx="2">
+            <a:schemeClr val="accent1"/>
+          </a:effectRef>
+          <a:fontRef idx="minor">
+            <a:schemeClr val="lt1"/>
+          </a:fontRef>
+        </p:style>
+        <p:txBody>
+          <a:bodyPr rtlCol="0" anchor="ctr" wrap="square"/>
+          <a:lstStyle/>
+          <a:p>
+            <a:pPr algn="ctr"/>
+          </a:p>
+        </p:txBody>
+      </p:sp>
+      <p:sp>
+        <p:nvSpPr>
+          <p:cNvPr id="34" name="TextBox 33"/>
+          <p:cNvSpPr txBox="1"/>
+          <p:nvPr/>
+        </p:nvSpPr>
+        <p:spPr>
+          <a:xfrm>
+            <a:off x="6400800" y="1847088"/>
+            <a:ext cx="5166359" cy="274320"/>
+          </a:xfrm>
+          <a:prstGeom prst="rect">
+            <a:avLst/>
+          </a:prstGeom>
+          <a:noFill/>
+        </p:spPr>
+        <p:txBody>
+          <a:bodyPr wrap="square">
+            <a:spAutoFit/>
+          </a:bodyPr>
+          <a:lstStyle/>
+          <a:p>
+            <a:r>
+              <a:rPr sz="1050" b="1">
+                <a:solidFill>
+                  <a:srgbClr val="B5533A"/>
+                </a:solidFill>
+                <a:latin typeface="微软雅黑"/>
+              </a:rPr>
+              <a:t>✗ 只讲不演示</a:t>
+            </a:r>
+          </a:p>
+        </p:txBody>
+      </p:sp>
+      <p:sp>
+        <p:nvSpPr>
+          <p:cNvPr id="35" name="TextBox 34"/>
+          <p:cNvSpPr txBox="1"/>
+          <p:nvPr/>
+        </p:nvSpPr>
+        <p:spPr>
+          <a:xfrm>
+            <a:off x="6400800" y="2167128"/>
+            <a:ext cx="5166359" cy="868680"/>
+          </a:xfrm>
+          <a:prstGeom prst="rect">
+            <a:avLst/>
+          </a:prstGeom>
+          <a:noFill/>
+        </p:spPr>
+        <p:txBody>
+          <a:bodyPr wrap="square">
+            <a:spAutoFit/>
+          </a:bodyPr>
+          <a:lstStyle/>
+          <a:p>
+            <a:r>
+              <a:rPr sz="900" b="0">
+                <a:solidFill>
+                  <a:srgbClr val="2B2F36"/>
+                </a:solidFill>
+                <a:latin typeface="微软雅黑"/>
+              </a:rPr>
+              <a:t>原因：空谈</a:t>
+            </a:r>
+          </a:p>
+          <a:p>
+            <a:r>
+              <a:rPr sz="900" b="0">
+                <a:solidFill>
+                  <a:srgbClr val="2B2F36"/>
+                </a:solidFill>
+                <a:latin typeface="微软雅黑"/>
+              </a:rPr>
+              <a:t>✔ 解决：必须现场运行</a:t>
+            </a:r>
+          </a:p>
+        </p:txBody>
+      </p:sp>
+      <p:sp>
+        <p:nvSpPr>
+          <p:cNvPr id="36" name="Rectangle 35"/>
+          <p:cNvSpPr/>
+          <p:nvPr/>
+        </p:nvSpPr>
+        <p:spPr>
+          <a:xfrm>
+            <a:off x="457200" y="3973068"/>
+            <a:ext cx="5532120" cy="2061972"/>
+          </a:xfrm>
+          <a:prstGeom prst="rect">
+            <a:avLst/>
+          </a:prstGeom>
+          <a:solidFill>
+            <a:srgbClr val="FFFFFF"/>
+          </a:solidFill>
+          <a:ln>
+            <a:solidFill>
+              <a:srgbClr val="D6DCE4"/>
+            </a:solidFill>
+          </a:ln>
+          <a:effectLst/>
+        </p:spPr>
+        <p:style>
+          <a:lnRef idx="1">
+            <a:schemeClr val="accent1"/>
+          </a:lnRef>
+          <a:fillRef idx="3">
+            <a:schemeClr val="accent1"/>
+          </a:fillRef>
+          <a:effectRef idx="2">
+            <a:schemeClr val="accent1"/>
+          </a:effectRef>
+          <a:fontRef idx="minor">
+            <a:schemeClr val="lt1"/>
+          </a:fontRef>
+        </p:style>
+        <p:txBody>
+          <a:bodyPr rtlCol="0" anchor="ctr" wrap="square"/>
+          <a:lstStyle/>
+          <a:p>
+            <a:pPr algn="ctr"/>
+          </a:p>
+        </p:txBody>
+      </p:sp>
+      <p:sp>
+        <p:nvSpPr>
+          <p:cNvPr id="37" name="Rectangle 36"/>
+          <p:cNvSpPr/>
+          <p:nvPr/>
+        </p:nvSpPr>
+        <p:spPr>
+          <a:xfrm>
+            <a:off x="457200" y="3973068"/>
+            <a:ext cx="82296" cy="2061972"/>
+          </a:xfrm>
+          <a:prstGeom prst="rect">
+            <a:avLst/>
+          </a:prstGeom>
+          <a:solidFill>
+            <a:srgbClr val="9A3B3B"/>
+          </a:solidFill>
+          <a:ln>
+            <a:noFill/>
+          </a:ln>
+          <a:effectLst/>
+        </p:spPr>
+        <p:style>
+          <a:lnRef idx="1">
+            <a:schemeClr val="accent1"/>
+          </a:lnRef>
+          <a:fillRef idx="3">
+            <a:schemeClr val="accent1"/>
+          </a:fillRef>
+          <a:effectRef idx="2">
+            <a:schemeClr val="accent1"/>
+          </a:effectRef>
+          <a:fontRef idx="minor">
+            <a:schemeClr val="lt1"/>
+          </a:fontRef>
+        </p:style>
+        <p:txBody>
+          <a:bodyPr rtlCol="0" anchor="ctr" wrap="square"/>
+          <a:lstStyle/>
+          <a:p>
+            <a:pPr algn="ctr"/>
+          </a:p>
+        </p:txBody>
+      </p:sp>
+      <p:sp>
+        <p:nvSpPr>
+          <p:cNvPr id="38" name="TextBox 37"/>
+          <p:cNvSpPr txBox="1"/>
+          <p:nvPr/>
+        </p:nvSpPr>
+        <p:spPr>
+          <a:xfrm>
+            <a:off x="658368" y="4037076"/>
+            <a:ext cx="5166359" cy="274320"/>
+          </a:xfrm>
+          <a:prstGeom prst="rect">
+            <a:avLst/>
+          </a:prstGeom>
+          <a:noFill/>
+        </p:spPr>
+        <p:txBody>
+          <a:bodyPr wrap="square">
+            <a:spAutoFit/>
+          </a:bodyPr>
+          <a:lstStyle/>
+          <a:p>
+            <a:r>
+              <a:rPr sz="1050" b="1">
+                <a:solidFill>
+                  <a:srgbClr val="B5533A"/>
+                </a:solidFill>
+                <a:latin typeface="微软雅黑"/>
+              </a:rPr>
+              <a:t>✗ 超时</a:t>
+            </a:r>
+          </a:p>
+        </p:txBody>
+      </p:sp>
+      <p:sp>
+        <p:nvSpPr>
+          <p:cNvPr id="39" name="TextBox 38"/>
+          <p:cNvSpPr txBox="1"/>
+          <p:nvPr/>
+        </p:nvSpPr>
+        <p:spPr>
+          <a:xfrm>
+            <a:off x="658368" y="4357116"/>
+            <a:ext cx="5166359" cy="868680"/>
+          </a:xfrm>
+          <a:prstGeom prst="rect">
+            <a:avLst/>
+          </a:prstGeom>
+          <a:noFill/>
+        </p:spPr>
+        <p:txBody>
+          <a:bodyPr wrap="square">
+            <a:spAutoFit/>
+          </a:bodyPr>
+          <a:lstStyle/>
+          <a:p>
+            <a:r>
+              <a:rPr sz="900" b="0">
+                <a:solidFill>
+                  <a:srgbClr val="2B2F36"/>
+                </a:solidFill>
+                <a:latin typeface="微软雅黑"/>
+              </a:rPr>
+              <a:t>原因：没掐表</a:t>
+            </a:r>
+          </a:p>
+          <a:p>
+            <a:r>
+              <a:rPr sz="900" b="0">
+                <a:solidFill>
+                  <a:srgbClr val="2B2F36"/>
+                </a:solidFill>
+                <a:latin typeface="微软雅黑"/>
+              </a:rPr>
+              <a:t>✔ 解决：按5+3彩排两遍</a:t>
+            </a:r>
+          </a:p>
+        </p:txBody>
+      </p:sp>
+      <p:sp>
+        <p:nvSpPr>
+          <p:cNvPr id="40" name="TextBox 39"/>
+          <p:cNvSpPr txBox="1"/>
+          <p:nvPr/>
+        </p:nvSpPr>
+        <p:spPr>
+          <a:xfrm>
+            <a:off x="457200" y="6281928"/>
+            <a:ext cx="9601200" cy="182880"/>
+          </a:xfrm>
+          <a:prstGeom prst="rect">
+            <a:avLst/>
+          </a:prstGeom>
+          <a:noFill/>
+        </p:spPr>
+        <p:txBody>
+          <a:bodyPr wrap="square">
+            <a:spAutoFit/>
+          </a:bodyPr>
+          <a:lstStyle/>
+          <a:p>
+            <a:r>
+              <a:rPr sz="900" b="0">
+                <a:solidFill>
+                  <a:srgbClr val="6B7280"/>
+                </a:solidFill>
+                <a:latin typeface="微软雅黑"/>
+              </a:rPr>
+              <a:t>素材来源：同周《第23次课-项目终验联调与预答辩》知识卡与避坑清单（逐字摘录）</a:t>
             </a:r>
           </a:p>
         </p:txBody>
@@ -11645,14 +12319,102 @@
       <p:grpSpPr/>
       <p:sp>
         <p:nvSpPr>
-          <p:cNvPr id="2" name="TextBox 1"/>
+          <p:cNvPr id="2" name="Rectangle 1"/>
+          <p:cNvSpPr/>
+          <p:nvPr/>
+        </p:nvSpPr>
+        <p:spPr>
+          <a:xfrm>
+            <a:off x="0" y="0"/>
+            <a:ext cx="12192000" cy="1150000"/>
+          </a:xfrm>
+          <a:prstGeom prst="rect">
+            <a:avLst/>
+          </a:prstGeom>
+          <a:solidFill>
+            <a:srgbClr val="010328"/>
+          </a:solidFill>
+          <a:ln>
+            <a:noFill/>
+          </a:ln>
+          <a:effectLst/>
+        </p:spPr>
+        <p:style>
+          <a:lnRef idx="1">
+            <a:schemeClr val="accent1"/>
+          </a:lnRef>
+          <a:fillRef idx="3">
+            <a:schemeClr val="accent1"/>
+          </a:fillRef>
+          <a:effectRef idx="2">
+            <a:schemeClr val="accent1"/>
+          </a:effectRef>
+          <a:fontRef idx="minor">
+            <a:schemeClr val="lt1"/>
+          </a:fontRef>
+        </p:style>
+        <p:txBody>
+          <a:bodyPr rtlCol="0" anchor="ctr"/>
+          <a:lstStyle/>
+          <a:p>
+            <a:pPr algn="ctr"/>
+          </a:p>
+        </p:txBody>
+      </p:sp>
+      <p:sp>
+        <p:nvSpPr>
+          <p:cNvPr id="3" name="Rectangle 2"/>
+          <p:cNvSpPr/>
+          <p:nvPr/>
+        </p:nvSpPr>
+        <p:spPr>
+          <a:xfrm>
+            <a:off x="0" y="1150000"/>
+            <a:ext cx="2600000" cy="70000"/>
+          </a:xfrm>
+          <a:prstGeom prst="rect">
+            <a:avLst/>
+          </a:prstGeom>
+          <a:solidFill>
+            <a:srgbClr val="F5670F"/>
+          </a:solidFill>
+          <a:ln>
+            <a:noFill/>
+          </a:ln>
+          <a:effectLst/>
+        </p:spPr>
+        <p:style>
+          <a:lnRef idx="1">
+            <a:schemeClr val="accent1"/>
+          </a:lnRef>
+          <a:fillRef idx="3">
+            <a:schemeClr val="accent1"/>
+          </a:fillRef>
+          <a:effectRef idx="2">
+            <a:schemeClr val="accent1"/>
+          </a:effectRef>
+          <a:fontRef idx="minor">
+            <a:schemeClr val="lt1"/>
+          </a:fontRef>
+        </p:style>
+        <p:txBody>
+          <a:bodyPr rtlCol="0" anchor="ctr"/>
+          <a:lstStyle/>
+          <a:p>
+            <a:pPr algn="ctr"/>
+          </a:p>
+        </p:txBody>
+      </p:sp>
+      <p:sp>
+        <p:nvSpPr>
+          <p:cNvPr id="4" name="TextBox 3"/>
           <p:cNvSpPr txBox="1"/>
           <p:nvPr/>
         </p:nvSpPr>
         <p:spPr>
           <a:xfrm>
-            <a:off x="548640" y="320040"/>
-            <a:ext cx="11094720" cy="914400"/>
+            <a:off x="700000" y="300000"/>
+            <a:ext cx="10792000" cy="700000"/>
           </a:xfrm>
           <a:prstGeom prst="rect">
             <a:avLst/>
@@ -11660,28 +12422,169 @@
           <a:noFill/>
         </p:spPr>
         <p:txBody>
-          <a:bodyPr wrap="none">
+          <a:bodyPr wrap="square" anchor="ctr">
             <a:spAutoFit/>
           </a:bodyPr>
           <a:lstStyle/>
           <a:p>
-            <a:r>
-              <a:rPr sz="3000" b="1"/>
-              <a:t>本任务六步法导航</a:t>
-            </a:r>
-          </a:p>
-        </p:txBody>
-      </p:sp>
-      <p:sp>
-        <p:nvSpPr>
-          <p:cNvPr id="3" name="TextBox 2"/>
+            <a:pPr algn="l">
+              <a:lnSpc>
+                <a:spcPct val="110000"/>
+              </a:lnSpc>
+              <a:spcAft>
+                <a:spcPts val="600"/>
+              </a:spcAft>
+            </a:pPr>
+            <a:r>
+              <a:rPr sz="2400" b="1">
+                <a:solidFill>
+                  <a:srgbClr val="FFFFFF"/>
+                </a:solidFill>
+                <a:latin typeface="微软雅黑"/>
+              </a:rPr>
+              <a:t>本课知识速览卡 · 边做边对照</a:t>
+            </a:r>
+          </a:p>
+        </p:txBody>
+      </p:sp>
+      <p:sp>
+        <p:nvSpPr>
+          <p:cNvPr id="24" name="Rectangle 23"/>
+          <p:cNvSpPr/>
+          <p:nvPr/>
+        </p:nvSpPr>
+        <p:spPr>
+          <a:xfrm>
+            <a:off x="500000" y="6500000"/>
+            <a:ext cx="11100000" cy="20000"/>
+          </a:xfrm>
+          <a:prstGeom prst="rect">
+            <a:avLst/>
+          </a:prstGeom>
+          <a:solidFill>
+            <a:srgbClr val="C9D4EE"/>
+          </a:solidFill>
+          <a:ln>
+            <a:noFill/>
+          </a:ln>
+          <a:effectLst/>
+        </p:spPr>
+        <p:style>
+          <a:lnRef idx="1">
+            <a:schemeClr val="accent1"/>
+          </a:lnRef>
+          <a:fillRef idx="3">
+            <a:schemeClr val="accent1"/>
+          </a:fillRef>
+          <a:effectRef idx="2">
+            <a:schemeClr val="accent1"/>
+          </a:effectRef>
+          <a:fontRef idx="minor">
+            <a:schemeClr val="lt1"/>
+          </a:fontRef>
+        </p:style>
+        <p:txBody>
+          <a:bodyPr rtlCol="0" anchor="ctr"/>
+          <a:lstStyle/>
+          <a:p>
+            <a:pPr algn="ctr"/>
+          </a:p>
+        </p:txBody>
+      </p:sp>
+      <p:sp>
+        <p:nvSpPr>
+          <p:cNvPr id="25" name="TextBox 24"/>
           <p:cNvSpPr txBox="1"/>
           <p:nvPr/>
         </p:nvSpPr>
         <p:spPr>
           <a:xfrm>
-            <a:off x="731520" y="1371600"/>
-            <a:ext cx="10728960" cy="4663440"/>
+            <a:off x="500000" y="6540000"/>
+            <a:ext cx="7000000" cy="300000"/>
+          </a:xfrm>
+          <a:prstGeom prst="rect">
+            <a:avLst/>
+          </a:prstGeom>
+          <a:noFill/>
+        </p:spPr>
+        <p:txBody>
+          <a:bodyPr wrap="square" anchor="t">
+            <a:spAutoFit/>
+          </a:bodyPr>
+          <a:lstStyle/>
+          <a:p>
+            <a:pPr algn="l">
+              <a:lnSpc>
+                <a:spcPct val="110000"/>
+              </a:lnSpc>
+              <a:spcAft>
+                <a:spcPts val="600"/>
+              </a:spcAft>
+            </a:pPr>
+            <a:r>
+              <a:rPr sz="1000" b="0">
+                <a:solidFill>
+                  <a:srgbClr val="8A97B5"/>
+                </a:solidFill>
+                <a:latin typeface="微软雅黑"/>
+              </a:rPr>
+              <a:t>两江智造集团 · Python编程基础</a:t>
+            </a:r>
+          </a:p>
+        </p:txBody>
+      </p:sp>
+      <p:sp>
+        <p:nvSpPr>
+          <p:cNvPr id="26" name="TextBox 25"/>
+          <p:cNvSpPr txBox="1"/>
+          <p:nvPr/>
+        </p:nvSpPr>
+        <p:spPr>
+          <a:xfrm>
+            <a:off x="10600000" y="6540000"/>
+            <a:ext cx="1000000" cy="300000"/>
+          </a:xfrm>
+          <a:prstGeom prst="rect">
+            <a:avLst/>
+          </a:prstGeom>
+          <a:noFill/>
+        </p:spPr>
+        <p:txBody>
+          <a:bodyPr wrap="square" anchor="t">
+            <a:spAutoFit/>
+          </a:bodyPr>
+          <a:lstStyle/>
+          <a:p>
+            <a:pPr algn="r">
+              <a:lnSpc>
+                <a:spcPct val="110000"/>
+              </a:lnSpc>
+              <a:spcAft>
+                <a:spcPts val="600"/>
+              </a:spcAft>
+            </a:pPr>
+            <a:r>
+              <a:rPr sz="1000" b="0">
+                <a:solidFill>
+                  <a:srgbClr val="8A97B5"/>
+                </a:solidFill>
+                <a:latin typeface="微软雅黑"/>
+              </a:rPr>
+              <a:t>9 / 15</a:t>
+            </a:r>
+          </a:p>
+        </p:txBody>
+      </p:sp>
+      <p:sp>
+        <p:nvSpPr>
+          <p:cNvPr id="27" name="TextBox 26"/>
+          <p:cNvSpPr txBox="1"/>
+          <p:nvPr/>
+        </p:nvSpPr>
+        <p:spPr>
+          <a:xfrm>
+            <a:off x="457200" y="1389888"/>
+            <a:ext cx="11274552" cy="274320"/>
           </a:xfrm>
           <a:prstGeom prst="rect">
             <a:avLst/>
@@ -11694,47 +12597,610 @@
           </a:bodyPr>
           <a:lstStyle/>
           <a:p>
-            <a:pPr>
-              <a:spcAft>
-                <a:spcPts val="1000"/>
-              </a:spcAft>
-            </a:pPr>
-            <a:r>
-              <a:rPr sz="1800"/>
-              <a:t>六步法：资讯 → 计划 → 决策 → 实施 → 检查 → 评估</a:t>
-            </a:r>
-          </a:p>
-          <a:p>
-            <a:pPr>
-              <a:spcAft>
-                <a:spcPts val="1000"/>
-              </a:spcAft>
-            </a:pPr>
-            <a:r>
-              <a:rPr sz="1800"/>
-              <a:t>本讲对应工单：《程序设计基础》分层任务工单</a:t>
-            </a:r>
-          </a:p>
-          <a:p>
-            <a:pPr>
-              <a:spcAft>
-                <a:spcPts val="1000"/>
-              </a:spcAft>
-            </a:pPr>
-            <a:r>
-              <a:rPr sz="1800"/>
-              <a:t>课堂产出：工单第六节实施记录须当堂填写，含操作前安全打勾与学生本人签字。</a:t>
-            </a:r>
-          </a:p>
-          <a:p>
-            <a:pPr>
-              <a:spcAft>
-                <a:spcPts val="1000"/>
-              </a:spcAft>
-            </a:pPr>
-            <a:r>
-              <a:rPr sz="1800"/>
-              <a:t>课后交付：班组长／操作员／教师三方联签后交回，缺签视为未交付。</a:t>
+            <a:r>
+              <a:rPr sz="1050" b="0">
+                <a:solidFill>
+                  <a:srgbClr val="6B7280"/>
+                </a:solidFill>
+                <a:latin typeface="微软雅黑"/>
+              </a:rPr>
+              <a:t>本讲是动手冲刺课：知识点在完整讲解课已细讲——这页把它们浓缩成一张速览卡，边做边对照。</a:t>
+            </a:r>
+          </a:p>
+        </p:txBody>
+      </p:sp>
+      <p:sp>
+        <p:nvSpPr>
+          <p:cNvPr id="28" name="Rectangle 27"/>
+          <p:cNvSpPr/>
+          <p:nvPr/>
+        </p:nvSpPr>
+        <p:spPr>
+          <a:xfrm>
+            <a:off x="457200" y="1783080"/>
+            <a:ext cx="6309360" cy="4114800"/>
+          </a:xfrm>
+          <a:prstGeom prst="rect">
+            <a:avLst/>
+          </a:prstGeom>
+          <a:solidFill>
+            <a:srgbClr val="FFFFFF"/>
+          </a:solidFill>
+          <a:ln>
+            <a:solidFill>
+              <a:srgbClr val="D6DCE4"/>
+            </a:solidFill>
+          </a:ln>
+          <a:effectLst/>
+        </p:spPr>
+        <p:style>
+          <a:lnRef idx="1">
+            <a:schemeClr val="accent1"/>
+          </a:lnRef>
+          <a:fillRef idx="3">
+            <a:schemeClr val="accent1"/>
+          </a:fillRef>
+          <a:effectRef idx="2">
+            <a:schemeClr val="accent1"/>
+          </a:effectRef>
+          <a:fontRef idx="minor">
+            <a:schemeClr val="lt1"/>
+          </a:fontRef>
+        </p:style>
+        <p:txBody>
+          <a:bodyPr rtlCol="0" anchor="ctr" wrap="square"/>
+          <a:lstStyle/>
+          <a:p>
+            <a:pPr algn="ctr"/>
+          </a:p>
+        </p:txBody>
+      </p:sp>
+      <p:sp>
+        <p:nvSpPr>
+          <p:cNvPr id="29" name="Rectangle 28"/>
+          <p:cNvSpPr/>
+          <p:nvPr/>
+        </p:nvSpPr>
+        <p:spPr>
+          <a:xfrm>
+            <a:off x="457200" y="1783080"/>
+            <a:ext cx="6309360" cy="365760"/>
+          </a:xfrm>
+          <a:prstGeom prst="rect">
+            <a:avLst/>
+          </a:prstGeom>
+          <a:solidFill>
+            <a:srgbClr val="2F5D8C"/>
+          </a:solidFill>
+          <a:ln>
+            <a:noFill/>
+          </a:ln>
+          <a:effectLst/>
+        </p:spPr>
+        <p:style>
+          <a:lnRef idx="1">
+            <a:schemeClr val="accent1"/>
+          </a:lnRef>
+          <a:fillRef idx="3">
+            <a:schemeClr val="accent1"/>
+          </a:fillRef>
+          <a:effectRef idx="2">
+            <a:schemeClr val="accent1"/>
+          </a:effectRef>
+          <a:fontRef idx="minor">
+            <a:schemeClr val="lt1"/>
+          </a:fontRef>
+        </p:style>
+        <p:txBody>
+          <a:bodyPr rtlCol="0" anchor="ctr" wrap="square"/>
+          <a:lstStyle/>
+          <a:p>
+            <a:pPr algn="ctr"/>
+          </a:p>
+        </p:txBody>
+      </p:sp>
+      <p:sp>
+        <p:nvSpPr>
+          <p:cNvPr id="30" name="TextBox 29"/>
+          <p:cNvSpPr txBox="1"/>
+          <p:nvPr/>
+        </p:nvSpPr>
+        <p:spPr>
+          <a:xfrm>
+            <a:off x="566928" y="1819656"/>
+            <a:ext cx="6089904" cy="292608"/>
+          </a:xfrm>
+          <a:prstGeom prst="rect">
+            <a:avLst/>
+          </a:prstGeom>
+          <a:noFill/>
+        </p:spPr>
+        <p:txBody>
+          <a:bodyPr wrap="square">
+            <a:spAutoFit/>
+          </a:bodyPr>
+          <a:lstStyle/>
+          <a:p>
+            <a:r>
+              <a:rPr sz="1150" b="1">
+                <a:solidFill>
+                  <a:srgbClr val="FFFFFF"/>
+                </a:solidFill>
+                <a:latin typeface="微软雅黑"/>
+              </a:rPr>
+              <a:t>知识点速览（逐字摘自同周完整讲解课知识卡）</a:t>
+            </a:r>
+          </a:p>
+        </p:txBody>
+      </p:sp>
+      <p:sp>
+        <p:nvSpPr>
+          <p:cNvPr id="31" name="TextBox 30"/>
+          <p:cNvSpPr txBox="1"/>
+          <p:nvPr/>
+        </p:nvSpPr>
+        <p:spPr>
+          <a:xfrm>
+            <a:off x="621792" y="2267712"/>
+            <a:ext cx="6035040" cy="3474720"/>
+          </a:xfrm>
+          <a:prstGeom prst="rect">
+            <a:avLst/>
+          </a:prstGeom>
+          <a:noFill/>
+        </p:spPr>
+        <p:txBody>
+          <a:bodyPr wrap="square">
+            <a:spAutoFit/>
+          </a:bodyPr>
+          <a:lstStyle/>
+          <a:p>
+            <a:r>
+              <a:rPr sz="950" b="0">
+                <a:solidFill>
+                  <a:srgbClr val="2B2F36"/>
+                </a:solidFill>
+                <a:latin typeface="微软雅黑"/>
+              </a:rPr>
+              <a:t>◆ B01 checklist三清单｜checklist=飞行前检查单：功能/规范/演示逐项打勾</a:t>
+            </a:r>
+          </a:p>
+          <a:p>
+            <a:r>
+              <a:rPr sz="950" b="0">
+                <a:solidFill>
+                  <a:srgbClr val="2B2F36"/>
+                </a:solidFill>
+                <a:latin typeface="微软雅黑"/>
+              </a:rPr>
+              <a:t>◆ B02 答辩四段结构｜四段=时间盒：1分钟分工+5分钟演示+2分钟总结+提问</a:t>
+            </a:r>
+          </a:p>
+          <a:p>
+            <a:r>
+              <a:rPr sz="950" b="0">
+                <a:solidFill>
+                  <a:srgbClr val="2B2F36"/>
+                </a:solidFill>
+                <a:latin typeface="微软雅黑"/>
+              </a:rPr>
+              <a:t>◆ B03 bad-case预案｜bad-case预案=答辩灭火器：评委必点脏数据，提前备好</a:t>
+            </a:r>
+          </a:p>
+          <a:p>
+            <a:r>
+              <a:rPr sz="950" b="0">
+                <a:solidFill>
+                  <a:srgbClr val="2B2F36"/>
+                </a:solidFill>
+                <a:latin typeface="微软雅黑"/>
+              </a:rPr>
+              <a:t>◆ B04 贡献表与Git核对｜贡献表对Git=口头对台账——谁写的代码提交记录说了算</a:t>
+            </a:r>
+          </a:p>
+          <a:p>
+            <a:r>
+              <a:rPr sz="950" b="0">
+                <a:solidFill>
+                  <a:srgbClr val="2B2F36"/>
+                </a:solidFill>
+                <a:latin typeface="微软雅黑"/>
+              </a:rPr>
+              <a:t>◆ B05 个人问责制｜个人问责=随机点名必答题——组分与个人分分开</a:t>
+            </a:r>
+          </a:p>
+          <a:p>
+            <a:r>
+              <a:rPr sz="950" b="0">
+                <a:solidFill>
+                  <a:srgbClr val="2B2F36"/>
+                </a:solidFill>
+                <a:latin typeface="微软雅黑"/>
+              </a:rPr>
+              <a:t>◆ B06 时间盒弹性｜时间盒弹性=人多就切5+3分钟——超时打断不解释</a:t>
+            </a:r>
+          </a:p>
+        </p:txBody>
+      </p:sp>
+      <p:sp>
+        <p:nvSpPr>
+          <p:cNvPr id="32" name="Rectangle 31"/>
+          <p:cNvSpPr/>
+          <p:nvPr/>
+        </p:nvSpPr>
+        <p:spPr>
+          <a:xfrm>
+            <a:off x="6903720" y="1783080"/>
+            <a:ext cx="4828032" cy="1965960"/>
+          </a:xfrm>
+          <a:prstGeom prst="rect">
+            <a:avLst/>
+          </a:prstGeom>
+          <a:solidFill>
+            <a:srgbClr val="FFFFFF"/>
+          </a:solidFill>
+          <a:ln>
+            <a:solidFill>
+              <a:srgbClr val="D6DCE4"/>
+            </a:solidFill>
+          </a:ln>
+          <a:effectLst/>
+        </p:spPr>
+        <p:style>
+          <a:lnRef idx="1">
+            <a:schemeClr val="accent1"/>
+          </a:lnRef>
+          <a:fillRef idx="3">
+            <a:schemeClr val="accent1"/>
+          </a:fillRef>
+          <a:effectRef idx="2">
+            <a:schemeClr val="accent1"/>
+          </a:effectRef>
+          <a:fontRef idx="minor">
+            <a:schemeClr val="lt1"/>
+          </a:fontRef>
+        </p:style>
+        <p:txBody>
+          <a:bodyPr rtlCol="0" anchor="ctr" wrap="square"/>
+          <a:lstStyle/>
+          <a:p>
+            <a:pPr algn="ctr"/>
+          </a:p>
+        </p:txBody>
+      </p:sp>
+      <p:sp>
+        <p:nvSpPr>
+          <p:cNvPr id="33" name="Rectangle 32"/>
+          <p:cNvSpPr/>
+          <p:nvPr/>
+        </p:nvSpPr>
+        <p:spPr>
+          <a:xfrm>
+            <a:off x="6903720" y="1783080"/>
+            <a:ext cx="4828032" cy="365760"/>
+          </a:xfrm>
+          <a:prstGeom prst="rect">
+            <a:avLst/>
+          </a:prstGeom>
+          <a:solidFill>
+            <a:srgbClr val="2E7D46"/>
+          </a:solidFill>
+          <a:ln>
+            <a:noFill/>
+          </a:ln>
+          <a:effectLst/>
+        </p:spPr>
+        <p:style>
+          <a:lnRef idx="1">
+            <a:schemeClr val="accent1"/>
+          </a:lnRef>
+          <a:fillRef idx="3">
+            <a:schemeClr val="accent1"/>
+          </a:fillRef>
+          <a:effectRef idx="2">
+            <a:schemeClr val="accent1"/>
+          </a:effectRef>
+          <a:fontRef idx="minor">
+            <a:schemeClr val="lt1"/>
+          </a:fontRef>
+        </p:style>
+        <p:txBody>
+          <a:bodyPr rtlCol="0" anchor="ctr" wrap="square"/>
+          <a:lstStyle/>
+          <a:p>
+            <a:pPr algn="ctr"/>
+          </a:p>
+        </p:txBody>
+      </p:sp>
+      <p:sp>
+        <p:nvSpPr>
+          <p:cNvPr id="34" name="TextBox 33"/>
+          <p:cNvSpPr txBox="1"/>
+          <p:nvPr/>
+        </p:nvSpPr>
+        <p:spPr>
+          <a:xfrm>
+            <a:off x="7013448" y="1819656"/>
+            <a:ext cx="4608576" cy="292608"/>
+          </a:xfrm>
+          <a:prstGeom prst="rect">
+            <a:avLst/>
+          </a:prstGeom>
+          <a:noFill/>
+        </p:spPr>
+        <p:txBody>
+          <a:bodyPr wrap="square">
+            <a:spAutoFit/>
+          </a:bodyPr>
+          <a:lstStyle/>
+          <a:p>
+            <a:r>
+              <a:rPr sz="1150" b="1">
+                <a:solidFill>
+                  <a:srgbClr val="FFFFFF"/>
+                </a:solidFill>
+                <a:latin typeface="微软雅黑"/>
+              </a:rPr>
+              <a:t>本讲达标线（当堂评分同口径）</a:t>
+            </a:r>
+          </a:p>
+        </p:txBody>
+      </p:sp>
+      <p:sp>
+        <p:nvSpPr>
+          <p:cNvPr id="35" name="TextBox 34"/>
+          <p:cNvSpPr txBox="1"/>
+          <p:nvPr/>
+        </p:nvSpPr>
+        <p:spPr>
+          <a:xfrm>
+            <a:off x="7068312" y="2249424"/>
+            <a:ext cx="4526280" cy="1371600"/>
+          </a:xfrm>
+          <a:prstGeom prst="rect">
+            <a:avLst/>
+          </a:prstGeom>
+          <a:noFill/>
+        </p:spPr>
+        <p:txBody>
+          <a:bodyPr wrap="square">
+            <a:spAutoFit/>
+          </a:bodyPr>
+          <a:lstStyle/>
+          <a:p>
+            <a:r>
+              <a:rPr sz="900" b="0">
+                <a:solidFill>
+                  <a:srgbClr val="2B2F36"/>
+                </a:solidFill>
+                <a:latin typeface="微软雅黑"/>
+              </a:rPr>
+              <a:t>① 及格(D)：功能基本完整+能演示主流程</a:t>
+            </a:r>
+          </a:p>
+          <a:p>
+            <a:r>
+              <a:rPr sz="900" b="0">
+                <a:solidFill>
+                  <a:srgbClr val="2B2F36"/>
+                </a:solidFill>
+                <a:latin typeface="微软雅黑"/>
+              </a:rPr>
+              <a:t>② 优秀(B+)：规范率≥95%+架构清晰+创新点</a:t>
+            </a:r>
+          </a:p>
+        </p:txBody>
+      </p:sp>
+      <p:sp>
+        <p:nvSpPr>
+          <p:cNvPr id="36" name="Rectangle 35"/>
+          <p:cNvSpPr/>
+          <p:nvPr/>
+        </p:nvSpPr>
+        <p:spPr>
+          <a:xfrm>
+            <a:off x="6903720" y="3886200"/>
+            <a:ext cx="4828032" cy="2011680"/>
+          </a:xfrm>
+          <a:prstGeom prst="rect">
+            <a:avLst/>
+          </a:prstGeom>
+          <a:solidFill>
+            <a:srgbClr val="FFFFFF"/>
+          </a:solidFill>
+          <a:ln>
+            <a:solidFill>
+              <a:srgbClr val="D6DCE4"/>
+            </a:solidFill>
+          </a:ln>
+          <a:effectLst/>
+        </p:spPr>
+        <p:style>
+          <a:lnRef idx="1">
+            <a:schemeClr val="accent1"/>
+          </a:lnRef>
+          <a:fillRef idx="3">
+            <a:schemeClr val="accent1"/>
+          </a:fillRef>
+          <a:effectRef idx="2">
+            <a:schemeClr val="accent1"/>
+          </a:effectRef>
+          <a:fontRef idx="minor">
+            <a:schemeClr val="lt1"/>
+          </a:fontRef>
+        </p:style>
+        <p:txBody>
+          <a:bodyPr rtlCol="0" anchor="ctr" wrap="square"/>
+          <a:lstStyle/>
+          <a:p>
+            <a:pPr algn="ctr"/>
+          </a:p>
+        </p:txBody>
+      </p:sp>
+      <p:sp>
+        <p:nvSpPr>
+          <p:cNvPr id="37" name="Rectangle 36"/>
+          <p:cNvSpPr/>
+          <p:nvPr/>
+        </p:nvSpPr>
+        <p:spPr>
+          <a:xfrm>
+            <a:off x="6903720" y="3886200"/>
+            <a:ext cx="4828032" cy="365760"/>
+          </a:xfrm>
+          <a:prstGeom prst="rect">
+            <a:avLst/>
+          </a:prstGeom>
+          <a:solidFill>
+            <a:srgbClr val="8A4B2D"/>
+          </a:solidFill>
+          <a:ln>
+            <a:noFill/>
+          </a:ln>
+          <a:effectLst/>
+        </p:spPr>
+        <p:style>
+          <a:lnRef idx="1">
+            <a:schemeClr val="accent1"/>
+          </a:lnRef>
+          <a:fillRef idx="3">
+            <a:schemeClr val="accent1"/>
+          </a:fillRef>
+          <a:effectRef idx="2">
+            <a:schemeClr val="accent1"/>
+          </a:effectRef>
+          <a:fontRef idx="minor">
+            <a:schemeClr val="lt1"/>
+          </a:fontRef>
+        </p:style>
+        <p:txBody>
+          <a:bodyPr rtlCol="0" anchor="ctr" wrap="square"/>
+          <a:lstStyle/>
+          <a:p>
+            <a:pPr algn="ctr"/>
+          </a:p>
+        </p:txBody>
+      </p:sp>
+      <p:sp>
+        <p:nvSpPr>
+          <p:cNvPr id="38" name="TextBox 37"/>
+          <p:cNvSpPr txBox="1"/>
+          <p:nvPr/>
+        </p:nvSpPr>
+        <p:spPr>
+          <a:xfrm>
+            <a:off x="7013448" y="3922776"/>
+            <a:ext cx="4608576" cy="292608"/>
+          </a:xfrm>
+          <a:prstGeom prst="rect">
+            <a:avLst/>
+          </a:prstGeom>
+          <a:noFill/>
+        </p:spPr>
+        <p:txBody>
+          <a:bodyPr wrap="square">
+            <a:spAutoFit/>
+          </a:bodyPr>
+          <a:lstStyle/>
+          <a:p>
+            <a:r>
+              <a:rPr sz="1150" b="1">
+                <a:solidFill>
+                  <a:srgbClr val="FFFFFF"/>
+                </a:solidFill>
+                <a:latin typeface="微软雅黑"/>
+              </a:rPr>
+              <a:t>动手前三个提醒（踩坑点摘录）</a:t>
+            </a:r>
+          </a:p>
+        </p:txBody>
+      </p:sp>
+      <p:sp>
+        <p:nvSpPr>
+          <p:cNvPr id="39" name="TextBox 38"/>
+          <p:cNvSpPr txBox="1"/>
+          <p:nvPr/>
+        </p:nvSpPr>
+        <p:spPr>
+          <a:xfrm>
+            <a:off x="7068312" y="4352544"/>
+            <a:ext cx="4526280" cy="1463040"/>
+          </a:xfrm>
+          <a:prstGeom prst="rect">
+            <a:avLst/>
+          </a:prstGeom>
+          <a:noFill/>
+        </p:spPr>
+        <p:txBody>
+          <a:bodyPr wrap="square">
+            <a:spAutoFit/>
+          </a:bodyPr>
+          <a:lstStyle/>
+          <a:p>
+            <a:r>
+              <a:rPr sz="900" b="0">
+                <a:solidFill>
+                  <a:srgbClr val="2B2F36"/>
+                </a:solidFill>
+                <a:latin typeface="微软雅黑"/>
+              </a:rPr>
+              <a:t>⚠ 答辩机预演</a:t>
+            </a:r>
+          </a:p>
+          <a:p>
+            <a:r>
+              <a:rPr sz="900" b="0">
+                <a:solidFill>
+                  <a:srgbClr val="2B2F36"/>
+                </a:solidFill>
+                <a:latin typeface="微软雅黑"/>
+              </a:rPr>
+              <a:t>⚠ 必须现场运行</a:t>
+            </a:r>
+          </a:p>
+          <a:p>
+            <a:r>
+              <a:rPr sz="900" b="0">
+                <a:solidFill>
+                  <a:srgbClr val="2B2F36"/>
+                </a:solidFill>
+                <a:latin typeface="微软雅黑"/>
+              </a:rPr>
+              <a:t>⚠ 按5+3彩排两遍</a:t>
+            </a:r>
+          </a:p>
+        </p:txBody>
+      </p:sp>
+      <p:sp>
+        <p:nvSpPr>
+          <p:cNvPr id="40" name="TextBox 39"/>
+          <p:cNvSpPr txBox="1"/>
+          <p:nvPr/>
+        </p:nvSpPr>
+        <p:spPr>
+          <a:xfrm>
+            <a:off x="457200" y="6281928"/>
+            <a:ext cx="9601200" cy="182880"/>
+          </a:xfrm>
+          <a:prstGeom prst="rect">
+            <a:avLst/>
+          </a:prstGeom>
+          <a:noFill/>
+        </p:spPr>
+        <p:txBody>
+          <a:bodyPr wrap="square">
+            <a:spAutoFit/>
+          </a:bodyPr>
+          <a:lstStyle/>
+          <a:p>
+            <a:r>
+              <a:rPr sz="900" b="0">
+                <a:solidFill>
+                  <a:srgbClr val="6B7280"/>
+                </a:solidFill>
+                <a:latin typeface="微软雅黑"/>
+              </a:rPr>
+              <a:t>素材来源：同周《第23次课-项目终验联调与预答辩》知识卡与避坑清单（逐字摘录）</a:t>
             </a:r>
           </a:p>
         </p:txBody>
